--- a/assets/windows/wsmart_route_results.pptx
+++ b/assets/windows/wsmart_route_results.pptx
@@ -3156,7 +3156,7 @@
         </p:nvSpPr>
         <p:spPr>
           <a:xfrm>
-            <a:off x="0" y="4206240"/>
+            <a:off x="0" y="4114800"/>
             <a:ext cx="12191695" cy="73152"/>
           </a:xfrm>
           <a:prstGeom prst="rect">
@@ -3199,7 +3199,7 @@
         </p:nvSpPr>
         <p:spPr>
           <a:xfrm>
-            <a:off x="822960" y="2011680"/>
+            <a:off x="822960" y="1920240"/>
             <a:ext cx="10545775" cy="2011680"/>
           </a:xfrm>
           <a:prstGeom prst="rect">
@@ -3246,8 +3246,8 @@
         </p:nvSpPr>
         <p:spPr>
           <a:xfrm>
-            <a:off x="822960" y="4572000"/>
-            <a:ext cx="10545775" cy="1097280"/>
+            <a:off x="822960" y="4434840"/>
+            <a:ext cx="10545775" cy="2011680"/>
           </a:xfrm>
           <a:prstGeom prst="rect">
             <a:avLst/>
@@ -3261,7 +3261,7 @@
           <a:lstStyle/>
           <a:p>
             <a:pPr>
-              <a:defRPr sz="2000" b="1">
+              <a:defRPr sz="2200" b="1">
                 <a:solidFill>
                   <a:srgbClr val="FFFFFF"/>
                 </a:solidFill>
@@ -3269,18 +3269,6 @@
             </a:pPr>
             <a:r>
               <a:t>Afonso Fernandes</a:t>
-            </a:r>
-          </a:p>
-          <a:p>
-            <a:pPr>
-              <a:defRPr sz="1400">
-                <a:solidFill>
-                  <a:srgbClr val="C9D6E4"/>
-                </a:solidFill>
-              </a:defRPr>
-            </a:pPr>
-            <a:r>
-              <a:t>06 July 2026</a:t>
             </a:r>
           </a:p>
         </p:txBody>
@@ -3357,14 +3345,82 @@
       </p:sp>
       <p:sp>
         <p:nvSpPr>
-          <p:cNvPr id="3" name="TextBox 2"/>
+          <p:cNvPr id="3" name="Rounded Rectangle 2"/>
+          <p:cNvSpPr/>
+          <p:nvPr/>
+        </p:nvSpPr>
+        <p:spPr>
+          <a:xfrm>
+            <a:off x="548640" y="1143000"/>
+            <a:ext cx="11094415" cy="2057400"/>
+          </a:xfrm>
+          <a:prstGeom prst="roundRect">
+            <a:avLst/>
+          </a:prstGeom>
+          <a:solidFill>
+            <a:srgbClr val="F0F4FA"/>
+          </a:solidFill>
+          <a:ln>
+            <a:noFill/>
+          </a:ln>
+          <a:effectLst/>
+        </p:spPr>
+        <p:style>
+          <a:lnRef idx="1">
+            <a:schemeClr val="accent1"/>
+          </a:lnRef>
+          <a:fillRef idx="3">
+            <a:schemeClr val="accent1"/>
+          </a:fillRef>
+          <a:effectRef idx="2">
+            <a:schemeClr val="accent1"/>
+          </a:effectRef>
+          <a:fontRef idx="minor">
+            <a:schemeClr val="lt1"/>
+          </a:fontRef>
+        </p:style>
+        <p:txBody>
+          <a:bodyPr rtlCol="0" anchor="ctr"/>
+          <a:lstStyle/>
+          <a:p>
+            <a:pPr algn="ctr"/>
+          </a:p>
+        </p:txBody>
+      </p:sp>
+      <p:pic>
+        <p:nvPicPr>
+          <p:cNvPr id="4" name="Picture 3" descr="eq_7.png"/>
+          <p:cNvPicPr>
+            <a:picLocks noChangeAspect="1"/>
+          </p:cNvPicPr>
+          <p:nvPr/>
+        </p:nvPicPr>
+        <p:blipFill>
+          <a:blip r:embed="rId2"/>
+          <a:stretch>
+            <a:fillRect/>
+          </a:stretch>
+        </p:blipFill>
+        <p:spPr>
+          <a:xfrm>
+            <a:off x="1896835" y="1234440"/>
+            <a:ext cx="8398025" cy="1874520"/>
+          </a:xfrm>
+          <a:prstGeom prst="rect">
+            <a:avLst/>
+          </a:prstGeom>
+        </p:spPr>
+      </p:pic>
+      <p:sp>
+        <p:nvSpPr>
+          <p:cNvPr id="5" name="TextBox 4"/>
           <p:cNvSpPr txBox="1"/>
           <p:nvPr/>
         </p:nvSpPr>
         <p:spPr>
           <a:xfrm>
-            <a:off x="548640" y="1188720"/>
-            <a:ext cx="11094415" cy="5303520"/>
+            <a:off x="548640" y="3429000"/>
+            <a:ext cx="11094415" cy="3063240"/>
           </a:xfrm>
           <a:prstGeom prst="rect">
             <a:avLst/>
@@ -3381,14 +3437,14 @@
               <a:spcAft>
                 <a:spcPts val="1000"/>
               </a:spcAft>
-              <a:defRPr sz="1600">
+              <a:defRPr sz="1400">
                 <a:solidFill>
                   <a:srgbClr val="1F2D3D"/>
                 </a:solidFill>
               </a:defRPr>
             </a:pPr>
             <a:r>
-              <a:t>•  Trajectory-based search: iteratively perturb the incumbent solution through neighbourhood moves</a:t>
+              <a:t>•  Trajectory-based: iteratively perturb the incumbent through neighbourhood moves</a:t>
             </a:r>
           </a:p>
           <a:p>
@@ -3396,14 +3452,14 @@
               <a:spcAft>
                 <a:spcPts val="1000"/>
               </a:spcAft>
-              <a:defRPr sz="1600">
+              <a:defRPr sz="1400">
                 <a:solidFill>
                   <a:srgbClr val="1F2D3D"/>
                 </a:solidFill>
               </a:defRPr>
             </a:pPr>
             <a:r>
-              <a:t>•  SANS — Simulated Annealing Neighborhood Search: accepts worsening moves with probability e^(−Δ/T); the cooling schedule shifts the search from exploration to exploitation</a:t>
+              <a:t>•  SANS: simulated annealing accepts worsening moves with probability e^(−Δ/T); cooling shifts exploration → exploitation</a:t>
             </a:r>
           </a:p>
           <a:p>
@@ -3411,14 +3467,14 @@
               <a:spcAft>
                 <a:spcPts val="1000"/>
               </a:spcAft>
-              <a:defRPr sz="1600">
+              <a:defRPr sz="1400">
                 <a:solidFill>
                   <a:srgbClr val="1F2D3D"/>
                 </a:solidFill>
               </a:defRPr>
             </a:pPr>
             <a:r>
-              <a:t>•  PG-CLNS — Policy-Gradient-guided Contextual Large Neighborhood Search: destroy-and-repair moves whose operator selection is learned online via policy-gradient reinforcement learning</a:t>
+              <a:t>•  PG-CLNS: destroy-and-repair large-neighborhood search whose operator selection is learned online via policy gradients, adapting to instance context (fill levels, geography)</a:t>
             </a:r>
           </a:p>
           <a:p>
@@ -3426,29 +3482,14 @@
               <a:spcAft>
                 <a:spcPts val="1000"/>
               </a:spcAft>
-              <a:defRPr sz="1600">
+              <a:defRPr sz="1400">
                 <a:solidFill>
                   <a:srgbClr val="1F2D3D"/>
                 </a:solidFill>
               </a:defRPr>
             </a:pPr>
             <a:r>
-              <a:t>•  The learned destroy/repair policy adapts to the instance context (fill levels, geography) instead of using fixed operator weights</a:t>
-            </a:r>
-          </a:p>
-          <a:p>
-            <a:pPr>
-              <a:spcAft>
-                <a:spcPts val="1000"/>
-              </a:spcAft>
-              <a:defRPr sz="1600">
-                <a:solidFill>
-                  <a:srgbClr val="1F2D3D"/>
-                </a:solidFill>
-              </a:defRPr>
-            </a:pPr>
-            <a:r>
-              <a:t>•  PG-CLNS is a standout overflow performer: SL1 + PG-CLNS reaches the Pareto front in several scenarios with as little as ~1 overflow / 30 days</a:t>
+              <a:t>•  PG-CLNS is a standout overflow performer: SL1 + PG-CLNS reaches the Pareto front with ~1 overflow / 30 days</a:t>
             </a:r>
           </a:p>
         </p:txBody>
@@ -3525,14 +3566,82 @@
       </p:sp>
       <p:sp>
         <p:nvSpPr>
-          <p:cNvPr id="3" name="TextBox 2"/>
+          <p:cNvPr id="3" name="Rounded Rectangle 2"/>
+          <p:cNvSpPr/>
+          <p:nvPr/>
+        </p:nvSpPr>
+        <p:spPr>
+          <a:xfrm>
+            <a:off x="548640" y="1143000"/>
+            <a:ext cx="11094415" cy="2057400"/>
+          </a:xfrm>
+          <a:prstGeom prst="roundRect">
+            <a:avLst/>
+          </a:prstGeom>
+          <a:solidFill>
+            <a:srgbClr val="F0F4FA"/>
+          </a:solidFill>
+          <a:ln>
+            <a:noFill/>
+          </a:ln>
+          <a:effectLst/>
+        </p:spPr>
+        <p:style>
+          <a:lnRef idx="1">
+            <a:schemeClr val="accent1"/>
+          </a:lnRef>
+          <a:fillRef idx="3">
+            <a:schemeClr val="accent1"/>
+          </a:fillRef>
+          <a:effectRef idx="2">
+            <a:schemeClr val="accent1"/>
+          </a:effectRef>
+          <a:fontRef idx="minor">
+            <a:schemeClr val="lt1"/>
+          </a:fontRef>
+        </p:style>
+        <p:txBody>
+          <a:bodyPr rtlCol="0" anchor="ctr"/>
+          <a:lstStyle/>
+          <a:p>
+            <a:pPr algn="ctr"/>
+          </a:p>
+        </p:txBody>
+      </p:sp>
+      <p:pic>
+        <p:nvPicPr>
+          <p:cNvPr id="4" name="Picture 3" descr="eq_8.png"/>
+          <p:cNvPicPr>
+            <a:picLocks noChangeAspect="1"/>
+          </p:cNvPicPr>
+          <p:nvPr/>
+        </p:nvPicPr>
+        <p:blipFill>
+          <a:blip r:embed="rId2"/>
+          <a:stretch>
+            <a:fillRect/>
+          </a:stretch>
+        </p:blipFill>
+        <p:spPr>
+          <a:xfrm>
+            <a:off x="1520168" y="1234440"/>
+            <a:ext cx="9151358" cy="1874520"/>
+          </a:xfrm>
+          <a:prstGeom prst="rect">
+            <a:avLst/>
+          </a:prstGeom>
+        </p:spPr>
+      </p:pic>
+      <p:sp>
+        <p:nvSpPr>
+          <p:cNvPr id="5" name="TextBox 4"/>
           <p:cNvSpPr txBox="1"/>
           <p:nvPr/>
         </p:nvSpPr>
         <p:spPr>
           <a:xfrm>
-            <a:off x="548640" y="1188720"/>
-            <a:ext cx="11094415" cy="5303520"/>
+            <a:off x="548640" y="3429000"/>
+            <a:ext cx="11094415" cy="3063240"/>
           </a:xfrm>
           <a:prstGeom prst="rect">
             <a:avLst/>
@@ -3549,14 +3658,14 @@
               <a:spcAft>
                 <a:spcPts val="1000"/>
               </a:spcAft>
-              <a:defRPr sz="1600">
+              <a:defRPr sz="1400">
                 <a:solidFill>
                   <a:srgbClr val="1F2D3D"/>
                 </a:solidFill>
               </a:defRPr>
             </a:pPr>
             <a:r>
-              <a:t>•  Route improvers post-optimise each constructed route; they are optional and constructor-agnostic</a:t>
+              <a:t>•  Optional, constructor-agnostic post-optimisation of each constructed route</a:t>
             </a:r>
           </a:p>
           <a:p>
@@ -3564,14 +3673,14 @@
               <a:spcAft>
                 <a:spcPts val="1000"/>
               </a:spcAft>
-              <a:defRPr sz="1600">
+              <a:defRPr sz="1400">
                 <a:solidFill>
                   <a:srgbClr val="1F2D3D"/>
                 </a:solidFill>
               </a:defRPr>
             </a:pPr>
             <a:r>
-              <a:t>•  Classical Local Search (CLS) — exhaustive intra/inter-route neighbourhoods (2-opt, or-opt, swap, relocate) until a local optimum: best kg/km polish, higher runtime</a:t>
+              <a:t>•  CLS: exhaustive intra/inter-route neighbourhoods (2-opt, or-opt, swap, relocate) to a local optimum — best kg/km polish</a:t>
             </a:r>
           </a:p>
           <a:p>
@@ -3579,14 +3688,14 @@
               <a:spcAft>
                 <a:spcPts val="1000"/>
               </a:spcAft>
-              <a:defRPr sz="1600">
+              <a:defRPr sz="1400">
                 <a:solidFill>
                   <a:srgbClr val="1F2D3D"/>
                 </a:solidFill>
               </a:defRPr>
             </a:pPr>
             <a:r>
-              <a:t>•  Fast-TSP (FTSP) — reorders each route as a TSP; exact for small routes, and for graphs with more than 20 nodes it switches to Stochastic Local Search (SLS) under the hood</a:t>
+              <a:t>•  Fast-TSP: reorders each route as a TSP — exact for small routes, Stochastic Local Search (SLS) under the hood for graphs with more than 20 nodes</a:t>
             </a:r>
           </a:p>
           <a:p>
@@ -3594,29 +3703,14 @@
               <a:spcAft>
                 <a:spcPts val="1000"/>
               </a:spcAft>
-              <a:defRPr sz="1600">
+              <a:defRPr sz="1400">
                 <a:solidFill>
                   <a:srgbClr val="1F2D3D"/>
                 </a:solidFill>
               </a:defRPr>
             </a:pPr>
             <a:r>
-              <a:t>•  Empirical pattern: CLS yields higher kg/km efficiency; FTSP is cheaper and occasionally prevents more overflows by preserving route slack</a:t>
-            </a:r>
-          </a:p>
-          <a:p>
-            <a:pPr>
-              <a:spcAft>
-                <a:spcPts val="1000"/>
-              </a:spcAft>
-              <a:defRPr sz="1600">
-                <a:solidFill>
-                  <a:srgbClr val="1F2D3D"/>
-                </a:solidFill>
-              </a:defRPr>
-            </a:pPr>
-            <a:r>
-              <a:t>•  Improver choice is a second-order effect — selection strategy and constructor dominate the KPI outcomes, so improvers are contrasted separately rather than in every chart</a:t>
+              <a:t>•  Improver choice is a second-order effect: selection strategy and constructor dominate the KPI outcomes</a:t>
             </a:r>
           </a:p>
         </p:txBody>
@@ -3707,7 +3801,7 @@
         </p:blipFill>
         <p:spPr>
           <a:xfrm>
-            <a:off x="274320" y="1551743"/>
+            <a:off x="274320" y="1483163"/>
             <a:ext cx="11460175" cy="4257434"/>
           </a:xfrm>
           <a:prstGeom prst="rect">
@@ -3745,7 +3839,7 @@
               </a:defRPr>
             </a:pPr>
             <a:r>
-              <a:t>Symlog X axis (overflows). Colour = selection variant, shape = scenario, dashed line = per-scenario Pareto front.</a:t>
+              <a:t>Symlog X axis (overflows). Colour = selection variant, shape = scenario, dashed lines = Pareto fronts (one colour per scenario).</a:t>
             </a:r>
           </a:p>
         </p:txBody>
@@ -3836,8 +3930,8 @@
         </p:blipFill>
         <p:spPr>
           <a:xfrm>
-            <a:off x="274320" y="2839305"/>
-            <a:ext cx="5638647" cy="1682309"/>
+            <a:off x="1958337" y="1051560"/>
+            <a:ext cx="8275020" cy="2468880"/>
           </a:xfrm>
           <a:prstGeom prst="rect">
             <a:avLst/>
@@ -3860,8 +3954,8 @@
         </p:blipFill>
         <p:spPr>
           <a:xfrm>
-            <a:off x="6095847" y="2839540"/>
-            <a:ext cx="5638647" cy="1681839"/>
+            <a:off x="1957182" y="3611880"/>
+            <a:ext cx="8277330" cy="2468880"/>
           </a:xfrm>
           <a:prstGeom prst="rect">
             <a:avLst/>
@@ -3968,14 +4062,14 @@
               </a:defRPr>
             </a:pPr>
             <a:r>
-              <a:t>Results — Overflow &amp; kg/km Heatmaps (Policies × Scenarios)</a:t>
+              <a:t>Results — Per-Scenario Heatmaps (Constructors × Strategy·Improver)</a:t>
             </a:r>
           </a:p>
         </p:txBody>
       </p:sp>
       <p:pic>
         <p:nvPicPr>
-          <p:cNvPr id="3" name="Picture 2" descr="policy_scenario_heatmap_overflows.png"/>
+          <p:cNvPr id="3" name="Picture 2" descr="scenario_constructor_heatmap.png"/>
           <p:cNvPicPr>
             <a:picLocks noChangeAspect="1"/>
           </p:cNvPicPr>
@@ -3989,41 +4083,17 @@
         </p:blipFill>
         <p:spPr>
           <a:xfrm>
-            <a:off x="2106001" y="1051560"/>
-            <a:ext cx="1975284" cy="5257800"/>
+            <a:off x="1475432" y="1051560"/>
+            <a:ext cx="9057950" cy="5120640"/>
           </a:xfrm>
           <a:prstGeom prst="rect">
             <a:avLst/>
           </a:prstGeom>
         </p:spPr>
       </p:pic>
-      <p:pic>
-        <p:nvPicPr>
-          <p:cNvPr id="4" name="Picture 3" descr="policy_scenario_heatmap_kgkm.png"/>
-          <p:cNvPicPr>
-            <a:picLocks noChangeAspect="1"/>
-          </p:cNvPicPr>
-          <p:nvPr/>
-        </p:nvPicPr>
-        <p:blipFill>
-          <a:blip r:embed="rId3"/>
-          <a:stretch>
-            <a:fillRect/>
-          </a:stretch>
-        </p:blipFill>
-        <p:spPr>
-          <a:xfrm>
-            <a:off x="7928185" y="1051560"/>
-            <a:ext cx="1973971" cy="5257800"/>
-          </a:xfrm>
-          <a:prstGeom prst="rect">
-            <a:avLst/>
-          </a:prstGeom>
-        </p:spPr>
-      </p:pic>
-      <p:sp>
-        <p:nvSpPr>
-          <p:cNvPr id="5" name="TextBox 4"/>
+      <p:sp>
+        <p:nvSpPr>
+          <p:cNvPr id="4" name="TextBox 3"/>
           <p:cNvSpPr txBox="1"/>
           <p:nvPr/>
         </p:nvSpPr>
@@ -4051,7 +4121,7 @@
               </a:defRPr>
             </a:pPr>
             <a:r>
-              <a:t>Rows = full policy configurations (selection + constructor + improver); columns = simulation scenarios.</a:t>
+              <a:t>30-day runs. One panel per scenario; route constructors on the rows, selection × improver combinations on the columns.</a:t>
             </a:r>
           </a:p>
         </p:txBody>
@@ -4121,14 +4191,14 @@
               </a:defRPr>
             </a:pPr>
             <a:r>
-              <a:t>Results — Per-Scenario Heatmaps (Constructors × Strategy·Improver)</a:t>
+              <a:t>Results — Overflow &amp; kg/km Heatmaps, 90 Days (Policies × Scenarios)</a:t>
             </a:r>
           </a:p>
         </p:txBody>
       </p:sp>
       <p:pic>
         <p:nvPicPr>
-          <p:cNvPr id="3" name="Picture 2" descr="scenario_constructor_heatmap.png"/>
+          <p:cNvPr id="3" name="Picture 2" descr="policy_scenario_heatmap_overflows.png"/>
           <p:cNvPicPr>
             <a:picLocks noChangeAspect="1"/>
           </p:cNvPicPr>
@@ -4142,17 +4212,41 @@
         </p:blipFill>
         <p:spPr>
           <a:xfrm>
-            <a:off x="1759551" y="1051560"/>
-            <a:ext cx="8489713" cy="5257800"/>
+            <a:off x="740384" y="1051560"/>
+            <a:ext cx="4706518" cy="5120640"/>
           </a:xfrm>
           <a:prstGeom prst="rect">
             <a:avLst/>
           </a:prstGeom>
         </p:spPr>
       </p:pic>
-      <p:sp>
-        <p:nvSpPr>
-          <p:cNvPr id="4" name="TextBox 3"/>
+      <p:pic>
+        <p:nvPicPr>
+          <p:cNvPr id="4" name="Picture 3" descr="policy_scenario_heatmap_kgkm.png"/>
+          <p:cNvPicPr>
+            <a:picLocks noChangeAspect="1"/>
+          </p:cNvPicPr>
+          <p:nvPr/>
+        </p:nvPicPr>
+        <p:blipFill>
+          <a:blip r:embed="rId3"/>
+          <a:stretch>
+            <a:fillRect/>
+          </a:stretch>
+        </p:blipFill>
+        <p:spPr>
+          <a:xfrm>
+            <a:off x="6579988" y="1051560"/>
+            <a:ext cx="4670365" cy="5120640"/>
+          </a:xfrm>
+          <a:prstGeom prst="rect">
+            <a:avLst/>
+          </a:prstGeom>
+        </p:spPr>
+      </p:pic>
+      <p:sp>
+        <p:nvSpPr>
+          <p:cNvPr id="5" name="TextBox 4"/>
           <p:cNvSpPr txBox="1"/>
           <p:nvPr/>
         </p:nvSpPr>
@@ -4180,7 +4274,7 @@
               </a:defRPr>
             </a:pPr>
             <a:r>
-              <a:t>One panel per scenario; route constructors on the rows, selection × improver combinations on the columns.</a:t>
+              <a:t>90-day runs (Pareto-front policies only — fewer rows, easier to read). Rows = policy configurations; columns = scenarios.</a:t>
             </a:r>
           </a:p>
         </p:txBody>
@@ -4271,7 +4365,7 @@
         </p:blipFill>
         <p:spPr>
           <a:xfrm>
-            <a:off x="274320" y="1353335"/>
+            <a:off x="274320" y="1284755"/>
             <a:ext cx="11460175" cy="4654250"/>
           </a:xfrm>
           <a:prstGeom prst="rect">
@@ -4384,16 +4478,40 @@
           </a:p>
         </p:txBody>
       </p:sp>
-      <p:sp>
-        <p:nvSpPr>
-          <p:cNvPr id="3" name="TextBox 2"/>
+      <p:pic>
+        <p:nvPicPr>
+          <p:cNvPr id="3" name="Picture 2" descr="policy_radar.png"/>
+          <p:cNvPicPr>
+            <a:picLocks noChangeAspect="1"/>
+          </p:cNvPicPr>
+          <p:nvPr/>
+        </p:nvPicPr>
+        <p:blipFill>
+          <a:blip r:embed="rId2"/>
+          <a:stretch>
+            <a:fillRect/>
+          </a:stretch>
+        </p:blipFill>
+        <p:spPr>
+          <a:xfrm>
+            <a:off x="6095847" y="1333266"/>
+            <a:ext cx="5730087" cy="4831548"/>
+          </a:xfrm>
+          <a:prstGeom prst="rect">
+            <a:avLst/>
+          </a:prstGeom>
+        </p:spPr>
+      </p:pic>
+      <p:sp>
+        <p:nvSpPr>
+          <p:cNvPr id="4" name="TextBox 3"/>
           <p:cNvSpPr txBox="1"/>
           <p:nvPr/>
         </p:nvSpPr>
         <p:spPr>
           <a:xfrm>
-            <a:off x="548640" y="1188720"/>
-            <a:ext cx="11094415" cy="5303520"/>
+            <a:off x="457200" y="1280160"/>
+            <a:ext cx="5455767" cy="5212080"/>
           </a:xfrm>
           <a:prstGeom prst="rect">
             <a:avLst/>
@@ -4410,14 +4528,14 @@
               <a:spcAft>
                 <a:spcPts val="1000"/>
               </a:spcAft>
-              <a:defRPr sz="1600">
+              <a:defRPr sz="1300">
                 <a:solidFill>
                   <a:srgbClr val="1F2D3D"/>
                 </a:solidFill>
               </a:defRPr>
             </a:pPr>
             <a:r>
-              <a:t>•  Conclusions — the selection strategy dominates the overflow/efficiency trade-off: SL variants prevent overflows (SL2 + ACO_HH reached 0 overflows at FFZ-350), LM (CF90) maximises kg/km (~12), LA balances both</a:t>
+              <a:t>•  The selection strategy dominates the overflow/efficiency trade-off: SL prevents overflows (SL2 + ACO_HH reached 0 at FFZ-350), LM (CF90) maximises kg/km (~12), LA balances</a:t>
             </a:r>
           </a:p>
           <a:p>
@@ -4425,14 +4543,14 @@
               <a:spcAft>
                 <a:spcPts val="1000"/>
               </a:spcAft>
-              <a:defRPr sz="1600">
+              <a:defRPr sz="1300">
                 <a:solidFill>
                   <a:srgbClr val="1F2D3D"/>
                 </a:solidFill>
               </a:defRPr>
             </a:pPr>
             <a:r>
-              <a:t>•  Conclusions — BPC and PG-CLNS are the most frequent Pareto-front constructors; ACO-HH is the most robust across scenarios and horizons</a:t>
+              <a:t>•  BPC and PG-CLNS are the most frequent Pareto-front constructors; ACO-HH is the most robust across scenarios and horizons</a:t>
             </a:r>
           </a:p>
           <a:p>
@@ -4440,14 +4558,14 @@
               <a:spcAft>
                 <a:spcPts val="1000"/>
               </a:spcAft>
-              <a:defRPr sz="1600">
+              <a:defRPr sz="1300">
                 <a:solidFill>
                   <a:srgbClr val="1F2D3D"/>
                 </a:solidFill>
               </a:defRPr>
             </a:pPr>
             <a:r>
-              <a:t>•  Conclusions — patterns are stable from 30 to 90 days; overflow pressure grows with the horizon while kg/km stays consistent</a:t>
+              <a:t>•  Patterns are stable from 30 to 90 days; overflow pressure grows with the horizon while kg/km stays consistent</a:t>
             </a:r>
           </a:p>
           <a:p>
@@ -4455,14 +4573,14 @@
               <a:spcAft>
                 <a:spcPts val="1000"/>
               </a:spcAft>
-              <a:defRPr sz="1600">
+              <a:defRPr sz="1300">
                 <a:solidFill>
                   <a:srgbClr val="1F2D3D"/>
                 </a:solidFill>
               </a:defRPr>
             </a:pPr>
             <a:r>
-              <a:t>•  Limitations — single vehicle type and depot per region; waste generation models calibrated on limited historical data; 90-day runs only cover the 30-day Pareto-front policies</a:t>
+              <a:t>•  Limitations: single vehicle type/depot per region; waste models calibrated on limited data; 90-day runs only cover the 30-day Pareto-front policies</a:t>
             </a:r>
           </a:p>
           <a:p>
@@ -4470,14 +4588,14 @@
               <a:spcAft>
                 <a:spcPts val="1000"/>
               </a:spcAft>
-              <a:defRPr sz="1600">
+              <a:defRPr sz="1300">
                 <a:solidFill>
                   <a:srgbClr val="1F2D3D"/>
                 </a:solidFill>
               </a:defRPr>
             </a:pPr>
             <a:r>
-              <a:t>•  Future work — richer acceptance criteria per constructor, neural constructors (attention models) in the same pipeline, multi-vehicle fleets, dynamic re-routing within the day, and CO₂-aware objectives</a:t>
+              <a:t>•  Future work: richer acceptance criteria, neural constructors in the same pipeline, multi-vehicle fleets, intra-day re-routing, CO₂-aware objectives</a:t>
             </a:r>
           </a:p>
         </p:txBody>
@@ -4551,8 +4669,8 @@
         </p:nvSpPr>
         <p:spPr>
           <a:xfrm>
-            <a:off x="822960" y="2377440"/>
-            <a:ext cx="10545775" cy="2194560"/>
+            <a:off x="822960" y="2560320"/>
+            <a:ext cx="10545775" cy="1828800"/>
           </a:xfrm>
           <a:prstGeom prst="rect">
             <a:avLst/>
@@ -4586,18 +4704,6 @@
             </a:pPr>
             <a:r>
               <a:t>Thank you for your attention!</a:t>
-            </a:r>
-          </a:p>
-          <a:p>
-            <a:pPr algn="ctr">
-              <a:defRPr sz="1600">
-                <a:solidFill>
-                  <a:srgbClr val="C9D6E4"/>
-                </a:solidFill>
-              </a:defRPr>
-            </a:pPr>
-            <a:r>
-              <a:t>Full report: public/simulation_analysis.md · Interactive charts: public/private/simulation/</a:t>
             </a:r>
           </a:p>
           <a:p>
@@ -4905,7 +5011,7 @@
               </a:defRPr>
             </a:pPr>
             <a:r>
-              <a:t>12.  Results — Policy × Scenario Heatmaps</a:t>
+              <a:t>12.  Results — Per-Scenario Heatmaps</a:t>
             </a:r>
           </a:p>
           <a:p>
@@ -4920,7 +5026,7 @@
               </a:defRPr>
             </a:pPr>
             <a:r>
-              <a:t>13.  Results — Per-Scenario Heatmaps</a:t>
+              <a:t>13.  Results — Policy × Scenario Heatmaps (90 days)</a:t>
             </a:r>
           </a:p>
           <a:p>
@@ -5027,14 +5133,82 @@
       </p:sp>
       <p:sp>
         <p:nvSpPr>
-          <p:cNvPr id="3" name="TextBox 2"/>
+          <p:cNvPr id="3" name="Rounded Rectangle 2"/>
+          <p:cNvSpPr/>
+          <p:nvPr/>
+        </p:nvSpPr>
+        <p:spPr>
+          <a:xfrm>
+            <a:off x="548640" y="1143000"/>
+            <a:ext cx="11094415" cy="2057400"/>
+          </a:xfrm>
+          <a:prstGeom prst="roundRect">
+            <a:avLst/>
+          </a:prstGeom>
+          <a:solidFill>
+            <a:srgbClr val="F0F4FA"/>
+          </a:solidFill>
+          <a:ln>
+            <a:noFill/>
+          </a:ln>
+          <a:effectLst/>
+        </p:spPr>
+        <p:style>
+          <a:lnRef idx="1">
+            <a:schemeClr val="accent1"/>
+          </a:lnRef>
+          <a:fillRef idx="3">
+            <a:schemeClr val="accent1"/>
+          </a:fillRef>
+          <a:effectRef idx="2">
+            <a:schemeClr val="accent1"/>
+          </a:effectRef>
+          <a:fontRef idx="minor">
+            <a:schemeClr val="lt1"/>
+          </a:fontRef>
+        </p:style>
+        <p:txBody>
+          <a:bodyPr rtlCol="0" anchor="ctr"/>
+          <a:lstStyle/>
+          <a:p>
+            <a:pPr algn="ctr"/>
+          </a:p>
+        </p:txBody>
+      </p:sp>
+      <p:pic>
+        <p:nvPicPr>
+          <p:cNvPr id="4" name="Picture 3" descr="eq_1.png"/>
+          <p:cNvPicPr>
+            <a:picLocks noChangeAspect="1"/>
+          </p:cNvPicPr>
+          <p:nvPr/>
+        </p:nvPicPr>
+        <p:blipFill>
+          <a:blip r:embed="rId2"/>
+          <a:stretch>
+            <a:fillRect/>
+          </a:stretch>
+        </p:blipFill>
+        <p:spPr>
+          <a:xfrm>
+            <a:off x="2901812" y="1234440"/>
+            <a:ext cx="6388070" cy="1874520"/>
+          </a:xfrm>
+          <a:prstGeom prst="rect">
+            <a:avLst/>
+          </a:prstGeom>
+        </p:spPr>
+      </p:pic>
+      <p:sp>
+        <p:nvSpPr>
+          <p:cNvPr id="5" name="TextBox 4"/>
           <p:cNvSpPr txBox="1"/>
           <p:nvPr/>
         </p:nvSpPr>
         <p:spPr>
           <a:xfrm>
-            <a:off x="548640" y="1188720"/>
-            <a:ext cx="11094415" cy="5303520"/>
+            <a:off x="548640" y="3429000"/>
+            <a:ext cx="11094415" cy="3063240"/>
           </a:xfrm>
           <a:prstGeom prst="rect">
             <a:avLst/>
@@ -5051,14 +5225,14 @@
               <a:spcAft>
                 <a:spcPts val="1000"/>
               </a:spcAft>
-              <a:defRPr sz="1600">
+              <a:defRPr sz="1400">
                 <a:solidFill>
                   <a:srgbClr val="1F2D3D"/>
                 </a:solidFill>
               </a:defRPr>
             </a:pPr>
             <a:r>
-              <a:t>•  Classical VRP visits every customer; VRPP relaxes this — each node carries a profit and only a profitable subset is visited</a:t>
+              <a:t>•  Unlike the classical VRP, only a profitable subset of nodes is visited: profit p_i (waste kg) vs travel cost c·d_ij</a:t>
             </a:r>
           </a:p>
           <a:p>
@@ -5066,14 +5240,14 @@
               <a:spcAft>
                 <a:spcPts val="1000"/>
               </a:spcAft>
-              <a:defRPr sz="1600">
+              <a:defRPr sz="1400">
                 <a:solidFill>
                   <a:srgbClr val="1F2D3D"/>
                 </a:solidFill>
               </a:defRPr>
             </a:pPr>
             <a:r>
-              <a:t>•  Objective: maximise collected profit (waste kg) minus travel cost (km), subject to vehicle capacity</a:t>
+              <a:t>•  In waste collection bins fill stochastically day by day — skipping a bin saves distance but risks overflow</a:t>
             </a:r>
           </a:p>
           <a:p>
@@ -5081,14 +5255,14 @@
               <a:spcAft>
                 <a:spcPts val="1000"/>
               </a:spcAft>
-              <a:defRPr sz="1600">
+              <a:defRPr sz="1400">
                 <a:solidFill>
                   <a:srgbClr val="1F2D3D"/>
                 </a:solidFill>
               </a:defRPr>
             </a:pPr>
             <a:r>
-              <a:t>•  In waste collection: bins fill stochastically day by day — skipping a bin saves distance but risks overflow</a:t>
+              <a:t>•  Two conflicting KPIs: bin overflows (service quality, ↓) and kg/km route efficiency (cost, ↑)</a:t>
             </a:r>
           </a:p>
           <a:p>
@@ -5096,44 +5270,14 @@
               <a:spcAft>
                 <a:spcPts val="1000"/>
               </a:spcAft>
-              <a:defRPr sz="1600">
+              <a:defRPr sz="1400">
                 <a:solidFill>
                   <a:srgbClr val="1F2D3D"/>
                 </a:solidFill>
               </a:defRPr>
             </a:pPr>
             <a:r>
-              <a:t>•  Two conflicting KPIs: number of bin overflows (service quality, ↓) and kg/km route efficiency (cost, ↑)</a:t>
-            </a:r>
-          </a:p>
-          <a:p>
-            <a:pPr>
-              <a:spcAft>
-                <a:spcPts val="1000"/>
-              </a:spcAft>
-              <a:defRPr sz="1600">
-                <a:solidFill>
-                  <a:srgbClr val="1F2D3D"/>
-                </a:solidFill>
-              </a:defRPr>
-            </a:pPr>
-            <a:r>
-              <a:t>•  Multi-day, stochastic setting: today's collection decisions shape tomorrow's fill levels — a sequential decision problem</a:t>
-            </a:r>
-          </a:p>
-          <a:p>
-            <a:pPr>
-              <a:spcAft>
-                <a:spcPts val="1000"/>
-              </a:spcAft>
-              <a:defRPr sz="1600">
-                <a:solidFill>
-                  <a:srgbClr val="1F2D3D"/>
-                </a:solidFill>
-              </a:defRPr>
-            </a:pPr>
-            <a:r>
-              <a:t>•  Studied scenarios: Rio Maior (N=100, 170) and Figueira da Foz (N=350), with Empirical and Gamma-3 waste generation over 30- and 90-day horizons</a:t>
+              <a:t>•  Multi-day sequential decision problem over scenarios: RM-100, RM-170, FFZ-350 × {Empirical, Gamma-3} × {30, 90} days</a:t>
             </a:r>
           </a:p>
         </p:txBody>
@@ -5210,14 +5354,515 @@
       </p:sp>
       <p:sp>
         <p:nvSpPr>
-          <p:cNvPr id="3" name="TextBox 2"/>
+          <p:cNvPr id="3" name="Chevron 2"/>
+          <p:cNvSpPr/>
+          <p:nvPr/>
+        </p:nvSpPr>
+        <p:spPr>
+          <a:xfrm>
+            <a:off x="548640" y="1554480"/>
+            <a:ext cx="2602153" cy="1371600"/>
+          </a:xfrm>
+          <a:prstGeom prst="chevron">
+            <a:avLst/>
+          </a:prstGeom>
+          <a:solidFill>
+            <a:srgbClr val="2E74B5"/>
+          </a:solidFill>
+          <a:ln>
+            <a:noFill/>
+          </a:ln>
+          <a:effectLst/>
+        </p:spPr>
+        <p:style>
+          <a:lnRef idx="1">
+            <a:schemeClr val="accent1"/>
+          </a:lnRef>
+          <a:fillRef idx="3">
+            <a:schemeClr val="accent1"/>
+          </a:fillRef>
+          <a:effectRef idx="2">
+            <a:schemeClr val="accent1"/>
+          </a:effectRef>
+          <a:fontRef idx="minor">
+            <a:schemeClr val="lt1"/>
+          </a:fontRef>
+        </p:style>
+        <p:txBody>
+          <a:bodyPr rtlCol="0" anchor="ctr" wrap="square"/>
+          <a:lstStyle/>
+          <a:p>
+            <a:pPr algn="ctr">
+              <a:defRPr sz="1500" b="1">
+                <a:solidFill>
+                  <a:srgbClr val="FFFFFF"/>
+                </a:solidFill>
+              </a:defRPr>
+            </a:pPr>
+            <a:r>
+              <a:t>Mandatory bin</a:t>
+            </a:r>
+          </a:p>
+          <a:p>
+            <a:pPr algn="ctr">
+              <a:defRPr sz="1500" b="1">
+                <a:solidFill>
+                  <a:srgbClr val="FFFFFF"/>
+                </a:solidFill>
+              </a:defRPr>
+            </a:pPr>
+            <a:r>
+              <a:t>selection strategy</a:t>
+            </a:r>
+          </a:p>
+        </p:txBody>
+      </p:sp>
+      <p:sp>
+        <p:nvSpPr>
+          <p:cNvPr id="4" name="TextBox 3"/>
           <p:cNvSpPr txBox="1"/>
           <p:nvPr/>
         </p:nvSpPr>
         <p:spPr>
           <a:xfrm>
-            <a:off x="548640" y="1188720"/>
-            <a:ext cx="11094415" cy="5303520"/>
+            <a:off x="548640" y="3017520"/>
+            <a:ext cx="2602153" cy="822960"/>
+          </a:xfrm>
+          <a:prstGeom prst="rect">
+            <a:avLst/>
+          </a:prstGeom>
+          <a:noFill/>
+        </p:spPr>
+        <p:txBody>
+          <a:bodyPr wrap="square">
+            <a:spAutoFit/>
+          </a:bodyPr>
+          <a:lstStyle/>
+          <a:p>
+            <a:pPr algn="ctr">
+              <a:defRPr sz="1200">
+                <a:solidFill>
+                  <a:srgbClr val="5A6A7A"/>
+                </a:solidFill>
+              </a:defRPr>
+            </a:pPr>
+            <a:r>
+              <a:t>LA · LM · SL</a:t>
+            </a:r>
+          </a:p>
+          <a:p>
+            <a:pPr algn="ctr">
+              <a:defRPr sz="1200">
+                <a:solidFill>
+                  <a:srgbClr val="5A6A7A"/>
+                </a:solidFill>
+              </a:defRPr>
+            </a:pPr>
+            <a:r>
+              <a:t>which bins today?</a:t>
+            </a:r>
+          </a:p>
+        </p:txBody>
+      </p:sp>
+      <p:sp>
+        <p:nvSpPr>
+          <p:cNvPr id="5" name="Chevron 4"/>
+          <p:cNvSpPr/>
+          <p:nvPr/>
+        </p:nvSpPr>
+        <p:spPr>
+          <a:xfrm>
+            <a:off x="3379393" y="1554480"/>
+            <a:ext cx="2602153" cy="1371600"/>
+          </a:xfrm>
+          <a:prstGeom prst="chevron">
+            <a:avLst/>
+          </a:prstGeom>
+          <a:solidFill>
+            <a:srgbClr val="2E74B5"/>
+          </a:solidFill>
+          <a:ln>
+            <a:noFill/>
+          </a:ln>
+          <a:effectLst/>
+        </p:spPr>
+        <p:style>
+          <a:lnRef idx="1">
+            <a:schemeClr val="accent1"/>
+          </a:lnRef>
+          <a:fillRef idx="3">
+            <a:schemeClr val="accent1"/>
+          </a:fillRef>
+          <a:effectRef idx="2">
+            <a:schemeClr val="accent1"/>
+          </a:effectRef>
+          <a:fontRef idx="minor">
+            <a:schemeClr val="lt1"/>
+          </a:fontRef>
+        </p:style>
+        <p:txBody>
+          <a:bodyPr rtlCol="0" anchor="ctr" wrap="square"/>
+          <a:lstStyle/>
+          <a:p>
+            <a:pPr algn="ctr">
+              <a:defRPr sz="1500" b="1">
+                <a:solidFill>
+                  <a:srgbClr val="FFFFFF"/>
+                </a:solidFill>
+              </a:defRPr>
+            </a:pPr>
+            <a:r>
+              <a:t>Route</a:t>
+            </a:r>
+          </a:p>
+          <a:p>
+            <a:pPr algn="ctr">
+              <a:defRPr sz="1500" b="1">
+                <a:solidFill>
+                  <a:srgbClr val="FFFFFF"/>
+                </a:solidFill>
+              </a:defRPr>
+            </a:pPr>
+            <a:r>
+              <a:t>constructor</a:t>
+            </a:r>
+          </a:p>
+        </p:txBody>
+      </p:sp>
+      <p:sp>
+        <p:nvSpPr>
+          <p:cNvPr id="6" name="TextBox 5"/>
+          <p:cNvSpPr txBox="1"/>
+          <p:nvPr/>
+        </p:nvSpPr>
+        <p:spPr>
+          <a:xfrm>
+            <a:off x="3379393" y="3017520"/>
+            <a:ext cx="2602153" cy="822960"/>
+          </a:xfrm>
+          <a:prstGeom prst="rect">
+            <a:avLst/>
+          </a:prstGeom>
+          <a:noFill/>
+        </p:spPr>
+        <p:txBody>
+          <a:bodyPr wrap="square">
+            <a:spAutoFit/>
+          </a:bodyPr>
+          <a:lstStyle/>
+          <a:p>
+            <a:pPr algn="ctr">
+              <a:defRPr sz="1200">
+                <a:solidFill>
+                  <a:srgbClr val="5A6A7A"/>
+                </a:solidFill>
+              </a:defRPr>
+            </a:pPr>
+            <a:r>
+              <a:t>exact · meta-h. · hyper-h.</a:t>
+            </a:r>
+          </a:p>
+          <a:p>
+            <a:pPr algn="ctr">
+              <a:defRPr sz="1200">
+                <a:solidFill>
+                  <a:srgbClr val="5A6A7A"/>
+                </a:solidFill>
+              </a:defRPr>
+            </a:pPr>
+            <a:r>
+              <a:t>build the routes</a:t>
+            </a:r>
+          </a:p>
+        </p:txBody>
+      </p:sp>
+      <p:sp>
+        <p:nvSpPr>
+          <p:cNvPr id="7" name="Chevron 6"/>
+          <p:cNvSpPr/>
+          <p:nvPr/>
+        </p:nvSpPr>
+        <p:spPr>
+          <a:xfrm>
+            <a:off x="6210146" y="1554480"/>
+            <a:ext cx="2602153" cy="1371600"/>
+          </a:xfrm>
+          <a:prstGeom prst="chevron">
+            <a:avLst/>
+          </a:prstGeom>
+          <a:solidFill>
+            <a:srgbClr val="5A6A7A"/>
+          </a:solidFill>
+          <a:ln>
+            <a:noFill/>
+          </a:ln>
+          <a:effectLst/>
+        </p:spPr>
+        <p:style>
+          <a:lnRef idx="1">
+            <a:schemeClr val="accent1"/>
+          </a:lnRef>
+          <a:fillRef idx="3">
+            <a:schemeClr val="accent1"/>
+          </a:fillRef>
+          <a:effectRef idx="2">
+            <a:schemeClr val="accent1"/>
+          </a:effectRef>
+          <a:fontRef idx="minor">
+            <a:schemeClr val="lt1"/>
+          </a:fontRef>
+        </p:style>
+        <p:txBody>
+          <a:bodyPr rtlCol="0" anchor="ctr" wrap="square"/>
+          <a:lstStyle/>
+          <a:p>
+            <a:pPr algn="ctr">
+              <a:defRPr sz="1500" b="1">
+                <a:solidFill>
+                  <a:srgbClr val="FFFFFF"/>
+                </a:solidFill>
+              </a:defRPr>
+            </a:pPr>
+            <a:r>
+              <a:t>Acceptance criterion</a:t>
+            </a:r>
+          </a:p>
+          <a:p>
+            <a:pPr algn="ctr">
+              <a:defRPr sz="1500" b="1">
+                <a:solidFill>
+                  <a:srgbClr val="FFFFFF"/>
+                </a:solidFill>
+              </a:defRPr>
+            </a:pPr>
+            <a:r>
+              <a:t>(optional)</a:t>
+            </a:r>
+          </a:p>
+        </p:txBody>
+      </p:sp>
+      <p:sp>
+        <p:nvSpPr>
+          <p:cNvPr id="8" name="TextBox 7"/>
+          <p:cNvSpPr txBox="1"/>
+          <p:nvPr/>
+        </p:nvSpPr>
+        <p:spPr>
+          <a:xfrm>
+            <a:off x="6210146" y="3017520"/>
+            <a:ext cx="2602153" cy="822960"/>
+          </a:xfrm>
+          <a:prstGeom prst="rect">
+            <a:avLst/>
+          </a:prstGeom>
+          <a:noFill/>
+        </p:spPr>
+        <p:txBody>
+          <a:bodyPr wrap="square">
+            <a:spAutoFit/>
+          </a:bodyPr>
+          <a:lstStyle/>
+          <a:p>
+            <a:pPr algn="ctr">
+              <a:defRPr sz="1200">
+                <a:solidFill>
+                  <a:srgbClr val="5A6A7A"/>
+                </a:solidFill>
+              </a:defRPr>
+            </a:pPr>
+            <a:r>
+              <a:t>constructor-dependent</a:t>
+            </a:r>
+          </a:p>
+          <a:p>
+            <a:pPr algn="ctr">
+              <a:defRPr sz="1200">
+                <a:solidFill>
+                  <a:srgbClr val="5A6A7A"/>
+                </a:solidFill>
+              </a:defRPr>
+            </a:pPr>
+            <a:r>
+              <a:t>e.g. BMC, OI</a:t>
+            </a:r>
+          </a:p>
+        </p:txBody>
+      </p:sp>
+      <p:sp>
+        <p:nvSpPr>
+          <p:cNvPr id="9" name="Chevron 8"/>
+          <p:cNvSpPr/>
+          <p:nvPr/>
+        </p:nvSpPr>
+        <p:spPr>
+          <a:xfrm>
+            <a:off x="9040899" y="1554480"/>
+            <a:ext cx="2602153" cy="1371600"/>
+          </a:xfrm>
+          <a:prstGeom prst="chevron">
+            <a:avLst/>
+          </a:prstGeom>
+          <a:solidFill>
+            <a:srgbClr val="5A6A7A"/>
+          </a:solidFill>
+          <a:ln>
+            <a:noFill/>
+          </a:ln>
+          <a:effectLst/>
+        </p:spPr>
+        <p:style>
+          <a:lnRef idx="1">
+            <a:schemeClr val="accent1"/>
+          </a:lnRef>
+          <a:fillRef idx="3">
+            <a:schemeClr val="accent1"/>
+          </a:fillRef>
+          <a:effectRef idx="2">
+            <a:schemeClr val="accent1"/>
+          </a:effectRef>
+          <a:fontRef idx="minor">
+            <a:schemeClr val="lt1"/>
+          </a:fontRef>
+        </p:style>
+        <p:txBody>
+          <a:bodyPr rtlCol="0" anchor="ctr" wrap="square"/>
+          <a:lstStyle/>
+          <a:p>
+            <a:pPr algn="ctr">
+              <a:defRPr sz="1500" b="1">
+                <a:solidFill>
+                  <a:srgbClr val="FFFFFF"/>
+                </a:solidFill>
+              </a:defRPr>
+            </a:pPr>
+            <a:r>
+              <a:t>Route improver</a:t>
+            </a:r>
+          </a:p>
+          <a:p>
+            <a:pPr algn="ctr">
+              <a:defRPr sz="1500" b="1">
+                <a:solidFill>
+                  <a:srgbClr val="FFFFFF"/>
+                </a:solidFill>
+              </a:defRPr>
+            </a:pPr>
+            <a:r>
+              <a:t>(optional)</a:t>
+            </a:r>
+          </a:p>
+        </p:txBody>
+      </p:sp>
+      <p:sp>
+        <p:nvSpPr>
+          <p:cNvPr id="10" name="TextBox 9"/>
+          <p:cNvSpPr txBox="1"/>
+          <p:nvPr/>
+        </p:nvSpPr>
+        <p:spPr>
+          <a:xfrm>
+            <a:off x="9040899" y="3017520"/>
+            <a:ext cx="2602153" cy="822960"/>
+          </a:xfrm>
+          <a:prstGeom prst="rect">
+            <a:avLst/>
+          </a:prstGeom>
+          <a:noFill/>
+        </p:spPr>
+        <p:txBody>
+          <a:bodyPr wrap="square">
+            <a:spAutoFit/>
+          </a:bodyPr>
+          <a:lstStyle/>
+          <a:p>
+            <a:pPr algn="ctr">
+              <a:defRPr sz="1200">
+                <a:solidFill>
+                  <a:srgbClr val="5A6A7A"/>
+                </a:solidFill>
+              </a:defRPr>
+            </a:pPr>
+            <a:r>
+              <a:t>CLS · FTSP</a:t>
+            </a:r>
+          </a:p>
+          <a:p>
+            <a:pPr algn="ctr">
+              <a:defRPr sz="1200">
+                <a:solidFill>
+                  <a:srgbClr val="5A6A7A"/>
+                </a:solidFill>
+              </a:defRPr>
+            </a:pPr>
+            <a:r>
+              <a:t>post-optimisation</a:t>
+            </a:r>
+          </a:p>
+        </p:txBody>
+      </p:sp>
+      <p:sp>
+        <p:nvSpPr>
+          <p:cNvPr id="11" name="Rounded Rectangle 10"/>
+          <p:cNvSpPr/>
+          <p:nvPr/>
+        </p:nvSpPr>
+        <p:spPr>
+          <a:xfrm>
+            <a:off x="2834640" y="4023360"/>
+            <a:ext cx="6522415" cy="731520"/>
+          </a:xfrm>
+          <a:prstGeom prst="roundRect">
+            <a:avLst/>
+          </a:prstGeom>
+          <a:solidFill>
+            <a:srgbClr val="1F2D3D"/>
+          </a:solidFill>
+          <a:ln>
+            <a:noFill/>
+          </a:ln>
+          <a:effectLst/>
+        </p:spPr>
+        <p:style>
+          <a:lnRef idx="1">
+            <a:schemeClr val="accent1"/>
+          </a:lnRef>
+          <a:fillRef idx="3">
+            <a:schemeClr val="accent1"/>
+          </a:fillRef>
+          <a:effectRef idx="2">
+            <a:schemeClr val="accent1"/>
+          </a:effectRef>
+          <a:fontRef idx="minor">
+            <a:schemeClr val="lt1"/>
+          </a:fontRef>
+        </p:style>
+        <p:txBody>
+          <a:bodyPr rtlCol="0" anchor="ctr"/>
+          <a:lstStyle/>
+          <a:p>
+            <a:pPr algn="ctr">
+              <a:defRPr sz="1400" b="1">
+                <a:solidFill>
+                  <a:srgbClr val="FFFFFF"/>
+                </a:solidFill>
+              </a:defRPr>
+            </a:pPr>
+            <a:r>
+              <a:t>Multi-day simulator: region × graph size × distribution</a:t>
+            </a:r>
+          </a:p>
+        </p:txBody>
+      </p:sp>
+      <p:sp>
+        <p:nvSpPr>
+          <p:cNvPr id="12" name="TextBox 11"/>
+          <p:cNvSpPr txBox="1"/>
+          <p:nvPr/>
+        </p:nvSpPr>
+        <p:spPr>
+          <a:xfrm>
+            <a:off x="548640" y="5120640"/>
+            <a:ext cx="11094415" cy="1371600"/>
           </a:xfrm>
           <a:prstGeom prst="rect">
             <a:avLst/>
@@ -5234,14 +5879,14 @@
               <a:spcAft>
                 <a:spcPts val="1000"/>
               </a:spcAft>
-              <a:defRPr sz="1600">
+              <a:defRPr sz="1400">
                 <a:solidFill>
                   <a:srgbClr val="1F2D3D"/>
                 </a:solidFill>
               </a:defRPr>
             </a:pPr>
             <a:r>
-              <a:t>•  Every daily routing policy is decomposed into interchangeable stages, benchmarked under identical conditions</a:t>
+              <a:t>•  Every daily routing policy is a composition of interchangeable stages, benchmarked under identical conditions</a:t>
             </a:r>
           </a:p>
           <a:p>
@@ -5249,67 +5894,7 @@
               <a:spcAft>
                 <a:spcPts val="1000"/>
               </a:spcAft>
-              <a:defRPr sz="1600">
-                <a:solidFill>
-                  <a:srgbClr val="1F2D3D"/>
-                </a:solidFill>
-              </a:defRPr>
-            </a:pPr>
-            <a:r>
-              <a:t>•  1) Mandatory bin selection strategy — decides WHICH bins must be collected today (look-ahead, last-minute, service-level)</a:t>
-            </a:r>
-          </a:p>
-          <a:p>
-            <a:pPr>
-              <a:spcAft>
-                <a:spcPts val="1000"/>
-              </a:spcAft>
-              <a:defRPr sz="1600">
-                <a:solidFill>
-                  <a:srgbClr val="1F2D3D"/>
-                </a:solidFill>
-              </a:defRPr>
-            </a:pPr>
-            <a:r>
-              <a:t>•  2) Route constructor — builds the routes over the selected bins (exact solver, meta-heuristic or hyper-heuristic)</a:t>
-            </a:r>
-          </a:p>
-          <a:p>
-            <a:pPr>
-              <a:spcAft>
-                <a:spcPts val="1000"/>
-              </a:spcAft>
-              <a:defRPr sz="1600">
-                <a:solidFill>
-                  <a:srgbClr val="1F2D3D"/>
-                </a:solidFill>
-              </a:defRPr>
-            </a:pPr>
-            <a:r>
-              <a:t>•  3) Optional acceptance criterion — constructor-dependent rule deciding which candidate solutions are accepted (e.g. BMC, OI)</a:t>
-            </a:r>
-          </a:p>
-          <a:p>
-            <a:pPr>
-              <a:spcAft>
-                <a:spcPts val="1000"/>
-              </a:spcAft>
-              <a:defRPr sz="1600">
-                <a:solidFill>
-                  <a:srgbClr val="1F2D3D"/>
-                </a:solidFill>
-              </a:defRPr>
-            </a:pPr>
-            <a:r>
-              <a:t>•  4) Optional route improver — post-optimisation of the constructed routes (CLS or FTSP)</a:t>
-            </a:r>
-          </a:p>
-          <a:p>
-            <a:pPr>
-              <a:spcAft>
-                <a:spcPts val="1000"/>
-              </a:spcAft>
-              <a:defRPr sz="1600">
+              <a:defRPr sz="1400">
                 <a:solidFill>
                   <a:srgbClr val="1F2D3D"/>
                 </a:solidFill>
@@ -5393,14 +5978,82 @@
       </p:sp>
       <p:sp>
         <p:nvSpPr>
-          <p:cNvPr id="3" name="TextBox 2"/>
+          <p:cNvPr id="3" name="Rounded Rectangle 2"/>
+          <p:cNvSpPr/>
+          <p:nvPr/>
+        </p:nvSpPr>
+        <p:spPr>
+          <a:xfrm>
+            <a:off x="548640" y="1143000"/>
+            <a:ext cx="11094415" cy="2743200"/>
+          </a:xfrm>
+          <a:prstGeom prst="roundRect">
+            <a:avLst/>
+          </a:prstGeom>
+          <a:solidFill>
+            <a:srgbClr val="F0F4FA"/>
+          </a:solidFill>
+          <a:ln>
+            <a:noFill/>
+          </a:ln>
+          <a:effectLst/>
+        </p:spPr>
+        <p:style>
+          <a:lnRef idx="1">
+            <a:schemeClr val="accent1"/>
+          </a:lnRef>
+          <a:fillRef idx="3">
+            <a:schemeClr val="accent1"/>
+          </a:fillRef>
+          <a:effectRef idx="2">
+            <a:schemeClr val="accent1"/>
+          </a:effectRef>
+          <a:fontRef idx="minor">
+            <a:schemeClr val="lt1"/>
+          </a:fontRef>
+        </p:style>
+        <p:txBody>
+          <a:bodyPr rtlCol="0" anchor="ctr"/>
+          <a:lstStyle/>
+          <a:p>
+            <a:pPr algn="ctr"/>
+          </a:p>
+        </p:txBody>
+      </p:sp>
+      <p:pic>
+        <p:nvPicPr>
+          <p:cNvPr id="4" name="Picture 3" descr="eq_2.png"/>
+          <p:cNvPicPr>
+            <a:picLocks noChangeAspect="1"/>
+          </p:cNvPicPr>
+          <p:nvPr/>
+        </p:nvPicPr>
+        <p:blipFill>
+          <a:blip r:embed="rId2"/>
+          <a:stretch>
+            <a:fillRect/>
+          </a:stretch>
+        </p:blipFill>
+        <p:spPr>
+          <a:xfrm>
+            <a:off x="2145586" y="1234440"/>
+            <a:ext cx="7900522" cy="2560320"/>
+          </a:xfrm>
+          <a:prstGeom prst="rect">
+            <a:avLst/>
+          </a:prstGeom>
+        </p:spPr>
+      </p:pic>
+      <p:sp>
+        <p:nvSpPr>
+          <p:cNvPr id="5" name="TextBox 4"/>
           <p:cNvSpPr txBox="1"/>
           <p:nvPr/>
         </p:nvSpPr>
         <p:spPr>
           <a:xfrm>
-            <a:off x="548640" y="1188720"/>
-            <a:ext cx="11094415" cy="5303520"/>
+            <a:off x="548640" y="4114800"/>
+            <a:ext cx="11094415" cy="2377440"/>
           </a:xfrm>
           <a:prstGeom prst="rect">
             <a:avLst/>
@@ -5417,14 +6070,14 @@
               <a:spcAft>
                 <a:spcPts val="1000"/>
               </a:spcAft>
-              <a:defRPr sz="1600">
+              <a:defRPr sz="1400">
                 <a:solidFill>
                   <a:srgbClr val="1F2D3D"/>
                 </a:solidFill>
               </a:defRPr>
             </a:pPr>
             <a:r>
-              <a:t>•  Look-Ahead (LA) — anticipates future fill levels: collects bins predicted to overflow before the next visit opportunity; proactive but can over-collect</a:t>
+              <a:t>•  Look-Ahead anticipates predicted overflows; Last-Minute waits for a critical fill threshold; Service-Level bounds each bin's overflow probability</a:t>
             </a:r>
           </a:p>
           <a:p>
@@ -5432,14 +6085,14 @@
               <a:spcAft>
                 <a:spcPts val="1000"/>
               </a:spcAft>
-              <a:defRPr sz="1600">
+              <a:defRPr sz="1400">
                 <a:solidFill>
                   <a:srgbClr val="1F2D3D"/>
                 </a:solidFill>
               </a:defRPr>
             </a:pPr>
             <a:r>
-              <a:t>•  Last-Minute (LM) — reactive: only collects bins whose fill exceeds a critical threshold (CF70 = 70%, CF90 = 90%); maximises kg per visit but risks overflows between visits</a:t>
+              <a:t>•  Empirical trade-off: LM dominates efficiency (kg/km), SL dominates overflow prevention, LA sits in between</a:t>
             </a:r>
           </a:p>
           <a:p>
@@ -5447,44 +6100,14 @@
               <a:spcAft>
                 <a:spcPts val="1000"/>
               </a:spcAft>
-              <a:defRPr sz="1600">
+              <a:defRPr sz="1400">
                 <a:solidFill>
                   <a:srgbClr val="1F2D3D"/>
                 </a:solidFill>
               </a:defRPr>
             </a:pPr>
             <a:r>
-              <a:t>•  Service-Level (SL) — probabilistic guarantee: keeps each bin's overflow probability below a target (SL1, SL2 variants); most conservative, lowest overflows at the price of more km</a:t>
-            </a:r>
-          </a:p>
-          <a:p>
-            <a:pPr>
-              <a:spcAft>
-                <a:spcPts val="1000"/>
-              </a:spcAft>
-              <a:defRPr sz="1600">
-                <a:solidFill>
-                  <a:srgbClr val="1F2D3D"/>
-                </a:solidFill>
-              </a:defRPr>
-            </a:pPr>
-            <a:r>
-              <a:t>•  Empirical trade-off: LM dominates efficiency (kg/km), SL dominates overflow prevention, LA sits in between</a:t>
-            </a:r>
-          </a:p>
-          <a:p>
-            <a:pPr>
-              <a:spcAft>
-                <a:spcPts val="1000"/>
-              </a:spcAft>
-              <a:defRPr sz="1600">
-                <a:solidFill>
-                  <a:srgbClr val="1F2D3D"/>
-                </a:solidFill>
-              </a:defRPr>
-            </a:pPr>
-            <a:r>
-              <a:t>•  The three strategies span the full service-quality vs cost spectrum — the choice is an operational decision, not an algorithmic one</a:t>
+              <a:t>•  The choice spans the service-quality vs cost spectrum — an operational decision, not an algorithmic one</a:t>
             </a:r>
           </a:p>
         </p:txBody>
@@ -5561,14 +6184,82 @@
       </p:sp>
       <p:sp>
         <p:nvSpPr>
-          <p:cNvPr id="3" name="TextBox 2"/>
+          <p:cNvPr id="3" name="Rounded Rectangle 2"/>
+          <p:cNvSpPr/>
+          <p:nvPr/>
+        </p:nvSpPr>
+        <p:spPr>
+          <a:xfrm>
+            <a:off x="548640" y="1143000"/>
+            <a:ext cx="11094415" cy="1371600"/>
+          </a:xfrm>
+          <a:prstGeom prst="roundRect">
+            <a:avLst/>
+          </a:prstGeom>
+          <a:solidFill>
+            <a:srgbClr val="F0F4FA"/>
+          </a:solidFill>
+          <a:ln>
+            <a:noFill/>
+          </a:ln>
+          <a:effectLst/>
+        </p:spPr>
+        <p:style>
+          <a:lnRef idx="1">
+            <a:schemeClr val="accent1"/>
+          </a:lnRef>
+          <a:fillRef idx="3">
+            <a:schemeClr val="accent1"/>
+          </a:fillRef>
+          <a:effectRef idx="2">
+            <a:schemeClr val="accent1"/>
+          </a:effectRef>
+          <a:fontRef idx="minor">
+            <a:schemeClr val="lt1"/>
+          </a:fontRef>
+        </p:style>
+        <p:txBody>
+          <a:bodyPr rtlCol="0" anchor="ctr"/>
+          <a:lstStyle/>
+          <a:p>
+            <a:pPr algn="ctr"/>
+          </a:p>
+        </p:txBody>
+      </p:sp>
+      <p:pic>
+        <p:nvPicPr>
+          <p:cNvPr id="4" name="Picture 3" descr="eq_3.png"/>
+          <p:cNvPicPr>
+            <a:picLocks noChangeAspect="1"/>
+          </p:cNvPicPr>
+          <p:nvPr/>
+        </p:nvPicPr>
+        <p:blipFill>
+          <a:blip r:embed="rId2"/>
+          <a:stretch>
+            <a:fillRect/>
+          </a:stretch>
+        </p:blipFill>
+        <p:spPr>
+          <a:xfrm>
+            <a:off x="1168916" y="1234440"/>
+            <a:ext cx="9853863" cy="1188720"/>
+          </a:xfrm>
+          <a:prstGeom prst="rect">
+            <a:avLst/>
+          </a:prstGeom>
+        </p:spPr>
+      </p:pic>
+      <p:sp>
+        <p:nvSpPr>
+          <p:cNvPr id="5" name="TextBox 4"/>
           <p:cNvSpPr txBox="1"/>
           <p:nvPr/>
         </p:nvSpPr>
         <p:spPr>
           <a:xfrm>
-            <a:off x="548640" y="1188720"/>
-            <a:ext cx="11094415" cy="5303520"/>
+            <a:off x="548640" y="2743200"/>
+            <a:ext cx="11094415" cy="3749040"/>
           </a:xfrm>
           <a:prstGeom prst="rect">
             <a:avLst/>
@@ -5585,14 +6276,14 @@
               <a:spcAft>
                 <a:spcPts val="1000"/>
               </a:spcAft>
-              <a:defRPr sz="1600">
+              <a:defRPr sz="1400">
                 <a:solidFill>
                   <a:srgbClr val="1F2D3D"/>
                 </a:solidFill>
               </a:defRPr>
             </a:pPr>
             <a:r>
-              <a:t>•  Branch-Price-and-Cut (BPC) — column-generation over route variables with cutting planes; solves the daily VRPP to proven optimality (BHV2000 lineage)</a:t>
+              <a:t>•  Branch-Price-and-Cut (BPC): column generation over the route set Ω with cutting planes — proven optimality (BHV2000 lineage)</a:t>
             </a:r>
           </a:p>
           <a:p>
@@ -5600,7 +6291,7 @@
               <a:spcAft>
                 <a:spcPts val="1000"/>
               </a:spcAft>
-              <a:defRPr sz="1600">
+              <a:defRPr sz="1400">
                 <a:solidFill>
                   <a:srgbClr val="1F2D3D"/>
                 </a:solidFill>
@@ -5615,14 +6306,14 @@
               <a:spcAft>
                 <a:spcPts val="1000"/>
               </a:spcAft>
-              <a:defRPr sz="1600">
+              <a:defRPr sz="1400">
                 <a:solidFill>
                   <a:srgbClr val="1F2D3D"/>
                 </a:solidFill>
               </a:defRPr>
             </a:pPr>
             <a:r>
-              <a:t>•  Strongest kg/km results across scenarios — but exponential worst-case runtime limits it to the daily subproblem sizes</a:t>
+              <a:t>•  SWC-TCF: exact set-partitioning over Clarke-Wright-style savings columns with traffic-congestion-adjusted costs</a:t>
             </a:r>
           </a:p>
           <a:p>
@@ -5630,29 +6321,14 @@
               <a:spcAft>
                 <a:spcPts val="1000"/>
               </a:spcAft>
-              <a:defRPr sz="1600">
+              <a:defRPr sz="1400">
                 <a:solidFill>
                   <a:srgbClr val="1F2D3D"/>
                 </a:solidFill>
               </a:defRPr>
             </a:pPr>
             <a:r>
-              <a:t>•  SWC-TCF — Savings-based Waste Collection with Traffic-Congestion Factors: exact set-partitioning formulation over Clarke-Wright-style savings columns with congestion-adjusted costs</a:t>
-            </a:r>
-          </a:p>
-          <a:p>
-            <a:pPr>
-              <a:spcAft>
-                <a:spcPts val="1000"/>
-              </a:spcAft>
-              <a:defRPr sz="1600">
-                <a:solidFill>
-                  <a:srgbClr val="1F2D3D"/>
-                </a:solidFill>
-              </a:defRPr>
-            </a:pPr>
-            <a:r>
-              <a:t>•  Both provide optimality reference points against which the (meta-)heuristics are benchmarked</a:t>
+              <a:t>•  Both provide optimality reference points; exponential worst-case runtime limits them to the daily subproblem sizes</a:t>
             </a:r>
           </a:p>
         </p:txBody>
@@ -5729,14 +6405,82 @@
       </p:sp>
       <p:sp>
         <p:nvSpPr>
-          <p:cNvPr id="3" name="TextBox 2"/>
+          <p:cNvPr id="3" name="Rounded Rectangle 2"/>
+          <p:cNvSpPr/>
+          <p:nvPr/>
+        </p:nvSpPr>
+        <p:spPr>
+          <a:xfrm>
+            <a:off x="548640" y="1143000"/>
+            <a:ext cx="11094415" cy="2057400"/>
+          </a:xfrm>
+          <a:prstGeom prst="roundRect">
+            <a:avLst/>
+          </a:prstGeom>
+          <a:solidFill>
+            <a:srgbClr val="F0F4FA"/>
+          </a:solidFill>
+          <a:ln>
+            <a:noFill/>
+          </a:ln>
+          <a:effectLst/>
+        </p:spPr>
+        <p:style>
+          <a:lnRef idx="1">
+            <a:schemeClr val="accent1"/>
+          </a:lnRef>
+          <a:fillRef idx="3">
+            <a:schemeClr val="accent1"/>
+          </a:fillRef>
+          <a:effectRef idx="2">
+            <a:schemeClr val="accent1"/>
+          </a:effectRef>
+          <a:fontRef idx="minor">
+            <a:schemeClr val="lt1"/>
+          </a:fontRef>
+        </p:style>
+        <p:txBody>
+          <a:bodyPr rtlCol="0" anchor="ctr"/>
+          <a:lstStyle/>
+          <a:p>
+            <a:pPr algn="ctr"/>
+          </a:p>
+        </p:txBody>
+      </p:sp>
+      <p:pic>
+        <p:nvPicPr>
+          <p:cNvPr id="4" name="Picture 3" descr="eq_4.png"/>
+          <p:cNvPicPr>
+            <a:picLocks noChangeAspect="1"/>
+          </p:cNvPicPr>
+          <p:nvPr/>
+        </p:nvPicPr>
+        <p:blipFill>
+          <a:blip r:embed="rId2"/>
+          <a:stretch>
+            <a:fillRect/>
+          </a:stretch>
+        </p:blipFill>
+        <p:spPr>
+          <a:xfrm>
+            <a:off x="1480838" y="1234440"/>
+            <a:ext cx="9230019" cy="1874520"/>
+          </a:xfrm>
+          <a:prstGeom prst="rect">
+            <a:avLst/>
+          </a:prstGeom>
+        </p:spPr>
+      </p:pic>
+      <p:sp>
+        <p:nvSpPr>
+          <p:cNvPr id="5" name="TextBox 4"/>
           <p:cNvSpPr txBox="1"/>
           <p:nvPr/>
         </p:nvSpPr>
         <p:spPr>
           <a:xfrm>
-            <a:off x="548640" y="1188720"/>
-            <a:ext cx="11094415" cy="5303520"/>
+            <a:off x="548640" y="3429000"/>
+            <a:ext cx="11094415" cy="3063240"/>
           </a:xfrm>
           <a:prstGeom prst="rect">
             <a:avLst/>
@@ -5753,14 +6497,14 @@
               <a:spcAft>
                 <a:spcPts val="1000"/>
               </a:spcAft>
-              <a:defRPr sz="1600">
+              <a:defRPr sz="1400">
                 <a:solidFill>
                   <a:srgbClr val="1F2D3D"/>
                 </a:solidFill>
               </a:defRPr>
             </a:pPr>
             <a:r>
-              <a:t>•  Exact methods guarantee optimality but scale exponentially; heuristics trade a small optimality gap for polynomial runtime</a:t>
+              <a:t>•  Heuristic search trades a small optimality gap for polynomial runtime — essential beyond the exact solvers' size limits</a:t>
             </a:r>
           </a:p>
           <a:p>
@@ -5768,14 +6512,14 @@
               <a:spcAft>
                 <a:spcPts val="1000"/>
               </a:spcAft>
-              <a:defRPr sz="1600">
+              <a:defRPr sz="1400">
                 <a:solidFill>
                   <a:srgbClr val="1F2D3D"/>
                 </a:solidFill>
               </a:defRPr>
             </a:pPr>
             <a:r>
-              <a:t>•  Meta-heuristics: problem-independent search frameworks (evolution, swarms, neighborhood search) guiding problem-specific operators</a:t>
+              <a:t>•  Meta-heuristics balance exploration (diversify, escape local optima) and exploitation (intensify, polish good solutions)</a:t>
             </a:r>
           </a:p>
           <a:p>
@@ -5783,14 +6527,14 @@
               <a:spcAft>
                 <a:spcPts val="1000"/>
               </a:spcAft>
-              <a:defRPr sz="1600">
+              <a:defRPr sz="1400">
                 <a:solidFill>
                   <a:srgbClr val="1F2D3D"/>
                 </a:solidFill>
               </a:defRPr>
             </a:pPr>
             <a:r>
-              <a:t>•  Balance two forces: exploration (diversify — escape local optima) and exploitation (intensify — polish good solutions)</a:t>
+              <a:t>•  Hyper-heuristics search the space of heuristics itself, learning which low-level operator to apply next (e.g. ACO-HH)</a:t>
             </a:r>
           </a:p>
           <a:p>
@@ -5798,29 +6542,14 @@
               <a:spcAft>
                 <a:spcPts val="1000"/>
               </a:spcAft>
-              <a:defRPr sz="1600">
+              <a:defRPr sz="1400">
                 <a:solidFill>
                   <a:srgbClr val="1F2D3D"/>
                 </a:solidFill>
               </a:defRPr>
             </a:pPr>
             <a:r>
-              <a:t>•  Hyper-heuristics go one level up: they search the space of heuristics, learning WHICH low-level operator to apply next (e.g. ACO-HH)</a:t>
-            </a:r>
-          </a:p>
-          <a:p>
-            <a:pPr>
-              <a:spcAft>
-                <a:spcPts val="1000"/>
-              </a:spcAft>
-              <a:defRPr sz="1600">
-                <a:solidFill>
-                  <a:srgbClr val="1F2D3D"/>
-                </a:solidFill>
-              </a:defRPr>
-            </a:pPr>
-            <a:r>
-              <a:t>•  Three families studied: evolutionary (HGS), swarm intelligence (PSOMA, ACO-HH) and neighborhood search (SANS, PG-CLNS)</a:t>
+              <a:t>•  Three families studied: evolutionary (HGS), swarm intelligence (PSOMA, ACO-HH), neighborhood search (SANS, PG-CLNS)</a:t>
             </a:r>
           </a:p>
         </p:txBody>
@@ -5897,14 +6626,82 @@
       </p:sp>
       <p:sp>
         <p:nvSpPr>
-          <p:cNvPr id="3" name="TextBox 2"/>
+          <p:cNvPr id="3" name="Rounded Rectangle 2"/>
+          <p:cNvSpPr/>
+          <p:nvPr/>
+        </p:nvSpPr>
+        <p:spPr>
+          <a:xfrm>
+            <a:off x="548640" y="1143000"/>
+            <a:ext cx="11094415" cy="1371600"/>
+          </a:xfrm>
+          <a:prstGeom prst="roundRect">
+            <a:avLst/>
+          </a:prstGeom>
+          <a:solidFill>
+            <a:srgbClr val="F0F4FA"/>
+          </a:solidFill>
+          <a:ln>
+            <a:noFill/>
+          </a:ln>
+          <a:effectLst/>
+        </p:spPr>
+        <p:style>
+          <a:lnRef idx="1">
+            <a:schemeClr val="accent1"/>
+          </a:lnRef>
+          <a:fillRef idx="3">
+            <a:schemeClr val="accent1"/>
+          </a:fillRef>
+          <a:effectRef idx="2">
+            <a:schemeClr val="accent1"/>
+          </a:effectRef>
+          <a:fontRef idx="minor">
+            <a:schemeClr val="lt1"/>
+          </a:fontRef>
+        </p:style>
+        <p:txBody>
+          <a:bodyPr rtlCol="0" anchor="ctr"/>
+          <a:lstStyle/>
+          <a:p>
+            <a:pPr algn="ctr"/>
+          </a:p>
+        </p:txBody>
+      </p:sp>
+      <p:pic>
+        <p:nvPicPr>
+          <p:cNvPr id="4" name="Picture 3" descr="eq_5.png"/>
+          <p:cNvPicPr>
+            <a:picLocks noChangeAspect="1"/>
+          </p:cNvPicPr>
+          <p:nvPr/>
+        </p:nvPicPr>
+        <p:blipFill>
+          <a:blip r:embed="rId2"/>
+          <a:stretch>
+            <a:fillRect/>
+          </a:stretch>
+        </p:blipFill>
+        <p:spPr>
+          <a:xfrm>
+            <a:off x="885507" y="1234440"/>
+            <a:ext cx="10420681" cy="1188720"/>
+          </a:xfrm>
+          <a:prstGeom prst="rect">
+            <a:avLst/>
+          </a:prstGeom>
+        </p:spPr>
+      </p:pic>
+      <p:sp>
+        <p:nvSpPr>
+          <p:cNvPr id="5" name="TextBox 4"/>
           <p:cNvSpPr txBox="1"/>
           <p:nvPr/>
         </p:nvSpPr>
         <p:spPr>
           <a:xfrm>
-            <a:off x="548640" y="1188720"/>
-            <a:ext cx="11094415" cy="5303520"/>
+            <a:off x="548640" y="2743200"/>
+            <a:ext cx="11094415" cy="3749040"/>
           </a:xfrm>
           <a:prstGeom prst="rect">
             <a:avLst/>
@@ -5921,14 +6718,14 @@
               <a:spcAft>
                 <a:spcPts val="1000"/>
               </a:spcAft>
-              <a:defRPr sz="1600">
+              <a:defRPr sz="1400">
                 <a:solidFill>
                   <a:srgbClr val="1F2D3D"/>
                 </a:solidFill>
               </a:defRPr>
             </a:pPr>
             <a:r>
-              <a:t>•  Population-based: solutions are individuals; parents recombine via ordered crossover to produce offspring routes</a:t>
+              <a:t>•  Population-based: parents recombine via ordered crossover; every offspring is 'educated' by aggressive local search</a:t>
             </a:r>
           </a:p>
           <a:p>
@@ -5936,14 +6733,14 @@
               <a:spcAft>
                 <a:spcPts val="1000"/>
               </a:spcAft>
-              <a:defRPr sz="1600">
+              <a:defRPr sz="1400">
                 <a:solidFill>
                   <a:srgbClr val="1F2D3D"/>
                 </a:solidFill>
               </a:defRPr>
             </a:pPr>
             <a:r>
-              <a:t>•  Hybrid = genetic search + aggressive local-search education of every offspring (swap, relocate, 2-opt neighbourhoods)</a:t>
+              <a:t>•  Biased fitness (above) blends solution quality with diversity contribution — prevents premature convergence</a:t>
             </a:r>
           </a:p>
           <a:p>
@@ -5951,14 +6748,14 @@
               <a:spcAft>
                 <a:spcPts val="1000"/>
               </a:spcAft>
-              <a:defRPr sz="1600">
+              <a:defRPr sz="1400">
                 <a:solidFill>
                   <a:srgbClr val="1F2D3D"/>
                 </a:solidFill>
               </a:defRPr>
             </a:pPr>
             <a:r>
-              <a:t>•  Biased fitness combines solution quality with population diversity contribution — prevents premature convergence</a:t>
+              <a:t>•  Infeasible individuals survive in a penalised sub-population, letting the search cross infeasible regions</a:t>
             </a:r>
           </a:p>
           <a:p>
@@ -5966,29 +6763,14 @@
               <a:spcAft>
                 <a:spcPts val="1000"/>
               </a:spcAft>
-              <a:defRPr sz="1600">
+              <a:defRPr sz="1400">
                 <a:solidFill>
                   <a:srgbClr val="1F2D3D"/>
                 </a:solidFill>
               </a:defRPr>
             </a:pPr>
             <a:r>
-              <a:t>•  Infeasible individuals are kept in a separate sub-population with penalised fitness, letting the search cross infeasible regions</a:t>
-            </a:r>
-          </a:p>
-          <a:p>
-            <a:pPr>
-              <a:spcAft>
-                <a:spcPts val="1000"/>
-              </a:spcAft>
-              <a:defRPr sz="1600">
-                <a:solidFill>
-                  <a:srgbClr val="1F2D3D"/>
-                </a:solidFill>
-              </a:defRPr>
-            </a:pPr>
-            <a:r>
-              <a:t>•  State-of-the-art on classical CVRP; in our study its education phase makes it a strong efficiency performer with the CLS improver</a:t>
+              <a:t>•  State-of-the-art on classical CVRP; strong efficiency performer here when paired with the CLS improver</a:t>
             </a:r>
           </a:p>
         </p:txBody>
@@ -6065,14 +6847,82 @@
       </p:sp>
       <p:sp>
         <p:nvSpPr>
-          <p:cNvPr id="3" name="TextBox 2"/>
+          <p:cNvPr id="3" name="Rounded Rectangle 2"/>
+          <p:cNvSpPr/>
+          <p:nvPr/>
+        </p:nvSpPr>
+        <p:spPr>
+          <a:xfrm>
+            <a:off x="548640" y="1143000"/>
+            <a:ext cx="11094415" cy="2057400"/>
+          </a:xfrm>
+          <a:prstGeom prst="roundRect">
+            <a:avLst/>
+          </a:prstGeom>
+          <a:solidFill>
+            <a:srgbClr val="F0F4FA"/>
+          </a:solidFill>
+          <a:ln>
+            <a:noFill/>
+          </a:ln>
+          <a:effectLst/>
+        </p:spPr>
+        <p:style>
+          <a:lnRef idx="1">
+            <a:schemeClr val="accent1"/>
+          </a:lnRef>
+          <a:fillRef idx="3">
+            <a:schemeClr val="accent1"/>
+          </a:fillRef>
+          <a:effectRef idx="2">
+            <a:schemeClr val="accent1"/>
+          </a:effectRef>
+          <a:fontRef idx="minor">
+            <a:schemeClr val="lt1"/>
+          </a:fontRef>
+        </p:style>
+        <p:txBody>
+          <a:bodyPr rtlCol="0" anchor="ctr"/>
+          <a:lstStyle/>
+          <a:p>
+            <a:pPr algn="ctr"/>
+          </a:p>
+        </p:txBody>
+      </p:sp>
+      <p:pic>
+        <p:nvPicPr>
+          <p:cNvPr id="4" name="Picture 3" descr="eq_6.png"/>
+          <p:cNvPicPr>
+            <a:picLocks noChangeAspect="1"/>
+          </p:cNvPicPr>
+          <p:nvPr/>
+        </p:nvPicPr>
+        <p:blipFill>
+          <a:blip r:embed="rId2"/>
+          <a:stretch>
+            <a:fillRect/>
+          </a:stretch>
+        </p:blipFill>
+        <p:spPr>
+          <a:xfrm>
+            <a:off x="2348797" y="1234440"/>
+            <a:ext cx="7494100" cy="1874520"/>
+          </a:xfrm>
+          <a:prstGeom prst="rect">
+            <a:avLst/>
+          </a:prstGeom>
+        </p:spPr>
+      </p:pic>
+      <p:sp>
+        <p:nvSpPr>
+          <p:cNvPr id="5" name="TextBox 4"/>
           <p:cNvSpPr txBox="1"/>
           <p:nvPr/>
         </p:nvSpPr>
         <p:spPr>
           <a:xfrm>
-            <a:off x="548640" y="1188720"/>
-            <a:ext cx="11094415" cy="5303520"/>
+            <a:off x="548640" y="3429000"/>
+            <a:ext cx="11094415" cy="3063240"/>
           </a:xfrm>
           <a:prstGeom prst="rect">
             <a:avLst/>
@@ -6089,14 +6939,14 @@
               <a:spcAft>
                 <a:spcPts val="1000"/>
               </a:spcAft>
-              <a:defRPr sz="1600">
+              <a:defRPr sz="1400">
                 <a:solidFill>
                   <a:srgbClr val="1F2D3D"/>
                 </a:solidFill>
               </a:defRPr>
             </a:pPr>
             <a:r>
-              <a:t>•  Swarm intelligence: many simple agents share information; global order emerges from local interactions</a:t>
+              <a:t>•  Many simple agents share information; global order emerges from local interactions</a:t>
             </a:r>
           </a:p>
           <a:p>
@@ -6104,14 +6954,14 @@
               <a:spcAft>
                 <a:spcPts val="1000"/>
               </a:spcAft>
-              <a:defRPr sz="1600">
+              <a:defRPr sz="1400">
                 <a:solidFill>
                   <a:srgbClr val="1F2D3D"/>
                 </a:solidFill>
               </a:defRPr>
             </a:pPr>
             <a:r>
-              <a:t>•  PSOMA — Particle Swarm Optimisation with Memetic Algorithm: particles fly through the solution space attracted by personal and global bests, then a memetic local-search phase refines each particle</a:t>
+              <a:t>•  PSOMA: particles attracted by personal/global bests + a memetic local-search refinement phase — consistent best-overflow performer in the empirical scenarios</a:t>
             </a:r>
           </a:p>
           <a:p>
@@ -6119,14 +6969,14 @@
               <a:spcAft>
                 <a:spcPts val="1000"/>
               </a:spcAft>
-              <a:defRPr sz="1600">
+              <a:defRPr sz="1400">
                 <a:solidFill>
                   <a:srgbClr val="1F2D3D"/>
                 </a:solidFill>
               </a:defRPr>
             </a:pPr>
             <a:r>
-              <a:t>•  PSOMA excels at overflow prevention in the empirical scenarios (consistent best-overflow performer for LM/SL)</a:t>
+              <a:t>•  ACO-HH: pheromones are laid over low-level heuristics (h) rather than arcs — the colony learns the best sequence of constructive operators</a:t>
             </a:r>
           </a:p>
           <a:p>
@@ -6134,29 +6984,14 @@
               <a:spcAft>
                 <a:spcPts val="1000"/>
               </a:spcAft>
-              <a:defRPr sz="1600">
+              <a:defRPr sz="1400">
                 <a:solidFill>
                   <a:srgbClr val="1F2D3D"/>
                 </a:solidFill>
               </a:defRPr>
             </a:pPr>
             <a:r>
-              <a:t>•  ACO-HH — Ant Colony Optimisation as a Hyper-Heuristic: pheromone trails are laid over low-level heuristics rather than arcs — the colony learns the best sequence of constructive operators</a:t>
-            </a:r>
-          </a:p>
-          <a:p>
-            <a:pPr>
-              <a:spcAft>
-                <a:spcPts val="1000"/>
-              </a:spcAft>
-              <a:defRPr sz="1600">
-                <a:solidFill>
-                  <a:srgbClr val="1F2D3D"/>
-                </a:solidFill>
-              </a:defRPr>
-            </a:pPr>
-            <a:r>
-              <a:t>•  ACO-HH is the most consistent all-rounder: Pareto-optimal in multiple scenarios (e.g. zero-overflow SL2 configurations at FFZ-350)</a:t>
+              <a:t>•  ACO-HH is the most robust all-rounder: Pareto-optimal in multiple scenarios (zero-overflow SL2 configs at FFZ-350)</a:t>
             </a:r>
           </a:p>
         </p:txBody>

--- a/assets/windows/wsmart_route_results.pptx
+++ b/assets/windows/wsmart_route_results.pptx
@@ -23,6 +23,7 @@
     <p:sldId id="271" r:id="rId22"/>
     <p:sldId id="272" r:id="rId23"/>
     <p:sldId id="273" r:id="rId24"/>
+    <p:sldId id="274" r:id="rId25"/>
   </p:sldIdLst>
   <p:sldSz cx="12191695" cy="6858000" type="screen4x3"/>
   <p:notesSz cx="6858000" cy="9144000"/>
@@ -3420,7 +3421,48 @@
         <p:spPr>
           <a:xfrm>
             <a:off x="548640" y="3429000"/>
-            <a:ext cx="11094415" cy="3063240"/>
+            <a:ext cx="11094415" cy="548640"/>
+          </a:xfrm>
+          <a:prstGeom prst="rect">
+            <a:avLst/>
+          </a:prstGeom>
+          <a:noFill/>
+        </p:spPr>
+        <p:txBody>
+          <a:bodyPr wrap="square">
+            <a:spAutoFit/>
+          </a:bodyPr>
+          <a:lstStyle/>
+          <a:p>
+            <a:r>
+              <a:rPr b="1" sz="1100">
+                <a:solidFill>
+                  <a:srgbClr val="1F2D3D"/>
+                </a:solidFill>
+              </a:rPr>
+              <a:t>Equation 7: </a:t>
+            </a:r>
+            <a:r>
+              <a:rPr i="1" sz="1100">
+                <a:solidFill>
+                  <a:srgbClr val="5A6A7A"/>
+                </a:solidFill>
+              </a:rPr>
+              <a:t>Simulated annealing accepts a worsening move with probability e^(−Δ/T_t), cooling temperature T by factor γ each iteration. PG-CLNS learns its destroy/repair operator choice o via the policy-gradient estimator ∇_θJ, using state s (fill levels, geography) and observed reward R.</a:t>
+            </a:r>
+          </a:p>
+        </p:txBody>
+      </p:sp>
+      <p:sp>
+        <p:nvSpPr>
+          <p:cNvPr id="6" name="TextBox 5"/>
+          <p:cNvSpPr txBox="1"/>
+          <p:nvPr/>
+        </p:nvSpPr>
+        <p:spPr>
+          <a:xfrm>
+            <a:off x="548640" y="3794760"/>
+            <a:ext cx="11094415" cy="2697480"/>
           </a:xfrm>
           <a:prstGeom prst="rect">
             <a:avLst/>
@@ -3641,7 +3683,48 @@
         <p:spPr>
           <a:xfrm>
             <a:off x="548640" y="3429000"/>
-            <a:ext cx="11094415" cy="3063240"/>
+            <a:ext cx="11094415" cy="548640"/>
+          </a:xfrm>
+          <a:prstGeom prst="rect">
+            <a:avLst/>
+          </a:prstGeom>
+          <a:noFill/>
+        </p:spPr>
+        <p:txBody>
+          <a:bodyPr wrap="square">
+            <a:spAutoFit/>
+          </a:bodyPr>
+          <a:lstStyle/>
+          <a:p>
+            <a:r>
+              <a:rPr b="1" sz="1100">
+                <a:solidFill>
+                  <a:srgbClr val="1F2D3D"/>
+                </a:solidFill>
+              </a:rPr>
+              <a:t>Equation 8: </a:t>
+            </a:r>
+            <a:r>
+              <a:rPr i="1" sz="1100">
+                <a:solidFill>
+                  <a:srgbClr val="5A6A7A"/>
+                </a:solidFill>
+              </a:rPr>
+              <a:t>2-opt accepts an edge swap whenever the resulting distance change Δ is negative. Fast-TSP reorders each route's visiting sequence π to minimise total distance — solved exactly for small routes and via Stochastic Local Search (SLS) once N exceeds 20 stops.</a:t>
+            </a:r>
+          </a:p>
+        </p:txBody>
+      </p:sp>
+      <p:sp>
+        <p:nvSpPr>
+          <p:cNvPr id="6" name="TextBox 5"/>
+          <p:cNvSpPr txBox="1"/>
+          <p:nvPr/>
+        </p:nvSpPr>
+        <p:spPr>
+          <a:xfrm>
+            <a:off x="548640" y="3794760"/>
+            <a:ext cx="11094415" cy="2697480"/>
           </a:xfrm>
           <a:prstGeom prst="rect">
             <a:avLst/>
@@ -3818,7 +3901,7 @@
         <p:spPr>
           <a:xfrm>
             <a:off x="548640" y="6355080"/>
-            <a:ext cx="11094415" cy="411480"/>
+            <a:ext cx="11094415" cy="548640"/>
           </a:xfrm>
           <a:prstGeom prst="rect">
             <a:avLst/>
@@ -3831,14 +3914,20 @@
           </a:bodyPr>
           <a:lstStyle/>
           <a:p>
-            <a:pPr>
-              <a:defRPr sz="1200" i="1">
+            <a:r>
+              <a:rPr b="1" sz="1100">
+                <a:solidFill>
+                  <a:srgbClr val="1F2D3D"/>
+                </a:solidFill>
+              </a:rPr>
+              <a:t>Figure 2: </a:t>
+            </a:r>
+            <a:r>
+              <a:rPr i="1" sz="1100">
                 <a:solidFill>
                   <a:srgbClr val="5A6A7A"/>
                 </a:solidFill>
-              </a:defRPr>
-            </a:pPr>
-            <a:r>
+              </a:rPr>
               <a:t>Symlog X axis (overflows). Colour = selection variant, shape = scenario, dashed lines = Pareto fronts (one colour per scenario).</a:t>
             </a:r>
           </a:p>
@@ -3971,7 +4060,7 @@
         <p:spPr>
           <a:xfrm>
             <a:off x="548640" y="6355080"/>
-            <a:ext cx="11094415" cy="411480"/>
+            <a:ext cx="11094415" cy="548640"/>
           </a:xfrm>
           <a:prstGeom prst="rect">
             <a:avLst/>
@@ -3984,14 +4073,20 @@
           </a:bodyPr>
           <a:lstStyle/>
           <a:p>
-            <a:pPr>
-              <a:defRPr sz="1200" i="1">
+            <a:r>
+              <a:rPr b="1" sz="1100">
+                <a:solidFill>
+                  <a:srgbClr val="1F2D3D"/>
+                </a:solidFill>
+              </a:rPr>
+              <a:t>Figure 3: </a:t>
+            </a:r>
+            <a:r>
+              <a:rPr i="1" sz="1100">
                 <a:solidFill>
                   <a:srgbClr val="5A6A7A"/>
                 </a:solidFill>
-              </a:defRPr>
-            </a:pPr>
-            <a:r>
+              </a:rPr>
               <a:t>Mean ± min/max range across route constructors; colours discriminate the mandatory selection strategies.</a:t>
             </a:r>
           </a:p>
@@ -4100,7 +4195,7 @@
         <p:spPr>
           <a:xfrm>
             <a:off x="548640" y="6355080"/>
-            <a:ext cx="11094415" cy="411480"/>
+            <a:ext cx="11094415" cy="548640"/>
           </a:xfrm>
           <a:prstGeom prst="rect">
             <a:avLst/>
@@ -4113,14 +4208,20 @@
           </a:bodyPr>
           <a:lstStyle/>
           <a:p>
-            <a:pPr>
-              <a:defRPr sz="1200" i="1">
+            <a:r>
+              <a:rPr b="1" sz="1100">
+                <a:solidFill>
+                  <a:srgbClr val="1F2D3D"/>
+                </a:solidFill>
+              </a:rPr>
+              <a:t>Figure 4: </a:t>
+            </a:r>
+            <a:r>
+              <a:rPr i="1" sz="1100">
                 <a:solidFill>
                   <a:srgbClr val="5A6A7A"/>
                 </a:solidFill>
-              </a:defRPr>
-            </a:pPr>
-            <a:r>
+              </a:rPr>
               <a:t>30-day runs. One panel per scenario; route constructors on the rows, selection × improver combinations on the columns.</a:t>
             </a:r>
           </a:p>
@@ -4253,7 +4354,7 @@
         <p:spPr>
           <a:xfrm>
             <a:off x="548640" y="6355080"/>
-            <a:ext cx="11094415" cy="411480"/>
+            <a:ext cx="11094415" cy="548640"/>
           </a:xfrm>
           <a:prstGeom prst="rect">
             <a:avLst/>
@@ -4266,14 +4367,20 @@
           </a:bodyPr>
           <a:lstStyle/>
           <a:p>
-            <a:pPr>
-              <a:defRPr sz="1200" i="1">
+            <a:r>
+              <a:rPr b="1" sz="1100">
+                <a:solidFill>
+                  <a:srgbClr val="1F2D3D"/>
+                </a:solidFill>
+              </a:rPr>
+              <a:t>Figure 5: </a:t>
+            </a:r>
+            <a:r>
+              <a:rPr i="1" sz="1100">
                 <a:solidFill>
                   <a:srgbClr val="5A6A7A"/>
                 </a:solidFill>
-              </a:defRPr>
-            </a:pPr>
-            <a:r>
+              </a:rPr>
               <a:t>90-day runs (Pareto-front policies only — fewer rows, easier to read). Rows = policy configurations; columns = scenarios.</a:t>
             </a:r>
           </a:p>
@@ -4382,7 +4489,7 @@
         <p:spPr>
           <a:xfrm>
             <a:off x="548640" y="6355080"/>
-            <a:ext cx="11094415" cy="411480"/>
+            <a:ext cx="11094415" cy="548640"/>
           </a:xfrm>
           <a:prstGeom prst="rect">
             <a:avLst/>
@@ -4395,14 +4502,20 @@
           </a:bodyPr>
           <a:lstStyle/>
           <a:p>
-            <a:pPr>
-              <a:defRPr sz="1200" i="1">
+            <a:r>
+              <a:rPr b="1" sz="1100">
+                <a:solidFill>
+                  <a:srgbClr val="1F2D3D"/>
+                </a:solidFill>
+              </a:rPr>
+              <a:t>Figure 6: </a:t>
+            </a:r>
+            <a:r>
+              <a:rPr i="1" sz="1100">
                 <a:solidFill>
                   <a:srgbClr val="5A6A7A"/>
                 </a:solidFill>
-              </a:defRPr>
-            </a:pPr>
-            <a:r>
+              </a:rPr>
               <a:t>Each bubble = (improver, scenario) averaged over strategies and constructors — FTSP vs CLS contrasted directly.</a:t>
             </a:r>
           </a:p>
@@ -4473,14 +4586,14 @@
               </a:defRPr>
             </a:pPr>
             <a:r>
-              <a:t>Conclusions, Limitations &amp; Future Work</a:t>
+              <a:t>Results — Full Table (30-Day Horizon)</a:t>
             </a:r>
           </a:p>
         </p:txBody>
       </p:sp>
       <p:pic>
         <p:nvPicPr>
-          <p:cNvPr id="3" name="Picture 2" descr="policy_radar.png"/>
+          <p:cNvPr id="3" name="Picture 2" descr="full_results_table.png"/>
           <p:cNvPicPr>
             <a:picLocks noChangeAspect="1"/>
           </p:cNvPicPr>
@@ -4494,8 +4607,8 @@
         </p:blipFill>
         <p:spPr>
           <a:xfrm>
-            <a:off x="6095847" y="1333266"/>
-            <a:ext cx="5730087" cy="4831548"/>
+            <a:off x="274320" y="2869653"/>
+            <a:ext cx="11643055" cy="1301573"/>
           </a:xfrm>
           <a:prstGeom prst="rect">
             <a:avLst/>
@@ -4510,8 +4623,8 @@
         </p:nvSpPr>
         <p:spPr>
           <a:xfrm>
-            <a:off x="457200" y="1280160"/>
-            <a:ext cx="5455767" cy="5212080"/>
+            <a:off x="548640" y="6355080"/>
+            <a:ext cx="11094415" cy="548640"/>
           </a:xfrm>
           <a:prstGeom prst="rect">
             <a:avLst/>
@@ -4524,78 +4637,21 @@
           </a:bodyPr>
           <a:lstStyle/>
           <a:p>
-            <a:pPr>
-              <a:spcAft>
-                <a:spcPts val="1000"/>
-              </a:spcAft>
-              <a:defRPr sz="1300">
+            <a:r>
+              <a:rPr b="1" sz="1100">
                 <a:solidFill>
                   <a:srgbClr val="1F2D3D"/>
                 </a:solidFill>
-              </a:defRPr>
-            </a:pPr>
-            <a:r>
-              <a:t>•  The selection strategy dominates the overflow/efficiency trade-off: SL prevents overflows (SL2 + ACO_HH reached 0 at FFZ-350), LM (CF90) maximises kg/km (~12), LA balances</a:t>
-            </a:r>
-          </a:p>
-          <a:p>
-            <a:pPr>
-              <a:spcAft>
-                <a:spcPts val="1000"/>
-              </a:spcAft>
-              <a:defRPr sz="1300">
-                <a:solidFill>
-                  <a:srgbClr val="1F2D3D"/>
-                </a:solidFill>
-              </a:defRPr>
-            </a:pPr>
-            <a:r>
-              <a:t>•  BPC and PG-CLNS are the most frequent Pareto-front constructors; ACO-HH is the most robust across scenarios and horizons</a:t>
-            </a:r>
-          </a:p>
-          <a:p>
-            <a:pPr>
-              <a:spcAft>
-                <a:spcPts val="1000"/>
-              </a:spcAft>
-              <a:defRPr sz="1300">
-                <a:solidFill>
-                  <a:srgbClr val="1F2D3D"/>
-                </a:solidFill>
-              </a:defRPr>
-            </a:pPr>
-            <a:r>
-              <a:t>•  Patterns are stable from 30 to 90 days; overflow pressure grows with the horizon while kg/km stays consistent</a:t>
-            </a:r>
-          </a:p>
-          <a:p>
-            <a:pPr>
-              <a:spcAft>
-                <a:spcPts val="1000"/>
-              </a:spcAft>
-              <a:defRPr sz="1300">
-                <a:solidFill>
-                  <a:srgbClr val="1F2D3D"/>
-                </a:solidFill>
-              </a:defRPr>
-            </a:pPr>
-            <a:r>
-              <a:t>•  Limitations: single vehicle type/depot per region; waste models calibrated on limited data; 90-day runs only cover the 30-day Pareto-front policies</a:t>
-            </a:r>
-          </a:p>
-          <a:p>
-            <a:pPr>
-              <a:spcAft>
-                <a:spcPts val="1000"/>
-              </a:spcAft>
-              <a:defRPr sz="1300">
-                <a:solidFill>
-                  <a:srgbClr val="1F2D3D"/>
-                </a:solidFill>
-              </a:defRPr>
-            </a:pPr>
-            <a:r>
-              <a:t>•  Future work: richer acceptance criteria, neural constructors in the same pipeline, multi-vehicle fleets, intra-day re-routing, CO₂-aware objectives</a:t>
+              </a:rPr>
+              <a:t>Table 1: </a:t>
+            </a:r>
+            <a:r>
+              <a:rPr i="1" sz="1100">
+                <a:solidFill>
+                  <a:srgbClr val="5A6A7A"/>
+                </a:solidFill>
+              </a:rPr>
+              <a:t>Full results table — rows: graph size × region × data distribution; columns: mandatory selection strategy × route constructor × route improver. Each cell reports mean±std overflows and mean±std kg/km.</a:t>
             </a:r>
           </a:p>
         </p:txBody>
@@ -4627,6 +4683,239 @@
         <p:spPr>
           <a:xfrm>
             <a:off x="0" y="0"/>
+            <a:ext cx="12191695" cy="914400"/>
+          </a:xfrm>
+          <a:prstGeom prst="rect">
+            <a:avLst/>
+          </a:prstGeom>
+          <a:solidFill>
+            <a:srgbClr val="1F2D3D"/>
+          </a:solidFill>
+          <a:ln>
+            <a:noFill/>
+          </a:ln>
+        </p:spPr>
+        <p:style>
+          <a:lnRef idx="1">
+            <a:schemeClr val="accent1"/>
+          </a:lnRef>
+          <a:fillRef idx="3">
+            <a:schemeClr val="accent1"/>
+          </a:fillRef>
+          <a:effectRef idx="2">
+            <a:schemeClr val="accent1"/>
+          </a:effectRef>
+          <a:fontRef idx="minor">
+            <a:schemeClr val="lt1"/>
+          </a:fontRef>
+        </p:style>
+        <p:txBody>
+          <a:bodyPr rtlCol="0" anchor="ctr" wrap="square" lIns="457200"/>
+          <a:lstStyle/>
+          <a:p>
+            <a:pPr algn="ctr">
+              <a:defRPr sz="2600" b="1">
+                <a:solidFill>
+                  <a:srgbClr val="FFFFFF"/>
+                </a:solidFill>
+              </a:defRPr>
+            </a:pPr>
+            <a:r>
+              <a:t>Conclusions, Limitations &amp; Future Work</a:t>
+            </a:r>
+          </a:p>
+        </p:txBody>
+      </p:sp>
+      <p:pic>
+        <p:nvPicPr>
+          <p:cNvPr id="3" name="Picture 2" descr="policy_radar.png"/>
+          <p:cNvPicPr>
+            <a:picLocks noChangeAspect="1"/>
+          </p:cNvPicPr>
+          <p:nvPr/>
+        </p:nvPicPr>
+        <p:blipFill>
+          <a:blip r:embed="rId2"/>
+          <a:stretch>
+            <a:fillRect/>
+          </a:stretch>
+        </p:blipFill>
+        <p:spPr>
+          <a:xfrm>
+            <a:off x="6095847" y="1333266"/>
+            <a:ext cx="5730087" cy="4831548"/>
+          </a:xfrm>
+          <a:prstGeom prst="rect">
+            <a:avLst/>
+          </a:prstGeom>
+        </p:spPr>
+      </p:pic>
+      <p:sp>
+        <p:nvSpPr>
+          <p:cNvPr id="4" name="TextBox 3"/>
+          <p:cNvSpPr txBox="1"/>
+          <p:nvPr/>
+        </p:nvSpPr>
+        <p:spPr>
+          <a:xfrm>
+            <a:off x="548640" y="6355080"/>
+            <a:ext cx="11094415" cy="548640"/>
+          </a:xfrm>
+          <a:prstGeom prst="rect">
+            <a:avLst/>
+          </a:prstGeom>
+          <a:noFill/>
+        </p:spPr>
+        <p:txBody>
+          <a:bodyPr wrap="square">
+            <a:spAutoFit/>
+          </a:bodyPr>
+          <a:lstStyle/>
+          <a:p>
+            <a:r>
+              <a:rPr b="1" sz="1100">
+                <a:solidFill>
+                  <a:srgbClr val="1F2D3D"/>
+                </a:solidFill>
+              </a:rPr>
+              <a:t>Figure 7: </a:t>
+            </a:r>
+            <a:r>
+              <a:rPr i="1" sz="1100">
+                <a:solidFill>
+                  <a:srgbClr val="5A6A7A"/>
+                </a:solidFill>
+              </a:rPr>
+              <a:t>Overlaid radar chart comparing key route constructors across overflow, efficiency, distance and profit axes — outer position indicates better performance on that axis.</a:t>
+            </a:r>
+          </a:p>
+        </p:txBody>
+      </p:sp>
+      <p:sp>
+        <p:nvSpPr>
+          <p:cNvPr id="5" name="TextBox 4"/>
+          <p:cNvSpPr txBox="1"/>
+          <p:nvPr/>
+        </p:nvSpPr>
+        <p:spPr>
+          <a:xfrm>
+            <a:off x="457200" y="1280160"/>
+            <a:ext cx="5455767" cy="5212080"/>
+          </a:xfrm>
+          <a:prstGeom prst="rect">
+            <a:avLst/>
+          </a:prstGeom>
+          <a:noFill/>
+        </p:spPr>
+        <p:txBody>
+          <a:bodyPr wrap="square">
+            <a:spAutoFit/>
+          </a:bodyPr>
+          <a:lstStyle/>
+          <a:p>
+            <a:pPr>
+              <a:spcAft>
+                <a:spcPts val="1000"/>
+              </a:spcAft>
+              <a:defRPr sz="1300">
+                <a:solidFill>
+                  <a:srgbClr val="1F2D3D"/>
+                </a:solidFill>
+              </a:defRPr>
+            </a:pPr>
+            <a:r>
+              <a:t>•  The selection strategy dominates the overflow/efficiency trade-off: SL prevents overflows (SL2 + ACO_HH reached 0 at FFZ-350), LM (CF90) maximises kg/km (~12), LA balances</a:t>
+            </a:r>
+          </a:p>
+          <a:p>
+            <a:pPr>
+              <a:spcAft>
+                <a:spcPts val="1000"/>
+              </a:spcAft>
+              <a:defRPr sz="1300">
+                <a:solidFill>
+                  <a:srgbClr val="1F2D3D"/>
+                </a:solidFill>
+              </a:defRPr>
+            </a:pPr>
+            <a:r>
+              <a:t>•  BPC and PG-CLNS are the most frequent Pareto-front constructors; ACO-HH is the most robust across scenarios and horizons</a:t>
+            </a:r>
+          </a:p>
+          <a:p>
+            <a:pPr>
+              <a:spcAft>
+                <a:spcPts val="1000"/>
+              </a:spcAft>
+              <a:defRPr sz="1300">
+                <a:solidFill>
+                  <a:srgbClr val="1F2D3D"/>
+                </a:solidFill>
+              </a:defRPr>
+            </a:pPr>
+            <a:r>
+              <a:t>•  Patterns are stable from 30 to 90 days; overflow pressure grows with the horizon while kg/km stays consistent</a:t>
+            </a:r>
+          </a:p>
+          <a:p>
+            <a:pPr>
+              <a:spcAft>
+                <a:spcPts val="1000"/>
+              </a:spcAft>
+              <a:defRPr sz="1300">
+                <a:solidFill>
+                  <a:srgbClr val="1F2D3D"/>
+                </a:solidFill>
+              </a:defRPr>
+            </a:pPr>
+            <a:r>
+              <a:t>•  Limitations: single vehicle type/depot per region; waste models calibrated on limited data; 90-day runs only cover the 30-day Pareto-front policies</a:t>
+            </a:r>
+          </a:p>
+          <a:p>
+            <a:pPr>
+              <a:spcAft>
+                <a:spcPts val="1000"/>
+              </a:spcAft>
+              <a:defRPr sz="1300">
+                <a:solidFill>
+                  <a:srgbClr val="1F2D3D"/>
+                </a:solidFill>
+              </a:defRPr>
+            </a:pPr>
+            <a:r>
+              <a:t>•  Future work: richer acceptance criteria, neural constructors in the same pipeline, multi-vehicle fleets, intra-day re-routing, CO₂-aware objectives</a:t>
+            </a:r>
+          </a:p>
+        </p:txBody>
+      </p:sp>
+    </p:spTree>
+  </p:cSld>
+  <p:clrMapOvr>
+    <a:masterClrMapping/>
+  </p:clrMapOvr>
+</p:sld>
+</file>
+
+<file path=ppt/slides/slide19.xml><?xml version="1.0" encoding="utf-8"?>
+<p:sld xmlns:a="http://schemas.openxmlformats.org/drawingml/2006/main" xmlns:p="http://schemas.openxmlformats.org/presentationml/2006/main" xmlns:r="http://schemas.openxmlformats.org/officeDocument/2006/relationships">
+  <p:cSld>
+    <p:spTree>
+      <p:nvGrpSpPr>
+        <p:cNvPr id="1" name=""/>
+        <p:cNvGrpSpPr/>
+        <p:nvPr/>
+      </p:nvGrpSpPr>
+      <p:grpSpPr/>
+      <p:sp>
+        <p:nvSpPr>
+          <p:cNvPr id="2" name="Rectangle 1"/>
+          <p:cNvSpPr/>
+          <p:nvPr/>
+        </p:nvSpPr>
+        <p:spPr>
+          <a:xfrm>
+            <a:off x="0" y="0"/>
             <a:ext cx="12191695" cy="6858000"/>
           </a:xfrm>
           <a:prstGeom prst="rect">
@@ -5208,7 +5497,48 @@
         <p:spPr>
           <a:xfrm>
             <a:off x="548640" y="3429000"/>
-            <a:ext cx="11094415" cy="3063240"/>
+            <a:ext cx="11094415" cy="548640"/>
+          </a:xfrm>
+          <a:prstGeom prst="rect">
+            <a:avLst/>
+          </a:prstGeom>
+          <a:noFill/>
+        </p:spPr>
+        <p:txBody>
+          <a:bodyPr wrap="square">
+            <a:spAutoFit/>
+          </a:bodyPr>
+          <a:lstStyle/>
+          <a:p>
+            <a:r>
+              <a:rPr b="1" sz="1100">
+                <a:solidFill>
+                  <a:srgbClr val="1F2D3D"/>
+                </a:solidFill>
+              </a:rPr>
+              <a:t>Equation 1: </a:t>
+            </a:r>
+            <a:r>
+              <a:rPr i="1" sz="1100">
+                <a:solidFill>
+                  <a:srgbClr val="5A6A7A"/>
+                </a:solidFill>
+              </a:rPr>
+              <a:t>Objective: maximise collected profit minus travel cost, choosing which nodes y to visit and how x routes them, subject to the vehicle capacity Q.</a:t>
+            </a:r>
+          </a:p>
+        </p:txBody>
+      </p:sp>
+      <p:sp>
+        <p:nvSpPr>
+          <p:cNvPr id="6" name="TextBox 5"/>
+          <p:cNvSpPr txBox="1"/>
+          <p:nvPr/>
+        </p:nvSpPr>
+        <p:spPr>
+          <a:xfrm>
+            <a:off x="548640" y="3794760"/>
+            <a:ext cx="11094415" cy="2697480"/>
           </a:xfrm>
           <a:prstGeom prst="rect">
             <a:avLst/>
@@ -5862,7 +6192,48 @@
         <p:spPr>
           <a:xfrm>
             <a:off x="548640" y="5120640"/>
-            <a:ext cx="11094415" cy="1371600"/>
+            <a:ext cx="11094415" cy="548640"/>
+          </a:xfrm>
+          <a:prstGeom prst="rect">
+            <a:avLst/>
+          </a:prstGeom>
+          <a:noFill/>
+        </p:spPr>
+        <p:txBody>
+          <a:bodyPr wrap="square">
+            <a:spAutoFit/>
+          </a:bodyPr>
+          <a:lstStyle/>
+          <a:p>
+            <a:r>
+              <a:rPr b="1" sz="1100">
+                <a:solidFill>
+                  <a:srgbClr val="1F2D3D"/>
+                </a:solidFill>
+              </a:rPr>
+              <a:t>Figure 1: </a:t>
+            </a:r>
+            <a:r>
+              <a:rPr i="1" sz="1100">
+                <a:solidFill>
+                  <a:srgbClr val="5A6A7A"/>
+                </a:solidFill>
+              </a:rPr>
+              <a:t>Every daily routing policy decomposes into a mandatory bin-selection strategy, a route constructor, an optional acceptance criterion and an optional route improver.</a:t>
+            </a:r>
+          </a:p>
+        </p:txBody>
+      </p:sp>
+      <p:sp>
+        <p:nvSpPr>
+          <p:cNvPr id="13" name="TextBox 12"/>
+          <p:cNvSpPr txBox="1"/>
+          <p:nvPr/>
+        </p:nvSpPr>
+        <p:spPr>
+          <a:xfrm>
+            <a:off x="548640" y="5486400"/>
+            <a:ext cx="11094415" cy="1005840"/>
           </a:xfrm>
           <a:prstGeom prst="rect">
             <a:avLst/>
@@ -6053,7 +6424,48 @@
         <p:spPr>
           <a:xfrm>
             <a:off x="548640" y="4114800"/>
-            <a:ext cx="11094415" cy="2377440"/>
+            <a:ext cx="11094415" cy="548640"/>
+          </a:xfrm>
+          <a:prstGeom prst="rect">
+            <a:avLst/>
+          </a:prstGeom>
+          <a:noFill/>
+        </p:spPr>
+        <p:txBody>
+          <a:bodyPr wrap="square">
+            <a:spAutoFit/>
+          </a:bodyPr>
+          <a:lstStyle/>
+          <a:p>
+            <a:r>
+              <a:rPr b="1" sz="1100">
+                <a:solidFill>
+                  <a:srgbClr val="1F2D3D"/>
+                </a:solidFill>
+              </a:rPr>
+              <a:t>Equation 2: </a:t>
+            </a:r>
+            <a:r>
+              <a:rPr i="1" sz="1100">
+                <a:solidFill>
+                  <a:srgbClr val="5A6A7A"/>
+                </a:solidFill>
+              </a:rPr>
+              <a:t>The three mandatory selection rules — Look-Ahead (LA) forecasts fill level f_i at t+δ, Last-Minute (LM) reacts once f_i crosses a critical fill threshold CF, and Service-Level (SL) bounds each bin's overflow probability by a target confidence α.</a:t>
+            </a:r>
+          </a:p>
+        </p:txBody>
+      </p:sp>
+      <p:sp>
+        <p:nvSpPr>
+          <p:cNvPr id="6" name="TextBox 5"/>
+          <p:cNvSpPr txBox="1"/>
+          <p:nvPr/>
+        </p:nvSpPr>
+        <p:spPr>
+          <a:xfrm>
+            <a:off x="548640" y="4480560"/>
+            <a:ext cx="11094415" cy="2011680"/>
           </a:xfrm>
           <a:prstGeom prst="rect">
             <a:avLst/>
@@ -6259,7 +6671,48 @@
         <p:spPr>
           <a:xfrm>
             <a:off x="548640" y="2743200"/>
-            <a:ext cx="11094415" cy="3749040"/>
+            <a:ext cx="11094415" cy="548640"/>
+          </a:xfrm>
+          <a:prstGeom prst="rect">
+            <a:avLst/>
+          </a:prstGeom>
+          <a:noFill/>
+        </p:spPr>
+        <p:txBody>
+          <a:bodyPr wrap="square">
+            <a:spAutoFit/>
+          </a:bodyPr>
+          <a:lstStyle/>
+          <a:p>
+            <a:r>
+              <a:rPr b="1" sz="1100">
+                <a:solidFill>
+                  <a:srgbClr val="1F2D3D"/>
+                </a:solidFill>
+              </a:rPr>
+              <a:t>Equation 3: </a:t>
+            </a:r>
+            <a:r>
+              <a:rPr i="1" sz="1100">
+                <a:solidFill>
+                  <a:srgbClr val="5A6A7A"/>
+                </a:solidFill>
+              </a:rPr>
+              <a:t>Set-partitioning master problem: choose a minimum-cost combination of routes r ∈ Ω (weight λ_r) such that every node i is covered exactly once (a_ir = 1 iff route r visits i).</a:t>
+            </a:r>
+          </a:p>
+        </p:txBody>
+      </p:sp>
+      <p:sp>
+        <p:nvSpPr>
+          <p:cNvPr id="6" name="TextBox 5"/>
+          <p:cNvSpPr txBox="1"/>
+          <p:nvPr/>
+        </p:nvSpPr>
+        <p:spPr>
+          <a:xfrm>
+            <a:off x="548640" y="3108960"/>
+            <a:ext cx="11094415" cy="3383280"/>
           </a:xfrm>
           <a:prstGeom prst="rect">
             <a:avLst/>
@@ -6480,7 +6933,48 @@
         <p:spPr>
           <a:xfrm>
             <a:off x="548640" y="3429000"/>
-            <a:ext cx="11094415" cy="3063240"/>
+            <a:ext cx="11094415" cy="548640"/>
+          </a:xfrm>
+          <a:prstGeom prst="rect">
+            <a:avLst/>
+          </a:prstGeom>
+          <a:noFill/>
+        </p:spPr>
+        <p:txBody>
+          <a:bodyPr wrap="square">
+            <a:spAutoFit/>
+          </a:bodyPr>
+          <a:lstStyle/>
+          <a:p>
+            <a:r>
+              <a:rPr b="1" sz="1100">
+                <a:solidFill>
+                  <a:srgbClr val="1F2D3D"/>
+                </a:solidFill>
+              </a:rPr>
+              <a:t>Equation 4: </a:t>
+            </a:r>
+            <a:r>
+              <a:rPr i="1" sz="1100">
+                <a:solidFill>
+                  <a:srgbClr val="5A6A7A"/>
+                </a:solidFill>
+              </a:rPr>
+              <a:t>A meta-heuristic maps the incumbent x_t to a new candidate via operator A parameterised by θ_t, updated from feedback; a hyper-heuristic instead searches over low-level heuristics h ∈ H, picking the one with highest estimated value Q_t(h) at each step.</a:t>
+            </a:r>
+          </a:p>
+        </p:txBody>
+      </p:sp>
+      <p:sp>
+        <p:nvSpPr>
+          <p:cNvPr id="6" name="TextBox 5"/>
+          <p:cNvSpPr txBox="1"/>
+          <p:nvPr/>
+        </p:nvSpPr>
+        <p:spPr>
+          <a:xfrm>
+            <a:off x="548640" y="3794760"/>
+            <a:ext cx="11094415" cy="2697480"/>
           </a:xfrm>
           <a:prstGeom prst="rect">
             <a:avLst/>
@@ -6701,7 +7195,48 @@
         <p:spPr>
           <a:xfrm>
             <a:off x="548640" y="2743200"/>
-            <a:ext cx="11094415" cy="3749040"/>
+            <a:ext cx="11094415" cy="548640"/>
+          </a:xfrm>
+          <a:prstGeom prst="rect">
+            <a:avLst/>
+          </a:prstGeom>
+          <a:noFill/>
+        </p:spPr>
+        <p:txBody>
+          <a:bodyPr wrap="square">
+            <a:spAutoFit/>
+          </a:bodyPr>
+          <a:lstStyle/>
+          <a:p>
+            <a:r>
+              <a:rPr b="1" sz="1100">
+                <a:solidFill>
+                  <a:srgbClr val="1F2D3D"/>
+                </a:solidFill>
+              </a:rPr>
+              <a:t>Equation 5: </a:t>
+            </a:r>
+            <a:r>
+              <a:rPr i="1" sz="1100">
+                <a:solidFill>
+                  <a:srgbClr val="5A6A7A"/>
+                </a:solidFill>
+              </a:rPr>
+              <a:t>Biased fitness function used to rank current solutions by both quality and diversity. n_pop is the current population size and n_elite the number of elite (best-cost) individuals; individuals outside the elite are increasingly rewarded for contributing diversity.</a:t>
+            </a:r>
+          </a:p>
+        </p:txBody>
+      </p:sp>
+      <p:sp>
+        <p:nvSpPr>
+          <p:cNvPr id="6" name="TextBox 5"/>
+          <p:cNvSpPr txBox="1"/>
+          <p:nvPr/>
+        </p:nvSpPr>
+        <p:spPr>
+          <a:xfrm>
+            <a:off x="548640" y="3108960"/>
+            <a:ext cx="11094415" cy="3383280"/>
           </a:xfrm>
           <a:prstGeom prst="rect">
             <a:avLst/>
@@ -6922,7 +7457,48 @@
         <p:spPr>
           <a:xfrm>
             <a:off x="548640" y="3429000"/>
-            <a:ext cx="11094415" cy="3063240"/>
+            <a:ext cx="11094415" cy="548640"/>
+          </a:xfrm>
+          <a:prstGeom prst="rect">
+            <a:avLst/>
+          </a:prstGeom>
+          <a:noFill/>
+        </p:spPr>
+        <p:txBody>
+          <a:bodyPr wrap="square">
+            <a:spAutoFit/>
+          </a:bodyPr>
+          <a:lstStyle/>
+          <a:p>
+            <a:r>
+              <a:rPr b="1" sz="1100">
+                <a:solidFill>
+                  <a:srgbClr val="1F2D3D"/>
+                </a:solidFill>
+              </a:rPr>
+              <a:t>Equation 6: </a:t>
+            </a:r>
+            <a:r>
+              <a:rPr i="1" sz="1100">
+                <a:solidFill>
+                  <a:srgbClr val="5A6A7A"/>
+                </a:solidFill>
+              </a:rPr>
+              <a:t>PSO velocity update: particle i moves toward its personal best p_i and the global best g under inertia ω and acceleration coefficients c1, c2. ACO pheromone update: pheromone τ_h on heuristic h decays by evaporation rate ρ and is reinforced by the deposits Δτ_h of the k ants that used it.</a:t>
+            </a:r>
+          </a:p>
+        </p:txBody>
+      </p:sp>
+      <p:sp>
+        <p:nvSpPr>
+          <p:cNvPr id="6" name="TextBox 5"/>
+          <p:cNvSpPr txBox="1"/>
+          <p:nvPr/>
+        </p:nvSpPr>
+        <p:spPr>
+          <a:xfrm>
+            <a:off x="548640" y="3794760"/>
+            <a:ext cx="11094415" cy="2697480"/>
           </a:xfrm>
           <a:prstGeom prst="rect">
             <a:avLst/>

--- a/assets/windows/wsmart_route_results.pptx
+++ b/assets/windows/wsmart_route_results.pptx
@@ -3461,8 +3461,8 @@
         </p:nvSpPr>
         <p:spPr>
           <a:xfrm>
-            <a:off x="548640" y="3794760"/>
-            <a:ext cx="11094415" cy="2697480"/>
+            <a:off x="548640" y="4114800"/>
+            <a:ext cx="11094415" cy="2377440"/>
           </a:xfrm>
           <a:prstGeom prst="rect">
             <a:avLst/>
@@ -3723,8 +3723,8 @@
         </p:nvSpPr>
         <p:spPr>
           <a:xfrm>
-            <a:off x="548640" y="3794760"/>
-            <a:ext cx="11094415" cy="2697480"/>
+            <a:off x="548640" y="4114800"/>
+            <a:ext cx="11094415" cy="2377440"/>
           </a:xfrm>
           <a:prstGeom prst="rect">
             <a:avLst/>
@@ -4591,9 +4591,44 @@
           </a:p>
         </p:txBody>
       </p:sp>
+      <p:sp>
+        <p:nvSpPr>
+          <p:cNvPr id="3" name="TextBox 2"/>
+          <p:cNvSpPr txBox="1"/>
+          <p:nvPr/>
+        </p:nvSpPr>
+        <p:spPr>
+          <a:xfrm>
+            <a:off x="365760" y="1051560"/>
+            <a:ext cx="11460175" cy="274320"/>
+          </a:xfrm>
+          <a:prstGeom prst="rect">
+            <a:avLst/>
+          </a:prstGeom>
+          <a:noFill/>
+        </p:spPr>
+        <p:txBody>
+          <a:bodyPr wrap="square">
+            <a:spAutoFit/>
+          </a:bodyPr>
+          <a:lstStyle/>
+          <a:p>
+            <a:pPr>
+              <a:defRPr b="1" sz="1200">
+                <a:solidFill>
+                  <a:srgbClr val="2E74B5"/>
+                </a:solidFill>
+              </a:defRPr>
+            </a:pPr>
+            <a:r>
+              <a:t>Improver: FTSP</a:t>
+            </a:r>
+          </a:p>
+        </p:txBody>
+      </p:sp>
       <p:pic>
         <p:nvPicPr>
-          <p:cNvPr id="3" name="Picture 2" descr="full_results_table.png"/>
+          <p:cNvPr id="4" name="Picture 3" descr="full_results_table_improver_0.png"/>
           <p:cNvPicPr>
             <a:picLocks noChangeAspect="1"/>
           </p:cNvPicPr>
@@ -4607,8 +4642,8 @@
         </p:blipFill>
         <p:spPr>
           <a:xfrm>
-            <a:off x="274320" y="2869653"/>
-            <a:ext cx="11643055" cy="1301573"/>
+            <a:off x="274320" y="1579833"/>
+            <a:ext cx="11643055" cy="1677509"/>
           </a:xfrm>
           <a:prstGeom prst="rect">
             <a:avLst/>
@@ -4617,14 +4652,14 @@
       </p:pic>
       <p:sp>
         <p:nvSpPr>
-          <p:cNvPr id="4" name="TextBox 3"/>
+          <p:cNvPr id="5" name="TextBox 4"/>
           <p:cNvSpPr txBox="1"/>
           <p:nvPr/>
         </p:nvSpPr>
         <p:spPr>
           <a:xfrm>
-            <a:off x="548640" y="6355080"/>
-            <a:ext cx="11094415" cy="548640"/>
+            <a:off x="365760" y="3520440"/>
+            <a:ext cx="11460175" cy="274320"/>
           </a:xfrm>
           <a:prstGeom prst="rect">
             <a:avLst/>
@@ -4637,6 +4672,65 @@
           </a:bodyPr>
           <a:lstStyle/>
           <a:p>
+            <a:pPr>
+              <a:defRPr b="1" sz="1200">
+                <a:solidFill>
+                  <a:srgbClr val="2E74B5"/>
+                </a:solidFill>
+              </a:defRPr>
+            </a:pPr>
+            <a:r>
+              <a:t>Improver: CLS</a:t>
+            </a:r>
+          </a:p>
+        </p:txBody>
+      </p:sp>
+      <p:pic>
+        <p:nvPicPr>
+          <p:cNvPr id="6" name="Picture 5" descr="full_results_table_improver_1.png"/>
+          <p:cNvPicPr>
+            <a:picLocks noChangeAspect="1"/>
+          </p:cNvPicPr>
+          <p:nvPr/>
+        </p:nvPicPr>
+        <p:blipFill>
+          <a:blip r:embed="rId3"/>
+          <a:stretch>
+            <a:fillRect/>
+          </a:stretch>
+        </p:blipFill>
+        <p:spPr>
+          <a:xfrm>
+            <a:off x="274320" y="4048713"/>
+            <a:ext cx="11643055" cy="1677509"/>
+          </a:xfrm>
+          <a:prstGeom prst="rect">
+            <a:avLst/>
+          </a:prstGeom>
+        </p:spPr>
+      </p:pic>
+      <p:sp>
+        <p:nvSpPr>
+          <p:cNvPr id="7" name="TextBox 6"/>
+          <p:cNvSpPr txBox="1"/>
+          <p:nvPr/>
+        </p:nvSpPr>
+        <p:spPr>
+          <a:xfrm>
+            <a:off x="548640" y="6355080"/>
+            <a:ext cx="11094415" cy="548640"/>
+          </a:xfrm>
+          <a:prstGeom prst="rect">
+            <a:avLst/>
+          </a:prstGeom>
+          <a:noFill/>
+        </p:spPr>
+        <p:txBody>
+          <a:bodyPr wrap="square">
+            <a:spAutoFit/>
+          </a:bodyPr>
+          <a:lstStyle/>
+          <a:p>
             <a:r>
               <a:rPr b="1" sz="1100">
                 <a:solidFill>
@@ -4651,7 +4745,7 @@
                   <a:srgbClr val="5A6A7A"/>
                 </a:solidFill>
               </a:rPr>
-              <a:t>Full results table — rows: graph size × region × data distribution; columns: mandatory selection strategy × route constructor × route improver. Each cell reports mean±std overflows and mean±std kg/km.</a:t>
+              <a:t>Full results table — rows: graph size × region × data distribution; columns: partitioned by route improver (FTSP, CLS), one partial table per value; each partial table then grouped by mandatory selection strategy × route constructor. Each cell reports mean±std overflows and mean±std kg/km.</a:t>
             </a:r>
           </a:p>
         </p:txBody>
@@ -5537,8 +5631,8 @@
         </p:nvSpPr>
         <p:spPr>
           <a:xfrm>
-            <a:off x="548640" y="3794760"/>
-            <a:ext cx="11094415" cy="2697480"/>
+            <a:off x="548640" y="4114800"/>
+            <a:ext cx="11094415" cy="2377440"/>
           </a:xfrm>
           <a:prstGeom prst="rect">
             <a:avLst/>
@@ -6232,8 +6326,8 @@
         </p:nvSpPr>
         <p:spPr>
           <a:xfrm>
-            <a:off x="548640" y="5486400"/>
-            <a:ext cx="11094415" cy="1005840"/>
+            <a:off x="548640" y="5806440"/>
+            <a:ext cx="11094415" cy="685800"/>
           </a:xfrm>
           <a:prstGeom prst="rect">
             <a:avLst/>
@@ -6464,8 +6558,8 @@
         </p:nvSpPr>
         <p:spPr>
           <a:xfrm>
-            <a:off x="548640" y="4480560"/>
-            <a:ext cx="11094415" cy="2011680"/>
+            <a:off x="548640" y="4800600"/>
+            <a:ext cx="11094415" cy="1691640"/>
           </a:xfrm>
           <a:prstGeom prst="rect">
             <a:avLst/>
@@ -6711,8 +6805,8 @@
         </p:nvSpPr>
         <p:spPr>
           <a:xfrm>
-            <a:off x="548640" y="3108960"/>
-            <a:ext cx="11094415" cy="3383280"/>
+            <a:off x="548640" y="3429000"/>
+            <a:ext cx="11094415" cy="3063240"/>
           </a:xfrm>
           <a:prstGeom prst="rect">
             <a:avLst/>
@@ -6973,8 +7067,8 @@
         </p:nvSpPr>
         <p:spPr>
           <a:xfrm>
-            <a:off x="548640" y="3794760"/>
-            <a:ext cx="11094415" cy="2697480"/>
+            <a:off x="548640" y="4114800"/>
+            <a:ext cx="11094415" cy="2377440"/>
           </a:xfrm>
           <a:prstGeom prst="rect">
             <a:avLst/>
@@ -7235,8 +7329,8 @@
         </p:nvSpPr>
         <p:spPr>
           <a:xfrm>
-            <a:off x="548640" y="3108960"/>
-            <a:ext cx="11094415" cy="3383280"/>
+            <a:off x="548640" y="3429000"/>
+            <a:ext cx="11094415" cy="3063240"/>
           </a:xfrm>
           <a:prstGeom prst="rect">
             <a:avLst/>
@@ -7497,8 +7591,8 @@
         </p:nvSpPr>
         <p:spPr>
           <a:xfrm>
-            <a:off x="548640" y="3794760"/>
-            <a:ext cx="11094415" cy="2697480"/>
+            <a:off x="548640" y="4114800"/>
+            <a:ext cx="11094415" cy="2377440"/>
           </a:xfrm>
           <a:prstGeom prst="rect">
             <a:avLst/>

--- a/assets/windows/wsmart_route_results.pptx
+++ b/assets/windows/wsmart_route_results.pptx
@@ -24,6 +24,7 @@
     <p:sldId id="272" r:id="rId23"/>
     <p:sldId id="273" r:id="rId24"/>
     <p:sldId id="274" r:id="rId25"/>
+    <p:sldId id="275" r:id="rId26"/>
   </p:sldIdLst>
   <p:sldSz cx="12191695" cy="6858000" type="screen4x3"/>
   <p:notesSz cx="6858000" cy="9144000"/>
@@ -3157,8 +3158,8 @@
         </p:nvSpPr>
         <p:spPr>
           <a:xfrm>
-            <a:off x="0" y="4114800"/>
-            <a:ext cx="12191695" cy="73152"/>
+            <a:off x="0" y="3794760"/>
+            <a:ext cx="12191695" cy="54864"/>
           </a:xfrm>
           <a:prstGeom prst="rect">
             <a:avLst/>
@@ -3200,8 +3201,8 @@
         </p:nvSpPr>
         <p:spPr>
           <a:xfrm>
-            <a:off x="822960" y="1920240"/>
-            <a:ext cx="10545775" cy="2011680"/>
+            <a:off x="822960" y="1051560"/>
+            <a:ext cx="10545775" cy="2606040"/>
           </a:xfrm>
           <a:prstGeom prst="rect">
             <a:avLst/>
@@ -3215,19 +3216,22 @@
           <a:lstStyle/>
           <a:p>
             <a:pPr>
-              <a:defRPr sz="3600" b="1">
+              <a:defRPr sz="2600" b="1">
                 <a:solidFill>
                   <a:srgbClr val="FFFFFF"/>
                 </a:solidFill>
               </a:defRPr>
             </a:pPr>
             <a:r>
-              <a:t>WSmart+ Route — Adaptive Routing Policies for Smart Waste Collection</a:t>
+              <a:t>A Simulation Framework for the Multi-Period Vehicle Routing Problem with Profits in Smart Waste Collection</a:t>
             </a:r>
           </a:p>
           <a:p>
             <a:pPr>
-              <a:defRPr sz="2000">
+              <a:spcBef>
+                <a:spcPts val="1000"/>
+              </a:spcBef>
+              <a:defRPr sz="1700">
                 <a:solidFill>
                   <a:srgbClr val="C9D6E4"/>
                 </a:solidFill>
@@ -3247,8 +3251,8 @@
         </p:nvSpPr>
         <p:spPr>
           <a:xfrm>
-            <a:off x="822960" y="4434840"/>
-            <a:ext cx="10545775" cy="2011680"/>
+            <a:off x="822960" y="4023360"/>
+            <a:ext cx="10545775" cy="2743200"/>
           </a:xfrm>
           <a:prstGeom prst="rect">
             <a:avLst/>
@@ -3262,14 +3266,44 @@
           <a:lstStyle/>
           <a:p>
             <a:pPr>
-              <a:defRPr sz="2200" b="1">
+              <a:defRPr sz="1900" b="1">
                 <a:solidFill>
                   <a:srgbClr val="FFFFFF"/>
                 </a:solidFill>
               </a:defRPr>
             </a:pPr>
             <a:r>
-              <a:t>Afonso Fernandes</a:t>
+              <a:t>Afonso Cruz Fernandes¹</a:t>
+            </a:r>
+          </a:p>
+          <a:p>
+            <a:pPr>
+              <a:spcBef>
+                <a:spcPts val="600"/>
+              </a:spcBef>
+              <a:defRPr sz="1400">
+                <a:solidFill>
+                  <a:srgbClr val="C9D6E4"/>
+                </a:solidFill>
+              </a:defRPr>
+            </a:pPr>
+            <a:r>
+              <a:t>with Héctor Bonilla-Londoño², Diana Jorge², Manuel Lopes¹, Pedro A. Santos¹, Tânia Ramos²</a:t>
+            </a:r>
+          </a:p>
+          <a:p>
+            <a:pPr>
+              <a:spcBef>
+                <a:spcPts val="1000"/>
+              </a:spcBef>
+              <a:defRPr sz="1100" i="1">
+                <a:solidFill>
+                  <a:srgbClr val="8A9BB0"/>
+                </a:solidFill>
+              </a:defRPr>
+            </a:pPr>
+            <a:r>
+              <a:t>¹ INESC-ID, Instituto Superior Técnico, University of Lisbon   ·   ² CEGIST, Instituto Superior Técnico, University of Lisbon</a:t>
             </a:r>
           </a:p>
         </p:txBody>
@@ -3339,7 +3373,7 @@
               </a:defRPr>
             </a:pPr>
             <a:r>
-              <a:t>Neighborhood Search — SANS &amp; PG-CLNS</a:t>
+              <a:t>Route Improvers: Classical Local Search vs Fast-TSP</a:t>
             </a:r>
           </a:p>
         </p:txBody>
@@ -3353,7 +3387,7 @@
         <p:spPr>
           <a:xfrm>
             <a:off x="548640" y="1143000"/>
-            <a:ext cx="11094415" cy="2057400"/>
+            <a:ext cx="5730087" cy="1499616"/>
           </a:xfrm>
           <a:prstGeom prst="roundRect">
             <a:avLst/>
@@ -3388,9 +3422,660 @@
           </a:p>
         </p:txBody>
       </p:sp>
+      <p:sp>
+        <p:nvSpPr>
+          <p:cNvPr id="4" name="TextBox 3"/>
+          <p:cNvSpPr txBox="1"/>
+          <p:nvPr/>
+        </p:nvSpPr>
+        <p:spPr>
+          <a:xfrm>
+            <a:off x="731520" y="1234440"/>
+            <a:ext cx="5364327" cy="1316736"/>
+          </a:xfrm>
+          <a:prstGeom prst="rect">
+            <a:avLst/>
+          </a:prstGeom>
+          <a:noFill/>
+        </p:spPr>
+        <p:txBody>
+          <a:bodyPr wrap="square">
+            <a:spAutoFit/>
+          </a:bodyPr>
+          <a:lstStyle/>
+          <a:p>
+            <a:pPr algn="ctr">
+              <a:defRPr sz="1500">
+                <a:solidFill>
+                  <a:srgbClr val="1F2D3D"/>
+                </a:solidFill>
+              </a:defRPr>
+            </a:pPr>
+            <mc:AlternateContent xmlns:mc="http://schemas.openxmlformats.org/markup-compatibility/2006" xmlns:a14="http://schemas.microsoft.com/office/drawing/2010/main" xmlns:m="http://schemas.openxmlformats.org/officeDocument/2006/math">
+              <mc:Choice Requires="a14">
+                <a14:m>
+                  <m:oMathPara>
+                    <m:oMath xmlns:w="http://schemas.openxmlformats.org/wordprocessingml/2006/main" xmlns:o="urn:schemas-microsoft-com:office:office" xmlns:v="urn:schemas-microsoft-com:vml" xmlns:w10="urn:schemas-microsoft-com:office:word" xmlns:pic="http://schemas.openxmlformats.org/drawingml/2006/picture" xmlns:wp="http://schemas.openxmlformats.org/drawingml/2006/wordprocessingDrawing">
+                      <m:r>
+                        <m:rPr>
+                          <m:sty m:val="b"/>
+                        </m:rPr>
+                        <m:t>2</m:t>
+                      </m:r>
+                      <m:r>
+                        <m:rPr>
+                          <m:sty m:val="p"/>
+                        </m:rPr>
+                        <m:t>−</m:t>
+                      </m:r>
+                      <m:r>
+                        <m:rPr>
+                          <m:sty m:val="b"/>
+                        </m:rPr>
+                        <m:t>o</m:t>
+                      </m:r>
+                      <m:r>
+                        <m:rPr>
+                          <m:sty m:val="b"/>
+                        </m:rPr>
+                        <m:t>p</m:t>
+                      </m:r>
+                      <m:r>
+                        <m:rPr>
+                          <m:sty m:val="b"/>
+                        </m:rPr>
+                        <m:t>t</m:t>
+                      </m:r>
+                      <m:r>
+                        <m:rPr>
+                          <m:sty m:val="b"/>
+                        </m:rPr>
+                        <m:t>:</m:t>
+                      </m:r>
+                      <m:r>
+                        <m:t> </m:t>
+                      </m:r>
+                      <m:r>
+                        <m:t> </m:t>
+                      </m:r>
+                      <m:r>
+                        <m:rPr>
+                          <m:sty m:val="p"/>
+                        </m:rPr>
+                        <m:t>Δ</m:t>
+                      </m:r>
+                      <m:r>
+                        <m:rPr>
+                          <m:sty m:val="p"/>
+                        </m:rPr>
+                        <m:t>=</m:t>
+                      </m:r>
+                      <m:sSub>
+                        <m:e>
+                          <m:r>
+                            <m:t>d</m:t>
+                          </m:r>
+                        </m:e>
+                        <m:sub>
+                          <m:r>
+                            <m:t>i</m:t>
+                          </m:r>
+                          <m:r>
+                            <m:rPr>
+                              <m:sty m:val="p"/>
+                            </m:rPr>
+                            <m:t>,</m:t>
+                          </m:r>
+                          <m:r>
+                            <m:t>i</m:t>
+                          </m:r>
+                          <m:r>
+                            <m:rPr>
+                              <m:sty m:val="p"/>
+                            </m:rPr>
+                            <m:t>+</m:t>
+                          </m:r>
+                          <m:r>
+                            <m:t>1</m:t>
+                          </m:r>
+                        </m:sub>
+                      </m:sSub>
+                      <m:r>
+                        <m:rPr>
+                          <m:sty m:val="p"/>
+                        </m:rPr>
+                        <m:t>+</m:t>
+                      </m:r>
+                      <m:sSub>
+                        <m:e>
+                          <m:r>
+                            <m:t>d</m:t>
+                          </m:r>
+                        </m:e>
+                        <m:sub>
+                          <m:r>
+                            <m:t>j</m:t>
+                          </m:r>
+                          <m:r>
+                            <m:rPr>
+                              <m:sty m:val="p"/>
+                            </m:rPr>
+                            <m:t>,</m:t>
+                          </m:r>
+                          <m:r>
+                            <m:t>j</m:t>
+                          </m:r>
+                          <m:r>
+                            <m:rPr>
+                              <m:sty m:val="p"/>
+                            </m:rPr>
+                            <m:t>+</m:t>
+                          </m:r>
+                          <m:r>
+                            <m:t>1</m:t>
+                          </m:r>
+                        </m:sub>
+                      </m:sSub>
+                      <m:r>
+                        <m:rPr>
+                          <m:sty m:val="p"/>
+                        </m:rPr>
+                        <m:t>−</m:t>
+                      </m:r>
+                      <m:sSub>
+                        <m:e>
+                          <m:r>
+                            <m:t>d</m:t>
+                          </m:r>
+                        </m:e>
+                        <m:sub>
+                          <m:r>
+                            <m:t>i</m:t>
+                          </m:r>
+                          <m:r>
+                            <m:rPr>
+                              <m:sty m:val="p"/>
+                            </m:rPr>
+                            <m:t>,</m:t>
+                          </m:r>
+                          <m:r>
+                            <m:t>j</m:t>
+                          </m:r>
+                        </m:sub>
+                      </m:sSub>
+                      <m:r>
+                        <m:rPr>
+                          <m:sty m:val="p"/>
+                        </m:rPr>
+                        <m:t>−</m:t>
+                      </m:r>
+                      <m:sSub>
+                        <m:e>
+                          <m:r>
+                            <m:t>d</m:t>
+                          </m:r>
+                        </m:e>
+                        <m:sub>
+                          <m:r>
+                            <m:t>i</m:t>
+                          </m:r>
+                          <m:r>
+                            <m:rPr>
+                              <m:sty m:val="p"/>
+                            </m:rPr>
+                            <m:t>+</m:t>
+                          </m:r>
+                          <m:r>
+                            <m:t>1</m:t>
+                          </m:r>
+                          <m:r>
+                            <m:rPr>
+                              <m:sty m:val="p"/>
+                            </m:rPr>
+                            <m:t>,</m:t>
+                          </m:r>
+                          <m:r>
+                            <m:t>j</m:t>
+                          </m:r>
+                          <m:r>
+                            <m:rPr>
+                              <m:sty m:val="p"/>
+                            </m:rPr>
+                            <m:t>+</m:t>
+                          </m:r>
+                          <m:r>
+                            <m:t>1</m:t>
+                          </m:r>
+                        </m:sub>
+                      </m:sSub>
+                      <m:r>
+                        <m:rPr>
+                          <m:sty m:val="p"/>
+                        </m:rPr>
+                        <m:t>&lt;</m:t>
+                      </m:r>
+                      <m:r>
+                        <m:t>0</m:t>
+                      </m:r>
+                      <m:r>
+                        <m:t> </m:t>
+                      </m:r>
+                      <m:r>
+                        <m:rPr>
+                          <m:sty m:val="p"/>
+                        </m:rPr>
+                        <m:t>⇒</m:t>
+                      </m:r>
+                      <m:r>
+                        <m:t> </m:t>
+                      </m:r>
+                      <m:r>
+                        <m:rPr>
+                          <m:sty m:val="p"/>
+                        </m:rPr>
+                        <m:t>a</m:t>
+                      </m:r>
+                      <m:r>
+                        <m:rPr>
+                          <m:sty m:val="p"/>
+                        </m:rPr>
+                        <m:t>p</m:t>
+                      </m:r>
+                      <m:r>
+                        <m:rPr>
+                          <m:sty m:val="p"/>
+                        </m:rPr>
+                        <m:t>p</m:t>
+                      </m:r>
+                      <m:r>
+                        <m:rPr>
+                          <m:sty m:val="p"/>
+                        </m:rPr>
+                        <m:t>l</m:t>
+                      </m:r>
+                      <m:r>
+                        <m:rPr>
+                          <m:sty m:val="p"/>
+                        </m:rPr>
+                        <m:t>y</m:t>
+                      </m:r>
+                    </m:oMath>
+                  </m:oMathPara>
+                </a14:m>
+              </mc:Choice>
+              <mc:Fallback>
+                <a:r>
+                  <a:rPr lang="en-US" sz="1500">
+                    <a:solidFill>
+                      <a:srgbClr val="1F2D3D"/>
+                    </a:solidFill>
+                  </a:rPr>
+                  <a:t>2-opt: Delta = d_i,i+1 + d_j,j+1 - d_i,j - d_i+1,j+1 &lt; 0 Rightarrow apply</a:t>
+                </a:r>
+              </mc:Fallback>
+            </mc:AlternateContent>
+          </a:p>
+          <a:p>
+            <a:pPr algn="ctr">
+              <a:defRPr sz="1500">
+                <a:solidFill>
+                  <a:srgbClr val="1F2D3D"/>
+                </a:solidFill>
+              </a:defRPr>
+            </a:pPr>
+            <mc:AlternateContent xmlns:mc="http://schemas.openxmlformats.org/markup-compatibility/2006" xmlns:a14="http://schemas.microsoft.com/office/drawing/2010/main" xmlns:m="http://schemas.openxmlformats.org/officeDocument/2006/math">
+              <mc:Choice Requires="a14">
+                <a14:m>
+                  <m:oMathPara>
+                    <m:oMath xmlns:w="http://schemas.openxmlformats.org/wordprocessingml/2006/main" xmlns:o="urn:schemas-microsoft-com:office:office" xmlns:v="urn:schemas-microsoft-com:vml" xmlns:w10="urn:schemas-microsoft-com:office:word" xmlns:pic="http://schemas.openxmlformats.org/drawingml/2006/picture" xmlns:wp="http://schemas.openxmlformats.org/drawingml/2006/wordprocessingDrawing">
+                      <m:r>
+                        <m:rPr>
+                          <m:sty m:val="b"/>
+                        </m:rPr>
+                        <m:t>F</m:t>
+                      </m:r>
+                      <m:r>
+                        <m:rPr>
+                          <m:sty m:val="b"/>
+                        </m:rPr>
+                        <m:t>T</m:t>
+                      </m:r>
+                      <m:r>
+                        <m:rPr>
+                          <m:sty m:val="b"/>
+                        </m:rPr>
+                        <m:t>S</m:t>
+                      </m:r>
+                      <m:r>
+                        <m:rPr>
+                          <m:sty m:val="b"/>
+                        </m:rPr>
+                        <m:t>P</m:t>
+                      </m:r>
+                      <m:r>
+                        <m:rPr>
+                          <m:sty m:val="b"/>
+                        </m:rPr>
+                        <m:t>:</m:t>
+                      </m:r>
+                      <m:r>
+                        <m:t> </m:t>
+                      </m:r>
+                      <m:r>
+                        <m:t> </m:t>
+                      </m:r>
+                      <m:limLow>
+                        <m:e>
+                          <m:r>
+                            <m:rPr>
+                              <m:sty m:val="p"/>
+                            </m:rPr>
+                            <m:t>min</m:t>
+                          </m:r>
+                        </m:e>
+                        <m:lim>
+                          <m:r>
+                            <m:t>π</m:t>
+                          </m:r>
+                        </m:lim>
+                      </m:limLow>
+                      <m:nary>
+                        <m:naryPr>
+                          <m:chr m:val="∑"/>
+                          <m:limLoc m:val="undOvr"/>
+                          <m:subHide m:val="off"/>
+                          <m:supHide m:val="on"/>
+                        </m:naryPr>
+                        <m:sub>
+                          <m:r>
+                            <m:t>k</m:t>
+                          </m:r>
+                        </m:sub>
+                        <m:sup>
+                          <m:r>
+                            <m:t>​</m:t>
+                          </m:r>
+                        </m:sup>
+                        <m:e>
+                          <m:sSub>
+                            <m:e>
+                              <m:r>
+                                <m:t>d</m:t>
+                              </m:r>
+                            </m:e>
+                            <m:sub>
+                              <m:r>
+                                <m:t>π</m:t>
+                              </m:r>
+                              <m:r>
+                                <m:rPr>
+                                  <m:sty m:val="p"/>
+                                </m:rPr>
+                                <m:t>(</m:t>
+                              </m:r>
+                              <m:r>
+                                <m:t>k</m:t>
+                              </m:r>
+                              <m:r>
+                                <m:rPr>
+                                  <m:sty m:val="p"/>
+                                </m:rPr>
+                                <m:t>)</m:t>
+                              </m:r>
+                              <m:r>
+                                <m:rPr>
+                                  <m:sty m:val="p"/>
+                                </m:rPr>
+                                <m:t>,</m:t>
+                              </m:r>
+                              <m:r>
+                                <m:t>π</m:t>
+                              </m:r>
+                              <m:r>
+                                <m:rPr>
+                                  <m:sty m:val="p"/>
+                                </m:rPr>
+                                <m:t>(</m:t>
+                              </m:r>
+                              <m:r>
+                                <m:t>k</m:t>
+                              </m:r>
+                              <m:r>
+                                <m:rPr>
+                                  <m:sty m:val="p"/>
+                                </m:rPr>
+                                <m:t>+</m:t>
+                              </m:r>
+                              <m:r>
+                                <m:t>1</m:t>
+                              </m:r>
+                              <m:r>
+                                <m:rPr>
+                                  <m:sty m:val="p"/>
+                                </m:rPr>
+                                <m:t>)</m:t>
+                              </m:r>
+                            </m:sub>
+                          </m:sSub>
+                        </m:e>
+                      </m:nary>
+                      <m:r>
+                        <m:t> </m:t>
+                      </m:r>
+                      <m:r>
+                        <m:rPr>
+                          <m:sty m:val="p"/>
+                        </m:rPr>
+                        <m:t>(</m:t>
+                      </m:r>
+                      <m:r>
+                        <m:rPr>
+                          <m:sty m:val="p"/>
+                        </m:rPr>
+                        <m:t>S</m:t>
+                      </m:r>
+                      <m:r>
+                        <m:rPr>
+                          <m:sty m:val="p"/>
+                        </m:rPr>
+                        <m:t>L</m:t>
+                      </m:r>
+                      <m:r>
+                        <m:rPr>
+                          <m:sty m:val="p"/>
+                        </m:rPr>
+                        <m:t>S</m:t>
+                      </m:r>
+                      <m:r>
+                        <m:rPr>
+                          <m:sty m:val="p"/>
+                        </m:rPr>
+                        <m:t> </m:t>
+                      </m:r>
+                      <m:r>
+                        <m:rPr>
+                          <m:sty m:val="p"/>
+                        </m:rPr>
+                        <m:t>f</m:t>
+                      </m:r>
+                      <m:r>
+                        <m:rPr>
+                          <m:sty m:val="p"/>
+                        </m:rPr>
+                        <m:t>o</m:t>
+                      </m:r>
+                      <m:r>
+                        <m:rPr>
+                          <m:sty m:val="p"/>
+                        </m:rPr>
+                        <m:t>r</m:t>
+                      </m:r>
+                      <m:r>
+                        <m:t> </m:t>
+                      </m:r>
+                      <m:r>
+                        <m:t>N</m:t>
+                      </m:r>
+                      <m:r>
+                        <m:rPr>
+                          <m:sty m:val="p"/>
+                        </m:rPr>
+                        <m:t>&gt;</m:t>
+                      </m:r>
+                      <m:r>
+                        <m:t>20</m:t>
+                      </m:r>
+                      <m:r>
+                        <m:rPr>
+                          <m:sty m:val="p"/>
+                        </m:rPr>
+                        <m:t>)</m:t>
+                      </m:r>
+                    </m:oMath>
+                  </m:oMathPara>
+                </a14:m>
+              </mc:Choice>
+              <mc:Fallback>
+                <a:r>
+                  <a:rPr lang="en-US" sz="1500">
+                    <a:solidFill>
+                      <a:srgbClr val="1F2D3D"/>
+                    </a:solidFill>
+                  </a:rPr>
+                  <a:t>FTSP: min_pi sum_k d_pi(k), pi(k+1) quad (SLS for N &gt; 20)</a:t>
+                </a:r>
+              </mc:Fallback>
+            </mc:AlternateContent>
+          </a:p>
+        </p:txBody>
+      </p:sp>
+      <p:sp>
+        <p:nvSpPr>
+          <p:cNvPr id="5" name="TextBox 4"/>
+          <p:cNvSpPr txBox="1"/>
+          <p:nvPr/>
+        </p:nvSpPr>
+        <p:spPr>
+          <a:xfrm>
+            <a:off x="548640" y="2825496"/>
+            <a:ext cx="5730087" cy="822960"/>
+          </a:xfrm>
+          <a:prstGeom prst="rect">
+            <a:avLst/>
+          </a:prstGeom>
+          <a:noFill/>
+        </p:spPr>
+        <p:txBody>
+          <a:bodyPr wrap="square">
+            <a:spAutoFit/>
+          </a:bodyPr>
+          <a:lstStyle/>
+          <a:p>
+            <a:r>
+              <a:rPr b="1" sz="1100">
+                <a:solidFill>
+                  <a:srgbClr val="1F2D3D"/>
+                </a:solidFill>
+              </a:rPr>
+              <a:t>Equation 5: </a:t>
+            </a:r>
+            <a:r>
+              <a:rPr i="1" sz="1100">
+                <a:solidFill>
+                  <a:srgbClr val="5A6A7A"/>
+                </a:solidFill>
+              </a:rPr>
+              <a:t>2-opt accepts an edge swap whenever the resulting distance change Δ is negative. Fast-TSP reorders each route's visiting sequence π to minimise total distance — solved exactly for small routes and via Stochastic Local Search (SLS) once N exceeds 20 stops.</a:t>
+            </a:r>
+          </a:p>
+        </p:txBody>
+      </p:sp>
+      <p:sp>
+        <p:nvSpPr>
+          <p:cNvPr id="6" name="TextBox 5"/>
+          <p:cNvSpPr txBox="1"/>
+          <p:nvPr/>
+        </p:nvSpPr>
+        <p:spPr>
+          <a:xfrm>
+            <a:off x="548640" y="3602736"/>
+            <a:ext cx="5730087" cy="2889504"/>
+          </a:xfrm>
+          <a:prstGeom prst="rect">
+            <a:avLst/>
+          </a:prstGeom>
+          <a:noFill/>
+        </p:spPr>
+        <p:txBody>
+          <a:bodyPr wrap="square">
+            <a:spAutoFit/>
+          </a:bodyPr>
+          <a:lstStyle/>
+          <a:p>
+            <a:pPr>
+              <a:spcAft>
+                <a:spcPts val="1000"/>
+              </a:spcAft>
+              <a:defRPr sz="1300">
+                <a:solidFill>
+                  <a:srgbClr val="1F2D3D"/>
+                </a:solidFill>
+              </a:defRPr>
+            </a:pPr>
+            <a:r>
+              <a:t>•  Optional, constructor-agnostic post-optimisation of each constructed route</a:t>
+            </a:r>
+          </a:p>
+          <a:p>
+            <a:pPr>
+              <a:spcAft>
+                <a:spcPts val="1000"/>
+              </a:spcAft>
+              <a:defRPr sz="1300">
+                <a:solidFill>
+                  <a:srgbClr val="1F2D3D"/>
+                </a:solidFill>
+              </a:defRPr>
+            </a:pPr>
+            <a:r>
+              <a:t>•  CLS: exhaustive intra/inter-route neighbourhoods (2-opt, or-opt, swap, relocate) to a local optimum — best kg/km polish</a:t>
+            </a:r>
+          </a:p>
+          <a:p>
+            <a:pPr>
+              <a:spcAft>
+                <a:spcPts val="1000"/>
+              </a:spcAft>
+              <a:defRPr sz="1300">
+                <a:solidFill>
+                  <a:srgbClr val="1F2D3D"/>
+                </a:solidFill>
+              </a:defRPr>
+            </a:pPr>
+            <a:r>
+              <a:t>•  Fast-TSP: reorders each route as a TSP — exact for small routes, Stochastic Local Search (SLS) under the hood for graphs with more than 20 nodes</a:t>
+            </a:r>
+          </a:p>
+          <a:p>
+            <a:pPr>
+              <a:spcAft>
+                <a:spcPts val="1000"/>
+              </a:spcAft>
+              <a:defRPr sz="1300">
+                <a:solidFill>
+                  <a:srgbClr val="1F2D3D"/>
+                </a:solidFill>
+              </a:defRPr>
+            </a:pPr>
+            <a:r>
+              <a:t>•  Improver choice is a second-order effect: selection strategy and constructor dominate the KPI outcomes</a:t>
+            </a:r>
+          </a:p>
+        </p:txBody>
+      </p:sp>
       <p:pic>
         <p:nvPicPr>
-          <p:cNvPr id="4" name="Picture 3" descr="eq_7.png"/>
+          <p:cNvPr id="7" name="Picture 6" descr="improver_delta.png"/>
           <p:cNvPicPr>
             <a:picLocks noChangeAspect="1"/>
           </p:cNvPicPr>
@@ -3404,138 +4089,14 @@
         </p:blipFill>
         <p:spPr>
           <a:xfrm>
-            <a:off x="1896835" y="1234440"/>
-            <a:ext cx="8398025" cy="1874520"/>
+            <a:off x="6278727" y="2761474"/>
+            <a:ext cx="5364327" cy="1975132"/>
           </a:xfrm>
           <a:prstGeom prst="rect">
             <a:avLst/>
           </a:prstGeom>
         </p:spPr>
       </p:pic>
-      <p:sp>
-        <p:nvSpPr>
-          <p:cNvPr id="5" name="TextBox 4"/>
-          <p:cNvSpPr txBox="1"/>
-          <p:nvPr/>
-        </p:nvSpPr>
-        <p:spPr>
-          <a:xfrm>
-            <a:off x="548640" y="3429000"/>
-            <a:ext cx="11094415" cy="548640"/>
-          </a:xfrm>
-          <a:prstGeom prst="rect">
-            <a:avLst/>
-          </a:prstGeom>
-          <a:noFill/>
-        </p:spPr>
-        <p:txBody>
-          <a:bodyPr wrap="square">
-            <a:spAutoFit/>
-          </a:bodyPr>
-          <a:lstStyle/>
-          <a:p>
-            <a:r>
-              <a:rPr b="1" sz="1100">
-                <a:solidFill>
-                  <a:srgbClr val="1F2D3D"/>
-                </a:solidFill>
-              </a:rPr>
-              <a:t>Equation 7: </a:t>
-            </a:r>
-            <a:r>
-              <a:rPr i="1" sz="1100">
-                <a:solidFill>
-                  <a:srgbClr val="5A6A7A"/>
-                </a:solidFill>
-              </a:rPr>
-              <a:t>Simulated annealing accepts a worsening move with probability e^(−Δ/T_t), cooling temperature T by factor γ each iteration. PG-CLNS learns its destroy/repair operator choice o via the policy-gradient estimator ∇_θJ, using state s (fill levels, geography) and observed reward R.</a:t>
-            </a:r>
-          </a:p>
-        </p:txBody>
-      </p:sp>
-      <p:sp>
-        <p:nvSpPr>
-          <p:cNvPr id="6" name="TextBox 5"/>
-          <p:cNvSpPr txBox="1"/>
-          <p:nvPr/>
-        </p:nvSpPr>
-        <p:spPr>
-          <a:xfrm>
-            <a:off x="548640" y="4114800"/>
-            <a:ext cx="11094415" cy="2377440"/>
-          </a:xfrm>
-          <a:prstGeom prst="rect">
-            <a:avLst/>
-          </a:prstGeom>
-          <a:noFill/>
-        </p:spPr>
-        <p:txBody>
-          <a:bodyPr wrap="square">
-            <a:spAutoFit/>
-          </a:bodyPr>
-          <a:lstStyle/>
-          <a:p>
-            <a:pPr>
-              <a:spcAft>
-                <a:spcPts val="1000"/>
-              </a:spcAft>
-              <a:defRPr sz="1400">
-                <a:solidFill>
-                  <a:srgbClr val="1F2D3D"/>
-                </a:solidFill>
-              </a:defRPr>
-            </a:pPr>
-            <a:r>
-              <a:t>•  Trajectory-based: iteratively perturb the incumbent through neighbourhood moves</a:t>
-            </a:r>
-          </a:p>
-          <a:p>
-            <a:pPr>
-              <a:spcAft>
-                <a:spcPts val="1000"/>
-              </a:spcAft>
-              <a:defRPr sz="1400">
-                <a:solidFill>
-                  <a:srgbClr val="1F2D3D"/>
-                </a:solidFill>
-              </a:defRPr>
-            </a:pPr>
-            <a:r>
-              <a:t>•  SANS: simulated annealing accepts worsening moves with probability e^(−Δ/T); cooling shifts exploration → exploitation</a:t>
-            </a:r>
-          </a:p>
-          <a:p>
-            <a:pPr>
-              <a:spcAft>
-                <a:spcPts val="1000"/>
-              </a:spcAft>
-              <a:defRPr sz="1400">
-                <a:solidFill>
-                  <a:srgbClr val="1F2D3D"/>
-                </a:solidFill>
-              </a:defRPr>
-            </a:pPr>
-            <a:r>
-              <a:t>•  PG-CLNS: destroy-and-repair large-neighborhood search whose operator selection is learned online via policy gradients, adapting to instance context (fill levels, geography)</a:t>
-            </a:r>
-          </a:p>
-          <a:p>
-            <a:pPr>
-              <a:spcAft>
-                <a:spcPts val="1000"/>
-              </a:spcAft>
-              <a:defRPr sz="1400">
-                <a:solidFill>
-                  <a:srgbClr val="1F2D3D"/>
-                </a:solidFill>
-              </a:defRPr>
-            </a:pPr>
-            <a:r>
-              <a:t>•  PG-CLNS is a standout overflow performer: SL1 + PG-CLNS reaches the Pareto front with ~1 overflow / 30 days</a:t>
-            </a:r>
-          </a:p>
-        </p:txBody>
-      </p:sp>
     </p:spTree>
   </p:cSld>
   <p:clrMapOvr>
@@ -3601,7 +4162,7 @@
               </a:defRPr>
             </a:pPr>
             <a:r>
-              <a:t>Route Improvers: Classical Local Search vs Fast-TSP</a:t>
+              <a:t>Design of Experiments</a:t>
             </a:r>
           </a:p>
         </p:txBody>
@@ -3614,14 +4175,14 @@
         </p:nvSpPr>
         <p:spPr>
           <a:xfrm>
-            <a:off x="548640" y="1143000"/>
-            <a:ext cx="11094415" cy="2057400"/>
+            <a:off x="5090007" y="1143000"/>
+            <a:ext cx="2011680" cy="457200"/>
           </a:xfrm>
           <a:prstGeom prst="roundRect">
             <a:avLst/>
           </a:prstGeom>
           <a:solidFill>
-            <a:srgbClr val="F0F4FA"/>
+            <a:srgbClr val="1F2D3D"/>
           </a:solidFill>
           <a:ln>
             <a:noFill/>
@@ -3646,44 +4207,135 @@
           <a:bodyPr rtlCol="0" anchor="ctr"/>
           <a:lstStyle/>
           <a:p>
-            <a:pPr algn="ctr"/>
-          </a:p>
-        </p:txBody>
-      </p:sp>
-      <p:pic>
-        <p:nvPicPr>
-          <p:cNvPr id="4" name="Picture 3" descr="eq_8.png"/>
-          <p:cNvPicPr>
-            <a:picLocks noChangeAspect="1"/>
-          </p:cNvPicPr>
+            <a:pPr algn="ctr">
+              <a:defRPr sz="1500" b="1">
+                <a:solidFill>
+                  <a:srgbClr val="FFFFFF"/>
+                </a:solidFill>
+              </a:defRPr>
+            </a:pPr>
+            <a:r>
+              <a:t>Simulation Runs</a:t>
+            </a:r>
+          </a:p>
+        </p:txBody>
+      </p:sp>
+      <p:sp>
+        <p:nvSpPr>
+          <p:cNvPr id="4" name="Rounded Rectangle 3"/>
+          <p:cNvSpPr/>
           <p:nvPr/>
-        </p:nvPicPr>
-        <p:blipFill>
-          <a:blip r:embed="rId2"/>
-          <a:stretch>
-            <a:fillRect/>
-          </a:stretch>
-        </p:blipFill>
-        <p:spPr>
-          <a:xfrm>
-            <a:off x="1520168" y="1234440"/>
-            <a:ext cx="9151358" cy="1874520"/>
+        </p:nvSpPr>
+        <p:spPr>
+          <a:xfrm>
+            <a:off x="548640" y="1920240"/>
+            <a:ext cx="5364327" cy="548640"/>
+          </a:xfrm>
+          <a:prstGeom prst="roundRect">
+            <a:avLst/>
+          </a:prstGeom>
+          <a:solidFill>
+            <a:srgbClr val="2E74B5"/>
+          </a:solidFill>
+          <a:ln>
+            <a:noFill/>
+          </a:ln>
+          <a:effectLst/>
+        </p:spPr>
+        <p:style>
+          <a:lnRef idx="1">
+            <a:schemeClr val="accent1"/>
+          </a:lnRef>
+          <a:fillRef idx="3">
+            <a:schemeClr val="accent1"/>
+          </a:fillRef>
+          <a:effectRef idx="2">
+            <a:schemeClr val="accent1"/>
+          </a:effectRef>
+          <a:fontRef idx="minor">
+            <a:schemeClr val="lt1"/>
+          </a:fontRef>
+        </p:style>
+        <p:txBody>
+          <a:bodyPr rtlCol="0" anchor="ctr" wrap="square"/>
+          <a:lstStyle/>
+          <a:p>
+            <a:pPr algn="ctr">
+              <a:defRPr sz="1300" b="1">
+                <a:solidFill>
+                  <a:srgbClr val="FFFFFF"/>
+                </a:solidFill>
+              </a:defRPr>
+            </a:pPr>
+            <a:r>
+              <a:t>30 Days</a:t>
+            </a:r>
+          </a:p>
+        </p:txBody>
+      </p:sp>
+      <p:sp>
+        <p:nvSpPr>
+          <p:cNvPr id="5" name="Rectangle 4"/>
+          <p:cNvSpPr/>
+          <p:nvPr/>
+        </p:nvSpPr>
+        <p:spPr>
+          <a:xfrm>
+            <a:off x="548640" y="2743200"/>
+            <a:ext cx="1696669" cy="457200"/>
           </a:xfrm>
           <a:prstGeom prst="rect">
             <a:avLst/>
           </a:prstGeom>
-        </p:spPr>
-      </p:pic>
-      <p:sp>
-        <p:nvSpPr>
-          <p:cNvPr id="5" name="TextBox 4"/>
+          <a:solidFill>
+            <a:srgbClr val="5A6A7A"/>
+          </a:solidFill>
+          <a:ln>
+            <a:noFill/>
+          </a:ln>
+          <a:effectLst/>
+        </p:spPr>
+        <p:style>
+          <a:lnRef idx="1">
+            <a:schemeClr val="accent1"/>
+          </a:lnRef>
+          <a:fillRef idx="3">
+            <a:schemeClr val="accent1"/>
+          </a:fillRef>
+          <a:effectRef idx="2">
+            <a:schemeClr val="accent1"/>
+          </a:effectRef>
+          <a:fontRef idx="minor">
+            <a:schemeClr val="lt1"/>
+          </a:fontRef>
+        </p:style>
+        <p:txBody>
+          <a:bodyPr rtlCol="0" anchor="ctr"/>
+          <a:lstStyle/>
+          <a:p>
+            <a:pPr algn="ctr">
+              <a:defRPr sz="1100" b="1">
+                <a:solidFill>
+                  <a:srgbClr val="FFFFFF"/>
+                </a:solidFill>
+              </a:defRPr>
+            </a:pPr>
+            <a:r>
+              <a:t>RM-100</a:t>
+            </a:r>
+          </a:p>
+        </p:txBody>
+      </p:sp>
+      <p:sp>
+        <p:nvSpPr>
+          <p:cNvPr id="6" name="TextBox 5"/>
           <p:cNvSpPr txBox="1"/>
           <p:nvPr/>
         </p:nvSpPr>
         <p:spPr>
           <a:xfrm>
-            <a:off x="548640" y="3429000"/>
-            <a:ext cx="11094415" cy="548640"/>
+            <a:off x="548640" y="3291840"/>
+            <a:ext cx="1696669" cy="365760"/>
           </a:xfrm>
           <a:prstGeom prst="rect">
             <a:avLst/>
@@ -3696,35 +4348,575 @@
           </a:bodyPr>
           <a:lstStyle/>
           <a:p>
-            <a:r>
-              <a:rPr b="1" sz="1100">
+            <a:pPr algn="ctr">
+              <a:defRPr sz="1000">
                 <a:solidFill>
                   <a:srgbClr val="1F2D3D"/>
                 </a:solidFill>
-              </a:rPr>
-              <a:t>Equation 8: </a:t>
-            </a:r>
-            <a:r>
-              <a:rPr i="1" sz="1100">
-                <a:solidFill>
-                  <a:srgbClr val="5A6A7A"/>
-                </a:solidFill>
-              </a:rPr>
-              <a:t>2-opt accepts an edge swap whenever the resulting distance change Δ is negative. Fast-TSP reorders each route's visiting sequence π to minimise total distance — solved exactly for small routes and via Stochastic Local Search (SLS) once N exceeds 20 stops.</a:t>
-            </a:r>
-          </a:p>
-        </p:txBody>
-      </p:sp>
-      <p:sp>
-        <p:nvSpPr>
-          <p:cNvPr id="6" name="TextBox 5"/>
+              </a:defRPr>
+            </a:pPr>
+            <a:r>
+              <a:t>Empirical / Gamma-3</a:t>
+            </a:r>
+          </a:p>
+        </p:txBody>
+      </p:sp>
+      <p:sp>
+        <p:nvSpPr>
+          <p:cNvPr id="7" name="Rectangle 6"/>
+          <p:cNvSpPr/>
+          <p:nvPr/>
+        </p:nvSpPr>
+        <p:spPr>
+          <a:xfrm>
+            <a:off x="2382469" y="2743200"/>
+            <a:ext cx="1696669" cy="457200"/>
+          </a:xfrm>
+          <a:prstGeom prst="rect">
+            <a:avLst/>
+          </a:prstGeom>
+          <a:solidFill>
+            <a:srgbClr val="5A6A7A"/>
+          </a:solidFill>
+          <a:ln>
+            <a:noFill/>
+          </a:ln>
+          <a:effectLst/>
+        </p:spPr>
+        <p:style>
+          <a:lnRef idx="1">
+            <a:schemeClr val="accent1"/>
+          </a:lnRef>
+          <a:fillRef idx="3">
+            <a:schemeClr val="accent1"/>
+          </a:fillRef>
+          <a:effectRef idx="2">
+            <a:schemeClr val="accent1"/>
+          </a:effectRef>
+          <a:fontRef idx="minor">
+            <a:schemeClr val="lt1"/>
+          </a:fontRef>
+        </p:style>
+        <p:txBody>
+          <a:bodyPr rtlCol="0" anchor="ctr"/>
+          <a:lstStyle/>
+          <a:p>
+            <a:pPr algn="ctr">
+              <a:defRPr sz="1100" b="1">
+                <a:solidFill>
+                  <a:srgbClr val="FFFFFF"/>
+                </a:solidFill>
+              </a:defRPr>
+            </a:pPr>
+            <a:r>
+              <a:t>RM-170</a:t>
+            </a:r>
+          </a:p>
+        </p:txBody>
+      </p:sp>
+      <p:sp>
+        <p:nvSpPr>
+          <p:cNvPr id="8" name="TextBox 7"/>
           <p:cNvSpPr txBox="1"/>
           <p:nvPr/>
         </p:nvSpPr>
         <p:spPr>
           <a:xfrm>
-            <a:off x="548640" y="4114800"/>
-            <a:ext cx="11094415" cy="2377440"/>
+            <a:off x="2382469" y="3291840"/>
+            <a:ext cx="1696669" cy="365760"/>
+          </a:xfrm>
+          <a:prstGeom prst="rect">
+            <a:avLst/>
+          </a:prstGeom>
+          <a:noFill/>
+        </p:spPr>
+        <p:txBody>
+          <a:bodyPr wrap="square">
+            <a:spAutoFit/>
+          </a:bodyPr>
+          <a:lstStyle/>
+          <a:p>
+            <a:pPr algn="ctr">
+              <a:defRPr sz="1000">
+                <a:solidFill>
+                  <a:srgbClr val="1F2D3D"/>
+                </a:solidFill>
+              </a:defRPr>
+            </a:pPr>
+            <a:r>
+              <a:t>Empirical / Gamma-3</a:t>
+            </a:r>
+          </a:p>
+        </p:txBody>
+      </p:sp>
+      <p:sp>
+        <p:nvSpPr>
+          <p:cNvPr id="9" name="Rectangle 8"/>
+          <p:cNvSpPr/>
+          <p:nvPr/>
+        </p:nvSpPr>
+        <p:spPr>
+          <a:xfrm>
+            <a:off x="4216298" y="2743200"/>
+            <a:ext cx="1696669" cy="457200"/>
+          </a:xfrm>
+          <a:prstGeom prst="rect">
+            <a:avLst/>
+          </a:prstGeom>
+          <a:solidFill>
+            <a:srgbClr val="5A6A7A"/>
+          </a:solidFill>
+          <a:ln>
+            <a:noFill/>
+          </a:ln>
+          <a:effectLst/>
+        </p:spPr>
+        <p:style>
+          <a:lnRef idx="1">
+            <a:schemeClr val="accent1"/>
+          </a:lnRef>
+          <a:fillRef idx="3">
+            <a:schemeClr val="accent1"/>
+          </a:fillRef>
+          <a:effectRef idx="2">
+            <a:schemeClr val="accent1"/>
+          </a:effectRef>
+          <a:fontRef idx="minor">
+            <a:schemeClr val="lt1"/>
+          </a:fontRef>
+        </p:style>
+        <p:txBody>
+          <a:bodyPr rtlCol="0" anchor="ctr"/>
+          <a:lstStyle/>
+          <a:p>
+            <a:pPr algn="ctr">
+              <a:defRPr sz="1100" b="1">
+                <a:solidFill>
+                  <a:srgbClr val="FFFFFF"/>
+                </a:solidFill>
+              </a:defRPr>
+            </a:pPr>
+            <a:r>
+              <a:t>FFZ-350</a:t>
+            </a:r>
+          </a:p>
+        </p:txBody>
+      </p:sp>
+      <p:sp>
+        <p:nvSpPr>
+          <p:cNvPr id="10" name="TextBox 9"/>
+          <p:cNvSpPr txBox="1"/>
+          <p:nvPr/>
+        </p:nvSpPr>
+        <p:spPr>
+          <a:xfrm>
+            <a:off x="4216298" y="3291840"/>
+            <a:ext cx="1696669" cy="365760"/>
+          </a:xfrm>
+          <a:prstGeom prst="rect">
+            <a:avLst/>
+          </a:prstGeom>
+          <a:noFill/>
+        </p:spPr>
+        <p:txBody>
+          <a:bodyPr wrap="square">
+            <a:spAutoFit/>
+          </a:bodyPr>
+          <a:lstStyle/>
+          <a:p>
+            <a:pPr algn="ctr">
+              <a:defRPr sz="1000">
+                <a:solidFill>
+                  <a:srgbClr val="1F2D3D"/>
+                </a:solidFill>
+              </a:defRPr>
+            </a:pPr>
+            <a:r>
+              <a:t>Empirical / Gamma-3</a:t>
+            </a:r>
+          </a:p>
+        </p:txBody>
+      </p:sp>
+      <p:sp>
+        <p:nvSpPr>
+          <p:cNvPr id="11" name="Rounded Rectangle 10"/>
+          <p:cNvSpPr/>
+          <p:nvPr/>
+        </p:nvSpPr>
+        <p:spPr>
+          <a:xfrm>
+            <a:off x="6278727" y="1920240"/>
+            <a:ext cx="5364327" cy="548640"/>
+          </a:xfrm>
+          <a:prstGeom prst="roundRect">
+            <a:avLst/>
+          </a:prstGeom>
+          <a:solidFill>
+            <a:srgbClr val="2E74B5"/>
+          </a:solidFill>
+          <a:ln>
+            <a:noFill/>
+          </a:ln>
+          <a:effectLst/>
+        </p:spPr>
+        <p:style>
+          <a:lnRef idx="1">
+            <a:schemeClr val="accent1"/>
+          </a:lnRef>
+          <a:fillRef idx="3">
+            <a:schemeClr val="accent1"/>
+          </a:fillRef>
+          <a:effectRef idx="2">
+            <a:schemeClr val="accent1"/>
+          </a:effectRef>
+          <a:fontRef idx="minor">
+            <a:schemeClr val="lt1"/>
+          </a:fontRef>
+        </p:style>
+        <p:txBody>
+          <a:bodyPr rtlCol="0" anchor="ctr" wrap="square"/>
+          <a:lstStyle/>
+          <a:p>
+            <a:pPr algn="ctr">
+              <a:defRPr sz="1300" b="1">
+                <a:solidFill>
+                  <a:srgbClr val="FFFFFF"/>
+                </a:solidFill>
+              </a:defRPr>
+            </a:pPr>
+            <a:r>
+              <a:t>90 Days</a:t>
+            </a:r>
+          </a:p>
+          <a:p>
+            <a:pPr algn="ctr">
+              <a:defRPr sz="1300" b="1">
+                <a:solidFill>
+                  <a:srgbClr val="FFFFFF"/>
+                </a:solidFill>
+              </a:defRPr>
+            </a:pPr>
+            <a:r>
+              <a:t>(Pareto-front policies only)</a:t>
+            </a:r>
+          </a:p>
+        </p:txBody>
+      </p:sp>
+      <p:sp>
+        <p:nvSpPr>
+          <p:cNvPr id="12" name="Rectangle 11"/>
+          <p:cNvSpPr/>
+          <p:nvPr/>
+        </p:nvSpPr>
+        <p:spPr>
+          <a:xfrm>
+            <a:off x="6278727" y="2743200"/>
+            <a:ext cx="1696669" cy="457200"/>
+          </a:xfrm>
+          <a:prstGeom prst="rect">
+            <a:avLst/>
+          </a:prstGeom>
+          <a:solidFill>
+            <a:srgbClr val="5A6A7A"/>
+          </a:solidFill>
+          <a:ln>
+            <a:noFill/>
+          </a:ln>
+          <a:effectLst/>
+        </p:spPr>
+        <p:style>
+          <a:lnRef idx="1">
+            <a:schemeClr val="accent1"/>
+          </a:lnRef>
+          <a:fillRef idx="3">
+            <a:schemeClr val="accent1"/>
+          </a:fillRef>
+          <a:effectRef idx="2">
+            <a:schemeClr val="accent1"/>
+          </a:effectRef>
+          <a:fontRef idx="minor">
+            <a:schemeClr val="lt1"/>
+          </a:fontRef>
+        </p:style>
+        <p:txBody>
+          <a:bodyPr rtlCol="0" anchor="ctr"/>
+          <a:lstStyle/>
+          <a:p>
+            <a:pPr algn="ctr">
+              <a:defRPr sz="1100" b="1">
+                <a:solidFill>
+                  <a:srgbClr val="FFFFFF"/>
+                </a:solidFill>
+              </a:defRPr>
+            </a:pPr>
+            <a:r>
+              <a:t>RM-100</a:t>
+            </a:r>
+          </a:p>
+        </p:txBody>
+      </p:sp>
+      <p:sp>
+        <p:nvSpPr>
+          <p:cNvPr id="13" name="TextBox 12"/>
+          <p:cNvSpPr txBox="1"/>
+          <p:nvPr/>
+        </p:nvSpPr>
+        <p:spPr>
+          <a:xfrm>
+            <a:off x="6278727" y="3291840"/>
+            <a:ext cx="1696669" cy="365760"/>
+          </a:xfrm>
+          <a:prstGeom prst="rect">
+            <a:avLst/>
+          </a:prstGeom>
+          <a:noFill/>
+        </p:spPr>
+        <p:txBody>
+          <a:bodyPr wrap="square">
+            <a:spAutoFit/>
+          </a:bodyPr>
+          <a:lstStyle/>
+          <a:p>
+            <a:pPr algn="ctr">
+              <a:defRPr sz="1000">
+                <a:solidFill>
+                  <a:srgbClr val="1F2D3D"/>
+                </a:solidFill>
+              </a:defRPr>
+            </a:pPr>
+            <a:r>
+              <a:t>Empirical / Gamma-3</a:t>
+            </a:r>
+          </a:p>
+        </p:txBody>
+      </p:sp>
+      <p:sp>
+        <p:nvSpPr>
+          <p:cNvPr id="14" name="Rectangle 13"/>
+          <p:cNvSpPr/>
+          <p:nvPr/>
+        </p:nvSpPr>
+        <p:spPr>
+          <a:xfrm>
+            <a:off x="8112556" y="2743200"/>
+            <a:ext cx="1696669" cy="457200"/>
+          </a:xfrm>
+          <a:prstGeom prst="rect">
+            <a:avLst/>
+          </a:prstGeom>
+          <a:solidFill>
+            <a:srgbClr val="5A6A7A"/>
+          </a:solidFill>
+          <a:ln>
+            <a:noFill/>
+          </a:ln>
+          <a:effectLst/>
+        </p:spPr>
+        <p:style>
+          <a:lnRef idx="1">
+            <a:schemeClr val="accent1"/>
+          </a:lnRef>
+          <a:fillRef idx="3">
+            <a:schemeClr val="accent1"/>
+          </a:fillRef>
+          <a:effectRef idx="2">
+            <a:schemeClr val="accent1"/>
+          </a:effectRef>
+          <a:fontRef idx="minor">
+            <a:schemeClr val="lt1"/>
+          </a:fontRef>
+        </p:style>
+        <p:txBody>
+          <a:bodyPr rtlCol="0" anchor="ctr"/>
+          <a:lstStyle/>
+          <a:p>
+            <a:pPr algn="ctr">
+              <a:defRPr sz="1100" b="1">
+                <a:solidFill>
+                  <a:srgbClr val="FFFFFF"/>
+                </a:solidFill>
+              </a:defRPr>
+            </a:pPr>
+            <a:r>
+              <a:t>RM-170</a:t>
+            </a:r>
+          </a:p>
+        </p:txBody>
+      </p:sp>
+      <p:sp>
+        <p:nvSpPr>
+          <p:cNvPr id="15" name="TextBox 14"/>
+          <p:cNvSpPr txBox="1"/>
+          <p:nvPr/>
+        </p:nvSpPr>
+        <p:spPr>
+          <a:xfrm>
+            <a:off x="8112556" y="3291840"/>
+            <a:ext cx="1696669" cy="365760"/>
+          </a:xfrm>
+          <a:prstGeom prst="rect">
+            <a:avLst/>
+          </a:prstGeom>
+          <a:noFill/>
+        </p:spPr>
+        <p:txBody>
+          <a:bodyPr wrap="square">
+            <a:spAutoFit/>
+          </a:bodyPr>
+          <a:lstStyle/>
+          <a:p>
+            <a:pPr algn="ctr">
+              <a:defRPr sz="1000">
+                <a:solidFill>
+                  <a:srgbClr val="1F2D3D"/>
+                </a:solidFill>
+              </a:defRPr>
+            </a:pPr>
+            <a:r>
+              <a:t>Empirical / Gamma-3</a:t>
+            </a:r>
+          </a:p>
+        </p:txBody>
+      </p:sp>
+      <p:sp>
+        <p:nvSpPr>
+          <p:cNvPr id="16" name="Rectangle 15"/>
+          <p:cNvSpPr/>
+          <p:nvPr/>
+        </p:nvSpPr>
+        <p:spPr>
+          <a:xfrm>
+            <a:off x="9946385" y="2743200"/>
+            <a:ext cx="1696669" cy="457200"/>
+          </a:xfrm>
+          <a:prstGeom prst="rect">
+            <a:avLst/>
+          </a:prstGeom>
+          <a:solidFill>
+            <a:srgbClr val="5A6A7A"/>
+          </a:solidFill>
+          <a:ln>
+            <a:noFill/>
+          </a:ln>
+          <a:effectLst/>
+        </p:spPr>
+        <p:style>
+          <a:lnRef idx="1">
+            <a:schemeClr val="accent1"/>
+          </a:lnRef>
+          <a:fillRef idx="3">
+            <a:schemeClr val="accent1"/>
+          </a:fillRef>
+          <a:effectRef idx="2">
+            <a:schemeClr val="accent1"/>
+          </a:effectRef>
+          <a:fontRef idx="minor">
+            <a:schemeClr val="lt1"/>
+          </a:fontRef>
+        </p:style>
+        <p:txBody>
+          <a:bodyPr rtlCol="0" anchor="ctr"/>
+          <a:lstStyle/>
+          <a:p>
+            <a:pPr algn="ctr">
+              <a:defRPr sz="1100" b="1">
+                <a:solidFill>
+                  <a:srgbClr val="FFFFFF"/>
+                </a:solidFill>
+              </a:defRPr>
+            </a:pPr>
+            <a:r>
+              <a:t>FFZ-350</a:t>
+            </a:r>
+          </a:p>
+        </p:txBody>
+      </p:sp>
+      <p:sp>
+        <p:nvSpPr>
+          <p:cNvPr id="17" name="TextBox 16"/>
+          <p:cNvSpPr txBox="1"/>
+          <p:nvPr/>
+        </p:nvSpPr>
+        <p:spPr>
+          <a:xfrm>
+            <a:off x="9946385" y="3291840"/>
+            <a:ext cx="1696669" cy="365760"/>
+          </a:xfrm>
+          <a:prstGeom prst="rect">
+            <a:avLst/>
+          </a:prstGeom>
+          <a:noFill/>
+        </p:spPr>
+        <p:txBody>
+          <a:bodyPr wrap="square">
+            <a:spAutoFit/>
+          </a:bodyPr>
+          <a:lstStyle/>
+          <a:p>
+            <a:pPr algn="ctr">
+              <a:defRPr sz="1000">
+                <a:solidFill>
+                  <a:srgbClr val="1F2D3D"/>
+                </a:solidFill>
+              </a:defRPr>
+            </a:pPr>
+            <a:r>
+              <a:t>Empirical / Gamma-3</a:t>
+            </a:r>
+          </a:p>
+        </p:txBody>
+      </p:sp>
+      <p:sp>
+        <p:nvSpPr>
+          <p:cNvPr id="18" name="TextBox 17"/>
+          <p:cNvSpPr txBox="1"/>
+          <p:nvPr/>
+        </p:nvSpPr>
+        <p:spPr>
+          <a:xfrm>
+            <a:off x="548640" y="5349240"/>
+            <a:ext cx="11094415" cy="822960"/>
+          </a:xfrm>
+          <a:prstGeom prst="rect">
+            <a:avLst/>
+          </a:prstGeom>
+          <a:noFill/>
+        </p:spPr>
+        <p:txBody>
+          <a:bodyPr wrap="square">
+            <a:spAutoFit/>
+          </a:bodyPr>
+          <a:lstStyle/>
+          <a:p>
+            <a:r>
+              <a:rPr b="1" sz="1100">
+                <a:solidFill>
+                  <a:srgbClr val="1F2D3D"/>
+                </a:solidFill>
+              </a:rPr>
+              <a:t>Figure 3: </a:t>
+            </a:r>
+            <a:r>
+              <a:rPr i="1" sz="1100">
+                <a:solidFill>
+                  <a:srgbClr val="5A6A7A"/>
+                </a:solidFill>
+              </a:rPr>
+              <a:t>Every scenario (region × graph size × waste distribution) is simulated for both the 30-day and the 90-day horizon; the 90-day runs are restricted to the 30-day Pareto-front policies.</a:t>
+            </a:r>
+          </a:p>
+        </p:txBody>
+      </p:sp>
+      <p:sp>
+        <p:nvSpPr>
+          <p:cNvPr id="19" name="TextBox 18"/>
+          <p:cNvSpPr txBox="1"/>
+          <p:nvPr/>
+        </p:nvSpPr>
+        <p:spPr>
+          <a:xfrm>
+            <a:off x="548640" y="5897880"/>
+            <a:ext cx="11094415" cy="594360"/>
           </a:xfrm>
           <a:prstGeom prst="rect">
             <a:avLst/>
@@ -3741,14 +4933,14 @@
               <a:spcAft>
                 <a:spcPts val="1000"/>
               </a:spcAft>
-              <a:defRPr sz="1400">
+              <a:defRPr sz="1300">
                 <a:solidFill>
                   <a:srgbClr val="1F2D3D"/>
                 </a:solidFill>
               </a:defRPr>
             </a:pPr>
             <a:r>
-              <a:t>•  Optional, constructor-agnostic post-optimisation of each constructed route</a:t>
+              <a:t>•  Regions/graph sizes: RM-100, RM-170 (Rio Maior), FFZ-350 (Figueira da Foz) — two waste distributions each: Empirical and Gamma-3</a:t>
             </a:r>
           </a:p>
           <a:p>
@@ -3756,44 +4948,14 @@
               <a:spcAft>
                 <a:spcPts val="1000"/>
               </a:spcAft>
-              <a:defRPr sz="1400">
+              <a:defRPr sz="1300">
                 <a:solidFill>
                   <a:srgbClr val="1F2D3D"/>
                 </a:solidFill>
               </a:defRPr>
             </a:pPr>
             <a:r>
-              <a:t>•  CLS: exhaustive intra/inter-route neighbourhoods (2-opt, or-opt, swap, relocate) to a local optimum — best kg/km polish</a:t>
-            </a:r>
-          </a:p>
-          <a:p>
-            <a:pPr>
-              <a:spcAft>
-                <a:spcPts val="1000"/>
-              </a:spcAft>
-              <a:defRPr sz="1400">
-                <a:solidFill>
-                  <a:srgbClr val="1F2D3D"/>
-                </a:solidFill>
-              </a:defRPr>
-            </a:pPr>
-            <a:r>
-              <a:t>•  Fast-TSP: reorders each route as a TSP — exact for small routes, Stochastic Local Search (SLS) under the hood for graphs with more than 20 nodes</a:t>
-            </a:r>
-          </a:p>
-          <a:p>
-            <a:pPr>
-              <a:spcAft>
-                <a:spcPts val="1000"/>
-              </a:spcAft>
-              <a:defRPr sz="1400">
-                <a:solidFill>
-                  <a:srgbClr val="1F2D3D"/>
-                </a:solidFill>
-              </a:defRPr>
-            </a:pPr>
-            <a:r>
-              <a:t>•  Improver choice is a second-order effect: selection strategy and constructor dominate the KPI outcomes</a:t>
+              <a:t>•  5 mandatory selection variants × 8 route constructors × up to 2 improvers, replicated at 30 and 90 days</a:t>
             </a:r>
           </a:p>
         </p:txBody>
@@ -3884,8 +5046,8 @@
         </p:blipFill>
         <p:spPr>
           <a:xfrm>
-            <a:off x="274320" y="1483163"/>
-            <a:ext cx="11460175" cy="4257434"/>
+            <a:off x="274320" y="1448266"/>
+            <a:ext cx="11460175" cy="4327228"/>
           </a:xfrm>
           <a:prstGeom prst="rect">
             <a:avLst/>
@@ -3901,7 +5063,7 @@
         <p:spPr>
           <a:xfrm>
             <a:off x="548640" y="6355080"/>
-            <a:ext cx="11094415" cy="548640"/>
+            <a:ext cx="11094415" cy="822960"/>
           </a:xfrm>
           <a:prstGeom prst="rect">
             <a:avLst/>
@@ -3920,7 +5082,7 @@
                   <a:srgbClr val="1F2D3D"/>
                 </a:solidFill>
               </a:rPr>
-              <a:t>Figure 2: </a:t>
+              <a:t>Figure 4: </a:t>
             </a:r>
             <a:r>
               <a:rPr i="1" sz="1100">
@@ -4019,8 +5181,8 @@
         </p:blipFill>
         <p:spPr>
           <a:xfrm>
-            <a:off x="1958337" y="1051560"/>
-            <a:ext cx="8275020" cy="2468880"/>
+            <a:off x="2061391" y="1051560"/>
+            <a:ext cx="8068912" cy="2468880"/>
           </a:xfrm>
           <a:prstGeom prst="rect">
             <a:avLst/>
@@ -4043,8 +5205,8 @@
         </p:blipFill>
         <p:spPr>
           <a:xfrm>
-            <a:off x="1957182" y="3611880"/>
-            <a:ext cx="8277330" cy="2468880"/>
+            <a:off x="2059139" y="3611880"/>
+            <a:ext cx="8073417" cy="2468880"/>
           </a:xfrm>
           <a:prstGeom prst="rect">
             <a:avLst/>
@@ -4060,7 +5222,7 @@
         <p:spPr>
           <a:xfrm>
             <a:off x="548640" y="6355080"/>
-            <a:ext cx="11094415" cy="548640"/>
+            <a:ext cx="11094415" cy="822960"/>
           </a:xfrm>
           <a:prstGeom prst="rect">
             <a:avLst/>
@@ -4079,7 +5241,7 @@
                   <a:srgbClr val="1F2D3D"/>
                 </a:solidFill>
               </a:rPr>
-              <a:t>Figure 3: </a:t>
+              <a:t>Figure 5: </a:t>
             </a:r>
             <a:r>
               <a:rPr i="1" sz="1100">
@@ -4157,14 +5319,14 @@
               </a:defRPr>
             </a:pPr>
             <a:r>
-              <a:t>Results — Per-Scenario Heatmaps (Constructors × Strategy·Improver)</a:t>
+              <a:t>Results — Strategy Trade-off (Overflows vs kg/km)</a:t>
             </a:r>
           </a:p>
         </p:txBody>
       </p:sp>
       <p:pic>
         <p:nvPicPr>
-          <p:cNvPr id="3" name="Picture 2" descr="scenario_constructor_heatmap.png"/>
+          <p:cNvPr id="3" name="Picture 2" descr="strategy_bubble_log.png"/>
           <p:cNvPicPr>
             <a:picLocks noChangeAspect="1"/>
           </p:cNvPicPr>
@@ -4178,8 +5340,8 @@
         </p:blipFill>
         <p:spPr>
           <a:xfrm>
-            <a:off x="1475432" y="1051560"/>
-            <a:ext cx="9057950" cy="5120640"/>
+            <a:off x="274320" y="1199922"/>
+            <a:ext cx="11460175" cy="4823916"/>
           </a:xfrm>
           <a:prstGeom prst="rect">
             <a:avLst/>
@@ -4195,7 +5357,7 @@
         <p:spPr>
           <a:xfrm>
             <a:off x="548640" y="6355080"/>
-            <a:ext cx="11094415" cy="548640"/>
+            <a:ext cx="11094415" cy="822960"/>
           </a:xfrm>
           <a:prstGeom prst="rect">
             <a:avLst/>
@@ -4214,7 +5376,7 @@
                   <a:srgbClr val="1F2D3D"/>
                 </a:solidFill>
               </a:rPr>
-              <a:t>Figure 4: </a:t>
+              <a:t>Figure 6: </a:t>
             </a:r>
             <a:r>
               <a:rPr i="1" sz="1100">
@@ -4222,7 +5384,7 @@
                   <a:srgbClr val="5A6A7A"/>
                 </a:solidFill>
               </a:rPr>
-              <a:t>30-day runs. One panel per scenario; route constructors on the rows, selection × improver combinations on the columns.</a:t>
+              <a:t>Each bubble = (selection strategy, scenario) averaged over constructors and improvers — coloured by mandatory selection strategy (LA/LM/SL).</a:t>
             </a:r>
           </a:p>
         </p:txBody>
@@ -4292,14 +5454,14 @@
               </a:defRPr>
             </a:pPr>
             <a:r>
-              <a:t>Results — Overflow &amp; kg/km Heatmaps, 90 Days (Policies × Scenarios)</a:t>
+              <a:t>Results — Per-Scenario Heatmaps (Constructors × Strategy·Improver)</a:t>
             </a:r>
           </a:p>
         </p:txBody>
       </p:sp>
       <p:pic>
         <p:nvPicPr>
-          <p:cNvPr id="3" name="Picture 2" descr="policy_scenario_heatmap_overflows.png"/>
+          <p:cNvPr id="3" name="Picture 2" descr="scenario_constructor_heatmap.png"/>
           <p:cNvPicPr>
             <a:picLocks noChangeAspect="1"/>
           </p:cNvPicPr>
@@ -4313,38 +5475,58 @@
         </p:blipFill>
         <p:spPr>
           <a:xfrm>
-            <a:off x="740384" y="1051560"/>
-            <a:ext cx="4706518" cy="5120640"/>
+            <a:off x="274320" y="1226724"/>
+            <a:ext cx="8442655" cy="4770311"/>
           </a:xfrm>
           <a:prstGeom prst="rect">
             <a:avLst/>
           </a:prstGeom>
         </p:spPr>
       </p:pic>
-      <p:pic>
-        <p:nvPicPr>
-          <p:cNvPr id="4" name="Picture 3" descr="policy_scenario_heatmap_kgkm.png"/>
-          <p:cNvPicPr>
-            <a:picLocks noChangeAspect="1"/>
-          </p:cNvPicPr>
+      <p:sp>
+        <p:nvSpPr>
+          <p:cNvPr id="4" name="Rounded Rectangle 3"/>
+          <p:cNvSpPr/>
           <p:nvPr/>
-        </p:nvPicPr>
-        <p:blipFill>
-          <a:blip r:embed="rId3"/>
-          <a:stretch>
-            <a:fillRect/>
-          </a:stretch>
-        </p:blipFill>
-        <p:spPr>
-          <a:xfrm>
-            <a:off x="6579988" y="1051560"/>
-            <a:ext cx="4670365" cy="5120640"/>
-          </a:xfrm>
-          <a:prstGeom prst="rect">
-            <a:avLst/>
-          </a:prstGeom>
-        </p:spPr>
-      </p:pic>
+        </p:nvSpPr>
+        <p:spPr>
+          <a:xfrm>
+            <a:off x="9082735" y="1051560"/>
+            <a:ext cx="2834640" cy="5120640"/>
+          </a:xfrm>
+          <a:prstGeom prst="roundRect">
+            <a:avLst/>
+          </a:prstGeom>
+          <a:solidFill>
+            <a:srgbClr val="F0F4FA"/>
+          </a:solidFill>
+          <a:ln>
+            <a:noFill/>
+          </a:ln>
+          <a:effectLst/>
+        </p:spPr>
+        <p:style>
+          <a:lnRef idx="1">
+            <a:schemeClr val="accent1"/>
+          </a:lnRef>
+          <a:fillRef idx="3">
+            <a:schemeClr val="accent1"/>
+          </a:fillRef>
+          <a:effectRef idx="2">
+            <a:schemeClr val="accent1"/>
+          </a:effectRef>
+          <a:fontRef idx="minor">
+            <a:schemeClr val="lt1"/>
+          </a:fontRef>
+        </p:style>
+        <p:txBody>
+          <a:bodyPr rtlCol="0" anchor="ctr"/>
+          <a:lstStyle/>
+          <a:p>
+            <a:pPr algn="ctr"/>
+          </a:p>
+        </p:txBody>
+      </p:sp>
       <p:sp>
         <p:nvSpPr>
           <p:cNvPr id="5" name="TextBox 4"/>
@@ -4353,8 +5535,8 @@
         </p:nvSpPr>
         <p:spPr>
           <a:xfrm>
-            <a:off x="548640" y="6355080"/>
-            <a:ext cx="11094415" cy="548640"/>
+            <a:off x="9265615" y="1188720"/>
+            <a:ext cx="2468880" cy="4846320"/>
           </a:xfrm>
           <a:prstGeom prst="rect">
             <a:avLst/>
@@ -4367,13 +5549,93 @@
           </a:bodyPr>
           <a:lstStyle/>
           <a:p>
+            <a:pPr>
+              <a:defRPr sz="1400" b="1">
+                <a:solidFill>
+                  <a:srgbClr val="2E74B5"/>
+                </a:solidFill>
+              </a:defRPr>
+            </a:pPr>
+            <a:r>
+              <a:t>Shared axis labels</a:t>
+            </a:r>
+          </a:p>
+          <a:p>
+            <a:pPr>
+              <a:spcBef>
+                <a:spcPts val="1000"/>
+              </a:spcBef>
+              <a:defRPr sz="1200">
+                <a:solidFill>
+                  <a:srgbClr val="1F2D3D"/>
+                </a:solidFill>
+              </a:defRPr>
+            </a:pPr>
+            <a:r>
+              <a:t>Rows (all 12 panels): route constructor — ACO_HH, ALNS, BPC, HGS, PG-CLNS, PSOMA, SANS, SWC-TCF.</a:t>
+            </a:r>
+          </a:p>
+          <a:p>
+            <a:pPr>
+              <a:spcBef>
+                <a:spcPts val="1000"/>
+              </a:spcBef>
+              <a:defRPr sz="1200">
+                <a:solidFill>
+                  <a:srgbClr val="1F2D3D"/>
+                </a:solidFill>
+              </a:defRPr>
+            </a:pPr>
+            <a:r>
+              <a:t>Columns (all 12 panels): mandatory selection strategy × route improver — LA/LM/SL × FTSP/CLS.</a:t>
+            </a:r>
+          </a:p>
+          <a:p>
+            <a:pPr>
+              <a:spcBef>
+                <a:spcPts val="1000"/>
+              </a:spcBef>
+              <a:defRPr sz="1200">
+                <a:solidFill>
+                  <a:srgbClr val="1F2D3D"/>
+                </a:solidFill>
+              </a:defRPr>
+            </a:pPr>
+            <a:r>
+              <a:t>Axis tick labels are shown once here rather than repeated in tiny print on every one of the 6 scenario panels.</a:t>
+            </a:r>
+          </a:p>
+        </p:txBody>
+      </p:sp>
+      <p:sp>
+        <p:nvSpPr>
+          <p:cNvPr id="6" name="TextBox 5"/>
+          <p:cNvSpPr txBox="1"/>
+          <p:nvPr/>
+        </p:nvSpPr>
+        <p:spPr>
+          <a:xfrm>
+            <a:off x="548640" y="6355080"/>
+            <a:ext cx="11094415" cy="822960"/>
+          </a:xfrm>
+          <a:prstGeom prst="rect">
+            <a:avLst/>
+          </a:prstGeom>
+          <a:noFill/>
+        </p:spPr>
+        <p:txBody>
+          <a:bodyPr wrap="square">
+            <a:spAutoFit/>
+          </a:bodyPr>
+          <a:lstStyle/>
+          <a:p>
             <a:r>
               <a:rPr b="1" sz="1100">
                 <a:solidFill>
                   <a:srgbClr val="1F2D3D"/>
                 </a:solidFill>
               </a:rPr>
-              <a:t>Figure 5: </a:t>
+              <a:t>Figure 7: </a:t>
             </a:r>
             <a:r>
               <a:rPr i="1" sz="1100">
@@ -4381,7 +5643,7 @@
                   <a:srgbClr val="5A6A7A"/>
                 </a:solidFill>
               </a:rPr>
-              <a:t>90-day runs (Pareto-front policies only — fewer rows, easier to read). Rows = policy configurations; columns = scenarios.</a:t>
+              <a:t>30-day runs. One panel per scenario; route constructors on the rows, selection × improver combinations on the columns.</a:t>
             </a:r>
           </a:p>
         </p:txBody>
@@ -4451,14 +5713,14 @@
               </a:defRPr>
             </a:pPr>
             <a:r>
-              <a:t>Results — Route Improver Comparison</a:t>
+              <a:t>Results — Overflow &amp; kg/km Heatmaps, 90 Days (Policies × Scenarios)</a:t>
             </a:r>
           </a:p>
         </p:txBody>
       </p:sp>
       <p:pic>
         <p:nvPicPr>
-          <p:cNvPr id="3" name="Picture 2" descr="improver_bubble_log.png"/>
+          <p:cNvPr id="3" name="Picture 2" descr="policy_scenario_heatmap_overflows.png"/>
           <p:cNvPicPr>
             <a:picLocks noChangeAspect="1"/>
           </p:cNvPicPr>
@@ -4472,24 +5734,48 @@
         </p:blipFill>
         <p:spPr>
           <a:xfrm>
-            <a:off x="274320" y="1284755"/>
-            <a:ext cx="11460175" cy="4654250"/>
+            <a:off x="811188" y="1051560"/>
+            <a:ext cx="4564911" cy="5120640"/>
           </a:xfrm>
           <a:prstGeom prst="rect">
             <a:avLst/>
           </a:prstGeom>
         </p:spPr>
       </p:pic>
-      <p:sp>
-        <p:nvSpPr>
-          <p:cNvPr id="4" name="TextBox 3"/>
+      <p:pic>
+        <p:nvPicPr>
+          <p:cNvPr id="4" name="Picture 3" descr="policy_scenario_heatmap_kgkm.png"/>
+          <p:cNvPicPr>
+            <a:picLocks noChangeAspect="1"/>
+          </p:cNvPicPr>
+          <p:nvPr/>
+        </p:nvPicPr>
+        <p:blipFill>
+          <a:blip r:embed="rId3"/>
+          <a:stretch>
+            <a:fillRect/>
+          </a:stretch>
+        </p:blipFill>
+        <p:spPr>
+          <a:xfrm>
+            <a:off x="6647269" y="1051560"/>
+            <a:ext cx="4535802" cy="5120640"/>
+          </a:xfrm>
+          <a:prstGeom prst="rect">
+            <a:avLst/>
+          </a:prstGeom>
+        </p:spPr>
+      </p:pic>
+      <p:sp>
+        <p:nvSpPr>
+          <p:cNvPr id="5" name="TextBox 4"/>
           <p:cNvSpPr txBox="1"/>
           <p:nvPr/>
         </p:nvSpPr>
         <p:spPr>
           <a:xfrm>
             <a:off x="548640" y="6355080"/>
-            <a:ext cx="11094415" cy="548640"/>
+            <a:ext cx="11094415" cy="822960"/>
           </a:xfrm>
           <a:prstGeom prst="rect">
             <a:avLst/>
@@ -4508,7 +5794,7 @@
                   <a:srgbClr val="1F2D3D"/>
                 </a:solidFill>
               </a:rPr>
-              <a:t>Figure 6: </a:t>
+              <a:t>Figure 8: </a:t>
             </a:r>
             <a:r>
               <a:rPr i="1" sz="1100">
@@ -4516,7 +5802,7 @@
                   <a:srgbClr val="5A6A7A"/>
                 </a:solidFill>
               </a:rPr>
-              <a:t>Each bubble = (improver, scenario) averaged over strategies and constructors — FTSP vs CLS contrasted directly.</a:t>
+              <a:t>90-day runs (Pareto-front policies only — fewer rows, easier to read). Rows = policy configurations; columns = scenarios.</a:t>
             </a:r>
           </a:p>
         </p:txBody>
@@ -4586,49 +5872,14 @@
               </a:defRPr>
             </a:pPr>
             <a:r>
-              <a:t>Results — Full Table (30-Day Horizon)</a:t>
-            </a:r>
-          </a:p>
-        </p:txBody>
-      </p:sp>
-      <p:sp>
-        <p:nvSpPr>
-          <p:cNvPr id="3" name="TextBox 2"/>
-          <p:cNvSpPr txBox="1"/>
-          <p:nvPr/>
-        </p:nvSpPr>
-        <p:spPr>
-          <a:xfrm>
-            <a:off x="365760" y="1051560"/>
-            <a:ext cx="11460175" cy="274320"/>
-          </a:xfrm>
-          <a:prstGeom prst="rect">
-            <a:avLst/>
-          </a:prstGeom>
-          <a:noFill/>
-        </p:spPr>
-        <p:txBody>
-          <a:bodyPr wrap="square">
-            <a:spAutoFit/>
-          </a:bodyPr>
-          <a:lstStyle/>
-          <a:p>
-            <a:pPr>
-              <a:defRPr b="1" sz="1200">
-                <a:solidFill>
-                  <a:srgbClr val="2E74B5"/>
-                </a:solidFill>
-              </a:defRPr>
-            </a:pPr>
-            <a:r>
-              <a:t>Improver: FTSP</a:t>
+              <a:t>Results — Route Improver Comparison</a:t>
             </a:r>
           </a:p>
         </p:txBody>
       </p:sp>
       <p:pic>
         <p:nvPicPr>
-          <p:cNvPr id="4" name="Picture 3" descr="full_results_table_improver_0.png"/>
+          <p:cNvPr id="3" name="Picture 2" descr="improver_bubble_log.png"/>
           <p:cNvPicPr>
             <a:picLocks noChangeAspect="1"/>
           </p:cNvPicPr>
@@ -4642,8 +5893,8 @@
         </p:blipFill>
         <p:spPr>
           <a:xfrm>
-            <a:off x="274320" y="1579833"/>
-            <a:ext cx="11643055" cy="1677509"/>
+            <a:off x="274320" y="1199110"/>
+            <a:ext cx="11460175" cy="4825539"/>
           </a:xfrm>
           <a:prstGeom prst="rect">
             <a:avLst/>
@@ -4652,14 +5903,14 @@
       </p:pic>
       <p:sp>
         <p:nvSpPr>
-          <p:cNvPr id="5" name="TextBox 4"/>
+          <p:cNvPr id="4" name="TextBox 3"/>
           <p:cNvSpPr txBox="1"/>
           <p:nvPr/>
         </p:nvSpPr>
         <p:spPr>
           <a:xfrm>
-            <a:off x="365760" y="3520440"/>
-            <a:ext cx="11460175" cy="274320"/>
+            <a:off x="548640" y="6355080"/>
+            <a:ext cx="11094415" cy="822960"/>
           </a:xfrm>
           <a:prstGeom prst="rect">
             <a:avLst/>
@@ -4672,72 +5923,13 @@
           </a:bodyPr>
           <a:lstStyle/>
           <a:p>
-            <a:pPr>
-              <a:defRPr b="1" sz="1200">
-                <a:solidFill>
-                  <a:srgbClr val="2E74B5"/>
-                </a:solidFill>
-              </a:defRPr>
-            </a:pPr>
-            <a:r>
-              <a:t>Improver: CLS</a:t>
-            </a:r>
-          </a:p>
-        </p:txBody>
-      </p:sp>
-      <p:pic>
-        <p:nvPicPr>
-          <p:cNvPr id="6" name="Picture 5" descr="full_results_table_improver_1.png"/>
-          <p:cNvPicPr>
-            <a:picLocks noChangeAspect="1"/>
-          </p:cNvPicPr>
-          <p:nvPr/>
-        </p:nvPicPr>
-        <p:blipFill>
-          <a:blip r:embed="rId3"/>
-          <a:stretch>
-            <a:fillRect/>
-          </a:stretch>
-        </p:blipFill>
-        <p:spPr>
-          <a:xfrm>
-            <a:off x="274320" y="4048713"/>
-            <a:ext cx="11643055" cy="1677509"/>
-          </a:xfrm>
-          <a:prstGeom prst="rect">
-            <a:avLst/>
-          </a:prstGeom>
-        </p:spPr>
-      </p:pic>
-      <p:sp>
-        <p:nvSpPr>
-          <p:cNvPr id="7" name="TextBox 6"/>
-          <p:cNvSpPr txBox="1"/>
-          <p:nvPr/>
-        </p:nvSpPr>
-        <p:spPr>
-          <a:xfrm>
-            <a:off x="548640" y="6355080"/>
-            <a:ext cx="11094415" cy="548640"/>
-          </a:xfrm>
-          <a:prstGeom prst="rect">
-            <a:avLst/>
-          </a:prstGeom>
-          <a:noFill/>
-        </p:spPr>
-        <p:txBody>
-          <a:bodyPr wrap="square">
-            <a:spAutoFit/>
-          </a:bodyPr>
-          <a:lstStyle/>
-          <a:p>
             <a:r>
               <a:rPr b="1" sz="1100">
                 <a:solidFill>
                   <a:srgbClr val="1F2D3D"/>
                 </a:solidFill>
               </a:rPr>
-              <a:t>Table 1: </a:t>
+              <a:t>Figure 9: </a:t>
             </a:r>
             <a:r>
               <a:rPr i="1" sz="1100">
@@ -4745,7 +5937,7 @@
                   <a:srgbClr val="5A6A7A"/>
                 </a:solidFill>
               </a:rPr>
-              <a:t>Full results table — rows: graph size × region × data distribution; columns: partitioned by route improver (FTSP, CLS), one partial table per value; each partial table then grouped by mandatory selection strategy × route constructor. Each cell reports mean±std overflows and mean±std kg/km.</a:t>
+              <a:t>Each bubble = (improver, scenario) averaged over strategies and constructors — FTSP vs CLS contrasted directly.</a:t>
             </a:r>
           </a:p>
         </p:txBody>
@@ -4815,14 +6007,49 @@
               </a:defRPr>
             </a:pPr>
             <a:r>
-              <a:t>Conclusions, Limitations &amp; Future Work</a:t>
+              <a:t>Results — Full Table (30-Day Horizon)</a:t>
+            </a:r>
+          </a:p>
+        </p:txBody>
+      </p:sp>
+      <p:sp>
+        <p:nvSpPr>
+          <p:cNvPr id="3" name="TextBox 2"/>
+          <p:cNvSpPr txBox="1"/>
+          <p:nvPr/>
+        </p:nvSpPr>
+        <p:spPr>
+          <a:xfrm>
+            <a:off x="365760" y="1051560"/>
+            <a:ext cx="11460175" cy="274320"/>
+          </a:xfrm>
+          <a:prstGeom prst="rect">
+            <a:avLst/>
+          </a:prstGeom>
+          <a:noFill/>
+        </p:spPr>
+        <p:txBody>
+          <a:bodyPr wrap="square">
+            <a:spAutoFit/>
+          </a:bodyPr>
+          <a:lstStyle/>
+          <a:p>
+            <a:pPr>
+              <a:defRPr b="1" sz="1200">
+                <a:solidFill>
+                  <a:srgbClr val="2E74B5"/>
+                </a:solidFill>
+              </a:defRPr>
+            </a:pPr>
+            <a:r>
+              <a:t>Improver: FTSP</a:t>
             </a:r>
           </a:p>
         </p:txBody>
       </p:sp>
       <p:pic>
         <p:nvPicPr>
-          <p:cNvPr id="3" name="Picture 2" descr="policy_radar.png"/>
+          <p:cNvPr id="4" name="Picture 3" descr="full_results_table_improver_0.png"/>
           <p:cNvPicPr>
             <a:picLocks noChangeAspect="1"/>
           </p:cNvPicPr>
@@ -4836,8 +6063,8 @@
         </p:blipFill>
         <p:spPr>
           <a:xfrm>
-            <a:off x="6095847" y="1333266"/>
-            <a:ext cx="5730087" cy="4831548"/>
+            <a:off x="274320" y="1579833"/>
+            <a:ext cx="11643055" cy="1677509"/>
           </a:xfrm>
           <a:prstGeom prst="rect">
             <a:avLst/>
@@ -4846,14 +6073,14 @@
       </p:pic>
       <p:sp>
         <p:nvSpPr>
-          <p:cNvPr id="4" name="TextBox 3"/>
+          <p:cNvPr id="5" name="TextBox 4"/>
           <p:cNvSpPr txBox="1"/>
           <p:nvPr/>
         </p:nvSpPr>
         <p:spPr>
           <a:xfrm>
-            <a:off x="548640" y="6355080"/>
-            <a:ext cx="11094415" cy="548640"/>
+            <a:off x="365760" y="3520440"/>
+            <a:ext cx="11460175" cy="274320"/>
           </a:xfrm>
           <a:prstGeom prst="rect">
             <a:avLst/>
@@ -4866,35 +6093,53 @@
           </a:bodyPr>
           <a:lstStyle/>
           <a:p>
-            <a:r>
-              <a:rPr b="1" sz="1100">
-                <a:solidFill>
-                  <a:srgbClr val="1F2D3D"/>
-                </a:solidFill>
-              </a:rPr>
-              <a:t>Figure 7: </a:t>
-            </a:r>
-            <a:r>
-              <a:rPr i="1" sz="1100">
-                <a:solidFill>
-                  <a:srgbClr val="5A6A7A"/>
-                </a:solidFill>
-              </a:rPr>
-              <a:t>Overlaid radar chart comparing key route constructors across overflow, efficiency, distance and profit axes — outer position indicates better performance on that axis.</a:t>
-            </a:r>
-          </a:p>
-        </p:txBody>
-      </p:sp>
-      <p:sp>
-        <p:nvSpPr>
-          <p:cNvPr id="5" name="TextBox 4"/>
+            <a:pPr>
+              <a:defRPr b="1" sz="1200">
+                <a:solidFill>
+                  <a:srgbClr val="2E74B5"/>
+                </a:solidFill>
+              </a:defRPr>
+            </a:pPr>
+            <a:r>
+              <a:t>Improver: CLS</a:t>
+            </a:r>
+          </a:p>
+        </p:txBody>
+      </p:sp>
+      <p:pic>
+        <p:nvPicPr>
+          <p:cNvPr id="6" name="Picture 5" descr="full_results_table_improver_1.png"/>
+          <p:cNvPicPr>
+            <a:picLocks noChangeAspect="1"/>
+          </p:cNvPicPr>
+          <p:nvPr/>
+        </p:nvPicPr>
+        <p:blipFill>
+          <a:blip r:embed="rId3"/>
+          <a:stretch>
+            <a:fillRect/>
+          </a:stretch>
+        </p:blipFill>
+        <p:spPr>
+          <a:xfrm>
+            <a:off x="274320" y="4048713"/>
+            <a:ext cx="11643055" cy="1677509"/>
+          </a:xfrm>
+          <a:prstGeom prst="rect">
+            <a:avLst/>
+          </a:prstGeom>
+        </p:spPr>
+      </p:pic>
+      <p:sp>
+        <p:nvSpPr>
+          <p:cNvPr id="7" name="TextBox 6"/>
           <p:cNvSpPr txBox="1"/>
           <p:nvPr/>
         </p:nvSpPr>
         <p:spPr>
           <a:xfrm>
-            <a:off x="457200" y="1280160"/>
-            <a:ext cx="5455767" cy="5212080"/>
+            <a:off x="548640" y="6355080"/>
+            <a:ext cx="11094415" cy="822960"/>
           </a:xfrm>
           <a:prstGeom prst="rect">
             <a:avLst/>
@@ -4907,78 +6152,21 @@
           </a:bodyPr>
           <a:lstStyle/>
           <a:p>
-            <a:pPr>
-              <a:spcAft>
-                <a:spcPts val="1000"/>
-              </a:spcAft>
-              <a:defRPr sz="1300">
+            <a:r>
+              <a:rPr b="1" sz="1100">
                 <a:solidFill>
                   <a:srgbClr val="1F2D3D"/>
                 </a:solidFill>
-              </a:defRPr>
-            </a:pPr>
-            <a:r>
-              <a:t>•  The selection strategy dominates the overflow/efficiency trade-off: SL prevents overflows (SL2 + ACO_HH reached 0 at FFZ-350), LM (CF90) maximises kg/km (~12), LA balances</a:t>
-            </a:r>
-          </a:p>
-          <a:p>
-            <a:pPr>
-              <a:spcAft>
-                <a:spcPts val="1000"/>
-              </a:spcAft>
-              <a:defRPr sz="1300">
-                <a:solidFill>
-                  <a:srgbClr val="1F2D3D"/>
-                </a:solidFill>
-              </a:defRPr>
-            </a:pPr>
-            <a:r>
-              <a:t>•  BPC and PG-CLNS are the most frequent Pareto-front constructors; ACO-HH is the most robust across scenarios and horizons</a:t>
-            </a:r>
-          </a:p>
-          <a:p>
-            <a:pPr>
-              <a:spcAft>
-                <a:spcPts val="1000"/>
-              </a:spcAft>
-              <a:defRPr sz="1300">
-                <a:solidFill>
-                  <a:srgbClr val="1F2D3D"/>
-                </a:solidFill>
-              </a:defRPr>
-            </a:pPr>
-            <a:r>
-              <a:t>•  Patterns are stable from 30 to 90 days; overflow pressure grows with the horizon while kg/km stays consistent</a:t>
-            </a:r>
-          </a:p>
-          <a:p>
-            <a:pPr>
-              <a:spcAft>
-                <a:spcPts val="1000"/>
-              </a:spcAft>
-              <a:defRPr sz="1300">
-                <a:solidFill>
-                  <a:srgbClr val="1F2D3D"/>
-                </a:solidFill>
-              </a:defRPr>
-            </a:pPr>
-            <a:r>
-              <a:t>•  Limitations: single vehicle type/depot per region; waste models calibrated on limited data; 90-day runs only cover the 30-day Pareto-front policies</a:t>
-            </a:r>
-          </a:p>
-          <a:p>
-            <a:pPr>
-              <a:spcAft>
-                <a:spcPts val="1000"/>
-              </a:spcAft>
-              <a:defRPr sz="1300">
-                <a:solidFill>
-                  <a:srgbClr val="1F2D3D"/>
-                </a:solidFill>
-              </a:defRPr>
-            </a:pPr>
-            <a:r>
-              <a:t>•  Future work: richer acceptance criteria, neural constructors in the same pipeline, multi-vehicle fleets, intra-day re-routing, CO₂-aware objectives</a:t>
+              </a:rPr>
+              <a:t>Table 1: </a:t>
+            </a:r>
+            <a:r>
+              <a:rPr i="1" sz="1100">
+                <a:solidFill>
+                  <a:srgbClr val="5A6A7A"/>
+                </a:solidFill>
+              </a:rPr>
+              <a:t>Full results table — rows: graph size × region × data distribution; columns: partitioned by route improver (FTSP, CLS), one partial table per value; each partial table then grouped by mandatory selection strategy × route constructor. In every cell, the top value is mean±std overflows (lower is better) and the bottom value is mean±std kg/km (higher is better); the best value per row is shown in bold green.</a:t>
             </a:r>
           </a:p>
         </p:txBody>
@@ -5010,7 +6198,7 @@
         <p:spPr>
           <a:xfrm>
             <a:off x="0" y="0"/>
-            <a:ext cx="12191695" cy="6858000"/>
+            <a:ext cx="12191695" cy="914400"/>
           </a:xfrm>
           <a:prstGeom prst="rect">
             <a:avLst/>
@@ -5037,23 +6225,56 @@
           </a:fontRef>
         </p:style>
         <p:txBody>
-          <a:bodyPr rtlCol="0" anchor="ctr"/>
-          <a:lstStyle/>
-          <a:p>
-            <a:pPr algn="ctr"/>
-          </a:p>
-        </p:txBody>
-      </p:sp>
-      <p:sp>
-        <p:nvSpPr>
-          <p:cNvPr id="3" name="TextBox 2"/>
+          <a:bodyPr rtlCol="0" anchor="ctr" wrap="square" lIns="457200"/>
+          <a:lstStyle/>
+          <a:p>
+            <a:pPr algn="ctr">
+              <a:defRPr sz="2600" b="1">
+                <a:solidFill>
+                  <a:srgbClr val="FFFFFF"/>
+                </a:solidFill>
+              </a:defRPr>
+            </a:pPr>
+            <a:r>
+              <a:t>Conclusions, Limitations &amp; Future Work</a:t>
+            </a:r>
+          </a:p>
+        </p:txBody>
+      </p:sp>
+      <p:pic>
+        <p:nvPicPr>
+          <p:cNvPr id="3" name="Picture 2" descr="policy_radar.png"/>
+          <p:cNvPicPr>
+            <a:picLocks noChangeAspect="1"/>
+          </p:cNvPicPr>
+          <p:nvPr/>
+        </p:nvPicPr>
+        <p:blipFill>
+          <a:blip r:embed="rId2"/>
+          <a:stretch>
+            <a:fillRect/>
+          </a:stretch>
+        </p:blipFill>
+        <p:spPr>
+          <a:xfrm>
+            <a:off x="6095847" y="1308863"/>
+            <a:ext cx="5730087" cy="4880353"/>
+          </a:xfrm>
+          <a:prstGeom prst="rect">
+            <a:avLst/>
+          </a:prstGeom>
+        </p:spPr>
+      </p:pic>
+      <p:sp>
+        <p:nvSpPr>
+          <p:cNvPr id="4" name="TextBox 3"/>
           <p:cNvSpPr txBox="1"/>
           <p:nvPr/>
         </p:nvSpPr>
         <p:spPr>
           <a:xfrm>
-            <a:off x="822960" y="2560320"/>
-            <a:ext cx="10545775" cy="1828800"/>
+            <a:off x="548640" y="6355080"/>
+            <a:ext cx="11094415" cy="822960"/>
           </a:xfrm>
           <a:prstGeom prst="rect">
             <a:avLst/>
@@ -5066,39 +6287,119 @@
           </a:bodyPr>
           <a:lstStyle/>
           <a:p>
-            <a:pPr algn="ctr">
-              <a:defRPr sz="3600" b="1">
-                <a:solidFill>
-                  <a:srgbClr val="FFFFFF"/>
-                </a:solidFill>
-              </a:defRPr>
-            </a:pPr>
-            <a:r>
-              <a:t>Thank You — Questions &amp; Answers</a:t>
-            </a:r>
-          </a:p>
-          <a:p>
-            <a:pPr algn="ctr">
-              <a:defRPr sz="1600">
-                <a:solidFill>
-                  <a:srgbClr val="C9D6E4"/>
-                </a:solidFill>
-              </a:defRPr>
-            </a:pPr>
-            <a:r>
-              <a:t>Thank you for your attention!</a:t>
-            </a:r>
-          </a:p>
-          <a:p>
-            <a:pPr algn="ctr">
-              <a:defRPr sz="1600">
-                <a:solidFill>
-                  <a:srgbClr val="C9D6E4"/>
-                </a:solidFill>
-              </a:defRPr>
-            </a:pPr>
-            <a:r>
-              <a:t>Time for questions</a:t>
+            <a:r>
+              <a:rPr b="1" sz="1100">
+                <a:solidFill>
+                  <a:srgbClr val="1F2D3D"/>
+                </a:solidFill>
+              </a:rPr>
+              <a:t>Figure 10: </a:t>
+            </a:r>
+            <a:r>
+              <a:rPr i="1" sz="1100">
+                <a:solidFill>
+                  <a:srgbClr val="5A6A7A"/>
+                </a:solidFill>
+              </a:rPr>
+              <a:t>Overlaid radar chart comparing key route constructors across overflow, efficiency, distance and profit axes — outer position indicates better performance on that axis.</a:t>
+            </a:r>
+          </a:p>
+        </p:txBody>
+      </p:sp>
+      <p:sp>
+        <p:nvSpPr>
+          <p:cNvPr id="5" name="TextBox 4"/>
+          <p:cNvSpPr txBox="1"/>
+          <p:nvPr/>
+        </p:nvSpPr>
+        <p:spPr>
+          <a:xfrm>
+            <a:off x="457200" y="1280160"/>
+            <a:ext cx="5455767" cy="5212080"/>
+          </a:xfrm>
+          <a:prstGeom prst="rect">
+            <a:avLst/>
+          </a:prstGeom>
+          <a:noFill/>
+        </p:spPr>
+        <p:txBody>
+          <a:bodyPr wrap="square">
+            <a:spAutoFit/>
+          </a:bodyPr>
+          <a:lstStyle/>
+          <a:p>
+            <a:pPr>
+              <a:spcAft>
+                <a:spcPts val="1000"/>
+              </a:spcAft>
+              <a:defRPr sz="1300">
+                <a:solidFill>
+                  <a:srgbClr val="1F2D3D"/>
+                </a:solidFill>
+              </a:defRPr>
+            </a:pPr>
+            <a:r>
+              <a:t>•  The selection strategy dominates the overflow/efficiency trade-off: SL prevents overflows (SL2 + ACO_HH reached 0 at FFZ-350), LM (CF90) maximises kg/km (~12), LA balances</a:t>
+            </a:r>
+          </a:p>
+          <a:p>
+            <a:pPr>
+              <a:spcAft>
+                <a:spcPts val="1000"/>
+              </a:spcAft>
+              <a:defRPr sz="1300">
+                <a:solidFill>
+                  <a:srgbClr val="1F2D3D"/>
+                </a:solidFill>
+              </a:defRPr>
+            </a:pPr>
+            <a:r>
+              <a:t>•  BPC and PG-CLNS are the most frequent Pareto-front constructors; ACO-HH is the most robust across scenarios and horizons</a:t>
+            </a:r>
+          </a:p>
+          <a:p>
+            <a:pPr>
+              <a:spcAft>
+                <a:spcPts val="1000"/>
+              </a:spcAft>
+              <a:defRPr sz="1300">
+                <a:solidFill>
+                  <a:srgbClr val="1F2D3D"/>
+                </a:solidFill>
+              </a:defRPr>
+            </a:pPr>
+            <a:r>
+              <a:t>•  Patterns are stable from 30 to 90 days; overflow pressure grows with the horizon while kg/km stays consistent</a:t>
+            </a:r>
+          </a:p>
+          <a:p>
+            <a:pPr>
+              <a:spcAft>
+                <a:spcPts val="1000"/>
+              </a:spcAft>
+              <a:defRPr sz="1300">
+                <a:solidFill>
+                  <a:srgbClr val="1F2D3D"/>
+                </a:solidFill>
+              </a:defRPr>
+            </a:pPr>
+            <a:r>
+              <a:t>•  Limitations: single vehicle type/depot per region; waste models calibrated on limited data; 90-day runs only cover the 30-day Pareto-front policies</a:t>
+            </a:r>
+          </a:p>
+          <a:p>
+            <a:pPr>
+              <a:spcAft>
+                <a:spcPts val="1000"/>
+              </a:spcAft>
+              <a:defRPr sz="1300">
+                <a:solidFill>
+                  <a:srgbClr val="1F2D3D"/>
+                </a:solidFill>
+              </a:defRPr>
+            </a:pPr>
+            <a:r>
+              <a:t>•  Future work: richer acceptance criteria, neural constructors (e.g. Attention Model) in the same pipeline, multi-vehicle fleets, intra-day re-routing, CO₂-aware objectives</a:t>
             </a:r>
           </a:p>
         </p:txBody>
@@ -5206,7 +6507,7 @@
               </a:defRPr>
             </a:pPr>
             <a:r>
-              <a:t>1.  The Vehicle Routing Problem with Profits (VRPP)</a:t>
+              <a:t>1.  Introduction — VRPP, Simulator Philosophy &amp; Objective</a:t>
             </a:r>
           </a:p>
           <a:p>
@@ -5221,7 +6522,7 @@
               </a:defRPr>
             </a:pPr>
             <a:r>
-              <a:t>2.  Routing Simulator Philosophy</a:t>
+              <a:t>2.  Mandatory Node Selection Strategies</a:t>
             </a:r>
           </a:p>
           <a:p>
@@ -5236,9 +6537,32 @@
               </a:defRPr>
             </a:pPr>
             <a:r>
-              <a:t>3.  Mandatory Node Selection Strategies</a:t>
-            </a:r>
-          </a:p>
+              <a:t>3.  Route Constructors &amp; Route Improvers</a:t>
+            </a:r>
+          </a:p>
+        </p:txBody>
+      </p:sp>
+      <p:sp>
+        <p:nvSpPr>
+          <p:cNvPr id="4" name="TextBox 3"/>
+          <p:cNvSpPr txBox="1"/>
+          <p:nvPr/>
+        </p:nvSpPr>
+        <p:spPr>
+          <a:xfrm>
+            <a:off x="6095847" y="1280160"/>
+            <a:ext cx="5364327" cy="5212080"/>
+          </a:xfrm>
+          <a:prstGeom prst="rect">
+            <a:avLst/>
+          </a:prstGeom>
+          <a:noFill/>
+        </p:spPr>
+        <p:txBody>
+          <a:bodyPr wrap="square">
+            <a:spAutoFit/>
+          </a:bodyPr>
+          <a:lstStyle/>
           <a:p>
             <a:pPr>
               <a:spcAft>
@@ -5251,7 +6575,7 @@
               </a:defRPr>
             </a:pPr>
             <a:r>
-              <a:t>4.  Exact Solvers: BPC &amp; SWC-TCF</a:t>
+              <a:t>4.  Results</a:t>
             </a:r>
           </a:p>
           <a:p>
@@ -5266,66 +6590,82 @@
               </a:defRPr>
             </a:pPr>
             <a:r>
-              <a:t>5.  Meta-Heuristics &amp; Hyper-Heuristics</a:t>
-            </a:r>
-          </a:p>
-          <a:p>
-            <a:pPr>
-              <a:spcAft>
-                <a:spcPts val="1200"/>
-              </a:spcAft>
-              <a:defRPr sz="1600">
-                <a:solidFill>
-                  <a:srgbClr val="1F2D3D"/>
-                </a:solidFill>
-              </a:defRPr>
-            </a:pPr>
-            <a:r>
-              <a:t>6.  Evolutionary Algorithms: HGS</a:t>
-            </a:r>
-          </a:p>
-          <a:p>
-            <a:pPr>
-              <a:spcAft>
-                <a:spcPts val="1200"/>
-              </a:spcAft>
-              <a:defRPr sz="1600">
-                <a:solidFill>
-                  <a:srgbClr val="1F2D3D"/>
-                </a:solidFill>
-              </a:defRPr>
-            </a:pPr>
-            <a:r>
-              <a:t>7.  Swarm Intelligence: PSOMA &amp; ACO-HH</a:t>
-            </a:r>
-          </a:p>
-          <a:p>
-            <a:pPr>
-              <a:spcAft>
-                <a:spcPts val="1200"/>
-              </a:spcAft>
-              <a:defRPr sz="1600">
-                <a:solidFill>
-                  <a:srgbClr val="1F2D3D"/>
-                </a:solidFill>
-              </a:defRPr>
-            </a:pPr>
-            <a:r>
-              <a:t>8.  Neighborhood Search: SANS &amp; PG-CLNS</a:t>
-            </a:r>
-          </a:p>
-        </p:txBody>
-      </p:sp>
-      <p:sp>
-        <p:nvSpPr>
-          <p:cNvPr id="4" name="TextBox 3"/>
+              <a:t>5.  Conclusions, Limitations &amp; Future Work</a:t>
+            </a:r>
+          </a:p>
+        </p:txBody>
+      </p:sp>
+    </p:spTree>
+  </p:cSld>
+  <p:clrMapOvr>
+    <a:masterClrMapping/>
+  </p:clrMapOvr>
+</p:sld>
+</file>
+
+<file path=ppt/slides/slide20.xml><?xml version="1.0" encoding="utf-8"?>
+<p:sld xmlns:a="http://schemas.openxmlformats.org/drawingml/2006/main" xmlns:p="http://schemas.openxmlformats.org/presentationml/2006/main" xmlns:r="http://schemas.openxmlformats.org/officeDocument/2006/relationships">
+  <p:cSld>
+    <p:spTree>
+      <p:nvGrpSpPr>
+        <p:cNvPr id="1" name=""/>
+        <p:cNvGrpSpPr/>
+        <p:nvPr/>
+      </p:nvGrpSpPr>
+      <p:grpSpPr/>
+      <p:sp>
+        <p:nvSpPr>
+          <p:cNvPr id="2" name="Rectangle 1"/>
+          <p:cNvSpPr/>
+          <p:nvPr/>
+        </p:nvSpPr>
+        <p:spPr>
+          <a:xfrm>
+            <a:off x="0" y="0"/>
+            <a:ext cx="12191695" cy="6858000"/>
+          </a:xfrm>
+          <a:prstGeom prst="rect">
+            <a:avLst/>
+          </a:prstGeom>
+          <a:solidFill>
+            <a:srgbClr val="1F2D3D"/>
+          </a:solidFill>
+          <a:ln>
+            <a:noFill/>
+          </a:ln>
+        </p:spPr>
+        <p:style>
+          <a:lnRef idx="1">
+            <a:schemeClr val="accent1"/>
+          </a:lnRef>
+          <a:fillRef idx="3">
+            <a:schemeClr val="accent1"/>
+          </a:fillRef>
+          <a:effectRef idx="2">
+            <a:schemeClr val="accent1"/>
+          </a:effectRef>
+          <a:fontRef idx="minor">
+            <a:schemeClr val="lt1"/>
+          </a:fontRef>
+        </p:style>
+        <p:txBody>
+          <a:bodyPr rtlCol="0" anchor="ctr"/>
+          <a:lstStyle/>
+          <a:p>
+            <a:pPr algn="ctr"/>
+          </a:p>
+        </p:txBody>
+      </p:sp>
+      <p:sp>
+        <p:nvSpPr>
+          <p:cNvPr id="3" name="TextBox 2"/>
           <p:cNvSpPr txBox="1"/>
           <p:nvPr/>
         </p:nvSpPr>
         <p:spPr>
           <a:xfrm>
-            <a:off x="6095847" y="1280160"/>
-            <a:ext cx="5364327" cy="5212080"/>
+            <a:off x="822960" y="2560320"/>
+            <a:ext cx="5090007" cy="2194560"/>
           </a:xfrm>
           <a:prstGeom prst="rect">
             <a:avLst/>
@@ -5338,112 +6678,67 @@
           </a:bodyPr>
           <a:lstStyle/>
           <a:p>
-            <a:pPr>
-              <a:spcAft>
-                <a:spcPts val="1200"/>
-              </a:spcAft>
+            <a:pPr algn="l">
+              <a:defRPr sz="3000" b="1">
+                <a:solidFill>
+                  <a:srgbClr val="FFFFFF"/>
+                </a:solidFill>
+              </a:defRPr>
+            </a:pPr>
+            <a:r>
+              <a:t>Thank You — Questions &amp; Answers</a:t>
+            </a:r>
+          </a:p>
+          <a:p>
+            <a:pPr algn="l">
               <a:defRPr sz="1600">
                 <a:solidFill>
-                  <a:srgbClr val="1F2D3D"/>
-                </a:solidFill>
-              </a:defRPr>
-            </a:pPr>
-            <a:r>
-              <a:t>9.  Route Improvers: Classical Local Search vs Fast-TSP</a:t>
-            </a:r>
-          </a:p>
-          <a:p>
-            <a:pPr>
-              <a:spcAft>
-                <a:spcPts val="1200"/>
-              </a:spcAft>
+                  <a:srgbClr val="C9D6E4"/>
+                </a:solidFill>
+              </a:defRPr>
+            </a:pPr>
+            <a:r>
+              <a:t>Thank you for your attention!</a:t>
+            </a:r>
+          </a:p>
+          <a:p>
+            <a:pPr algn="l">
               <a:defRPr sz="1600">
                 <a:solidFill>
-                  <a:srgbClr val="1F2D3D"/>
-                </a:solidFill>
-              </a:defRPr>
-            </a:pPr>
-            <a:r>
-              <a:t>10.  Results — Pareto Front</a:t>
-            </a:r>
-          </a:p>
-          <a:p>
-            <a:pPr>
-              <a:spcAft>
-                <a:spcPts val="1200"/>
-              </a:spcAft>
-              <a:defRPr sz="1600">
-                <a:solidFill>
-                  <a:srgbClr val="1F2D3D"/>
-                </a:solidFill>
-              </a:defRPr>
-            </a:pPr>
-            <a:r>
-              <a:t>11.  Results — Summary KPI Analysis</a:t>
-            </a:r>
-          </a:p>
-          <a:p>
-            <a:pPr>
-              <a:spcAft>
-                <a:spcPts val="1200"/>
-              </a:spcAft>
-              <a:defRPr sz="1600">
-                <a:solidFill>
-                  <a:srgbClr val="1F2D3D"/>
-                </a:solidFill>
-              </a:defRPr>
-            </a:pPr>
-            <a:r>
-              <a:t>12.  Results — Per-Scenario Heatmaps</a:t>
-            </a:r>
-          </a:p>
-          <a:p>
-            <a:pPr>
-              <a:spcAft>
-                <a:spcPts val="1200"/>
-              </a:spcAft>
-              <a:defRPr sz="1600">
-                <a:solidFill>
-                  <a:srgbClr val="1F2D3D"/>
-                </a:solidFill>
-              </a:defRPr>
-            </a:pPr>
-            <a:r>
-              <a:t>13.  Results — Policy × Scenario Heatmaps (90 days)</a:t>
-            </a:r>
-          </a:p>
-          <a:p>
-            <a:pPr>
-              <a:spcAft>
-                <a:spcPts val="1200"/>
-              </a:spcAft>
-              <a:defRPr sz="1600">
-                <a:solidFill>
-                  <a:srgbClr val="1F2D3D"/>
-                </a:solidFill>
-              </a:defRPr>
-            </a:pPr>
-            <a:r>
-              <a:t>14.  Results — Route Improver Comparison</a:t>
-            </a:r>
-          </a:p>
-          <a:p>
-            <a:pPr>
-              <a:spcAft>
-                <a:spcPts val="1200"/>
-              </a:spcAft>
-              <a:defRPr sz="1600">
-                <a:solidFill>
-                  <a:srgbClr val="1F2D3D"/>
-                </a:solidFill>
-              </a:defRPr>
-            </a:pPr>
-            <a:r>
-              <a:t>15.  Conclusions, Limitations &amp; Future Work</a:t>
-            </a:r>
-          </a:p>
-        </p:txBody>
-      </p:sp>
+                  <a:srgbClr val="C9D6E4"/>
+                </a:solidFill>
+              </a:defRPr>
+            </a:pPr>
+            <a:r>
+              <a:t>Time for questions</a:t>
+            </a:r>
+          </a:p>
+        </p:txBody>
+      </p:sp>
+      <p:pic>
+        <p:nvPicPr>
+          <p:cNvPr id="4" name="Picture 3" descr="policy_radar_combined.png"/>
+          <p:cNvPicPr>
+            <a:picLocks noChangeAspect="1"/>
+          </p:cNvPicPr>
+          <p:nvPr/>
+        </p:nvPicPr>
+        <p:blipFill>
+          <a:blip r:embed="rId2"/>
+          <a:stretch>
+            <a:fillRect/>
+          </a:stretch>
+        </p:blipFill>
+        <p:spPr>
+          <a:xfrm>
+            <a:off x="6278727" y="1216397"/>
+            <a:ext cx="5364327" cy="4425206"/>
+          </a:xfrm>
+          <a:prstGeom prst="rect">
+            <a:avLst/>
+          </a:prstGeom>
+        </p:spPr>
+      </p:pic>
     </p:spTree>
   </p:cSld>
   <p:clrMapOvr>
@@ -5523,7 +6818,7 @@
         <p:spPr>
           <a:xfrm>
             <a:off x="548640" y="1143000"/>
-            <a:ext cx="11094415" cy="2057400"/>
+            <a:ext cx="11094415" cy="1499616"/>
           </a:xfrm>
           <a:prstGeom prst="roundRect">
             <a:avLst/>
@@ -5558,30 +6853,504 @@
           </a:p>
         </p:txBody>
       </p:sp>
-      <p:pic>
-        <p:nvPicPr>
-          <p:cNvPr id="4" name="Picture 3" descr="eq_1.png"/>
-          <p:cNvPicPr>
-            <a:picLocks noChangeAspect="1"/>
-          </p:cNvPicPr>
+      <p:sp>
+        <p:nvSpPr>
+          <p:cNvPr id="4" name="TextBox 3"/>
+          <p:cNvSpPr txBox="1"/>
           <p:nvPr/>
-        </p:nvPicPr>
-        <p:blipFill>
-          <a:blip r:embed="rId2"/>
-          <a:stretch>
-            <a:fillRect/>
-          </a:stretch>
-        </p:blipFill>
-        <p:spPr>
-          <a:xfrm>
-            <a:off x="2901812" y="1234440"/>
-            <a:ext cx="6388070" cy="1874520"/>
+        </p:nvSpPr>
+        <p:spPr>
+          <a:xfrm>
+            <a:off x="731520" y="1234440"/>
+            <a:ext cx="10728655" cy="1316736"/>
           </a:xfrm>
           <a:prstGeom prst="rect">
             <a:avLst/>
           </a:prstGeom>
-        </p:spPr>
-      </p:pic>
+          <a:noFill/>
+        </p:spPr>
+        <p:txBody>
+          <a:bodyPr wrap="square">
+            <a:spAutoFit/>
+          </a:bodyPr>
+          <a:lstStyle/>
+          <a:p>
+            <a:pPr algn="ctr">
+              <a:defRPr sz="2000">
+                <a:solidFill>
+                  <a:srgbClr val="1F2D3D"/>
+                </a:solidFill>
+              </a:defRPr>
+            </a:pPr>
+            <mc:AlternateContent xmlns:mc="http://schemas.openxmlformats.org/markup-compatibility/2006" xmlns:a14="http://schemas.microsoft.com/office/drawing/2010/main" xmlns:m="http://schemas.openxmlformats.org/officeDocument/2006/math">
+              <mc:Choice Requires="a14">
+                <a14:m>
+                  <m:oMathPara>
+                    <m:oMath xmlns:w="http://schemas.openxmlformats.org/wordprocessingml/2006/main" xmlns:o="urn:schemas-microsoft-com:office:office" xmlns:v="urn:schemas-microsoft-com:vml" xmlns:w10="urn:schemas-microsoft-com:office:word" xmlns:pic="http://schemas.openxmlformats.org/drawingml/2006/picture" xmlns:wp="http://schemas.openxmlformats.org/drawingml/2006/wordprocessingDrawing">
+                      <m:limLow>
+                        <m:e>
+                          <m:r>
+                            <m:rPr>
+                              <m:sty m:val="p"/>
+                            </m:rPr>
+                            <m:t>max</m:t>
+                          </m:r>
+                        </m:e>
+                        <m:lim>
+                          <m:r>
+                            <m:t>y</m:t>
+                          </m:r>
+                          <m:r>
+                            <m:rPr>
+                              <m:sty m:val="p"/>
+                            </m:rPr>
+                            <m:t>,</m:t>
+                          </m:r>
+                          <m:r>
+                            <m:t> </m:t>
+                          </m:r>
+                          <m:r>
+                            <m:t>x</m:t>
+                          </m:r>
+                        </m:lim>
+                      </m:limLow>
+                      <m:r>
+                        <m:t> </m:t>
+                      </m:r>
+                      <m:r>
+                        <m:t> </m:t>
+                      </m:r>
+                      <m:nary>
+                        <m:naryPr>
+                          <m:chr m:val="∑"/>
+                          <m:limLoc m:val="undOvr"/>
+                          <m:subHide m:val="off"/>
+                          <m:supHide m:val="on"/>
+                        </m:naryPr>
+                        <m:sub>
+                          <m:r>
+                            <m:t>i</m:t>
+                          </m:r>
+                          <m:r>
+                            <m:rPr>
+                              <m:sty m:val="p"/>
+                            </m:rPr>
+                            <m:t>∈</m:t>
+                          </m:r>
+                          <m:r>
+                            <m:t>V</m:t>
+                          </m:r>
+                        </m:sub>
+                        <m:sup>
+                          <m:r>
+                            <m:t>​</m:t>
+                          </m:r>
+                        </m:sup>
+                        <m:e>
+                          <m:sSub>
+                            <m:e>
+                              <m:r>
+                                <m:t>p</m:t>
+                              </m:r>
+                            </m:e>
+                            <m:sub>
+                              <m:r>
+                                <m:t>i</m:t>
+                              </m:r>
+                            </m:sub>
+                          </m:sSub>
+                        </m:e>
+                      </m:nary>
+                      <m:r>
+                        <m:t> </m:t>
+                      </m:r>
+                      <m:sSub>
+                        <m:e>
+                          <m:r>
+                            <m:t>y</m:t>
+                          </m:r>
+                        </m:e>
+                        <m:sub>
+                          <m:r>
+                            <m:t>i</m:t>
+                          </m:r>
+                        </m:sub>
+                      </m:sSub>
+                      <m:r>
+                        <m:t> </m:t>
+                      </m:r>
+                      <m:r>
+                        <m:rPr>
+                          <m:sty m:val="p"/>
+                        </m:rPr>
+                        <m:t>−</m:t>
+                      </m:r>
+                      <m:r>
+                        <m:t> </m:t>
+                      </m:r>
+                      <m:r>
+                        <m:t>c</m:t>
+                      </m:r>
+                      <m:nary>
+                        <m:naryPr>
+                          <m:chr m:val="∑"/>
+                          <m:limLoc m:val="undOvr"/>
+                          <m:subHide m:val="off"/>
+                          <m:supHide m:val="on"/>
+                        </m:naryPr>
+                        <m:sub>
+                          <m:r>
+                            <m:rPr>
+                              <m:sty m:val="p"/>
+                            </m:rPr>
+                            <m:t>(</m:t>
+                          </m:r>
+                          <m:r>
+                            <m:t>i</m:t>
+                          </m:r>
+                          <m:r>
+                            <m:rPr>
+                              <m:sty m:val="p"/>
+                            </m:rPr>
+                            <m:t>,</m:t>
+                          </m:r>
+                          <m:r>
+                            <m:t>j</m:t>
+                          </m:r>
+                          <m:r>
+                            <m:rPr>
+                              <m:sty m:val="p"/>
+                            </m:rPr>
+                            <m:t>)</m:t>
+                          </m:r>
+                          <m:r>
+                            <m:rPr>
+                              <m:sty m:val="p"/>
+                            </m:rPr>
+                            <m:t>∈</m:t>
+                          </m:r>
+                          <m:r>
+                            <m:t>A</m:t>
+                          </m:r>
+                        </m:sub>
+                        <m:sup>
+                          <m:r>
+                            <m:t>​</m:t>
+                          </m:r>
+                        </m:sup>
+                        <m:e>
+                          <m:sSub>
+                            <m:e>
+                              <m:r>
+                                <m:t>d</m:t>
+                              </m:r>
+                            </m:e>
+                            <m:sub>
+                              <m:r>
+                                <m:t>i</m:t>
+                              </m:r>
+                              <m:r>
+                                <m:t>j</m:t>
+                              </m:r>
+                            </m:sub>
+                          </m:sSub>
+                        </m:e>
+                      </m:nary>
+                      <m:r>
+                        <m:t> </m:t>
+                      </m:r>
+                      <m:sSub>
+                        <m:e>
+                          <m:r>
+                            <m:t>x</m:t>
+                          </m:r>
+                        </m:e>
+                        <m:sub>
+                          <m:r>
+                            <m:t>i</m:t>
+                          </m:r>
+                          <m:r>
+                            <m:t>j</m:t>
+                          </m:r>
+                        </m:sub>
+                      </m:sSub>
+                    </m:oMath>
+                  </m:oMathPara>
+                </a14:m>
+              </mc:Choice>
+              <mc:Fallback>
+                <a:r>
+                  <a:rPr lang="en-US" sz="2000">
+                    <a:solidFill>
+                      <a:srgbClr val="1F2D3D"/>
+                    </a:solidFill>
+                  </a:rPr>
+                  <a:t>max_y,,x sum_i in V p_i, y_i - c sum_(i,j) in A d_ij, x_ij</a:t>
+                </a:r>
+              </mc:Fallback>
+            </mc:AlternateContent>
+          </a:p>
+          <a:p>
+            <a:pPr algn="ctr">
+              <a:defRPr sz="2000">
+                <a:solidFill>
+                  <a:srgbClr val="1F2D3D"/>
+                </a:solidFill>
+              </a:defRPr>
+            </a:pPr>
+            <mc:AlternateContent xmlns:mc="http://schemas.openxmlformats.org/markup-compatibility/2006" xmlns:a14="http://schemas.microsoft.com/office/drawing/2010/main" xmlns:m="http://schemas.openxmlformats.org/officeDocument/2006/math">
+              <mc:Choice Requires="a14">
+                <a14:m>
+                  <m:oMathPara>
+                    <m:oMath xmlns:w="http://schemas.openxmlformats.org/wordprocessingml/2006/main" xmlns:o="urn:schemas-microsoft-com:office:office" xmlns:v="urn:schemas-microsoft-com:vml" xmlns:w10="urn:schemas-microsoft-com:office:word" xmlns:pic="http://schemas.openxmlformats.org/drawingml/2006/picture" xmlns:wp="http://schemas.openxmlformats.org/drawingml/2006/wordprocessingDrawing">
+                      <m:r>
+                        <m:rPr>
+                          <m:sty m:val="p"/>
+                        </m:rPr>
+                        <m:t>s</m:t>
+                      </m:r>
+                      <m:r>
+                        <m:rPr>
+                          <m:sty m:val="p"/>
+                        </m:rPr>
+                        <m:t>.</m:t>
+                      </m:r>
+                      <m:r>
+                        <m:rPr>
+                          <m:sty m:val="p"/>
+                        </m:rPr>
+                        <m:t>t</m:t>
+                      </m:r>
+                      <m:r>
+                        <m:rPr>
+                          <m:sty m:val="p"/>
+                        </m:rPr>
+                        <m:t>.</m:t>
+                      </m:r>
+                      <m:r>
+                        <m:t> </m:t>
+                      </m:r>
+                      <m:r>
+                        <m:t> </m:t>
+                      </m:r>
+                      <m:nary>
+                        <m:naryPr>
+                          <m:chr m:val="∑"/>
+                          <m:limLoc m:val="undOvr"/>
+                          <m:subHide m:val="off"/>
+                          <m:supHide m:val="on"/>
+                        </m:naryPr>
+                        <m:sub>
+                          <m:r>
+                            <m:t>i</m:t>
+                          </m:r>
+                          <m:r>
+                            <m:rPr>
+                              <m:sty m:val="p"/>
+                            </m:rPr>
+                            <m:t>∈</m:t>
+                          </m:r>
+                          <m:r>
+                            <m:t>V</m:t>
+                          </m:r>
+                        </m:sub>
+                        <m:sup>
+                          <m:r>
+                            <m:t>​</m:t>
+                          </m:r>
+                        </m:sup>
+                        <m:e>
+                          <m:sSub>
+                            <m:e>
+                              <m:r>
+                                <m:t>q</m:t>
+                              </m:r>
+                            </m:e>
+                            <m:sub>
+                              <m:r>
+                                <m:t>i</m:t>
+                              </m:r>
+                            </m:sub>
+                          </m:sSub>
+                        </m:e>
+                      </m:nary>
+                      <m:r>
+                        <m:t> </m:t>
+                      </m:r>
+                      <m:sSub>
+                        <m:e>
+                          <m:r>
+                            <m:t>y</m:t>
+                          </m:r>
+                        </m:e>
+                        <m:sub>
+                          <m:r>
+                            <m:t>i</m:t>
+                          </m:r>
+                        </m:sub>
+                      </m:sSub>
+                      <m:r>
+                        <m:rPr>
+                          <m:sty m:val="p"/>
+                        </m:rPr>
+                        <m:t>≤</m:t>
+                      </m:r>
+                      <m:r>
+                        <m:t>Q</m:t>
+                      </m:r>
+                      <m:r>
+                        <m:rPr>
+                          <m:sty m:val="p"/>
+                        </m:rPr>
+                        <m:t>,</m:t>
+                      </m:r>
+                      <m:r>
+                        <m:t> </m:t>
+                      </m:r>
+                      <m:r>
+                        <m:t>x</m:t>
+                      </m:r>
+                      <m:r>
+                        <m:t> </m:t>
+                      </m:r>
+                      <m:r>
+                        <m:rPr>
+                          <m:sty m:val="p"/>
+                        </m:rPr>
+                        <m:t>r</m:t>
+                      </m:r>
+                      <m:r>
+                        <m:rPr>
+                          <m:sty m:val="p"/>
+                        </m:rPr>
+                        <m:t>o</m:t>
+                      </m:r>
+                      <m:r>
+                        <m:rPr>
+                          <m:sty m:val="p"/>
+                        </m:rPr>
+                        <m:t>u</m:t>
+                      </m:r>
+                      <m:r>
+                        <m:rPr>
+                          <m:sty m:val="p"/>
+                        </m:rPr>
+                        <m:t>t</m:t>
+                      </m:r>
+                      <m:r>
+                        <m:rPr>
+                          <m:sty m:val="p"/>
+                        </m:rPr>
+                        <m:t>e</m:t>
+                      </m:r>
+                      <m:r>
+                        <m:rPr>
+                          <m:sty m:val="p"/>
+                        </m:rPr>
+                        <m:t>s</m:t>
+                      </m:r>
+                      <m:r>
+                        <m:rPr>
+                          <m:sty m:val="p"/>
+                        </m:rPr>
+                        <m:t> </m:t>
+                      </m:r>
+                      <m:r>
+                        <m:rPr>
+                          <m:sty m:val="p"/>
+                        </m:rPr>
+                        <m:t>t</m:t>
+                      </m:r>
+                      <m:r>
+                        <m:rPr>
+                          <m:sty m:val="p"/>
+                        </m:rPr>
+                        <m:t>h</m:t>
+                      </m:r>
+                      <m:r>
+                        <m:rPr>
+                          <m:sty m:val="p"/>
+                        </m:rPr>
+                        <m:t>e</m:t>
+                      </m:r>
+                      <m:r>
+                        <m:rPr>
+                          <m:sty m:val="p"/>
+                        </m:rPr>
+                        <m:t> </m:t>
+                      </m:r>
+                      <m:r>
+                        <m:rPr>
+                          <m:sty m:val="p"/>
+                        </m:rPr>
+                        <m:t>s</m:t>
+                      </m:r>
+                      <m:r>
+                        <m:rPr>
+                          <m:sty m:val="p"/>
+                        </m:rPr>
+                        <m:t>e</m:t>
+                      </m:r>
+                      <m:r>
+                        <m:rPr>
+                          <m:sty m:val="p"/>
+                        </m:rPr>
+                        <m:t>l</m:t>
+                      </m:r>
+                      <m:r>
+                        <m:rPr>
+                          <m:sty m:val="p"/>
+                        </m:rPr>
+                        <m:t>e</m:t>
+                      </m:r>
+                      <m:r>
+                        <m:rPr>
+                          <m:sty m:val="p"/>
+                        </m:rPr>
+                        <m:t>c</m:t>
+                      </m:r>
+                      <m:r>
+                        <m:rPr>
+                          <m:sty m:val="p"/>
+                        </m:rPr>
+                        <m:t>t</m:t>
+                      </m:r>
+                      <m:r>
+                        <m:rPr>
+                          <m:sty m:val="p"/>
+                        </m:rPr>
+                        <m:t>e</m:t>
+                      </m:r>
+                      <m:r>
+                        <m:rPr>
+                          <m:sty m:val="p"/>
+                        </m:rPr>
+                        <m:t>d</m:t>
+                      </m:r>
+                      <m:r>
+                        <m:t> </m:t>
+                      </m:r>
+                      <m:r>
+                        <m:t>y</m:t>
+                      </m:r>
+                    </m:oMath>
+                  </m:oMathPara>
+                </a14:m>
+              </mc:Choice>
+              <mc:Fallback>
+                <a:r>
+                  <a:rPr lang="en-US" sz="2000">
+                    <a:solidFill>
+                      <a:srgbClr val="1F2D3D"/>
+                    </a:solidFill>
+                  </a:rPr>
+                  <a:t>s.t. sum_i in V q_i, y_i leq Q,quad x routes the selected y</a:t>
+                </a:r>
+              </mc:Fallback>
+            </mc:AlternateContent>
+          </a:p>
+        </p:txBody>
+      </p:sp>
       <p:sp>
         <p:nvSpPr>
           <p:cNvPr id="5" name="TextBox 4"/>
@@ -5590,8 +7359,8 @@
         </p:nvSpPr>
         <p:spPr>
           <a:xfrm>
-            <a:off x="548640" y="3429000"/>
-            <a:ext cx="11094415" cy="548640"/>
+            <a:off x="548640" y="2825496"/>
+            <a:ext cx="11094415" cy="822960"/>
           </a:xfrm>
           <a:prstGeom prst="rect">
             <a:avLst/>
@@ -5631,8 +7400,8 @@
         </p:nvSpPr>
         <p:spPr>
           <a:xfrm>
-            <a:off x="548640" y="4114800"/>
-            <a:ext cx="11094415" cy="2377440"/>
+            <a:off x="548640" y="3602736"/>
+            <a:ext cx="11094415" cy="2889504"/>
           </a:xfrm>
           <a:prstGeom prst="rect">
             <a:avLst/>
@@ -5771,563 +7540,21 @@
               </a:defRPr>
             </a:pPr>
             <a:r>
-              <a:t>Routing Simulator Philosophy — Modular Policy Pipeline</a:t>
-            </a:r>
-          </a:p>
-        </p:txBody>
-      </p:sp>
-      <p:sp>
-        <p:nvSpPr>
-          <p:cNvPr id="3" name="Chevron 2"/>
-          <p:cNvSpPr/>
-          <p:nvPr/>
-        </p:nvSpPr>
-        <p:spPr>
-          <a:xfrm>
-            <a:off x="548640" y="1554480"/>
-            <a:ext cx="2602153" cy="1371600"/>
-          </a:xfrm>
-          <a:prstGeom prst="chevron">
-            <a:avLst/>
-          </a:prstGeom>
-          <a:solidFill>
-            <a:srgbClr val="2E74B5"/>
-          </a:solidFill>
-          <a:ln>
-            <a:noFill/>
-          </a:ln>
-          <a:effectLst/>
-        </p:spPr>
-        <p:style>
-          <a:lnRef idx="1">
-            <a:schemeClr val="accent1"/>
-          </a:lnRef>
-          <a:fillRef idx="3">
-            <a:schemeClr val="accent1"/>
-          </a:fillRef>
-          <a:effectRef idx="2">
-            <a:schemeClr val="accent1"/>
-          </a:effectRef>
-          <a:fontRef idx="minor">
-            <a:schemeClr val="lt1"/>
-          </a:fontRef>
-        </p:style>
-        <p:txBody>
-          <a:bodyPr rtlCol="0" anchor="ctr" wrap="square"/>
-          <a:lstStyle/>
-          <a:p>
-            <a:pPr algn="ctr">
-              <a:defRPr sz="1500" b="1">
-                <a:solidFill>
-                  <a:srgbClr val="FFFFFF"/>
-                </a:solidFill>
-              </a:defRPr>
-            </a:pPr>
-            <a:r>
-              <a:t>Mandatory bin</a:t>
-            </a:r>
-          </a:p>
-          <a:p>
-            <a:pPr algn="ctr">
-              <a:defRPr sz="1500" b="1">
-                <a:solidFill>
-                  <a:srgbClr val="FFFFFF"/>
-                </a:solidFill>
-              </a:defRPr>
-            </a:pPr>
-            <a:r>
-              <a:t>selection strategy</a:t>
-            </a:r>
-          </a:p>
-        </p:txBody>
-      </p:sp>
-      <p:sp>
-        <p:nvSpPr>
-          <p:cNvPr id="4" name="TextBox 3"/>
+              <a:t>Objective of this Work</a:t>
+            </a:r>
+          </a:p>
+        </p:txBody>
+      </p:sp>
+      <p:sp>
+        <p:nvSpPr>
+          <p:cNvPr id="3" name="TextBox 2"/>
           <p:cNvSpPr txBox="1"/>
           <p:nvPr/>
         </p:nvSpPr>
         <p:spPr>
           <a:xfrm>
-            <a:off x="548640" y="3017520"/>
-            <a:ext cx="2602153" cy="822960"/>
-          </a:xfrm>
-          <a:prstGeom prst="rect">
-            <a:avLst/>
-          </a:prstGeom>
-          <a:noFill/>
-        </p:spPr>
-        <p:txBody>
-          <a:bodyPr wrap="square">
-            <a:spAutoFit/>
-          </a:bodyPr>
-          <a:lstStyle/>
-          <a:p>
-            <a:pPr algn="ctr">
-              <a:defRPr sz="1200">
-                <a:solidFill>
-                  <a:srgbClr val="5A6A7A"/>
-                </a:solidFill>
-              </a:defRPr>
-            </a:pPr>
-            <a:r>
-              <a:t>LA · LM · SL</a:t>
-            </a:r>
-          </a:p>
-          <a:p>
-            <a:pPr algn="ctr">
-              <a:defRPr sz="1200">
-                <a:solidFill>
-                  <a:srgbClr val="5A6A7A"/>
-                </a:solidFill>
-              </a:defRPr>
-            </a:pPr>
-            <a:r>
-              <a:t>which bins today?</a:t>
-            </a:r>
-          </a:p>
-        </p:txBody>
-      </p:sp>
-      <p:sp>
-        <p:nvSpPr>
-          <p:cNvPr id="5" name="Chevron 4"/>
-          <p:cNvSpPr/>
-          <p:nvPr/>
-        </p:nvSpPr>
-        <p:spPr>
-          <a:xfrm>
-            <a:off x="3379393" y="1554480"/>
-            <a:ext cx="2602153" cy="1371600"/>
-          </a:xfrm>
-          <a:prstGeom prst="chevron">
-            <a:avLst/>
-          </a:prstGeom>
-          <a:solidFill>
-            <a:srgbClr val="2E74B5"/>
-          </a:solidFill>
-          <a:ln>
-            <a:noFill/>
-          </a:ln>
-          <a:effectLst/>
-        </p:spPr>
-        <p:style>
-          <a:lnRef idx="1">
-            <a:schemeClr val="accent1"/>
-          </a:lnRef>
-          <a:fillRef idx="3">
-            <a:schemeClr val="accent1"/>
-          </a:fillRef>
-          <a:effectRef idx="2">
-            <a:schemeClr val="accent1"/>
-          </a:effectRef>
-          <a:fontRef idx="minor">
-            <a:schemeClr val="lt1"/>
-          </a:fontRef>
-        </p:style>
-        <p:txBody>
-          <a:bodyPr rtlCol="0" anchor="ctr" wrap="square"/>
-          <a:lstStyle/>
-          <a:p>
-            <a:pPr algn="ctr">
-              <a:defRPr sz="1500" b="1">
-                <a:solidFill>
-                  <a:srgbClr val="FFFFFF"/>
-                </a:solidFill>
-              </a:defRPr>
-            </a:pPr>
-            <a:r>
-              <a:t>Route</a:t>
-            </a:r>
-          </a:p>
-          <a:p>
-            <a:pPr algn="ctr">
-              <a:defRPr sz="1500" b="1">
-                <a:solidFill>
-                  <a:srgbClr val="FFFFFF"/>
-                </a:solidFill>
-              </a:defRPr>
-            </a:pPr>
-            <a:r>
-              <a:t>constructor</a:t>
-            </a:r>
-          </a:p>
-        </p:txBody>
-      </p:sp>
-      <p:sp>
-        <p:nvSpPr>
-          <p:cNvPr id="6" name="TextBox 5"/>
-          <p:cNvSpPr txBox="1"/>
-          <p:nvPr/>
-        </p:nvSpPr>
-        <p:spPr>
-          <a:xfrm>
-            <a:off x="3379393" y="3017520"/>
-            <a:ext cx="2602153" cy="822960"/>
-          </a:xfrm>
-          <a:prstGeom prst="rect">
-            <a:avLst/>
-          </a:prstGeom>
-          <a:noFill/>
-        </p:spPr>
-        <p:txBody>
-          <a:bodyPr wrap="square">
-            <a:spAutoFit/>
-          </a:bodyPr>
-          <a:lstStyle/>
-          <a:p>
-            <a:pPr algn="ctr">
-              <a:defRPr sz="1200">
-                <a:solidFill>
-                  <a:srgbClr val="5A6A7A"/>
-                </a:solidFill>
-              </a:defRPr>
-            </a:pPr>
-            <a:r>
-              <a:t>exact · meta-h. · hyper-h.</a:t>
-            </a:r>
-          </a:p>
-          <a:p>
-            <a:pPr algn="ctr">
-              <a:defRPr sz="1200">
-                <a:solidFill>
-                  <a:srgbClr val="5A6A7A"/>
-                </a:solidFill>
-              </a:defRPr>
-            </a:pPr>
-            <a:r>
-              <a:t>build the routes</a:t>
-            </a:r>
-          </a:p>
-        </p:txBody>
-      </p:sp>
-      <p:sp>
-        <p:nvSpPr>
-          <p:cNvPr id="7" name="Chevron 6"/>
-          <p:cNvSpPr/>
-          <p:nvPr/>
-        </p:nvSpPr>
-        <p:spPr>
-          <a:xfrm>
-            <a:off x="6210146" y="1554480"/>
-            <a:ext cx="2602153" cy="1371600"/>
-          </a:xfrm>
-          <a:prstGeom prst="chevron">
-            <a:avLst/>
-          </a:prstGeom>
-          <a:solidFill>
-            <a:srgbClr val="5A6A7A"/>
-          </a:solidFill>
-          <a:ln>
-            <a:noFill/>
-          </a:ln>
-          <a:effectLst/>
-        </p:spPr>
-        <p:style>
-          <a:lnRef idx="1">
-            <a:schemeClr val="accent1"/>
-          </a:lnRef>
-          <a:fillRef idx="3">
-            <a:schemeClr val="accent1"/>
-          </a:fillRef>
-          <a:effectRef idx="2">
-            <a:schemeClr val="accent1"/>
-          </a:effectRef>
-          <a:fontRef idx="minor">
-            <a:schemeClr val="lt1"/>
-          </a:fontRef>
-        </p:style>
-        <p:txBody>
-          <a:bodyPr rtlCol="0" anchor="ctr" wrap="square"/>
-          <a:lstStyle/>
-          <a:p>
-            <a:pPr algn="ctr">
-              <a:defRPr sz="1500" b="1">
-                <a:solidFill>
-                  <a:srgbClr val="FFFFFF"/>
-                </a:solidFill>
-              </a:defRPr>
-            </a:pPr>
-            <a:r>
-              <a:t>Acceptance criterion</a:t>
-            </a:r>
-          </a:p>
-          <a:p>
-            <a:pPr algn="ctr">
-              <a:defRPr sz="1500" b="1">
-                <a:solidFill>
-                  <a:srgbClr val="FFFFFF"/>
-                </a:solidFill>
-              </a:defRPr>
-            </a:pPr>
-            <a:r>
-              <a:t>(optional)</a:t>
-            </a:r>
-          </a:p>
-        </p:txBody>
-      </p:sp>
-      <p:sp>
-        <p:nvSpPr>
-          <p:cNvPr id="8" name="TextBox 7"/>
-          <p:cNvSpPr txBox="1"/>
-          <p:nvPr/>
-        </p:nvSpPr>
-        <p:spPr>
-          <a:xfrm>
-            <a:off x="6210146" y="3017520"/>
-            <a:ext cx="2602153" cy="822960"/>
-          </a:xfrm>
-          <a:prstGeom prst="rect">
-            <a:avLst/>
-          </a:prstGeom>
-          <a:noFill/>
-        </p:spPr>
-        <p:txBody>
-          <a:bodyPr wrap="square">
-            <a:spAutoFit/>
-          </a:bodyPr>
-          <a:lstStyle/>
-          <a:p>
-            <a:pPr algn="ctr">
-              <a:defRPr sz="1200">
-                <a:solidFill>
-                  <a:srgbClr val="5A6A7A"/>
-                </a:solidFill>
-              </a:defRPr>
-            </a:pPr>
-            <a:r>
-              <a:t>constructor-dependent</a:t>
-            </a:r>
-          </a:p>
-          <a:p>
-            <a:pPr algn="ctr">
-              <a:defRPr sz="1200">
-                <a:solidFill>
-                  <a:srgbClr val="5A6A7A"/>
-                </a:solidFill>
-              </a:defRPr>
-            </a:pPr>
-            <a:r>
-              <a:t>e.g. BMC, OI</a:t>
-            </a:r>
-          </a:p>
-        </p:txBody>
-      </p:sp>
-      <p:sp>
-        <p:nvSpPr>
-          <p:cNvPr id="9" name="Chevron 8"/>
-          <p:cNvSpPr/>
-          <p:nvPr/>
-        </p:nvSpPr>
-        <p:spPr>
-          <a:xfrm>
-            <a:off x="9040899" y="1554480"/>
-            <a:ext cx="2602153" cy="1371600"/>
-          </a:xfrm>
-          <a:prstGeom prst="chevron">
-            <a:avLst/>
-          </a:prstGeom>
-          <a:solidFill>
-            <a:srgbClr val="5A6A7A"/>
-          </a:solidFill>
-          <a:ln>
-            <a:noFill/>
-          </a:ln>
-          <a:effectLst/>
-        </p:spPr>
-        <p:style>
-          <a:lnRef idx="1">
-            <a:schemeClr val="accent1"/>
-          </a:lnRef>
-          <a:fillRef idx="3">
-            <a:schemeClr val="accent1"/>
-          </a:fillRef>
-          <a:effectRef idx="2">
-            <a:schemeClr val="accent1"/>
-          </a:effectRef>
-          <a:fontRef idx="minor">
-            <a:schemeClr val="lt1"/>
-          </a:fontRef>
-        </p:style>
-        <p:txBody>
-          <a:bodyPr rtlCol="0" anchor="ctr" wrap="square"/>
-          <a:lstStyle/>
-          <a:p>
-            <a:pPr algn="ctr">
-              <a:defRPr sz="1500" b="1">
-                <a:solidFill>
-                  <a:srgbClr val="FFFFFF"/>
-                </a:solidFill>
-              </a:defRPr>
-            </a:pPr>
-            <a:r>
-              <a:t>Route improver</a:t>
-            </a:r>
-          </a:p>
-          <a:p>
-            <a:pPr algn="ctr">
-              <a:defRPr sz="1500" b="1">
-                <a:solidFill>
-                  <a:srgbClr val="FFFFFF"/>
-                </a:solidFill>
-              </a:defRPr>
-            </a:pPr>
-            <a:r>
-              <a:t>(optional)</a:t>
-            </a:r>
-          </a:p>
-        </p:txBody>
-      </p:sp>
-      <p:sp>
-        <p:nvSpPr>
-          <p:cNvPr id="10" name="TextBox 9"/>
-          <p:cNvSpPr txBox="1"/>
-          <p:nvPr/>
-        </p:nvSpPr>
-        <p:spPr>
-          <a:xfrm>
-            <a:off x="9040899" y="3017520"/>
-            <a:ext cx="2602153" cy="822960"/>
-          </a:xfrm>
-          <a:prstGeom prst="rect">
-            <a:avLst/>
-          </a:prstGeom>
-          <a:noFill/>
-        </p:spPr>
-        <p:txBody>
-          <a:bodyPr wrap="square">
-            <a:spAutoFit/>
-          </a:bodyPr>
-          <a:lstStyle/>
-          <a:p>
-            <a:pPr algn="ctr">
-              <a:defRPr sz="1200">
-                <a:solidFill>
-                  <a:srgbClr val="5A6A7A"/>
-                </a:solidFill>
-              </a:defRPr>
-            </a:pPr>
-            <a:r>
-              <a:t>CLS · FTSP</a:t>
-            </a:r>
-          </a:p>
-          <a:p>
-            <a:pPr algn="ctr">
-              <a:defRPr sz="1200">
-                <a:solidFill>
-                  <a:srgbClr val="5A6A7A"/>
-                </a:solidFill>
-              </a:defRPr>
-            </a:pPr>
-            <a:r>
-              <a:t>post-optimisation</a:t>
-            </a:r>
-          </a:p>
-        </p:txBody>
-      </p:sp>
-      <p:sp>
-        <p:nvSpPr>
-          <p:cNvPr id="11" name="Rounded Rectangle 10"/>
-          <p:cNvSpPr/>
-          <p:nvPr/>
-        </p:nvSpPr>
-        <p:spPr>
-          <a:xfrm>
-            <a:off x="2834640" y="4023360"/>
-            <a:ext cx="6522415" cy="731520"/>
-          </a:xfrm>
-          <a:prstGeom prst="roundRect">
-            <a:avLst/>
-          </a:prstGeom>
-          <a:solidFill>
-            <a:srgbClr val="1F2D3D"/>
-          </a:solidFill>
-          <a:ln>
-            <a:noFill/>
-          </a:ln>
-          <a:effectLst/>
-        </p:spPr>
-        <p:style>
-          <a:lnRef idx="1">
-            <a:schemeClr val="accent1"/>
-          </a:lnRef>
-          <a:fillRef idx="3">
-            <a:schemeClr val="accent1"/>
-          </a:fillRef>
-          <a:effectRef idx="2">
-            <a:schemeClr val="accent1"/>
-          </a:effectRef>
-          <a:fontRef idx="minor">
-            <a:schemeClr val="lt1"/>
-          </a:fontRef>
-        </p:style>
-        <p:txBody>
-          <a:bodyPr rtlCol="0" anchor="ctr"/>
-          <a:lstStyle/>
-          <a:p>
-            <a:pPr algn="ctr">
-              <a:defRPr sz="1400" b="1">
-                <a:solidFill>
-                  <a:srgbClr val="FFFFFF"/>
-                </a:solidFill>
-              </a:defRPr>
-            </a:pPr>
-            <a:r>
-              <a:t>Multi-day simulator: region × graph size × distribution</a:t>
-            </a:r>
-          </a:p>
-        </p:txBody>
-      </p:sp>
-      <p:sp>
-        <p:nvSpPr>
-          <p:cNvPr id="12" name="TextBox 11"/>
-          <p:cNvSpPr txBox="1"/>
-          <p:nvPr/>
-        </p:nvSpPr>
-        <p:spPr>
-          <a:xfrm>
-            <a:off x="548640" y="5120640"/>
-            <a:ext cx="11094415" cy="548640"/>
-          </a:xfrm>
-          <a:prstGeom prst="rect">
-            <a:avLst/>
-          </a:prstGeom>
-          <a:noFill/>
-        </p:spPr>
-        <p:txBody>
-          <a:bodyPr wrap="square">
-            <a:spAutoFit/>
-          </a:bodyPr>
-          <a:lstStyle/>
-          <a:p>
-            <a:r>
-              <a:rPr b="1" sz="1100">
-                <a:solidFill>
-                  <a:srgbClr val="1F2D3D"/>
-                </a:solidFill>
-              </a:rPr>
-              <a:t>Figure 1: </a:t>
-            </a:r>
-            <a:r>
-              <a:rPr i="1" sz="1100">
-                <a:solidFill>
-                  <a:srgbClr val="5A6A7A"/>
-                </a:solidFill>
-              </a:rPr>
-              <a:t>Every daily routing policy decomposes into a mandatory bin-selection strategy, a route constructor, an optional acceptance criterion and an optional route improver.</a:t>
-            </a:r>
-          </a:p>
-        </p:txBody>
-      </p:sp>
-      <p:sp>
-        <p:nvSpPr>
-          <p:cNvPr id="13" name="TextBox 12"/>
-          <p:cNvSpPr txBox="1"/>
-          <p:nvPr/>
-        </p:nvSpPr>
-        <p:spPr>
-          <a:xfrm>
-            <a:off x="548640" y="5806440"/>
-            <a:ext cx="11094415" cy="685800"/>
+            <a:off x="548640" y="1188720"/>
+            <a:ext cx="11094415" cy="5303520"/>
           </a:xfrm>
           <a:prstGeom prst="rect">
             <a:avLst/>
@@ -6344,14 +7571,14 @@
               <a:spcAft>
                 <a:spcPts val="1000"/>
               </a:spcAft>
-              <a:defRPr sz="1400">
+              <a:defRPr sz="1600">
                 <a:solidFill>
                   <a:srgbClr val="1F2D3D"/>
                 </a:solidFill>
               </a:defRPr>
             </a:pPr>
             <a:r>
-              <a:t>•  Every daily routing policy is a composition of interchangeable stages, benchmarked under identical conditions</a:t>
+              <a:t>•  Benchmark, under one simulation framework, the full space of daily routing policies for the multi-period VRPP in smart waste collection</a:t>
             </a:r>
           </a:p>
           <a:p>
@@ -6359,14 +7586,59 @@
               <a:spcAft>
                 <a:spcPts val="1000"/>
               </a:spcAft>
-              <a:defRPr sz="1400">
+              <a:defRPr sz="1600">
                 <a:solidFill>
                   <a:srgbClr val="1F2D3D"/>
                 </a:solidFill>
               </a:defRPr>
             </a:pPr>
             <a:r>
-              <a:t>•  The simulator replays multi-day scenarios (region × graph size × waste distribution), logging overflows, kg, km, kg/km and profit for every policy combination</a:t>
+              <a:t>•  Exact methods: Branch-Price-and-Cut (BPC) and SWC-TCF — optimality reference points at the daily-subproblem scale</a:t>
+            </a:r>
+          </a:p>
+          <a:p>
+            <a:pPr>
+              <a:spcAft>
+                <a:spcPts val="1000"/>
+              </a:spcAft>
+              <a:defRPr sz="1600">
+                <a:solidFill>
+                  <a:srgbClr val="1F2D3D"/>
+                </a:solidFill>
+              </a:defRPr>
+            </a:pPr>
+            <a:r>
+              <a:t>•  Meta-heuristics: Hybrid Genetic Search (HGS), Adaptive Large Neighborhood Search (ALNS), Simulated Annealing Neighborhood Search (SANS), Policy-Gradient CLNS (PG-CLNS)</a:t>
+            </a:r>
+          </a:p>
+          <a:p>
+            <a:pPr>
+              <a:spcAft>
+                <a:spcPts val="1000"/>
+              </a:spcAft>
+              <a:defRPr sz="1600">
+                <a:solidFill>
+                  <a:srgbClr val="1F2D3D"/>
+                </a:solidFill>
+              </a:defRPr>
+            </a:pPr>
+            <a:r>
+              <a:t>•  Hyper-heuristics: Particle Swarm Optimisation Memetic Algorithm (PSOMA) and Ant Colony Optimisation Hyper-Heuristic (ACO-HH)</a:t>
+            </a:r>
+          </a:p>
+          <a:p>
+            <a:pPr>
+              <a:spcAft>
+                <a:spcPts val="1000"/>
+              </a:spcAft>
+              <a:defRPr sz="1600">
+                <a:solidFill>
+                  <a:srgbClr val="1F2D3D"/>
+                </a:solidFill>
+              </a:defRPr>
+            </a:pPr>
+            <a:r>
+              <a:t>•  Question: which combination of mandatory selection strategy, route constructor and route improver dominates the overflow vs kg/km trade-off, and how stable is that answer across scenarios and horizons?</a:t>
             </a:r>
           </a:p>
         </p:txBody>
@@ -6436,27 +7708,27 @@
               </a:defRPr>
             </a:pPr>
             <a:r>
-              <a:t>Mandatory Node Selection Strategies</a:t>
-            </a:r>
-          </a:p>
-        </p:txBody>
-      </p:sp>
-      <p:sp>
-        <p:nvSpPr>
-          <p:cNvPr id="3" name="Rounded Rectangle 2"/>
+              <a:t>Routing Simulator Philosophy — Modular Policy Pipeline</a:t>
+            </a:r>
+          </a:p>
+        </p:txBody>
+      </p:sp>
+      <p:sp>
+        <p:nvSpPr>
+          <p:cNvPr id="3" name="Chevron 2"/>
           <p:cNvSpPr/>
           <p:nvPr/>
         </p:nvSpPr>
         <p:spPr>
           <a:xfrm>
-            <a:off x="548640" y="1143000"/>
-            <a:ext cx="11094415" cy="2743200"/>
-          </a:xfrm>
-          <a:prstGeom prst="roundRect">
+            <a:off x="548640" y="1554480"/>
+            <a:ext cx="2602153" cy="1371600"/>
+          </a:xfrm>
+          <a:prstGeom prst="chevron">
             <a:avLst/>
           </a:prstGeom>
           <a:solidFill>
-            <a:srgbClr val="F0F4FA"/>
+            <a:srgbClr val="2E74B5"/>
           </a:solidFill>
           <a:ln>
             <a:noFill/>
@@ -6478,47 +7750,44 @@
           </a:fontRef>
         </p:style>
         <p:txBody>
-          <a:bodyPr rtlCol="0" anchor="ctr"/>
-          <a:lstStyle/>
-          <a:p>
-            <a:pPr algn="ctr"/>
-          </a:p>
-        </p:txBody>
-      </p:sp>
-      <p:pic>
-        <p:nvPicPr>
-          <p:cNvPr id="4" name="Picture 3" descr="eq_2.png"/>
-          <p:cNvPicPr>
-            <a:picLocks noChangeAspect="1"/>
-          </p:cNvPicPr>
-          <p:nvPr/>
-        </p:nvPicPr>
-        <p:blipFill>
-          <a:blip r:embed="rId2"/>
-          <a:stretch>
-            <a:fillRect/>
-          </a:stretch>
-        </p:blipFill>
-        <p:spPr>
-          <a:xfrm>
-            <a:off x="2145586" y="1234440"/>
-            <a:ext cx="7900522" cy="2560320"/>
-          </a:xfrm>
-          <a:prstGeom prst="rect">
-            <a:avLst/>
-          </a:prstGeom>
-        </p:spPr>
-      </p:pic>
-      <p:sp>
-        <p:nvSpPr>
-          <p:cNvPr id="5" name="TextBox 4"/>
+          <a:bodyPr rtlCol="0" anchor="ctr" wrap="square"/>
+          <a:lstStyle/>
+          <a:p>
+            <a:pPr algn="ctr">
+              <a:defRPr sz="1500" b="1">
+                <a:solidFill>
+                  <a:srgbClr val="FFFFFF"/>
+                </a:solidFill>
+              </a:defRPr>
+            </a:pPr>
+            <a:r>
+              <a:t>Mandatory bin</a:t>
+            </a:r>
+          </a:p>
+          <a:p>
+            <a:pPr algn="ctr">
+              <a:defRPr sz="1500" b="1">
+                <a:solidFill>
+                  <a:srgbClr val="FFFFFF"/>
+                </a:solidFill>
+              </a:defRPr>
+            </a:pPr>
+            <a:r>
+              <a:t>selection strategy</a:t>
+            </a:r>
+          </a:p>
+        </p:txBody>
+      </p:sp>
+      <p:sp>
+        <p:nvSpPr>
+          <p:cNvPr id="4" name="TextBox 3"/>
           <p:cNvSpPr txBox="1"/>
           <p:nvPr/>
         </p:nvSpPr>
         <p:spPr>
           <a:xfrm>
-            <a:off x="548640" y="4114800"/>
-            <a:ext cx="11094415" cy="548640"/>
+            <a:off x="548640" y="3017520"/>
+            <a:ext cx="2602153" cy="822960"/>
           </a:xfrm>
           <a:prstGeom prst="rect">
             <a:avLst/>
@@ -6531,21 +7800,92 @@
           </a:bodyPr>
           <a:lstStyle/>
           <a:p>
-            <a:r>
-              <a:rPr b="1" sz="1100">
-                <a:solidFill>
-                  <a:srgbClr val="1F2D3D"/>
-                </a:solidFill>
-              </a:rPr>
-              <a:t>Equation 2: </a:t>
-            </a:r>
-            <a:r>
-              <a:rPr i="1" sz="1100">
+            <a:pPr algn="ctr">
+              <a:defRPr sz="1200">
                 <a:solidFill>
                   <a:srgbClr val="5A6A7A"/>
                 </a:solidFill>
-              </a:rPr>
-              <a:t>The three mandatory selection rules — Look-Ahead (LA) forecasts fill level f_i at t+δ, Last-Minute (LM) reacts once f_i crosses a critical fill threshold CF, and Service-Level (SL) bounds each bin's overflow probability by a target confidence α.</a:t>
+              </a:defRPr>
+            </a:pPr>
+            <a:r>
+              <a:t>LA · LM · SL</a:t>
+            </a:r>
+          </a:p>
+          <a:p>
+            <a:pPr algn="ctr">
+              <a:defRPr sz="1200">
+                <a:solidFill>
+                  <a:srgbClr val="5A6A7A"/>
+                </a:solidFill>
+              </a:defRPr>
+            </a:pPr>
+            <a:r>
+              <a:t>which bins today?</a:t>
+            </a:r>
+          </a:p>
+        </p:txBody>
+      </p:sp>
+      <p:sp>
+        <p:nvSpPr>
+          <p:cNvPr id="5" name="Chevron 4"/>
+          <p:cNvSpPr/>
+          <p:nvPr/>
+        </p:nvSpPr>
+        <p:spPr>
+          <a:xfrm>
+            <a:off x="3379393" y="1554480"/>
+            <a:ext cx="2602153" cy="1371600"/>
+          </a:xfrm>
+          <a:prstGeom prst="chevron">
+            <a:avLst/>
+          </a:prstGeom>
+          <a:solidFill>
+            <a:srgbClr val="2E74B5"/>
+          </a:solidFill>
+          <a:ln>
+            <a:noFill/>
+          </a:ln>
+          <a:effectLst/>
+        </p:spPr>
+        <p:style>
+          <a:lnRef idx="1">
+            <a:schemeClr val="accent1"/>
+          </a:lnRef>
+          <a:fillRef idx="3">
+            <a:schemeClr val="accent1"/>
+          </a:fillRef>
+          <a:effectRef idx="2">
+            <a:schemeClr val="accent1"/>
+          </a:effectRef>
+          <a:fontRef idx="minor">
+            <a:schemeClr val="lt1"/>
+          </a:fontRef>
+        </p:style>
+        <p:txBody>
+          <a:bodyPr rtlCol="0" anchor="ctr" wrap="square"/>
+          <a:lstStyle/>
+          <a:p>
+            <a:pPr algn="ctr">
+              <a:defRPr sz="1500" b="1">
+                <a:solidFill>
+                  <a:srgbClr val="FFFFFF"/>
+                </a:solidFill>
+              </a:defRPr>
+            </a:pPr>
+            <a:r>
+              <a:t>Route</a:t>
+            </a:r>
+          </a:p>
+          <a:p>
+            <a:pPr algn="ctr">
+              <a:defRPr sz="1500" b="1">
+                <a:solidFill>
+                  <a:srgbClr val="FFFFFF"/>
+                </a:solidFill>
+              </a:defRPr>
+            </a:pPr>
+            <a:r>
+              <a:t>constructor</a:t>
             </a:r>
           </a:p>
         </p:txBody>
@@ -6558,8 +7898,373 @@
         </p:nvSpPr>
         <p:spPr>
           <a:xfrm>
-            <a:off x="548640" y="4800600"/>
-            <a:ext cx="11094415" cy="1691640"/>
+            <a:off x="3379393" y="3017520"/>
+            <a:ext cx="2602153" cy="822960"/>
+          </a:xfrm>
+          <a:prstGeom prst="rect">
+            <a:avLst/>
+          </a:prstGeom>
+          <a:noFill/>
+        </p:spPr>
+        <p:txBody>
+          <a:bodyPr wrap="square">
+            <a:spAutoFit/>
+          </a:bodyPr>
+          <a:lstStyle/>
+          <a:p>
+            <a:pPr algn="ctr">
+              <a:defRPr sz="1200">
+                <a:solidFill>
+                  <a:srgbClr val="5A6A7A"/>
+                </a:solidFill>
+              </a:defRPr>
+            </a:pPr>
+            <a:r>
+              <a:t>exact · meta-h. · hyper-h.</a:t>
+            </a:r>
+          </a:p>
+          <a:p>
+            <a:pPr algn="ctr">
+              <a:defRPr sz="1200">
+                <a:solidFill>
+                  <a:srgbClr val="5A6A7A"/>
+                </a:solidFill>
+              </a:defRPr>
+            </a:pPr>
+            <a:r>
+              <a:t>build the routes</a:t>
+            </a:r>
+          </a:p>
+        </p:txBody>
+      </p:sp>
+      <p:sp>
+        <p:nvSpPr>
+          <p:cNvPr id="7" name="Chevron 6"/>
+          <p:cNvSpPr/>
+          <p:nvPr/>
+        </p:nvSpPr>
+        <p:spPr>
+          <a:xfrm>
+            <a:off x="6210146" y="1554480"/>
+            <a:ext cx="2602153" cy="1371600"/>
+          </a:xfrm>
+          <a:prstGeom prst="chevron">
+            <a:avLst/>
+          </a:prstGeom>
+          <a:solidFill>
+            <a:srgbClr val="5A6A7A"/>
+          </a:solidFill>
+          <a:ln>
+            <a:noFill/>
+          </a:ln>
+          <a:effectLst/>
+        </p:spPr>
+        <p:style>
+          <a:lnRef idx="1">
+            <a:schemeClr val="accent1"/>
+          </a:lnRef>
+          <a:fillRef idx="3">
+            <a:schemeClr val="accent1"/>
+          </a:fillRef>
+          <a:effectRef idx="2">
+            <a:schemeClr val="accent1"/>
+          </a:effectRef>
+          <a:fontRef idx="minor">
+            <a:schemeClr val="lt1"/>
+          </a:fontRef>
+        </p:style>
+        <p:txBody>
+          <a:bodyPr rtlCol="0" anchor="ctr" wrap="square"/>
+          <a:lstStyle/>
+          <a:p>
+            <a:pPr algn="ctr">
+              <a:defRPr sz="1500" b="1">
+                <a:solidFill>
+                  <a:srgbClr val="FFFFFF"/>
+                </a:solidFill>
+              </a:defRPr>
+            </a:pPr>
+            <a:r>
+              <a:t>Acceptance criterion</a:t>
+            </a:r>
+          </a:p>
+          <a:p>
+            <a:pPr algn="ctr">
+              <a:defRPr sz="1500" b="1">
+                <a:solidFill>
+                  <a:srgbClr val="FFFFFF"/>
+                </a:solidFill>
+              </a:defRPr>
+            </a:pPr>
+            <a:r>
+              <a:t>(optional)</a:t>
+            </a:r>
+          </a:p>
+        </p:txBody>
+      </p:sp>
+      <p:sp>
+        <p:nvSpPr>
+          <p:cNvPr id="8" name="TextBox 7"/>
+          <p:cNvSpPr txBox="1"/>
+          <p:nvPr/>
+        </p:nvSpPr>
+        <p:spPr>
+          <a:xfrm>
+            <a:off x="6210146" y="3017520"/>
+            <a:ext cx="2602153" cy="822960"/>
+          </a:xfrm>
+          <a:prstGeom prst="rect">
+            <a:avLst/>
+          </a:prstGeom>
+          <a:noFill/>
+        </p:spPr>
+        <p:txBody>
+          <a:bodyPr wrap="square">
+            <a:spAutoFit/>
+          </a:bodyPr>
+          <a:lstStyle/>
+          <a:p>
+            <a:pPr algn="ctr">
+              <a:defRPr sz="1200">
+                <a:solidFill>
+                  <a:srgbClr val="5A6A7A"/>
+                </a:solidFill>
+              </a:defRPr>
+            </a:pPr>
+            <a:r>
+              <a:t>constructor-dependent</a:t>
+            </a:r>
+          </a:p>
+          <a:p>
+            <a:pPr algn="ctr">
+              <a:defRPr sz="1200">
+                <a:solidFill>
+                  <a:srgbClr val="5A6A7A"/>
+                </a:solidFill>
+              </a:defRPr>
+            </a:pPr>
+            <a:r>
+              <a:t>e.g. BMC, OI</a:t>
+            </a:r>
+          </a:p>
+        </p:txBody>
+      </p:sp>
+      <p:sp>
+        <p:nvSpPr>
+          <p:cNvPr id="9" name="Chevron 8"/>
+          <p:cNvSpPr/>
+          <p:nvPr/>
+        </p:nvSpPr>
+        <p:spPr>
+          <a:xfrm>
+            <a:off x="9040899" y="1554480"/>
+            <a:ext cx="2602153" cy="1371600"/>
+          </a:xfrm>
+          <a:prstGeom prst="chevron">
+            <a:avLst/>
+          </a:prstGeom>
+          <a:solidFill>
+            <a:srgbClr val="5A6A7A"/>
+          </a:solidFill>
+          <a:ln>
+            <a:noFill/>
+          </a:ln>
+          <a:effectLst/>
+        </p:spPr>
+        <p:style>
+          <a:lnRef idx="1">
+            <a:schemeClr val="accent1"/>
+          </a:lnRef>
+          <a:fillRef idx="3">
+            <a:schemeClr val="accent1"/>
+          </a:fillRef>
+          <a:effectRef idx="2">
+            <a:schemeClr val="accent1"/>
+          </a:effectRef>
+          <a:fontRef idx="minor">
+            <a:schemeClr val="lt1"/>
+          </a:fontRef>
+        </p:style>
+        <p:txBody>
+          <a:bodyPr rtlCol="0" anchor="ctr" wrap="square"/>
+          <a:lstStyle/>
+          <a:p>
+            <a:pPr algn="ctr">
+              <a:defRPr sz="1500" b="1">
+                <a:solidFill>
+                  <a:srgbClr val="FFFFFF"/>
+                </a:solidFill>
+              </a:defRPr>
+            </a:pPr>
+            <a:r>
+              <a:t>Route improver</a:t>
+            </a:r>
+          </a:p>
+          <a:p>
+            <a:pPr algn="ctr">
+              <a:defRPr sz="1500" b="1">
+                <a:solidFill>
+                  <a:srgbClr val="FFFFFF"/>
+                </a:solidFill>
+              </a:defRPr>
+            </a:pPr>
+            <a:r>
+              <a:t>(optional)</a:t>
+            </a:r>
+          </a:p>
+        </p:txBody>
+      </p:sp>
+      <p:sp>
+        <p:nvSpPr>
+          <p:cNvPr id="10" name="TextBox 9"/>
+          <p:cNvSpPr txBox="1"/>
+          <p:nvPr/>
+        </p:nvSpPr>
+        <p:spPr>
+          <a:xfrm>
+            <a:off x="9040899" y="3017520"/>
+            <a:ext cx="2602153" cy="822960"/>
+          </a:xfrm>
+          <a:prstGeom prst="rect">
+            <a:avLst/>
+          </a:prstGeom>
+          <a:noFill/>
+        </p:spPr>
+        <p:txBody>
+          <a:bodyPr wrap="square">
+            <a:spAutoFit/>
+          </a:bodyPr>
+          <a:lstStyle/>
+          <a:p>
+            <a:pPr algn="ctr">
+              <a:defRPr sz="1200">
+                <a:solidFill>
+                  <a:srgbClr val="5A6A7A"/>
+                </a:solidFill>
+              </a:defRPr>
+            </a:pPr>
+            <a:r>
+              <a:t>CLS · FTSP</a:t>
+            </a:r>
+          </a:p>
+          <a:p>
+            <a:pPr algn="ctr">
+              <a:defRPr sz="1200">
+                <a:solidFill>
+                  <a:srgbClr val="5A6A7A"/>
+                </a:solidFill>
+              </a:defRPr>
+            </a:pPr>
+            <a:r>
+              <a:t>post-optimisation</a:t>
+            </a:r>
+          </a:p>
+        </p:txBody>
+      </p:sp>
+      <p:sp>
+        <p:nvSpPr>
+          <p:cNvPr id="11" name="Rounded Rectangle 10"/>
+          <p:cNvSpPr/>
+          <p:nvPr/>
+        </p:nvSpPr>
+        <p:spPr>
+          <a:xfrm>
+            <a:off x="2834640" y="4023360"/>
+            <a:ext cx="6522415" cy="731520"/>
+          </a:xfrm>
+          <a:prstGeom prst="roundRect">
+            <a:avLst/>
+          </a:prstGeom>
+          <a:solidFill>
+            <a:srgbClr val="1F2D3D"/>
+          </a:solidFill>
+          <a:ln>
+            <a:noFill/>
+          </a:ln>
+          <a:effectLst/>
+        </p:spPr>
+        <p:style>
+          <a:lnRef idx="1">
+            <a:schemeClr val="accent1"/>
+          </a:lnRef>
+          <a:fillRef idx="3">
+            <a:schemeClr val="accent1"/>
+          </a:fillRef>
+          <a:effectRef idx="2">
+            <a:schemeClr val="accent1"/>
+          </a:effectRef>
+          <a:fontRef idx="minor">
+            <a:schemeClr val="lt1"/>
+          </a:fontRef>
+        </p:style>
+        <p:txBody>
+          <a:bodyPr rtlCol="0" anchor="ctr"/>
+          <a:lstStyle/>
+          <a:p>
+            <a:pPr algn="ctr">
+              <a:defRPr sz="1400" b="1">
+                <a:solidFill>
+                  <a:srgbClr val="FFFFFF"/>
+                </a:solidFill>
+              </a:defRPr>
+            </a:pPr>
+            <a:r>
+              <a:t>Multi-day simulator: region × graph size × distribution</a:t>
+            </a:r>
+          </a:p>
+        </p:txBody>
+      </p:sp>
+      <p:sp>
+        <p:nvSpPr>
+          <p:cNvPr id="12" name="TextBox 11"/>
+          <p:cNvSpPr txBox="1"/>
+          <p:nvPr/>
+        </p:nvSpPr>
+        <p:spPr>
+          <a:xfrm>
+            <a:off x="548640" y="5120640"/>
+            <a:ext cx="11094415" cy="822960"/>
+          </a:xfrm>
+          <a:prstGeom prst="rect">
+            <a:avLst/>
+          </a:prstGeom>
+          <a:noFill/>
+        </p:spPr>
+        <p:txBody>
+          <a:bodyPr wrap="square">
+            <a:spAutoFit/>
+          </a:bodyPr>
+          <a:lstStyle/>
+          <a:p>
+            <a:r>
+              <a:rPr b="1" sz="1100">
+                <a:solidFill>
+                  <a:srgbClr val="1F2D3D"/>
+                </a:solidFill>
+              </a:rPr>
+              <a:t>Figure 1: </a:t>
+            </a:r>
+            <a:r>
+              <a:rPr i="1" sz="1100">
+                <a:solidFill>
+                  <a:srgbClr val="5A6A7A"/>
+                </a:solidFill>
+              </a:rPr>
+              <a:t>Every daily routing policy decomposes into a mandatory bin-selection strategy, a route constructor, an optional acceptance criterion and an optional route improver.</a:t>
+            </a:r>
+          </a:p>
+        </p:txBody>
+      </p:sp>
+      <p:sp>
+        <p:nvSpPr>
+          <p:cNvPr id="13" name="TextBox 12"/>
+          <p:cNvSpPr txBox="1"/>
+          <p:nvPr/>
+        </p:nvSpPr>
+        <p:spPr>
+          <a:xfrm>
+            <a:off x="548640" y="5806440"/>
+            <a:ext cx="11094415" cy="685800"/>
           </a:xfrm>
           <a:prstGeom prst="rect">
             <a:avLst/>
@@ -6583,7 +8288,7 @@
               </a:defRPr>
             </a:pPr>
             <a:r>
-              <a:t>•  Look-Ahead anticipates predicted overflows; Last-Minute waits for a critical fill threshold; Service-Level bounds each bin's overflow probability</a:t>
+              <a:t>•  Every daily routing policy is a composition of interchangeable stages, benchmarked under identical conditions</a:t>
             </a:r>
           </a:p>
           <a:p>
@@ -6598,22 +8303,7 @@
               </a:defRPr>
             </a:pPr>
             <a:r>
-              <a:t>•  Empirical trade-off: LM dominates efficiency (kg/km), SL dominates overflow prevention, LA sits in between</a:t>
-            </a:r>
-          </a:p>
-          <a:p>
-            <a:pPr>
-              <a:spcAft>
-                <a:spcPts val="1000"/>
-              </a:spcAft>
-              <a:defRPr sz="1400">
-                <a:solidFill>
-                  <a:srgbClr val="1F2D3D"/>
-                </a:solidFill>
-              </a:defRPr>
-            </a:pPr>
-            <a:r>
-              <a:t>•  The choice spans the service-quality vs cost spectrum — an operational decision, not an algorithmic one</a:t>
+              <a:t>•  The simulator replays multi-day scenarios (region × graph size × waste distribution), logging overflows, kg, km, kg/km and profit for every policy combination</a:t>
             </a:r>
           </a:p>
         </p:txBody>
@@ -6683,7 +8373,7 @@
               </a:defRPr>
             </a:pPr>
             <a:r>
-              <a:t>Exact Solvers: BPC &amp; SWC-TCF</a:t>
+              <a:t>Mandatory Node Selection Strategies</a:t>
             </a:r>
           </a:p>
         </p:txBody>
@@ -6697,7 +8387,7 @@
         <p:spPr>
           <a:xfrm>
             <a:off x="548640" y="1143000"/>
-            <a:ext cx="11094415" cy="1371600"/>
+            <a:ext cx="11094415" cy="2066543"/>
           </a:xfrm>
           <a:prstGeom prst="roundRect">
             <a:avLst/>
@@ -6732,30 +8422,748 @@
           </a:p>
         </p:txBody>
       </p:sp>
-      <p:pic>
-        <p:nvPicPr>
-          <p:cNvPr id="4" name="Picture 3" descr="eq_3.png"/>
-          <p:cNvPicPr>
-            <a:picLocks noChangeAspect="1"/>
-          </p:cNvPicPr>
+      <p:sp>
+        <p:nvSpPr>
+          <p:cNvPr id="4" name="TextBox 3"/>
+          <p:cNvSpPr txBox="1"/>
           <p:nvPr/>
-        </p:nvPicPr>
-        <p:blipFill>
-          <a:blip r:embed="rId2"/>
-          <a:stretch>
-            <a:fillRect/>
-          </a:stretch>
-        </p:blipFill>
-        <p:spPr>
-          <a:xfrm>
-            <a:off x="1168916" y="1234440"/>
-            <a:ext cx="9853863" cy="1188720"/>
+        </p:nvSpPr>
+        <p:spPr>
+          <a:xfrm>
+            <a:off x="731520" y="1234440"/>
+            <a:ext cx="10728655" cy="1883663"/>
           </a:xfrm>
           <a:prstGeom prst="rect">
             <a:avLst/>
           </a:prstGeom>
-        </p:spPr>
-      </p:pic>
+          <a:noFill/>
+        </p:spPr>
+        <p:txBody>
+          <a:bodyPr wrap="square">
+            <a:spAutoFit/>
+          </a:bodyPr>
+          <a:lstStyle/>
+          <a:p>
+            <a:pPr algn="ctr">
+              <a:defRPr sz="2000">
+                <a:solidFill>
+                  <a:srgbClr val="1F2D3D"/>
+                </a:solidFill>
+              </a:defRPr>
+            </a:pPr>
+            <mc:AlternateContent xmlns:mc="http://schemas.openxmlformats.org/markup-compatibility/2006" xmlns:a14="http://schemas.microsoft.com/office/drawing/2010/main" xmlns:m="http://schemas.openxmlformats.org/officeDocument/2006/math">
+              <mc:Choice Requires="a14">
+                <a14:m>
+                  <m:oMathPara>
+                    <m:oMath xmlns:w="http://schemas.openxmlformats.org/wordprocessingml/2006/main" xmlns:o="urn:schemas-microsoft-com:office:office" xmlns:v="urn:schemas-microsoft-com:vml" xmlns:w10="urn:schemas-microsoft-com:office:word" xmlns:pic="http://schemas.openxmlformats.org/drawingml/2006/picture" xmlns:wp="http://schemas.openxmlformats.org/drawingml/2006/wordprocessingDrawing">
+                      <m:r>
+                        <m:rPr>
+                          <m:nor/>
+                          <m:sty m:val="b"/>
+                        </m:rPr>
+                        <m:t>Look-Ahead (LA):</m:t>
+                      </m:r>
+                      <m:r>
+                        <m:t> </m:t>
+                      </m:r>
+                      <m:r>
+                        <m:t> </m:t>
+                      </m:r>
+                      <m:sSub>
+                        <m:e>
+                          <m:acc>
+                            <m:accPr>
+                              <m:chr m:val="̂"/>
+                            </m:accPr>
+                            <m:e>
+                              <m:r>
+                                <m:t>f</m:t>
+                              </m:r>
+                            </m:e>
+                          </m:acc>
+                        </m:e>
+                        <m:sub>
+                          <m:r>
+                            <m:t>i</m:t>
+                          </m:r>
+                        </m:sub>
+                      </m:sSub>
+                      <m:r>
+                        <m:rPr>
+                          <m:sty m:val="p"/>
+                        </m:rPr>
+                        <m:t>(</m:t>
+                      </m:r>
+                      <m:r>
+                        <m:t>t</m:t>
+                      </m:r>
+                      <m:r>
+                        <m:rPr>
+                          <m:sty m:val="p"/>
+                        </m:rPr>
+                        <m:t>+</m:t>
+                      </m:r>
+                      <m:r>
+                        <m:t>δ</m:t>
+                      </m:r>
+                      <m:r>
+                        <m:rPr>
+                          <m:sty m:val="p"/>
+                        </m:rPr>
+                        <m:t>)</m:t>
+                      </m:r>
+                      <m:r>
+                        <m:rPr>
+                          <m:sty m:val="p"/>
+                        </m:rPr>
+                        <m:t>≥</m:t>
+                      </m:r>
+                      <m:r>
+                        <m:t>100</m:t>
+                      </m:r>
+                      <m:r>
+                        <m:rPr>
+                          <m:sty m:val="p"/>
+                        </m:rPr>
+                        <m:t>%</m:t>
+                      </m:r>
+                      <m:r>
+                        <m:t> </m:t>
+                      </m:r>
+                      <m:r>
+                        <m:rPr>
+                          <m:sty m:val="p"/>
+                        </m:rPr>
+                        <m:t>⇒</m:t>
+                      </m:r>
+                      <m:r>
+                        <m:t> </m:t>
+                      </m:r>
+                      <m:r>
+                        <m:rPr>
+                          <m:sty m:val="p"/>
+                        </m:rPr>
+                        <m:t>c</m:t>
+                      </m:r>
+                      <m:r>
+                        <m:rPr>
+                          <m:sty m:val="p"/>
+                        </m:rPr>
+                        <m:t>o</m:t>
+                      </m:r>
+                      <m:r>
+                        <m:rPr>
+                          <m:sty m:val="p"/>
+                        </m:rPr>
+                        <m:t>l</m:t>
+                      </m:r>
+                      <m:r>
+                        <m:rPr>
+                          <m:sty m:val="p"/>
+                        </m:rPr>
+                        <m:t>l</m:t>
+                      </m:r>
+                      <m:r>
+                        <m:rPr>
+                          <m:sty m:val="p"/>
+                        </m:rPr>
+                        <m:t>e</m:t>
+                      </m:r>
+                      <m:r>
+                        <m:rPr>
+                          <m:sty m:val="p"/>
+                        </m:rPr>
+                        <m:t>c</m:t>
+                      </m:r>
+                      <m:r>
+                        <m:rPr>
+                          <m:sty m:val="p"/>
+                        </m:rPr>
+                        <m:t>t</m:t>
+                      </m:r>
+                      <m:r>
+                        <m:rPr>
+                          <m:sty m:val="p"/>
+                        </m:rPr>
+                        <m:t> </m:t>
+                      </m:r>
+                      <m:r>
+                        <m:rPr>
+                          <m:sty m:val="p"/>
+                        </m:rPr>
+                        <m:t>t</m:t>
+                      </m:r>
+                      <m:r>
+                        <m:rPr>
+                          <m:sty m:val="p"/>
+                        </m:rPr>
+                        <m:t>o</m:t>
+                      </m:r>
+                      <m:r>
+                        <m:rPr>
+                          <m:sty m:val="p"/>
+                        </m:rPr>
+                        <m:t>d</m:t>
+                      </m:r>
+                      <m:r>
+                        <m:rPr>
+                          <m:sty m:val="p"/>
+                        </m:rPr>
+                        <m:t>a</m:t>
+                      </m:r>
+                      <m:r>
+                        <m:rPr>
+                          <m:sty m:val="p"/>
+                        </m:rPr>
+                        <m:t>y</m:t>
+                      </m:r>
+                      <m:r>
+                        <m:rPr>
+                          <m:sty m:val="p"/>
+                        </m:rPr>
+                        <m:t> </m:t>
+                      </m:r>
+                      <m:r>
+                        <m:rPr>
+                          <m:sty m:val="p"/>
+                        </m:rPr>
+                        <m:t>(</m:t>
+                      </m:r>
+                      <m:r>
+                        <m:rPr>
+                          <m:sty m:val="p"/>
+                        </m:rPr>
+                        <m:t>p</m:t>
+                      </m:r>
+                      <m:r>
+                        <m:rPr>
+                          <m:sty m:val="p"/>
+                        </m:rPr>
+                        <m:t>r</m:t>
+                      </m:r>
+                      <m:r>
+                        <m:rPr>
+                          <m:sty m:val="p"/>
+                        </m:rPr>
+                        <m:t>o</m:t>
+                      </m:r>
+                      <m:r>
+                        <m:rPr>
+                          <m:sty m:val="p"/>
+                        </m:rPr>
+                        <m:t>a</m:t>
+                      </m:r>
+                      <m:r>
+                        <m:rPr>
+                          <m:sty m:val="p"/>
+                        </m:rPr>
+                        <m:t>c</m:t>
+                      </m:r>
+                      <m:r>
+                        <m:rPr>
+                          <m:sty m:val="p"/>
+                        </m:rPr>
+                        <m:t>t</m:t>
+                      </m:r>
+                      <m:r>
+                        <m:rPr>
+                          <m:sty m:val="p"/>
+                        </m:rPr>
+                        <m:t>i</m:t>
+                      </m:r>
+                      <m:r>
+                        <m:rPr>
+                          <m:sty m:val="p"/>
+                        </m:rPr>
+                        <m:t>v</m:t>
+                      </m:r>
+                      <m:r>
+                        <m:rPr>
+                          <m:sty m:val="p"/>
+                        </m:rPr>
+                        <m:t>e</m:t>
+                      </m:r>
+                      <m:r>
+                        <m:rPr>
+                          <m:sty m:val="p"/>
+                        </m:rPr>
+                        <m:t>)</m:t>
+                      </m:r>
+                    </m:oMath>
+                  </m:oMathPara>
+                </a14:m>
+              </mc:Choice>
+              <mc:Fallback>
+                <a:r>
+                  <a:rPr lang="en-US" sz="2000">
+                    <a:solidFill>
+                      <a:srgbClr val="1F2D3D"/>
+                    </a:solidFill>
+                  </a:rPr>
+                  <a:t>Look-Ahead (LA): hatf_i(t + delta) geq 100% Rightarrow collect today (proactive)</a:t>
+                </a:r>
+              </mc:Fallback>
+            </mc:AlternateContent>
+          </a:p>
+          <a:p>
+            <a:pPr algn="ctr">
+              <a:defRPr sz="2000">
+                <a:solidFill>
+                  <a:srgbClr val="1F2D3D"/>
+                </a:solidFill>
+              </a:defRPr>
+            </a:pPr>
+            <mc:AlternateContent xmlns:mc="http://schemas.openxmlformats.org/markup-compatibility/2006" xmlns:a14="http://schemas.microsoft.com/office/drawing/2010/main" xmlns:m="http://schemas.openxmlformats.org/officeDocument/2006/math">
+              <mc:Choice Requires="a14">
+                <a14:m>
+                  <m:oMathPara>
+                    <m:oMath xmlns:w="http://schemas.openxmlformats.org/wordprocessingml/2006/main" xmlns:o="urn:schemas-microsoft-com:office:office" xmlns:v="urn:schemas-microsoft-com:vml" xmlns:w10="urn:schemas-microsoft-com:office:word" xmlns:pic="http://schemas.openxmlformats.org/drawingml/2006/picture" xmlns:wp="http://schemas.openxmlformats.org/drawingml/2006/wordprocessingDrawing">
+                      <m:r>
+                        <m:rPr>
+                          <m:nor/>
+                          <m:sty m:val="b"/>
+                        </m:rPr>
+                        <m:t>Last-Minute (LM):</m:t>
+                      </m:r>
+                      <m:r>
+                        <m:t> </m:t>
+                      </m:r>
+                      <m:r>
+                        <m:t> </m:t>
+                      </m:r>
+                      <m:sSub>
+                        <m:e>
+                          <m:r>
+                            <m:t>f</m:t>
+                          </m:r>
+                        </m:e>
+                        <m:sub>
+                          <m:r>
+                            <m:t>i</m:t>
+                          </m:r>
+                        </m:sub>
+                      </m:sSub>
+                      <m:r>
+                        <m:rPr>
+                          <m:sty m:val="p"/>
+                        </m:rPr>
+                        <m:t>(</m:t>
+                      </m:r>
+                      <m:r>
+                        <m:t>t</m:t>
+                      </m:r>
+                      <m:r>
+                        <m:rPr>
+                          <m:sty m:val="p"/>
+                        </m:rPr>
+                        <m:t>)</m:t>
+                      </m:r>
+                      <m:r>
+                        <m:rPr>
+                          <m:sty m:val="p"/>
+                        </m:rPr>
+                        <m:t>≥</m:t>
+                      </m:r>
+                      <m:r>
+                        <m:t>C</m:t>
+                      </m:r>
+                      <m:r>
+                        <m:t>F</m:t>
+                      </m:r>
+                      <m:r>
+                        <m:rPr>
+                          <m:sty m:val="p"/>
+                        </m:rPr>
+                        <m:t>,</m:t>
+                      </m:r>
+                      <m:r>
+                        <m:t> </m:t>
+                      </m:r>
+                      <m:r>
+                        <m:t>C</m:t>
+                      </m:r>
+                      <m:r>
+                        <m:t>F</m:t>
+                      </m:r>
+                      <m:r>
+                        <m:rPr>
+                          <m:sty m:val="p"/>
+                        </m:rPr>
+                        <m:t>∈</m:t>
+                      </m:r>
+                      <m:r>
+                        <m:rPr>
+                          <m:sty m:val="p"/>
+                        </m:rPr>
+                        <m:t>{</m:t>
+                      </m:r>
+                      <m:r>
+                        <m:t>70</m:t>
+                      </m:r>
+                      <m:r>
+                        <m:rPr>
+                          <m:sty m:val="p"/>
+                        </m:rPr>
+                        <m:t>%</m:t>
+                      </m:r>
+                      <m:r>
+                        <m:rPr>
+                          <m:sty m:val="p"/>
+                        </m:rPr>
+                        <m:t>,</m:t>
+                      </m:r>
+                      <m:r>
+                        <m:t> </m:t>
+                      </m:r>
+                      <m:r>
+                        <m:t>90</m:t>
+                      </m:r>
+                      <m:r>
+                        <m:rPr>
+                          <m:sty m:val="p"/>
+                        </m:rPr>
+                        <m:t>%</m:t>
+                      </m:r>
+                      <m:r>
+                        <m:rPr>
+                          <m:sty m:val="p"/>
+                        </m:rPr>
+                        <m:t>}</m:t>
+                      </m:r>
+                      <m:r>
+                        <m:t> </m:t>
+                      </m:r>
+                      <m:r>
+                        <m:rPr>
+                          <m:sty m:val="p"/>
+                        </m:rPr>
+                        <m:t>(</m:t>
+                      </m:r>
+                      <m:r>
+                        <m:rPr>
+                          <m:sty m:val="p"/>
+                        </m:rPr>
+                        <m:t>r</m:t>
+                      </m:r>
+                      <m:r>
+                        <m:rPr>
+                          <m:sty m:val="p"/>
+                        </m:rPr>
+                        <m:t>e</m:t>
+                      </m:r>
+                      <m:r>
+                        <m:rPr>
+                          <m:sty m:val="p"/>
+                        </m:rPr>
+                        <m:t>a</m:t>
+                      </m:r>
+                      <m:r>
+                        <m:rPr>
+                          <m:sty m:val="p"/>
+                        </m:rPr>
+                        <m:t>c</m:t>
+                      </m:r>
+                      <m:r>
+                        <m:rPr>
+                          <m:sty m:val="p"/>
+                        </m:rPr>
+                        <m:t>t</m:t>
+                      </m:r>
+                      <m:r>
+                        <m:rPr>
+                          <m:sty m:val="p"/>
+                        </m:rPr>
+                        <m:t>i</m:t>
+                      </m:r>
+                      <m:r>
+                        <m:rPr>
+                          <m:sty m:val="p"/>
+                        </m:rPr>
+                        <m:t>v</m:t>
+                      </m:r>
+                      <m:r>
+                        <m:rPr>
+                          <m:sty m:val="p"/>
+                        </m:rPr>
+                        <m:t>e</m:t>
+                      </m:r>
+                      <m:r>
+                        <m:rPr>
+                          <m:sty m:val="p"/>
+                        </m:rPr>
+                        <m:t>)</m:t>
+                      </m:r>
+                    </m:oMath>
+                  </m:oMathPara>
+                </a14:m>
+              </mc:Choice>
+              <mc:Fallback>
+                <a:r>
+                  <a:rPr lang="en-US" sz="2000">
+                    <a:solidFill>
+                      <a:srgbClr val="1F2D3D"/>
+                    </a:solidFill>
+                  </a:rPr>
+                  <a:t>Last-Minute (LM): f_i(t) geq CF, quad CF in 70%, 90% (reactive)</a:t>
+                </a:r>
+              </mc:Fallback>
+            </mc:AlternateContent>
+          </a:p>
+          <a:p>
+            <a:pPr algn="ctr">
+              <a:defRPr sz="2000">
+                <a:solidFill>
+                  <a:srgbClr val="1F2D3D"/>
+                </a:solidFill>
+              </a:defRPr>
+            </a:pPr>
+            <mc:AlternateContent xmlns:mc="http://schemas.openxmlformats.org/markup-compatibility/2006" xmlns:a14="http://schemas.microsoft.com/office/drawing/2010/main" xmlns:m="http://schemas.openxmlformats.org/officeDocument/2006/math">
+              <mc:Choice Requires="a14">
+                <a14:m>
+                  <m:oMathPara>
+                    <m:oMath xmlns:w="http://schemas.openxmlformats.org/wordprocessingml/2006/main" xmlns:o="urn:schemas-microsoft-com:office:office" xmlns:v="urn:schemas-microsoft-com:vml" xmlns:w10="urn:schemas-microsoft-com:office:word" xmlns:pic="http://schemas.openxmlformats.org/drawingml/2006/picture" xmlns:wp="http://schemas.openxmlformats.org/drawingml/2006/wordprocessingDrawing">
+                      <m:r>
+                        <m:rPr>
+                          <m:nor/>
+                          <m:sty m:val="b"/>
+                        </m:rPr>
+                        <m:t>Service-Level (SL):</m:t>
+                      </m:r>
+                      <m:r>
+                        <m:t> </m:t>
+                      </m:r>
+                      <m:r>
+                        <m:t> </m:t>
+                      </m:r>
+                      <m:r>
+                        <m:t>P</m:t>
+                      </m:r>
+                      <m:d>
+                        <m:dPr>
+                          <m:begChr m:val="("/>
+                          <m:sepChr m:val=""/>
+                          <m:endChr m:val=")"/>
+                          <m:grow/>
+                        </m:dPr>
+                        <m:e>
+                          <m:sSub>
+                            <m:e>
+                              <m:r>
+                                <m:t>f</m:t>
+                              </m:r>
+                            </m:e>
+                            <m:sub>
+                              <m:r>
+                                <m:t>i</m:t>
+                              </m:r>
+                            </m:sub>
+                          </m:sSub>
+                          <m:r>
+                            <m:rPr>
+                              <m:sty m:val="p"/>
+                            </m:rPr>
+                            <m:t>≥</m:t>
+                          </m:r>
+                          <m:r>
+                            <m:t>100</m:t>
+                          </m:r>
+                          <m:r>
+                            <m:rPr>
+                              <m:sty m:val="p"/>
+                            </m:rPr>
+                            <m:t>%</m:t>
+                          </m:r>
+                        </m:e>
+                      </m:d>
+                      <m:r>
+                        <m:rPr>
+                          <m:sty m:val="p"/>
+                        </m:rPr>
+                        <m:t>≤</m:t>
+                      </m:r>
+                      <m:r>
+                        <m:t>1</m:t>
+                      </m:r>
+                      <m:r>
+                        <m:rPr>
+                          <m:sty m:val="p"/>
+                        </m:rPr>
+                        <m:t>−</m:t>
+                      </m:r>
+                      <m:r>
+                        <m:t>α</m:t>
+                      </m:r>
+                      <m:r>
+                        <m:t> </m:t>
+                      </m:r>
+                      <m:r>
+                        <m:rPr>
+                          <m:sty m:val="p"/>
+                        </m:rPr>
+                        <m:t>(</m:t>
+                      </m:r>
+                      <m:r>
+                        <m:rPr>
+                          <m:sty m:val="p"/>
+                        </m:rPr>
+                        <m:t>p</m:t>
+                      </m:r>
+                      <m:r>
+                        <m:rPr>
+                          <m:sty m:val="p"/>
+                        </m:rPr>
+                        <m:t>r</m:t>
+                      </m:r>
+                      <m:r>
+                        <m:rPr>
+                          <m:sty m:val="p"/>
+                        </m:rPr>
+                        <m:t>o</m:t>
+                      </m:r>
+                      <m:r>
+                        <m:rPr>
+                          <m:sty m:val="p"/>
+                        </m:rPr>
+                        <m:t>b</m:t>
+                      </m:r>
+                      <m:r>
+                        <m:rPr>
+                          <m:sty m:val="p"/>
+                        </m:rPr>
+                        <m:t>a</m:t>
+                      </m:r>
+                      <m:r>
+                        <m:rPr>
+                          <m:sty m:val="p"/>
+                        </m:rPr>
+                        <m:t>b</m:t>
+                      </m:r>
+                      <m:r>
+                        <m:rPr>
+                          <m:sty m:val="p"/>
+                        </m:rPr>
+                        <m:t>i</m:t>
+                      </m:r>
+                      <m:r>
+                        <m:rPr>
+                          <m:sty m:val="p"/>
+                        </m:rPr>
+                        <m:t>l</m:t>
+                      </m:r>
+                      <m:r>
+                        <m:rPr>
+                          <m:sty m:val="p"/>
+                        </m:rPr>
+                        <m:t>i</m:t>
+                      </m:r>
+                      <m:r>
+                        <m:rPr>
+                          <m:sty m:val="p"/>
+                        </m:rPr>
+                        <m:t>s</m:t>
+                      </m:r>
+                      <m:r>
+                        <m:rPr>
+                          <m:sty m:val="p"/>
+                        </m:rPr>
+                        <m:t>t</m:t>
+                      </m:r>
+                      <m:r>
+                        <m:rPr>
+                          <m:sty m:val="p"/>
+                        </m:rPr>
+                        <m:t>i</m:t>
+                      </m:r>
+                      <m:r>
+                        <m:rPr>
+                          <m:sty m:val="p"/>
+                        </m:rPr>
+                        <m:t>c</m:t>
+                      </m:r>
+                      <m:r>
+                        <m:rPr>
+                          <m:sty m:val="p"/>
+                        </m:rPr>
+                        <m:t> </m:t>
+                      </m:r>
+                      <m:r>
+                        <m:rPr>
+                          <m:sty m:val="p"/>
+                        </m:rPr>
+                        <m:t>g</m:t>
+                      </m:r>
+                      <m:r>
+                        <m:rPr>
+                          <m:sty m:val="p"/>
+                        </m:rPr>
+                        <m:t>u</m:t>
+                      </m:r>
+                      <m:r>
+                        <m:rPr>
+                          <m:sty m:val="p"/>
+                        </m:rPr>
+                        <m:t>a</m:t>
+                      </m:r>
+                      <m:r>
+                        <m:rPr>
+                          <m:sty m:val="p"/>
+                        </m:rPr>
+                        <m:t>r</m:t>
+                      </m:r>
+                      <m:r>
+                        <m:rPr>
+                          <m:sty m:val="p"/>
+                        </m:rPr>
+                        <m:t>a</m:t>
+                      </m:r>
+                      <m:r>
+                        <m:rPr>
+                          <m:sty m:val="p"/>
+                        </m:rPr>
+                        <m:t>n</m:t>
+                      </m:r>
+                      <m:r>
+                        <m:rPr>
+                          <m:sty m:val="p"/>
+                        </m:rPr>
+                        <m:t>t</m:t>
+                      </m:r>
+                      <m:r>
+                        <m:rPr>
+                          <m:sty m:val="p"/>
+                        </m:rPr>
+                        <m:t>e</m:t>
+                      </m:r>
+                      <m:r>
+                        <m:rPr>
+                          <m:sty m:val="p"/>
+                        </m:rPr>
+                        <m:t>e</m:t>
+                      </m:r>
+                      <m:r>
+                        <m:rPr>
+                          <m:sty m:val="p"/>
+                        </m:rPr>
+                        <m:t>)</m:t>
+                      </m:r>
+                    </m:oMath>
+                  </m:oMathPara>
+                </a14:m>
+              </mc:Choice>
+              <mc:Fallback>
+                <a:r>
+                  <a:rPr lang="en-US" sz="2000">
+                    <a:solidFill>
+                      <a:srgbClr val="1F2D3D"/>
+                    </a:solidFill>
+                  </a:rPr>
+                  <a:t>Service-Level (SL): P(f_i geq 100%) leq 1 - alpha quad (probabilistic guarantee)</a:t>
+                </a:r>
+              </mc:Fallback>
+            </mc:AlternateContent>
+          </a:p>
+        </p:txBody>
+      </p:sp>
       <p:sp>
         <p:nvSpPr>
           <p:cNvPr id="5" name="TextBox 4"/>
@@ -6764,8 +9172,8 @@
         </p:nvSpPr>
         <p:spPr>
           <a:xfrm>
-            <a:off x="548640" y="2743200"/>
-            <a:ext cx="11094415" cy="548640"/>
+            <a:off x="548640" y="3392423"/>
+            <a:ext cx="11094415" cy="822960"/>
           </a:xfrm>
           <a:prstGeom prst="rect">
             <a:avLst/>
@@ -6784,7 +9192,7 @@
                   <a:srgbClr val="1F2D3D"/>
                 </a:solidFill>
               </a:rPr>
-              <a:t>Equation 3: </a:t>
+              <a:t>Equation 2: </a:t>
             </a:r>
             <a:r>
               <a:rPr i="1" sz="1100">
@@ -6792,7 +9200,7 @@
                   <a:srgbClr val="5A6A7A"/>
                 </a:solidFill>
               </a:rPr>
-              <a:t>Set-partitioning master problem: choose a minimum-cost combination of routes r ∈ Ω (weight λ_r) such that every node i is covered exactly once (a_ir = 1 iff route r visits i).</a:t>
+              <a:t>The three mandatory selection rules — Look-Ahead (LA) forecasts fill level f_i at t+δ, Last-Minute (LM) reacts once f_i crosses a critical fill threshold CF, and Service-Level (SL) bounds each bin's overflow probability by a target confidence α.</a:t>
             </a:r>
           </a:p>
         </p:txBody>
@@ -6805,8 +9213,8 @@
         </p:nvSpPr>
         <p:spPr>
           <a:xfrm>
-            <a:off x="548640" y="3429000"/>
-            <a:ext cx="11094415" cy="3063240"/>
+            <a:off x="548640" y="4169663"/>
+            <a:ext cx="11094415" cy="2322577"/>
           </a:xfrm>
           <a:prstGeom prst="rect">
             <a:avLst/>
@@ -6830,7 +9238,7 @@
               </a:defRPr>
             </a:pPr>
             <a:r>
-              <a:t>•  Branch-Price-and-Cut (BPC): column generation over the route set Ω with cutting planes — proven optimality (BHV2000 lineage)</a:t>
+              <a:t>•  Look-Ahead (LA) anticipates predicted overflows; Last-Minute (LM) waits for a critical fill threshold; Service-Level (SL) bounds each bin's overflow probability</a:t>
             </a:r>
           </a:p>
           <a:p>
@@ -6845,7 +9253,7 @@
               </a:defRPr>
             </a:pPr>
             <a:r>
-              <a:t>•  Pricing subproblem: elementary shortest path with resource constraints, accelerated by ng-route relaxation and limited-memory cuts</a:t>
+              <a:t>•  Empirical trade-off: LM dominates efficiency (kg/km), SL dominates overflow prevention, LA sits in between</a:t>
             </a:r>
           </a:p>
           <a:p>
@@ -6860,22 +9268,7 @@
               </a:defRPr>
             </a:pPr>
             <a:r>
-              <a:t>•  SWC-TCF: exact set-partitioning over Clarke-Wright-style savings columns with traffic-congestion-adjusted costs</a:t>
-            </a:r>
-          </a:p>
-          <a:p>
-            <a:pPr>
-              <a:spcAft>
-                <a:spcPts val="1000"/>
-              </a:spcAft>
-              <a:defRPr sz="1400">
-                <a:solidFill>
-                  <a:srgbClr val="1F2D3D"/>
-                </a:solidFill>
-              </a:defRPr>
-            </a:pPr>
-            <a:r>
-              <a:t>•  Both provide optimality reference points; exponential worst-case runtime limits them to the daily subproblem sizes</a:t>
+              <a:t>•  The choice spans the service-quality vs cost spectrum — an operational decision, not an algorithmic one</a:t>
             </a:r>
           </a:p>
         </p:txBody>
@@ -6945,7 +9338,7 @@
               </a:defRPr>
             </a:pPr>
             <a:r>
-              <a:t>Meta-Heuristics &amp; Hyper-Heuristics — Overarching Philosophy</a:t>
+              <a:t>Big Picture: Policy Configuration Space</a:t>
             </a:r>
           </a:p>
         </p:txBody>
@@ -6958,14 +9351,14 @@
         </p:nvSpPr>
         <p:spPr>
           <a:xfrm>
-            <a:off x="548640" y="1143000"/>
-            <a:ext cx="11094415" cy="2057400"/>
+            <a:off x="548640" y="1051560"/>
+            <a:ext cx="3515258" cy="502920"/>
           </a:xfrm>
           <a:prstGeom prst="roundRect">
             <a:avLst/>
           </a:prstGeom>
           <a:solidFill>
-            <a:srgbClr val="F0F4FA"/>
+            <a:srgbClr val="1F2D3D"/>
           </a:solidFill>
           <a:ln>
             <a:noFill/>
@@ -6990,44 +9383,704 @@
           <a:bodyPr rtlCol="0" anchor="ctr"/>
           <a:lstStyle/>
           <a:p>
-            <a:pPr algn="ctr"/>
-          </a:p>
-        </p:txBody>
-      </p:sp>
-      <p:pic>
-        <p:nvPicPr>
-          <p:cNvPr id="4" name="Picture 3" descr="eq_4.png"/>
-          <p:cNvPicPr>
-            <a:picLocks noChangeAspect="1"/>
-          </p:cNvPicPr>
+            <a:pPr algn="ctr">
+              <a:defRPr sz="1500" b="1">
+                <a:solidFill>
+                  <a:srgbClr val="FFFFFF"/>
+                </a:solidFill>
+              </a:defRPr>
+            </a:pPr>
+            <a:r>
+              <a:t>Mandatory Selection</a:t>
+            </a:r>
+          </a:p>
+        </p:txBody>
+      </p:sp>
+      <p:sp>
+        <p:nvSpPr>
+          <p:cNvPr id="4" name="Rounded Rectangle 3"/>
+          <p:cNvSpPr/>
           <p:nvPr/>
-        </p:nvPicPr>
-        <p:blipFill>
-          <a:blip r:embed="rId2"/>
-          <a:stretch>
-            <a:fillRect/>
-          </a:stretch>
-        </p:blipFill>
-        <p:spPr>
-          <a:xfrm>
-            <a:off x="1480838" y="1234440"/>
-            <a:ext cx="9230019" cy="1874520"/>
+        </p:nvSpPr>
+        <p:spPr>
+          <a:xfrm>
+            <a:off x="548640" y="1691640"/>
+            <a:ext cx="3515258" cy="625449"/>
+          </a:xfrm>
+          <a:prstGeom prst="roundRect">
+            <a:avLst/>
+          </a:prstGeom>
+          <a:solidFill>
+            <a:srgbClr val="2E74B5"/>
+          </a:solidFill>
+          <a:ln>
+            <a:noFill/>
+          </a:ln>
+          <a:effectLst/>
+        </p:spPr>
+        <p:style>
+          <a:lnRef idx="1">
+            <a:schemeClr val="accent1"/>
+          </a:lnRef>
+          <a:fillRef idx="3">
+            <a:schemeClr val="accent1"/>
+          </a:fillRef>
+          <a:effectRef idx="2">
+            <a:schemeClr val="accent1"/>
+          </a:effectRef>
+          <a:fontRef idx="minor">
+            <a:schemeClr val="lt1"/>
+          </a:fontRef>
+        </p:style>
+        <p:txBody>
+          <a:bodyPr rtlCol="0" anchor="ctr"/>
+          <a:lstStyle/>
+          <a:p>
+            <a:pPr algn="ctr">
+              <a:defRPr sz="1300" b="1">
+                <a:solidFill>
+                  <a:srgbClr val="FFFFFF"/>
+                </a:solidFill>
+              </a:defRPr>
+            </a:pPr>
+            <a:r>
+              <a:t>Look-Ahead (LA)</a:t>
+            </a:r>
+          </a:p>
+        </p:txBody>
+      </p:sp>
+      <p:sp>
+        <p:nvSpPr>
+          <p:cNvPr id="5" name="Rounded Rectangle 4"/>
+          <p:cNvSpPr/>
+          <p:nvPr/>
+        </p:nvSpPr>
+        <p:spPr>
+          <a:xfrm>
+            <a:off x="548640" y="2426817"/>
+            <a:ext cx="3515258" cy="625449"/>
+          </a:xfrm>
+          <a:prstGeom prst="roundRect">
+            <a:avLst/>
+          </a:prstGeom>
+          <a:solidFill>
+            <a:srgbClr val="2E74B5"/>
+          </a:solidFill>
+          <a:ln>
+            <a:noFill/>
+          </a:ln>
+          <a:effectLst/>
+        </p:spPr>
+        <p:style>
+          <a:lnRef idx="1">
+            <a:schemeClr val="accent1"/>
+          </a:lnRef>
+          <a:fillRef idx="3">
+            <a:schemeClr val="accent1"/>
+          </a:fillRef>
+          <a:effectRef idx="2">
+            <a:schemeClr val="accent1"/>
+          </a:effectRef>
+          <a:fontRef idx="minor">
+            <a:schemeClr val="lt1"/>
+          </a:fontRef>
+        </p:style>
+        <p:txBody>
+          <a:bodyPr rtlCol="0" anchor="ctr"/>
+          <a:lstStyle/>
+          <a:p>
+            <a:pPr algn="ctr">
+              <a:defRPr sz="1300" b="1">
+                <a:solidFill>
+                  <a:srgbClr val="FFFFFF"/>
+                </a:solidFill>
+              </a:defRPr>
+            </a:pPr>
+            <a:r>
+              <a:t>Last-Minute (LM, CF70)</a:t>
+            </a:r>
+          </a:p>
+        </p:txBody>
+      </p:sp>
+      <p:sp>
+        <p:nvSpPr>
+          <p:cNvPr id="6" name="Rounded Rectangle 5"/>
+          <p:cNvSpPr/>
+          <p:nvPr/>
+        </p:nvSpPr>
+        <p:spPr>
+          <a:xfrm>
+            <a:off x="548640" y="3161994"/>
+            <a:ext cx="3515258" cy="625449"/>
+          </a:xfrm>
+          <a:prstGeom prst="roundRect">
+            <a:avLst/>
+          </a:prstGeom>
+          <a:solidFill>
+            <a:srgbClr val="2E74B5"/>
+          </a:solidFill>
+          <a:ln>
+            <a:noFill/>
+          </a:ln>
+          <a:effectLst/>
+        </p:spPr>
+        <p:style>
+          <a:lnRef idx="1">
+            <a:schemeClr val="accent1"/>
+          </a:lnRef>
+          <a:fillRef idx="3">
+            <a:schemeClr val="accent1"/>
+          </a:fillRef>
+          <a:effectRef idx="2">
+            <a:schemeClr val="accent1"/>
+          </a:effectRef>
+          <a:fontRef idx="minor">
+            <a:schemeClr val="lt1"/>
+          </a:fontRef>
+        </p:style>
+        <p:txBody>
+          <a:bodyPr rtlCol="0" anchor="ctr"/>
+          <a:lstStyle/>
+          <a:p>
+            <a:pPr algn="ctr">
+              <a:defRPr sz="1300" b="1">
+                <a:solidFill>
+                  <a:srgbClr val="FFFFFF"/>
+                </a:solidFill>
+              </a:defRPr>
+            </a:pPr>
+            <a:r>
+              <a:t>Last-Minute (LM, CF90)</a:t>
+            </a:r>
+          </a:p>
+        </p:txBody>
+      </p:sp>
+      <p:sp>
+        <p:nvSpPr>
+          <p:cNvPr id="7" name="Rounded Rectangle 6"/>
+          <p:cNvSpPr/>
+          <p:nvPr/>
+        </p:nvSpPr>
+        <p:spPr>
+          <a:xfrm>
+            <a:off x="548640" y="3897171"/>
+            <a:ext cx="3515258" cy="625449"/>
+          </a:xfrm>
+          <a:prstGeom prst="roundRect">
+            <a:avLst/>
+          </a:prstGeom>
+          <a:solidFill>
+            <a:srgbClr val="2E74B5"/>
+          </a:solidFill>
+          <a:ln>
+            <a:noFill/>
+          </a:ln>
+          <a:effectLst/>
+        </p:spPr>
+        <p:style>
+          <a:lnRef idx="1">
+            <a:schemeClr val="accent1"/>
+          </a:lnRef>
+          <a:fillRef idx="3">
+            <a:schemeClr val="accent1"/>
+          </a:fillRef>
+          <a:effectRef idx="2">
+            <a:schemeClr val="accent1"/>
+          </a:effectRef>
+          <a:fontRef idx="minor">
+            <a:schemeClr val="lt1"/>
+          </a:fontRef>
+        </p:style>
+        <p:txBody>
+          <a:bodyPr rtlCol="0" anchor="ctr"/>
+          <a:lstStyle/>
+          <a:p>
+            <a:pPr algn="ctr">
+              <a:defRPr sz="1300" b="1">
+                <a:solidFill>
+                  <a:srgbClr val="FFFFFF"/>
+                </a:solidFill>
+              </a:defRPr>
+            </a:pPr>
+            <a:r>
+              <a:t>Service-Level (SL1)</a:t>
+            </a:r>
+          </a:p>
+        </p:txBody>
+      </p:sp>
+      <p:sp>
+        <p:nvSpPr>
+          <p:cNvPr id="8" name="Rounded Rectangle 7"/>
+          <p:cNvSpPr/>
+          <p:nvPr/>
+        </p:nvSpPr>
+        <p:spPr>
+          <a:xfrm>
+            <a:off x="548640" y="4632348"/>
+            <a:ext cx="3515258" cy="625449"/>
+          </a:xfrm>
+          <a:prstGeom prst="roundRect">
+            <a:avLst/>
+          </a:prstGeom>
+          <a:solidFill>
+            <a:srgbClr val="2E74B5"/>
+          </a:solidFill>
+          <a:ln>
+            <a:noFill/>
+          </a:ln>
+          <a:effectLst/>
+        </p:spPr>
+        <p:style>
+          <a:lnRef idx="1">
+            <a:schemeClr val="accent1"/>
+          </a:lnRef>
+          <a:fillRef idx="3">
+            <a:schemeClr val="accent1"/>
+          </a:fillRef>
+          <a:effectRef idx="2">
+            <a:schemeClr val="accent1"/>
+          </a:effectRef>
+          <a:fontRef idx="minor">
+            <a:schemeClr val="lt1"/>
+          </a:fontRef>
+        </p:style>
+        <p:txBody>
+          <a:bodyPr rtlCol="0" anchor="ctr"/>
+          <a:lstStyle/>
+          <a:p>
+            <a:pPr algn="ctr">
+              <a:defRPr sz="1300" b="1">
+                <a:solidFill>
+                  <a:srgbClr val="FFFFFF"/>
+                </a:solidFill>
+              </a:defRPr>
+            </a:pPr>
+            <a:r>
+              <a:t>Service-Level (SL2)</a:t>
+            </a:r>
+          </a:p>
+        </p:txBody>
+      </p:sp>
+      <p:sp>
+        <p:nvSpPr>
+          <p:cNvPr id="9" name="Rounded Rectangle 8"/>
+          <p:cNvSpPr/>
+          <p:nvPr/>
+        </p:nvSpPr>
+        <p:spPr>
+          <a:xfrm>
+            <a:off x="4338218" y="1051560"/>
+            <a:ext cx="3515258" cy="502920"/>
+          </a:xfrm>
+          <a:prstGeom prst="roundRect">
+            <a:avLst/>
+          </a:prstGeom>
+          <a:solidFill>
+            <a:srgbClr val="1F2D3D"/>
+          </a:solidFill>
+          <a:ln>
+            <a:noFill/>
+          </a:ln>
+          <a:effectLst/>
+        </p:spPr>
+        <p:style>
+          <a:lnRef idx="1">
+            <a:schemeClr val="accent1"/>
+          </a:lnRef>
+          <a:fillRef idx="3">
+            <a:schemeClr val="accent1"/>
+          </a:fillRef>
+          <a:effectRef idx="2">
+            <a:schemeClr val="accent1"/>
+          </a:effectRef>
+          <a:fontRef idx="minor">
+            <a:schemeClr val="lt1"/>
+          </a:fontRef>
+        </p:style>
+        <p:txBody>
+          <a:bodyPr rtlCol="0" anchor="ctr"/>
+          <a:lstStyle/>
+          <a:p>
+            <a:pPr algn="ctr">
+              <a:defRPr sz="1500" b="1">
+                <a:solidFill>
+                  <a:srgbClr val="FFFFFF"/>
+                </a:solidFill>
+              </a:defRPr>
+            </a:pPr>
+            <a:r>
+              <a:t>Route Constructor</a:t>
+            </a:r>
+          </a:p>
+        </p:txBody>
+      </p:sp>
+      <p:sp>
+        <p:nvSpPr>
+          <p:cNvPr id="10" name="Rectangle 9"/>
+          <p:cNvSpPr/>
+          <p:nvPr/>
+        </p:nvSpPr>
+        <p:spPr>
+          <a:xfrm>
+            <a:off x="4338218" y="1691640"/>
+            <a:ext cx="3515258" cy="1097280"/>
           </a:xfrm>
           <a:prstGeom prst="rect">
             <a:avLst/>
           </a:prstGeom>
-        </p:spPr>
-      </p:pic>
-      <p:sp>
-        <p:nvSpPr>
-          <p:cNvPr id="5" name="TextBox 4"/>
+          <a:noFill/>
+          <a:ln w="12700">
+            <a:solidFill>
+              <a:srgbClr val="5A6A7A"/>
+            </a:solidFill>
+            <a:prstDash val="dash"/>
+          </a:ln>
+          <a:effectLst/>
+        </p:spPr>
+        <p:style>
+          <a:lnRef idx="1">
+            <a:schemeClr val="accent1"/>
+          </a:lnRef>
+          <a:fillRef idx="3">
+            <a:schemeClr val="accent1"/>
+          </a:fillRef>
+          <a:effectRef idx="2">
+            <a:schemeClr val="accent1"/>
+          </a:effectRef>
+          <a:fontRef idx="minor">
+            <a:schemeClr val="lt1"/>
+          </a:fontRef>
+        </p:style>
+        <p:txBody>
+          <a:bodyPr rtlCol="0" anchor="ctr" wrap="square"/>
+          <a:lstStyle/>
+          <a:p>
+            <a:pPr algn="ctr">
+              <a:defRPr sz="1200" b="1">
+                <a:solidFill>
+                  <a:srgbClr val="2E74B5"/>
+                </a:solidFill>
+              </a:defRPr>
+            </a:pPr>
+            <a:r>
+              <a:t>Exact Methods</a:t>
+            </a:r>
+          </a:p>
+          <a:p>
+            <a:pPr algn="ctr">
+              <a:defRPr sz="1100">
+                <a:solidFill>
+                  <a:srgbClr val="1F2D3D"/>
+                </a:solidFill>
+              </a:defRPr>
+            </a:pPr>
+            <a:r>
+              <a:t>BPC  ·  SWC-TCF</a:t>
+            </a:r>
+          </a:p>
+        </p:txBody>
+      </p:sp>
+      <p:sp>
+        <p:nvSpPr>
+          <p:cNvPr id="11" name="Rectangle 10"/>
+          <p:cNvSpPr/>
+          <p:nvPr/>
+        </p:nvSpPr>
+        <p:spPr>
+          <a:xfrm>
+            <a:off x="4338218" y="2926080"/>
+            <a:ext cx="3515258" cy="1097280"/>
+          </a:xfrm>
+          <a:prstGeom prst="rect">
+            <a:avLst/>
+          </a:prstGeom>
+          <a:noFill/>
+          <a:ln w="12700">
+            <a:solidFill>
+              <a:srgbClr val="5A6A7A"/>
+            </a:solidFill>
+            <a:prstDash val="dash"/>
+          </a:ln>
+          <a:effectLst/>
+        </p:spPr>
+        <p:style>
+          <a:lnRef idx="1">
+            <a:schemeClr val="accent1"/>
+          </a:lnRef>
+          <a:fillRef idx="3">
+            <a:schemeClr val="accent1"/>
+          </a:fillRef>
+          <a:effectRef idx="2">
+            <a:schemeClr val="accent1"/>
+          </a:effectRef>
+          <a:fontRef idx="minor">
+            <a:schemeClr val="lt1"/>
+          </a:fontRef>
+        </p:style>
+        <p:txBody>
+          <a:bodyPr rtlCol="0" anchor="ctr" wrap="square"/>
+          <a:lstStyle/>
+          <a:p>
+            <a:pPr algn="ctr">
+              <a:defRPr sz="1200" b="1">
+                <a:solidFill>
+                  <a:srgbClr val="2E74B5"/>
+                </a:solidFill>
+              </a:defRPr>
+            </a:pPr>
+            <a:r>
+              <a:t>Meta-Heuristics</a:t>
+            </a:r>
+          </a:p>
+          <a:p>
+            <a:pPr algn="ctr">
+              <a:defRPr sz="1100">
+                <a:solidFill>
+                  <a:srgbClr val="1F2D3D"/>
+                </a:solidFill>
+              </a:defRPr>
+            </a:pPr>
+            <a:r>
+              <a:t>HGS  ·  ALNS  ·  SANS  ·  PG-CLNS</a:t>
+            </a:r>
+          </a:p>
+        </p:txBody>
+      </p:sp>
+      <p:sp>
+        <p:nvSpPr>
+          <p:cNvPr id="12" name="Rectangle 11"/>
+          <p:cNvSpPr/>
+          <p:nvPr/>
+        </p:nvSpPr>
+        <p:spPr>
+          <a:xfrm>
+            <a:off x="4338218" y="4160520"/>
+            <a:ext cx="3515258" cy="1097280"/>
+          </a:xfrm>
+          <a:prstGeom prst="rect">
+            <a:avLst/>
+          </a:prstGeom>
+          <a:noFill/>
+          <a:ln w="12700">
+            <a:solidFill>
+              <a:srgbClr val="5A6A7A"/>
+            </a:solidFill>
+            <a:prstDash val="dash"/>
+          </a:ln>
+          <a:effectLst/>
+        </p:spPr>
+        <p:style>
+          <a:lnRef idx="1">
+            <a:schemeClr val="accent1"/>
+          </a:lnRef>
+          <a:fillRef idx="3">
+            <a:schemeClr val="accent1"/>
+          </a:fillRef>
+          <a:effectRef idx="2">
+            <a:schemeClr val="accent1"/>
+          </a:effectRef>
+          <a:fontRef idx="minor">
+            <a:schemeClr val="lt1"/>
+          </a:fontRef>
+        </p:style>
+        <p:txBody>
+          <a:bodyPr rtlCol="0" anchor="ctr" wrap="square"/>
+          <a:lstStyle/>
+          <a:p>
+            <a:pPr algn="ctr">
+              <a:defRPr sz="1200" b="1">
+                <a:solidFill>
+                  <a:srgbClr val="2E74B5"/>
+                </a:solidFill>
+              </a:defRPr>
+            </a:pPr>
+            <a:r>
+              <a:t>Hyper-Heuristics</a:t>
+            </a:r>
+          </a:p>
+          <a:p>
+            <a:pPr algn="ctr">
+              <a:defRPr sz="1100">
+                <a:solidFill>
+                  <a:srgbClr val="1F2D3D"/>
+                </a:solidFill>
+              </a:defRPr>
+            </a:pPr>
+            <a:r>
+              <a:t>PSOMA  ·  ACO-HH</a:t>
+            </a:r>
+          </a:p>
+        </p:txBody>
+      </p:sp>
+      <p:sp>
+        <p:nvSpPr>
+          <p:cNvPr id="13" name="Rounded Rectangle 12"/>
+          <p:cNvSpPr/>
+          <p:nvPr/>
+        </p:nvSpPr>
+        <p:spPr>
+          <a:xfrm>
+            <a:off x="8127796" y="1051560"/>
+            <a:ext cx="3515258" cy="502920"/>
+          </a:xfrm>
+          <a:prstGeom prst="roundRect">
+            <a:avLst/>
+          </a:prstGeom>
+          <a:solidFill>
+            <a:srgbClr val="1F2D3D"/>
+          </a:solidFill>
+          <a:ln>
+            <a:noFill/>
+          </a:ln>
+          <a:effectLst/>
+        </p:spPr>
+        <p:style>
+          <a:lnRef idx="1">
+            <a:schemeClr val="accent1"/>
+          </a:lnRef>
+          <a:fillRef idx="3">
+            <a:schemeClr val="accent1"/>
+          </a:fillRef>
+          <a:effectRef idx="2">
+            <a:schemeClr val="accent1"/>
+          </a:effectRef>
+          <a:fontRef idx="minor">
+            <a:schemeClr val="lt1"/>
+          </a:fontRef>
+        </p:style>
+        <p:txBody>
+          <a:bodyPr rtlCol="0" anchor="ctr"/>
+          <a:lstStyle/>
+          <a:p>
+            <a:pPr algn="ctr">
+              <a:defRPr sz="1500" b="1">
+                <a:solidFill>
+                  <a:srgbClr val="FFFFFF"/>
+                </a:solidFill>
+              </a:defRPr>
+            </a:pPr>
+            <a:r>
+              <a:t>Route Improver</a:t>
+            </a:r>
+          </a:p>
+        </p:txBody>
+      </p:sp>
+      <p:sp>
+        <p:nvSpPr>
+          <p:cNvPr id="14" name="Rounded Rectangle 13"/>
+          <p:cNvSpPr/>
+          <p:nvPr/>
+        </p:nvSpPr>
+        <p:spPr>
+          <a:xfrm>
+            <a:off x="8127796" y="1691640"/>
+            <a:ext cx="3515258" cy="1728216"/>
+          </a:xfrm>
+          <a:prstGeom prst="roundRect">
+            <a:avLst/>
+          </a:prstGeom>
+          <a:solidFill>
+            <a:srgbClr val="2E74B5"/>
+          </a:solidFill>
+          <a:ln>
+            <a:noFill/>
+          </a:ln>
+          <a:effectLst/>
+        </p:spPr>
+        <p:style>
+          <a:lnRef idx="1">
+            <a:schemeClr val="accent1"/>
+          </a:lnRef>
+          <a:fillRef idx="3">
+            <a:schemeClr val="accent1"/>
+          </a:fillRef>
+          <a:effectRef idx="2">
+            <a:schemeClr val="accent1"/>
+          </a:effectRef>
+          <a:fontRef idx="minor">
+            <a:schemeClr val="lt1"/>
+          </a:fontRef>
+        </p:style>
+        <p:txBody>
+          <a:bodyPr rtlCol="0" anchor="ctr"/>
+          <a:lstStyle/>
+          <a:p>
+            <a:pPr algn="ctr">
+              <a:defRPr sz="1300" b="1">
+                <a:solidFill>
+                  <a:srgbClr val="FFFFFF"/>
+                </a:solidFill>
+              </a:defRPr>
+            </a:pPr>
+            <a:r>
+              <a:t>Fast-TSP</a:t>
+            </a:r>
+          </a:p>
+        </p:txBody>
+      </p:sp>
+      <p:sp>
+        <p:nvSpPr>
+          <p:cNvPr id="15" name="Rounded Rectangle 14"/>
+          <p:cNvSpPr/>
+          <p:nvPr/>
+        </p:nvSpPr>
+        <p:spPr>
+          <a:xfrm>
+            <a:off x="8127796" y="3529584"/>
+            <a:ext cx="3515258" cy="1728216"/>
+          </a:xfrm>
+          <a:prstGeom prst="roundRect">
+            <a:avLst/>
+          </a:prstGeom>
+          <a:solidFill>
+            <a:srgbClr val="2E74B5"/>
+          </a:solidFill>
+          <a:ln>
+            <a:noFill/>
+          </a:ln>
+          <a:effectLst/>
+        </p:spPr>
+        <p:style>
+          <a:lnRef idx="1">
+            <a:schemeClr val="accent1"/>
+          </a:lnRef>
+          <a:fillRef idx="3">
+            <a:schemeClr val="accent1"/>
+          </a:fillRef>
+          <a:effectRef idx="2">
+            <a:schemeClr val="accent1"/>
+          </a:effectRef>
+          <a:fontRef idx="minor">
+            <a:schemeClr val="lt1"/>
+          </a:fontRef>
+        </p:style>
+        <p:txBody>
+          <a:bodyPr rtlCol="0" anchor="ctr"/>
+          <a:lstStyle/>
+          <a:p>
+            <a:pPr algn="ctr">
+              <a:defRPr sz="1300" b="1">
+                <a:solidFill>
+                  <a:srgbClr val="FFFFFF"/>
+                </a:solidFill>
+              </a:defRPr>
+            </a:pPr>
+            <a:r>
+              <a:t>Local Search (CLS)</a:t>
+            </a:r>
+          </a:p>
+        </p:txBody>
+      </p:sp>
+      <p:sp>
+        <p:nvSpPr>
+          <p:cNvPr id="16" name="TextBox 15"/>
           <p:cNvSpPr txBox="1"/>
           <p:nvPr/>
         </p:nvSpPr>
         <p:spPr>
           <a:xfrm>
-            <a:off x="548640" y="3429000"/>
-            <a:ext cx="11094415" cy="548640"/>
+            <a:off x="548640" y="5349240"/>
+            <a:ext cx="11094415" cy="822960"/>
           </a:xfrm>
           <a:prstGeom prst="rect">
             <a:avLst/>
@@ -7046,7 +10099,7 @@
                   <a:srgbClr val="1F2D3D"/>
                 </a:solidFill>
               </a:rPr>
-              <a:t>Equation 4: </a:t>
+              <a:t>Figure 2: </a:t>
             </a:r>
             <a:r>
               <a:rPr i="1" sz="1100">
@@ -7054,21 +10107,21 @@
                   <a:srgbClr val="5A6A7A"/>
                 </a:solidFill>
               </a:rPr>
-              <a:t>A meta-heuristic maps the incumbent x_t to a new candidate via operator A parameterised by θ_t, updated from feedback; a hyper-heuristic instead searches over low-level heuristics h ∈ H, picking the one with highest estimated value Q_t(h) at each step.</a:t>
-            </a:r>
-          </a:p>
-        </p:txBody>
-      </p:sp>
-      <p:sp>
-        <p:nvSpPr>
-          <p:cNvPr id="6" name="TextBox 5"/>
+              <a:t>Every simulated policy is one path through the three columns: a mandatory selection strategy, a route constructor (exact / meta-heuristic / hyper-heuristic) and an optional route improver.</a:t>
+            </a:r>
+          </a:p>
+        </p:txBody>
+      </p:sp>
+      <p:sp>
+        <p:nvSpPr>
+          <p:cNvPr id="17" name="TextBox 16"/>
           <p:cNvSpPr txBox="1"/>
           <p:nvPr/>
         </p:nvSpPr>
         <p:spPr>
           <a:xfrm>
-            <a:off x="548640" y="4114800"/>
-            <a:ext cx="11094415" cy="2377440"/>
+            <a:off x="548640" y="5897880"/>
+            <a:ext cx="11094415" cy="594360"/>
           </a:xfrm>
           <a:prstGeom prst="rect">
             <a:avLst/>
@@ -7085,14 +10138,14 @@
               <a:spcAft>
                 <a:spcPts val="1000"/>
               </a:spcAft>
-              <a:defRPr sz="1400">
+              <a:defRPr sz="1300">
                 <a:solidFill>
                   <a:srgbClr val="1F2D3D"/>
                 </a:solidFill>
               </a:defRPr>
             </a:pPr>
             <a:r>
-              <a:t>•  Heuristic search trades a small optimality gap for polynomial runtime — essential beyond the exact solvers' size limits</a:t>
+              <a:t>•  Mandatory selection × route constructor × route improver — every combination is run through the same multi-day simulator</a:t>
             </a:r>
           </a:p>
           <a:p>
@@ -7100,44 +10153,14 @@
               <a:spcAft>
                 <a:spcPts val="1000"/>
               </a:spcAft>
-              <a:defRPr sz="1400">
+              <a:defRPr sz="1300">
                 <a:solidFill>
                   <a:srgbClr val="1F2D3D"/>
                 </a:solidFill>
               </a:defRPr>
             </a:pPr>
             <a:r>
-              <a:t>•  Meta-heuristics balance exploration (diversify, escape local optima) and exploitation (intensify, polish good solutions)</a:t>
-            </a:r>
-          </a:p>
-          <a:p>
-            <a:pPr>
-              <a:spcAft>
-                <a:spcPts val="1000"/>
-              </a:spcAft>
-              <a:defRPr sz="1400">
-                <a:solidFill>
-                  <a:srgbClr val="1F2D3D"/>
-                </a:solidFill>
-              </a:defRPr>
-            </a:pPr>
-            <a:r>
-              <a:t>•  Hyper-heuristics search the space of heuristics itself, learning which low-level operator to apply next (e.g. ACO-HH)</a:t>
-            </a:r>
-          </a:p>
-          <a:p>
-            <a:pPr>
-              <a:spcAft>
-                <a:spcPts val="1000"/>
-              </a:spcAft>
-              <a:defRPr sz="1400">
-                <a:solidFill>
-                  <a:srgbClr val="1F2D3D"/>
-                </a:solidFill>
-              </a:defRPr>
-            </a:pPr>
-            <a:r>
-              <a:t>•  Three families studied: evolutionary (HGS), swarm intelligence (PSOMA, ACO-HH), neighborhood search (SANS, PG-CLNS)</a:t>
+              <a:t>•  Exact methods and meta-/hyper-heuristics are interchangeable route constructors under the identical selection and improvement stages</a:t>
             </a:r>
           </a:p>
         </p:txBody>
@@ -7207,7 +10230,7 @@
               </a:defRPr>
             </a:pPr>
             <a:r>
-              <a:t>Evolutionary Algorithms — HGS (Hybrid Genetic Search)</a:t>
+              <a:t>Exact Methods: BPC &amp; SWC-TCF</a:t>
             </a:r>
           </a:p>
         </p:txBody>
@@ -7221,7 +10244,7 @@
         <p:spPr>
           <a:xfrm>
             <a:off x="548640" y="1143000"/>
-            <a:ext cx="11094415" cy="1371600"/>
+            <a:ext cx="5730087" cy="932688"/>
           </a:xfrm>
           <a:prstGeom prst="roundRect">
             <a:avLst/>
@@ -7256,9 +10279,405 @@
           </a:p>
         </p:txBody>
       </p:sp>
+      <p:sp>
+        <p:nvSpPr>
+          <p:cNvPr id="4" name="TextBox 3"/>
+          <p:cNvSpPr txBox="1"/>
+          <p:nvPr/>
+        </p:nvSpPr>
+        <p:spPr>
+          <a:xfrm>
+            <a:off x="731520" y="1234440"/>
+            <a:ext cx="5364327" cy="749808"/>
+          </a:xfrm>
+          <a:prstGeom prst="rect">
+            <a:avLst/>
+          </a:prstGeom>
+          <a:noFill/>
+        </p:spPr>
+        <p:txBody>
+          <a:bodyPr wrap="square">
+            <a:spAutoFit/>
+          </a:bodyPr>
+          <a:lstStyle/>
+          <a:p>
+            <a:pPr algn="ctr">
+              <a:defRPr sz="1500">
+                <a:solidFill>
+                  <a:srgbClr val="1F2D3D"/>
+                </a:solidFill>
+              </a:defRPr>
+            </a:pPr>
+            <mc:AlternateContent xmlns:mc="http://schemas.openxmlformats.org/markup-compatibility/2006" xmlns:a14="http://schemas.microsoft.com/office/drawing/2010/main" xmlns:m="http://schemas.openxmlformats.org/officeDocument/2006/math">
+              <mc:Choice Requires="a14">
+                <a14:m>
+                  <m:oMathPara>
+                    <m:oMath xmlns:w="http://schemas.openxmlformats.org/wordprocessingml/2006/main" xmlns:o="urn:schemas-microsoft-com:office:office" xmlns:v="urn:schemas-microsoft-com:vml" xmlns:w10="urn:schemas-microsoft-com:office:word" xmlns:pic="http://schemas.openxmlformats.org/drawingml/2006/picture" xmlns:wp="http://schemas.openxmlformats.org/drawingml/2006/wordprocessingDrawing">
+                      <m:r>
+                        <m:rPr>
+                          <m:sty m:val="p"/>
+                        </m:rPr>
+                        <m:t>min</m:t>
+                      </m:r>
+                      <m:nary>
+                        <m:naryPr>
+                          <m:chr m:val="∑"/>
+                          <m:limLoc m:val="undOvr"/>
+                          <m:subHide m:val="off"/>
+                          <m:supHide m:val="on"/>
+                        </m:naryPr>
+                        <m:sub>
+                          <m:r>
+                            <m:t>r</m:t>
+                          </m:r>
+                          <m:r>
+                            <m:rPr>
+                              <m:sty m:val="p"/>
+                            </m:rPr>
+                            <m:t>∈</m:t>
+                          </m:r>
+                          <m:r>
+                            <m:rPr>
+                              <m:sty m:val="p"/>
+                            </m:rPr>
+                            <m:t>Ω</m:t>
+                          </m:r>
+                        </m:sub>
+                        <m:sup>
+                          <m:r>
+                            <m:t>​</m:t>
+                          </m:r>
+                        </m:sup>
+                        <m:e>
+                          <m:sSub>
+                            <m:e>
+                              <m:r>
+                                <m:t>c</m:t>
+                              </m:r>
+                            </m:e>
+                            <m:sub>
+                              <m:r>
+                                <m:t>r</m:t>
+                              </m:r>
+                            </m:sub>
+                          </m:sSub>
+                        </m:e>
+                      </m:nary>
+                      <m:r>
+                        <m:t> </m:t>
+                      </m:r>
+                      <m:sSub>
+                        <m:e>
+                          <m:r>
+                            <m:t>λ</m:t>
+                          </m:r>
+                        </m:e>
+                        <m:sub>
+                          <m:r>
+                            <m:t>r</m:t>
+                          </m:r>
+                        </m:sub>
+                      </m:sSub>
+                      <m:r>
+                        <m:t> </m:t>
+                      </m:r>
+                      <m:r>
+                        <m:rPr>
+                          <m:sty m:val="p"/>
+                        </m:rPr>
+                        <m:t>s</m:t>
+                      </m:r>
+                      <m:r>
+                        <m:rPr>
+                          <m:sty m:val="p"/>
+                        </m:rPr>
+                        <m:t>.</m:t>
+                      </m:r>
+                      <m:r>
+                        <m:rPr>
+                          <m:sty m:val="p"/>
+                        </m:rPr>
+                        <m:t>t</m:t>
+                      </m:r>
+                      <m:r>
+                        <m:rPr>
+                          <m:sty m:val="p"/>
+                        </m:rPr>
+                        <m:t>.</m:t>
+                      </m:r>
+                      <m:r>
+                        <m:t> </m:t>
+                      </m:r>
+                      <m:nary>
+                        <m:naryPr>
+                          <m:chr m:val="∑"/>
+                          <m:limLoc m:val="undOvr"/>
+                          <m:subHide m:val="off"/>
+                          <m:supHide m:val="on"/>
+                        </m:naryPr>
+                        <m:sub>
+                          <m:r>
+                            <m:t>r</m:t>
+                          </m:r>
+                          <m:r>
+                            <m:rPr>
+                              <m:sty m:val="p"/>
+                            </m:rPr>
+                            <m:t>∈</m:t>
+                          </m:r>
+                          <m:r>
+                            <m:rPr>
+                              <m:sty m:val="p"/>
+                            </m:rPr>
+                            <m:t>Ω</m:t>
+                          </m:r>
+                        </m:sub>
+                        <m:sup>
+                          <m:r>
+                            <m:t>​</m:t>
+                          </m:r>
+                        </m:sup>
+                        <m:e>
+                          <m:sSub>
+                            <m:e>
+                              <m:r>
+                                <m:t>a</m:t>
+                              </m:r>
+                            </m:e>
+                            <m:sub>
+                              <m:r>
+                                <m:t>i</m:t>
+                              </m:r>
+                              <m:r>
+                                <m:t>r</m:t>
+                              </m:r>
+                            </m:sub>
+                          </m:sSub>
+                        </m:e>
+                      </m:nary>
+                      <m:r>
+                        <m:t> </m:t>
+                      </m:r>
+                      <m:sSub>
+                        <m:e>
+                          <m:r>
+                            <m:t>λ</m:t>
+                          </m:r>
+                        </m:e>
+                        <m:sub>
+                          <m:r>
+                            <m:t>r</m:t>
+                          </m:r>
+                        </m:sub>
+                      </m:sSub>
+                      <m:r>
+                        <m:rPr>
+                          <m:sty m:val="p"/>
+                        </m:rPr>
+                        <m:t>=</m:t>
+                      </m:r>
+                      <m:r>
+                        <m:t>1</m:t>
+                      </m:r>
+                      <m:r>
+                        <m:t> </m:t>
+                      </m:r>
+                      <m:r>
+                        <m:t> </m:t>
+                      </m:r>
+                      <m:r>
+                        <m:rPr>
+                          <m:sty m:val="p"/>
+                        </m:rPr>
+                        <m:t>∀</m:t>
+                      </m:r>
+                      <m:r>
+                        <m:t>i</m:t>
+                      </m:r>
+                      <m:r>
+                        <m:rPr>
+                          <m:sty m:val="p"/>
+                        </m:rPr>
+                        <m:t>∈</m:t>
+                      </m:r>
+                      <m:r>
+                        <m:t>V</m:t>
+                      </m:r>
+                      <m:r>
+                        <m:rPr>
+                          <m:sty m:val="p"/>
+                        </m:rPr>
+                        <m:t>,</m:t>
+                      </m:r>
+                      <m:r>
+                        <m:t> </m:t>
+                      </m:r>
+                      <m:sSub>
+                        <m:e>
+                          <m:r>
+                            <m:t>λ</m:t>
+                          </m:r>
+                        </m:e>
+                        <m:sub>
+                          <m:r>
+                            <m:t>r</m:t>
+                          </m:r>
+                        </m:sub>
+                      </m:sSub>
+                      <m:r>
+                        <m:rPr>
+                          <m:sty m:val="p"/>
+                        </m:rPr>
+                        <m:t>≥</m:t>
+                      </m:r>
+                      <m:r>
+                        <m:t>0</m:t>
+                      </m:r>
+                    </m:oMath>
+                  </m:oMathPara>
+                </a14:m>
+              </mc:Choice>
+              <mc:Fallback>
+                <a:r>
+                  <a:rPr lang="en-US" sz="1500">
+                    <a:solidFill>
+                      <a:srgbClr val="1F2D3D"/>
+                    </a:solidFill>
+                  </a:rPr>
+                  <a:t>min sum_r in Omega c_r, lambda_r quad s.t. quad sum_r in Omega a_ir, lambda_r = 1 forall i in V, quad lambda_r geq 0</a:t>
+                </a:r>
+              </mc:Fallback>
+            </mc:AlternateContent>
+          </a:p>
+        </p:txBody>
+      </p:sp>
+      <p:sp>
+        <p:nvSpPr>
+          <p:cNvPr id="5" name="TextBox 4"/>
+          <p:cNvSpPr txBox="1"/>
+          <p:nvPr/>
+        </p:nvSpPr>
+        <p:spPr>
+          <a:xfrm>
+            <a:off x="548640" y="2258568"/>
+            <a:ext cx="5730087" cy="822960"/>
+          </a:xfrm>
+          <a:prstGeom prst="rect">
+            <a:avLst/>
+          </a:prstGeom>
+          <a:noFill/>
+        </p:spPr>
+        <p:txBody>
+          <a:bodyPr wrap="square">
+            <a:spAutoFit/>
+          </a:bodyPr>
+          <a:lstStyle/>
+          <a:p>
+            <a:r>
+              <a:rPr b="1" sz="1100">
+                <a:solidFill>
+                  <a:srgbClr val="1F2D3D"/>
+                </a:solidFill>
+              </a:rPr>
+              <a:t>Equation 3: </a:t>
+            </a:r>
+            <a:r>
+              <a:rPr i="1" sz="1100">
+                <a:solidFill>
+                  <a:srgbClr val="5A6A7A"/>
+                </a:solidFill>
+              </a:rPr>
+              <a:t>Set-partitioning master problem: choose a minimum-cost combination of routes r ∈ Ω (weight λ_r) such that every node i is covered exactly once (a_ir = 1 iff route r visits i).</a:t>
+            </a:r>
+          </a:p>
+        </p:txBody>
+      </p:sp>
+      <p:sp>
+        <p:nvSpPr>
+          <p:cNvPr id="6" name="TextBox 5"/>
+          <p:cNvSpPr txBox="1"/>
+          <p:nvPr/>
+        </p:nvSpPr>
+        <p:spPr>
+          <a:xfrm>
+            <a:off x="548640" y="3035808"/>
+            <a:ext cx="5730087" cy="3456432"/>
+          </a:xfrm>
+          <a:prstGeom prst="rect">
+            <a:avLst/>
+          </a:prstGeom>
+          <a:noFill/>
+        </p:spPr>
+        <p:txBody>
+          <a:bodyPr wrap="square">
+            <a:spAutoFit/>
+          </a:bodyPr>
+          <a:lstStyle/>
+          <a:p>
+            <a:pPr>
+              <a:spcAft>
+                <a:spcPts val="1000"/>
+              </a:spcAft>
+              <a:defRPr sz="1300">
+                <a:solidFill>
+                  <a:srgbClr val="1F2D3D"/>
+                </a:solidFill>
+              </a:defRPr>
+            </a:pPr>
+            <a:r>
+              <a:t>•  Branch-Price-and-Cut (BPC): column generation over the route set Ω with cutting planes — proven optimality (BHV2000 lineage)</a:t>
+            </a:r>
+          </a:p>
+          <a:p>
+            <a:pPr>
+              <a:spcAft>
+                <a:spcPts val="1000"/>
+              </a:spcAft>
+              <a:defRPr sz="1300">
+                <a:solidFill>
+                  <a:srgbClr val="1F2D3D"/>
+                </a:solidFill>
+              </a:defRPr>
+            </a:pPr>
+            <a:r>
+              <a:t>•  Pricing subproblem: elementary shortest path with resource constraints, accelerated by ng-route relaxation and limited-memory cuts</a:t>
+            </a:r>
+          </a:p>
+          <a:p>
+            <a:pPr>
+              <a:spcAft>
+                <a:spcPts val="1000"/>
+              </a:spcAft>
+              <a:defRPr sz="1300">
+                <a:solidFill>
+                  <a:srgbClr val="1F2D3D"/>
+                </a:solidFill>
+              </a:defRPr>
+            </a:pPr>
+            <a:r>
+              <a:t>•  SWC-TCF: exact set-partitioning over Clarke-Wright-style savings columns with traffic-congestion-adjusted costs</a:t>
+            </a:r>
+          </a:p>
+          <a:p>
+            <a:pPr>
+              <a:spcAft>
+                <a:spcPts val="1000"/>
+              </a:spcAft>
+              <a:defRPr sz="1300">
+                <a:solidFill>
+                  <a:srgbClr val="1F2D3D"/>
+                </a:solidFill>
+              </a:defRPr>
+            </a:pPr>
+            <a:r>
+              <a:t>•  Both provide optimality reference points; exponential worst-case runtime limits them to the daily subproblem sizes</a:t>
+            </a:r>
+          </a:p>
+        </p:txBody>
+      </p:sp>
       <p:pic>
         <p:nvPicPr>
-          <p:cNvPr id="4" name="Picture 3" descr="eq_5.png"/>
+          <p:cNvPr id="7" name="Picture 6" descr="constructor_ranking.png"/>
           <p:cNvPicPr>
             <a:picLocks noChangeAspect="1"/>
           </p:cNvPicPr>
@@ -7272,138 +10691,14 @@
         </p:blipFill>
         <p:spPr>
           <a:xfrm>
-            <a:off x="885507" y="1234440"/>
-            <a:ext cx="10420681" cy="1188720"/>
+            <a:off x="6278727" y="2271037"/>
+            <a:ext cx="5364327" cy="2956006"/>
           </a:xfrm>
           <a:prstGeom prst="rect">
             <a:avLst/>
           </a:prstGeom>
         </p:spPr>
       </p:pic>
-      <p:sp>
-        <p:nvSpPr>
-          <p:cNvPr id="5" name="TextBox 4"/>
-          <p:cNvSpPr txBox="1"/>
-          <p:nvPr/>
-        </p:nvSpPr>
-        <p:spPr>
-          <a:xfrm>
-            <a:off x="548640" y="2743200"/>
-            <a:ext cx="11094415" cy="548640"/>
-          </a:xfrm>
-          <a:prstGeom prst="rect">
-            <a:avLst/>
-          </a:prstGeom>
-          <a:noFill/>
-        </p:spPr>
-        <p:txBody>
-          <a:bodyPr wrap="square">
-            <a:spAutoFit/>
-          </a:bodyPr>
-          <a:lstStyle/>
-          <a:p>
-            <a:r>
-              <a:rPr b="1" sz="1100">
-                <a:solidFill>
-                  <a:srgbClr val="1F2D3D"/>
-                </a:solidFill>
-              </a:rPr>
-              <a:t>Equation 5: </a:t>
-            </a:r>
-            <a:r>
-              <a:rPr i="1" sz="1100">
-                <a:solidFill>
-                  <a:srgbClr val="5A6A7A"/>
-                </a:solidFill>
-              </a:rPr>
-              <a:t>Biased fitness function used to rank current solutions by both quality and diversity. n_pop is the current population size and n_elite the number of elite (best-cost) individuals; individuals outside the elite are increasingly rewarded for contributing diversity.</a:t>
-            </a:r>
-          </a:p>
-        </p:txBody>
-      </p:sp>
-      <p:sp>
-        <p:nvSpPr>
-          <p:cNvPr id="6" name="TextBox 5"/>
-          <p:cNvSpPr txBox="1"/>
-          <p:nvPr/>
-        </p:nvSpPr>
-        <p:spPr>
-          <a:xfrm>
-            <a:off x="548640" y="3429000"/>
-            <a:ext cx="11094415" cy="3063240"/>
-          </a:xfrm>
-          <a:prstGeom prst="rect">
-            <a:avLst/>
-          </a:prstGeom>
-          <a:noFill/>
-        </p:spPr>
-        <p:txBody>
-          <a:bodyPr wrap="square">
-            <a:spAutoFit/>
-          </a:bodyPr>
-          <a:lstStyle/>
-          <a:p>
-            <a:pPr>
-              <a:spcAft>
-                <a:spcPts val="1000"/>
-              </a:spcAft>
-              <a:defRPr sz="1400">
-                <a:solidFill>
-                  <a:srgbClr val="1F2D3D"/>
-                </a:solidFill>
-              </a:defRPr>
-            </a:pPr>
-            <a:r>
-              <a:t>•  Population-based: parents recombine via ordered crossover; every offspring is 'educated' by aggressive local search</a:t>
-            </a:r>
-          </a:p>
-          <a:p>
-            <a:pPr>
-              <a:spcAft>
-                <a:spcPts val="1000"/>
-              </a:spcAft>
-              <a:defRPr sz="1400">
-                <a:solidFill>
-                  <a:srgbClr val="1F2D3D"/>
-                </a:solidFill>
-              </a:defRPr>
-            </a:pPr>
-            <a:r>
-              <a:t>•  Biased fitness (above) blends solution quality with diversity contribution — prevents premature convergence</a:t>
-            </a:r>
-          </a:p>
-          <a:p>
-            <a:pPr>
-              <a:spcAft>
-                <a:spcPts val="1000"/>
-              </a:spcAft>
-              <a:defRPr sz="1400">
-                <a:solidFill>
-                  <a:srgbClr val="1F2D3D"/>
-                </a:solidFill>
-              </a:defRPr>
-            </a:pPr>
-            <a:r>
-              <a:t>•  Infeasible individuals survive in a penalised sub-population, letting the search cross infeasible regions</a:t>
-            </a:r>
-          </a:p>
-          <a:p>
-            <a:pPr>
-              <a:spcAft>
-                <a:spcPts val="1000"/>
-              </a:spcAft>
-              <a:defRPr sz="1400">
-                <a:solidFill>
-                  <a:srgbClr val="1F2D3D"/>
-                </a:solidFill>
-              </a:defRPr>
-            </a:pPr>
-            <a:r>
-              <a:t>•  State-of-the-art on classical CVRP; strong efficiency performer here when paired with the CLS improver</a:t>
-            </a:r>
-          </a:p>
-        </p:txBody>
-      </p:sp>
     </p:spTree>
   </p:cSld>
   <p:clrMapOvr>
@@ -7469,7 +10764,7 @@
               </a:defRPr>
             </a:pPr>
             <a:r>
-              <a:t>Swarm Intelligence — PSOMA &amp; ACO-HH</a:t>
+              <a:t>Meta-Heuristics &amp; Hyper-Heuristics — Overarching Philosophy</a:t>
             </a:r>
           </a:p>
         </p:txBody>
@@ -7483,7 +10778,7 @@
         <p:spPr>
           <a:xfrm>
             <a:off x="548640" y="1143000"/>
-            <a:ext cx="11094415" cy="2057400"/>
+            <a:ext cx="11094415" cy="1499616"/>
           </a:xfrm>
           <a:prstGeom prst="roundRect">
             <a:avLst/>
@@ -7518,30 +10813,561 @@
           </a:p>
         </p:txBody>
       </p:sp>
-      <p:pic>
-        <p:nvPicPr>
-          <p:cNvPr id="4" name="Picture 3" descr="eq_6.png"/>
-          <p:cNvPicPr>
-            <a:picLocks noChangeAspect="1"/>
-          </p:cNvPicPr>
+      <p:sp>
+        <p:nvSpPr>
+          <p:cNvPr id="4" name="TextBox 3"/>
+          <p:cNvSpPr txBox="1"/>
           <p:nvPr/>
-        </p:nvPicPr>
-        <p:blipFill>
-          <a:blip r:embed="rId2"/>
-          <a:stretch>
-            <a:fillRect/>
-          </a:stretch>
-        </p:blipFill>
-        <p:spPr>
-          <a:xfrm>
-            <a:off x="2348797" y="1234440"/>
-            <a:ext cx="7494100" cy="1874520"/>
+        </p:nvSpPr>
+        <p:spPr>
+          <a:xfrm>
+            <a:off x="731520" y="1234440"/>
+            <a:ext cx="10728655" cy="1316736"/>
           </a:xfrm>
           <a:prstGeom prst="rect">
             <a:avLst/>
           </a:prstGeom>
-        </p:spPr>
-      </p:pic>
+          <a:noFill/>
+        </p:spPr>
+        <p:txBody>
+          <a:bodyPr wrap="square">
+            <a:spAutoFit/>
+          </a:bodyPr>
+          <a:lstStyle/>
+          <a:p>
+            <a:pPr algn="ctr">
+              <a:defRPr sz="2000">
+                <a:solidFill>
+                  <a:srgbClr val="1F2D3D"/>
+                </a:solidFill>
+              </a:defRPr>
+            </a:pPr>
+            <mc:AlternateContent xmlns:mc="http://schemas.openxmlformats.org/markup-compatibility/2006" xmlns:a14="http://schemas.microsoft.com/office/drawing/2010/main" xmlns:m="http://schemas.openxmlformats.org/officeDocument/2006/math">
+              <mc:Choice Requires="a14">
+                <a14:m>
+                  <m:oMathPara>
+                    <m:oMath xmlns:w="http://schemas.openxmlformats.org/wordprocessingml/2006/main" xmlns:o="urn:schemas-microsoft-com:office:office" xmlns:v="urn:schemas-microsoft-com:vml" xmlns:w10="urn:schemas-microsoft-com:office:word" xmlns:pic="http://schemas.openxmlformats.org/drawingml/2006/picture" xmlns:wp="http://schemas.openxmlformats.org/drawingml/2006/wordprocessingDrawing">
+                      <m:sSub>
+                        <m:e>
+                          <m:r>
+                            <m:t>x</m:t>
+                          </m:r>
+                        </m:e>
+                        <m:sub>
+                          <m:r>
+                            <m:t>t</m:t>
+                          </m:r>
+                          <m:r>
+                            <m:rPr>
+                              <m:sty m:val="p"/>
+                            </m:rPr>
+                            <m:t>+</m:t>
+                          </m:r>
+                          <m:r>
+                            <m:t>1</m:t>
+                          </m:r>
+                        </m:sub>
+                      </m:sSub>
+                      <m:r>
+                        <m:rPr>
+                          <m:sty m:val="p"/>
+                        </m:rPr>
+                        <m:t>=</m:t>
+                      </m:r>
+                      <m:r>
+                        <m:rPr>
+                          <m:scr m:val="script"/>
+                          <m:sty m:val="p"/>
+                        </m:rPr>
+                        <m:t>A</m:t>
+                      </m:r>
+                      <m:d>
+                        <m:dPr>
+                          <m:begChr m:val="("/>
+                          <m:sepChr m:val=""/>
+                          <m:endChr m:val=")"/>
+                          <m:grow/>
+                        </m:dPr>
+                        <m:e>
+                          <m:sSub>
+                            <m:e>
+                              <m:r>
+                                <m:t>x</m:t>
+                              </m:r>
+                            </m:e>
+                            <m:sub>
+                              <m:r>
+                                <m:t>t</m:t>
+                              </m:r>
+                            </m:sub>
+                          </m:sSub>
+                          <m:r>
+                            <m:rPr>
+                              <m:sty m:val="p"/>
+                            </m:rPr>
+                            <m:t>;</m:t>
+                          </m:r>
+                          <m:r>
+                            <m:t> </m:t>
+                          </m:r>
+                          <m:sSub>
+                            <m:e>
+                              <m:r>
+                                <m:t>θ</m:t>
+                              </m:r>
+                            </m:e>
+                            <m:sub>
+                              <m:r>
+                                <m:t>t</m:t>
+                              </m:r>
+                            </m:sub>
+                          </m:sSub>
+                        </m:e>
+                      </m:d>
+                      <m:r>
+                        <m:rPr>
+                          <m:sty m:val="p"/>
+                        </m:rPr>
+                        <m:t>,</m:t>
+                      </m:r>
+                      <m:r>
+                        <m:t>  </m:t>
+                      </m:r>
+                      <m:sSub>
+                        <m:e>
+                          <m:r>
+                            <m:t>θ</m:t>
+                          </m:r>
+                        </m:e>
+                        <m:sub>
+                          <m:r>
+                            <m:t>t</m:t>
+                          </m:r>
+                          <m:r>
+                            <m:rPr>
+                              <m:sty m:val="p"/>
+                            </m:rPr>
+                            <m:t>+</m:t>
+                          </m:r>
+                          <m:r>
+                            <m:t>1</m:t>
+                          </m:r>
+                        </m:sub>
+                      </m:sSub>
+                      <m:r>
+                        <m:rPr>
+                          <m:sty m:val="p"/>
+                        </m:rPr>
+                        <m:t>=</m:t>
+                      </m:r>
+                      <m:r>
+                        <m:rPr>
+                          <m:scr m:val="script"/>
+                          <m:sty m:val="p"/>
+                        </m:rPr>
+                        <m:t>U</m:t>
+                      </m:r>
+                      <m:d>
+                        <m:dPr>
+                          <m:begChr m:val="("/>
+                          <m:sepChr m:val=""/>
+                          <m:endChr m:val=")"/>
+                          <m:grow/>
+                        </m:dPr>
+                        <m:e>
+                          <m:sSub>
+                            <m:e>
+                              <m:r>
+                                <m:t>θ</m:t>
+                              </m:r>
+                            </m:e>
+                            <m:sub>
+                              <m:r>
+                                <m:t>t</m:t>
+                              </m:r>
+                            </m:sub>
+                          </m:sSub>
+                          <m:r>
+                            <m:rPr>
+                              <m:sty m:val="p"/>
+                            </m:rPr>
+                            <m:t>,</m:t>
+                          </m:r>
+                          <m:r>
+                            <m:t> </m:t>
+                          </m:r>
+                          <m:r>
+                            <m:rPr>
+                              <m:sty m:val="p"/>
+                            </m:rPr>
+                            <m:t>f</m:t>
+                          </m:r>
+                          <m:r>
+                            <m:rPr>
+                              <m:sty m:val="p"/>
+                            </m:rPr>
+                            <m:t>e</m:t>
+                          </m:r>
+                          <m:r>
+                            <m:rPr>
+                              <m:sty m:val="p"/>
+                            </m:rPr>
+                            <m:t>e</m:t>
+                          </m:r>
+                          <m:r>
+                            <m:rPr>
+                              <m:sty m:val="p"/>
+                            </m:rPr>
+                            <m:t>d</m:t>
+                          </m:r>
+                          <m:r>
+                            <m:rPr>
+                              <m:sty m:val="p"/>
+                            </m:rPr>
+                            <m:t>b</m:t>
+                          </m:r>
+                          <m:r>
+                            <m:rPr>
+                              <m:sty m:val="p"/>
+                            </m:rPr>
+                            <m:t>a</m:t>
+                          </m:r>
+                          <m:r>
+                            <m:rPr>
+                              <m:sty m:val="p"/>
+                            </m:rPr>
+                            <m:t>c</m:t>
+                          </m:r>
+                          <m:r>
+                            <m:rPr>
+                              <m:sty m:val="p"/>
+                            </m:rPr>
+                            <m:t>k</m:t>
+                          </m:r>
+                        </m:e>
+                      </m:d>
+                    </m:oMath>
+                  </m:oMathPara>
+                </a14:m>
+              </mc:Choice>
+              <mc:Fallback>
+                <a:r>
+                  <a:rPr lang="en-US" sz="2000">
+                    <a:solidFill>
+                      <a:srgbClr val="1F2D3D"/>
+                    </a:solidFill>
+                  </a:rPr>
+                  <a:t>x_t+1 = A(x_t; theta_t), qquad theta_t+1 = U(theta_t, feedback)</a:t>
+                </a:r>
+              </mc:Fallback>
+            </mc:AlternateContent>
+          </a:p>
+          <a:p>
+            <a:pPr algn="ctr">
+              <a:defRPr sz="2000">
+                <a:solidFill>
+                  <a:srgbClr val="1F2D3D"/>
+                </a:solidFill>
+              </a:defRPr>
+            </a:pPr>
+            <mc:AlternateContent xmlns:mc="http://schemas.openxmlformats.org/markup-compatibility/2006" xmlns:a14="http://schemas.microsoft.com/office/drawing/2010/main" xmlns:m="http://schemas.openxmlformats.org/officeDocument/2006/math">
+              <mc:Choice Requires="a14">
+                <a14:m>
+                  <m:oMathPara>
+                    <m:oMath xmlns:w="http://schemas.openxmlformats.org/wordprocessingml/2006/main" xmlns:o="urn:schemas-microsoft-com:office:office" xmlns:v="urn:schemas-microsoft-com:vml" xmlns:w10="urn:schemas-microsoft-com:office:word" xmlns:pic="http://schemas.openxmlformats.org/drawingml/2006/picture" xmlns:wp="http://schemas.openxmlformats.org/drawingml/2006/wordprocessingDrawing">
+                      <m:r>
+                        <m:rPr>
+                          <m:sty m:val="b"/>
+                        </m:rPr>
+                        <m:t>H</m:t>
+                      </m:r>
+                      <m:r>
+                        <m:rPr>
+                          <m:sty m:val="b"/>
+                        </m:rPr>
+                        <m:t>y</m:t>
+                      </m:r>
+                      <m:r>
+                        <m:rPr>
+                          <m:sty m:val="b"/>
+                        </m:rPr>
+                        <m:t>p</m:t>
+                      </m:r>
+                      <m:r>
+                        <m:rPr>
+                          <m:sty m:val="b"/>
+                        </m:rPr>
+                        <m:t>e</m:t>
+                      </m:r>
+                      <m:r>
+                        <m:rPr>
+                          <m:sty m:val="b"/>
+                        </m:rPr>
+                        <m:t>r</m:t>
+                      </m:r>
+                      <m:r>
+                        <m:rPr>
+                          <m:sty m:val="b"/>
+                        </m:rPr>
+                        <m:t>:</m:t>
+                      </m:r>
+                      <m:r>
+                        <m:t> </m:t>
+                      </m:r>
+                      <m:r>
+                        <m:t> </m:t>
+                      </m:r>
+                      <m:sSubSup>
+                        <m:e>
+                          <m:r>
+                            <m:t>h</m:t>
+                          </m:r>
+                        </m:e>
+                        <m:sub>
+                          <m:r>
+                            <m:t>t</m:t>
+                          </m:r>
+                        </m:sub>
+                        <m:sup>
+                          <m:r>
+                            <m:rPr>
+                              <m:sty m:val="p"/>
+                            </m:rPr>
+                            <m:t>*</m:t>
+                          </m:r>
+                        </m:sup>
+                      </m:sSubSup>
+                      <m:r>
+                        <m:rPr>
+                          <m:sty m:val="p"/>
+                        </m:rPr>
+                        <m:t>=</m:t>
+                      </m:r>
+                      <m:r>
+                        <m:rPr>
+                          <m:sty m:val="p"/>
+                        </m:rPr>
+                        <m:t>arg</m:t>
+                      </m:r>
+                      <m:limLow>
+                        <m:e>
+                          <m:r>
+                            <m:rPr>
+                              <m:sty m:val="p"/>
+                            </m:rPr>
+                            <m:t>max</m:t>
+                          </m:r>
+                        </m:e>
+                        <m:lim>
+                          <m:r>
+                            <m:t>h</m:t>
+                          </m:r>
+                          <m:r>
+                            <m:rPr>
+                              <m:sty m:val="p"/>
+                            </m:rPr>
+                            <m:t>∈</m:t>
+                          </m:r>
+                          <m:r>
+                            <m:t>H</m:t>
+                          </m:r>
+                        </m:lim>
+                      </m:limLow>
+                      <m:r>
+                        <m:t> </m:t>
+                      </m:r>
+                      <m:sSub>
+                        <m:e>
+                          <m:r>
+                            <m:t>Q</m:t>
+                          </m:r>
+                        </m:e>
+                        <m:sub>
+                          <m:r>
+                            <m:t>t</m:t>
+                          </m:r>
+                        </m:sub>
+                      </m:sSub>
+                      <m:r>
+                        <m:rPr>
+                          <m:sty m:val="p"/>
+                        </m:rPr>
+                        <m:t>(</m:t>
+                      </m:r>
+                      <m:r>
+                        <m:t>h</m:t>
+                      </m:r>
+                      <m:r>
+                        <m:rPr>
+                          <m:sty m:val="p"/>
+                        </m:rPr>
+                        <m:t>)</m:t>
+                      </m:r>
+                      <m:r>
+                        <m:t> </m:t>
+                      </m:r>
+                      <m:r>
+                        <m:rPr>
+                          <m:sty m:val="p"/>
+                        </m:rPr>
+                        <m:t>(</m:t>
+                      </m:r>
+                      <m:r>
+                        <m:rPr>
+                          <m:sty m:val="p"/>
+                        </m:rPr>
+                        <m:t>s</m:t>
+                      </m:r>
+                      <m:r>
+                        <m:rPr>
+                          <m:sty m:val="p"/>
+                        </m:rPr>
+                        <m:t>e</m:t>
+                      </m:r>
+                      <m:r>
+                        <m:rPr>
+                          <m:sty m:val="p"/>
+                        </m:rPr>
+                        <m:t>a</m:t>
+                      </m:r>
+                      <m:r>
+                        <m:rPr>
+                          <m:sty m:val="p"/>
+                        </m:rPr>
+                        <m:t>r</m:t>
+                      </m:r>
+                      <m:r>
+                        <m:rPr>
+                          <m:sty m:val="p"/>
+                        </m:rPr>
+                        <m:t>c</m:t>
+                      </m:r>
+                      <m:r>
+                        <m:rPr>
+                          <m:sty m:val="p"/>
+                        </m:rPr>
+                        <m:t>h</m:t>
+                      </m:r>
+                      <m:r>
+                        <m:rPr>
+                          <m:sty m:val="p"/>
+                        </m:rPr>
+                        <m:t> </m:t>
+                      </m:r>
+                      <m:r>
+                        <m:rPr>
+                          <m:sty m:val="p"/>
+                        </m:rPr>
+                        <m:t>o</m:t>
+                      </m:r>
+                      <m:r>
+                        <m:rPr>
+                          <m:sty m:val="p"/>
+                        </m:rPr>
+                        <m:t>v</m:t>
+                      </m:r>
+                      <m:r>
+                        <m:rPr>
+                          <m:sty m:val="p"/>
+                        </m:rPr>
+                        <m:t>e</m:t>
+                      </m:r>
+                      <m:r>
+                        <m:rPr>
+                          <m:sty m:val="p"/>
+                        </m:rPr>
+                        <m:t>r</m:t>
+                      </m:r>
+                      <m:r>
+                        <m:rPr>
+                          <m:sty m:val="p"/>
+                        </m:rPr>
+                        <m:t> </m:t>
+                      </m:r>
+                      <m:r>
+                        <m:rPr>
+                          <m:sty m:val="p"/>
+                        </m:rPr>
+                        <m:t>h</m:t>
+                      </m:r>
+                      <m:r>
+                        <m:rPr>
+                          <m:sty m:val="p"/>
+                        </m:rPr>
+                        <m:t>e</m:t>
+                      </m:r>
+                      <m:r>
+                        <m:rPr>
+                          <m:sty m:val="p"/>
+                        </m:rPr>
+                        <m:t>u</m:t>
+                      </m:r>
+                      <m:r>
+                        <m:rPr>
+                          <m:sty m:val="p"/>
+                        </m:rPr>
+                        <m:t>r</m:t>
+                      </m:r>
+                      <m:r>
+                        <m:rPr>
+                          <m:sty m:val="p"/>
+                        </m:rPr>
+                        <m:t>i</m:t>
+                      </m:r>
+                      <m:r>
+                        <m:rPr>
+                          <m:sty m:val="p"/>
+                        </m:rPr>
+                        <m:t>s</m:t>
+                      </m:r>
+                      <m:r>
+                        <m:rPr>
+                          <m:sty m:val="p"/>
+                        </m:rPr>
+                        <m:t>t</m:t>
+                      </m:r>
+                      <m:r>
+                        <m:rPr>
+                          <m:sty m:val="p"/>
+                        </m:rPr>
+                        <m:t>i</m:t>
+                      </m:r>
+                      <m:r>
+                        <m:rPr>
+                          <m:sty m:val="p"/>
+                        </m:rPr>
+                        <m:t>c</m:t>
+                      </m:r>
+                      <m:r>
+                        <m:rPr>
+                          <m:sty m:val="p"/>
+                        </m:rPr>
+                        <m:t>s</m:t>
+                      </m:r>
+                      <m:r>
+                        <m:rPr>
+                          <m:sty m:val="p"/>
+                        </m:rPr>
+                        <m:t>)</m:t>
+                      </m:r>
+                    </m:oMath>
+                  </m:oMathPara>
+                </a14:m>
+              </mc:Choice>
+              <mc:Fallback>
+                <a:r>
+                  <a:rPr lang="en-US" sz="2000">
+                    <a:solidFill>
+                      <a:srgbClr val="1F2D3D"/>
+                    </a:solidFill>
+                  </a:rPr>
+                  <a:t>Hyper: h^*_t = argmax_h in H Q_t(h) quad (search over heuristics)</a:t>
+                </a:r>
+              </mc:Fallback>
+            </mc:AlternateContent>
+          </a:p>
+        </p:txBody>
+      </p:sp>
       <p:sp>
         <p:nvSpPr>
           <p:cNvPr id="5" name="TextBox 4"/>
@@ -7550,8 +11376,8 @@
         </p:nvSpPr>
         <p:spPr>
           <a:xfrm>
-            <a:off x="548640" y="3429000"/>
-            <a:ext cx="11094415" cy="548640"/>
+            <a:off x="548640" y="2825496"/>
+            <a:ext cx="11094415" cy="822960"/>
           </a:xfrm>
           <a:prstGeom prst="rect">
             <a:avLst/>
@@ -7570,7 +11396,7 @@
                   <a:srgbClr val="1F2D3D"/>
                 </a:solidFill>
               </a:rPr>
-              <a:t>Equation 6: </a:t>
+              <a:t>Equation 4: </a:t>
             </a:r>
             <a:r>
               <a:rPr i="1" sz="1100">
@@ -7578,7 +11404,7 @@
                   <a:srgbClr val="5A6A7A"/>
                 </a:solidFill>
               </a:rPr>
-              <a:t>PSO velocity update: particle i moves toward its personal best p_i and the global best g under inertia ω and acceleration coefficients c1, c2. ACO pheromone update: pheromone τ_h on heuristic h decays by evaporation rate ρ and is reinforced by the deposits Δτ_h of the k ants that used it.</a:t>
+              <a:t>A meta-heuristic maps the incumbent x_t to a new candidate via operator A parameterised by θ_t, updated from feedback; a hyper-heuristic instead searches over low-level heuristics h ∈ H, picking the one with highest estimated value Q_t(h) at each step.</a:t>
             </a:r>
           </a:p>
         </p:txBody>
@@ -7591,8 +11417,8 @@
         </p:nvSpPr>
         <p:spPr>
           <a:xfrm>
-            <a:off x="548640" y="4114800"/>
-            <a:ext cx="11094415" cy="2377440"/>
+            <a:off x="548640" y="3602736"/>
+            <a:ext cx="11094415" cy="2889504"/>
           </a:xfrm>
           <a:prstGeom prst="rect">
             <a:avLst/>
@@ -7616,7 +11442,7 @@
               </a:defRPr>
             </a:pPr>
             <a:r>
-              <a:t>•  Many simple agents share information; global order emerges from local interactions</a:t>
+              <a:t>•  Heuristic search trades a small optimality gap for polynomial runtime — essential beyond the exact methods' size limits</a:t>
             </a:r>
           </a:p>
           <a:p>
@@ -7631,7 +11457,7 @@
               </a:defRPr>
             </a:pPr>
             <a:r>
-              <a:t>•  PSOMA: particles attracted by personal/global bests + a memetic local-search refinement phase — consistent best-overflow performer in the empirical scenarios</a:t>
+              <a:t>•  Evolutionary — HGS: population-based, ordered crossover + aggressive local search, biased fitness balances quality and diversity</a:t>
             </a:r>
           </a:p>
           <a:p>
@@ -7646,7 +11472,7 @@
               </a:defRPr>
             </a:pPr>
             <a:r>
-              <a:t>•  ACO-HH: pheromones are laid over low-level heuristics (h) rather than arcs — the colony learns the best sequence of constructive operators</a:t>
+              <a:t>•  Swarm intelligence — PSOMA: particle swarm + memetic refinement (best-overflow performer); ACO-HH: pheromones over low-level heuristics, most robust all-rounder</a:t>
             </a:r>
           </a:p>
           <a:p>
@@ -7661,7 +11487,22 @@
               </a:defRPr>
             </a:pPr>
             <a:r>
-              <a:t>•  ACO-HH is the most robust all-rounder: Pareto-optimal in multiple scenarios (zero-overflow SL2 configs at FFZ-350)</a:t>
+              <a:t>•  Trajectory-based — SANS: simulated annealing accepts worsening moves under a cooling schedule; PG-CLNS: destroy-and-repair LNS whose operator choice is learned via policy gradients</a:t>
+            </a:r>
+          </a:p>
+          <a:p>
+            <a:pPr>
+              <a:spcAft>
+                <a:spcPts val="1000"/>
+              </a:spcAft>
+              <a:defRPr sz="1400">
+                <a:solidFill>
+                  <a:srgbClr val="1F2D3D"/>
+                </a:solidFill>
+              </a:defRPr>
+            </a:pPr>
+            <a:r>
+              <a:t>•  Three families, one shared interface: each plugs into the pipeline as an interchangeable route constructor</a:t>
             </a:r>
           </a:p>
         </p:txBody>

--- a/assets/windows/wsmart_route_results.pptx
+++ b/assets/windows/wsmart_route_results.pptx
@@ -5475,8 +5475,8 @@
         </p:blipFill>
         <p:spPr>
           <a:xfrm>
-            <a:off x="274320" y="1226724"/>
-            <a:ext cx="8442655" cy="4770311"/>
+            <a:off x="2929570" y="1051560"/>
+            <a:ext cx="6149674" cy="3474720"/>
           </a:xfrm>
           <a:prstGeom prst="rect">
             <a:avLst/>
@@ -5491,8 +5491,8 @@
         </p:nvSpPr>
         <p:spPr>
           <a:xfrm>
-            <a:off x="9082735" y="1051560"/>
-            <a:ext cx="2834640" cy="5120640"/>
+            <a:off x="274320" y="4663440"/>
+            <a:ext cx="11643055" cy="1005840"/>
           </a:xfrm>
           <a:prstGeom prst="roundRect">
             <a:avLst/>
@@ -5535,8 +5535,8 @@
         </p:nvSpPr>
         <p:spPr>
           <a:xfrm>
-            <a:off x="9265615" y="1188720"/>
-            <a:ext cx="2468880" cy="4846320"/>
+            <a:off x="457200" y="4754880"/>
+            <a:ext cx="11277295" cy="822960"/>
           </a:xfrm>
           <a:prstGeom prst="rect">
             <a:avLst/>
@@ -5550,7 +5550,7 @@
           <a:lstStyle/>
           <a:p>
             <a:pPr>
-              <a:defRPr sz="1400" b="1">
+              <a:defRPr sz="1300" b="1">
                 <a:solidFill>
                   <a:srgbClr val="2E74B5"/>
                 </a:solidFill>
@@ -5563,9 +5563,9 @@
           <a:p>
             <a:pPr>
               <a:spcBef>
-                <a:spcPts val="1000"/>
+                <a:spcPts val="300"/>
               </a:spcBef>
-              <a:defRPr sz="1200">
+              <a:defRPr sz="1050">
                 <a:solidFill>
                   <a:srgbClr val="1F2D3D"/>
                 </a:solidFill>
@@ -5578,9 +5578,9 @@
           <a:p>
             <a:pPr>
               <a:spcBef>
-                <a:spcPts val="1000"/>
+                <a:spcPts val="300"/>
               </a:spcBef>
-              <a:defRPr sz="1200">
+              <a:defRPr sz="1050">
                 <a:solidFill>
                   <a:srgbClr val="1F2D3D"/>
                 </a:solidFill>
@@ -5593,9 +5593,9 @@
           <a:p>
             <a:pPr>
               <a:spcBef>
-                <a:spcPts val="1000"/>
+                <a:spcPts val="300"/>
               </a:spcBef>
-              <a:defRPr sz="1200">
+              <a:defRPr sz="1050">
                 <a:solidFill>
                   <a:srgbClr val="1F2D3D"/>
                 </a:solidFill>
@@ -5615,7 +5615,7 @@
         </p:nvSpPr>
         <p:spPr>
           <a:xfrm>
-            <a:off x="548640" y="6355080"/>
+            <a:off x="548640" y="6263640"/>
             <a:ext cx="11094415" cy="822960"/>
           </a:xfrm>
           <a:prstGeom prst="rect">
@@ -6012,44 +6012,9 @@
           </a:p>
         </p:txBody>
       </p:sp>
-      <p:sp>
-        <p:nvSpPr>
-          <p:cNvPr id="3" name="TextBox 2"/>
-          <p:cNvSpPr txBox="1"/>
-          <p:nvPr/>
-        </p:nvSpPr>
-        <p:spPr>
-          <a:xfrm>
-            <a:off x="365760" y="1051560"/>
-            <a:ext cx="11460175" cy="274320"/>
-          </a:xfrm>
-          <a:prstGeom prst="rect">
-            <a:avLst/>
-          </a:prstGeom>
-          <a:noFill/>
-        </p:spPr>
-        <p:txBody>
-          <a:bodyPr wrap="square">
-            <a:spAutoFit/>
-          </a:bodyPr>
-          <a:lstStyle/>
-          <a:p>
-            <a:pPr>
-              <a:defRPr b="1" sz="1200">
-                <a:solidFill>
-                  <a:srgbClr val="2E74B5"/>
-                </a:solidFill>
-              </a:defRPr>
-            </a:pPr>
-            <a:r>
-              <a:t>Improver: FTSP</a:t>
-            </a:r>
-          </a:p>
-        </p:txBody>
-      </p:sp>
       <p:pic>
         <p:nvPicPr>
-          <p:cNvPr id="4" name="Picture 3" descr="full_results_table_improver_0.png"/>
+          <p:cNvPr id="3" name="Picture 2" descr="full_results_table.png"/>
           <p:cNvPicPr>
             <a:picLocks noChangeAspect="1"/>
           </p:cNvPicPr>
@@ -6063,8 +6028,8 @@
         </p:blipFill>
         <p:spPr>
           <a:xfrm>
-            <a:off x="274320" y="1579833"/>
-            <a:ext cx="11643055" cy="1677509"/>
+            <a:off x="274320" y="2869653"/>
+            <a:ext cx="11643055" cy="1301573"/>
           </a:xfrm>
           <a:prstGeom prst="rect">
             <a:avLst/>
@@ -6073,14 +6038,14 @@
       </p:pic>
       <p:sp>
         <p:nvSpPr>
-          <p:cNvPr id="5" name="TextBox 4"/>
+          <p:cNvPr id="4" name="TextBox 3"/>
           <p:cNvSpPr txBox="1"/>
           <p:nvPr/>
         </p:nvSpPr>
         <p:spPr>
           <a:xfrm>
-            <a:off x="365760" y="3520440"/>
-            <a:ext cx="11460175" cy="274320"/>
+            <a:off x="548640" y="6355080"/>
+            <a:ext cx="11094415" cy="822960"/>
           </a:xfrm>
           <a:prstGeom prst="rect">
             <a:avLst/>
@@ -6093,65 +6058,6 @@
           </a:bodyPr>
           <a:lstStyle/>
           <a:p>
-            <a:pPr>
-              <a:defRPr b="1" sz="1200">
-                <a:solidFill>
-                  <a:srgbClr val="2E74B5"/>
-                </a:solidFill>
-              </a:defRPr>
-            </a:pPr>
-            <a:r>
-              <a:t>Improver: CLS</a:t>
-            </a:r>
-          </a:p>
-        </p:txBody>
-      </p:sp>
-      <p:pic>
-        <p:nvPicPr>
-          <p:cNvPr id="6" name="Picture 5" descr="full_results_table_improver_1.png"/>
-          <p:cNvPicPr>
-            <a:picLocks noChangeAspect="1"/>
-          </p:cNvPicPr>
-          <p:nvPr/>
-        </p:nvPicPr>
-        <p:blipFill>
-          <a:blip r:embed="rId3"/>
-          <a:stretch>
-            <a:fillRect/>
-          </a:stretch>
-        </p:blipFill>
-        <p:spPr>
-          <a:xfrm>
-            <a:off x="274320" y="4048713"/>
-            <a:ext cx="11643055" cy="1677509"/>
-          </a:xfrm>
-          <a:prstGeom prst="rect">
-            <a:avLst/>
-          </a:prstGeom>
-        </p:spPr>
-      </p:pic>
-      <p:sp>
-        <p:nvSpPr>
-          <p:cNvPr id="7" name="TextBox 6"/>
-          <p:cNvSpPr txBox="1"/>
-          <p:nvPr/>
-        </p:nvSpPr>
-        <p:spPr>
-          <a:xfrm>
-            <a:off x="548640" y="6355080"/>
-            <a:ext cx="11094415" cy="822960"/>
-          </a:xfrm>
-          <a:prstGeom prst="rect">
-            <a:avLst/>
-          </a:prstGeom>
-          <a:noFill/>
-        </p:spPr>
-        <p:txBody>
-          <a:bodyPr wrap="square">
-            <a:spAutoFit/>
-          </a:bodyPr>
-          <a:lstStyle/>
-          <a:p>
             <a:r>
               <a:rPr b="1" sz="1100">
                 <a:solidFill>
@@ -6166,7 +6072,7 @@
                   <a:srgbClr val="5A6A7A"/>
                 </a:solidFill>
               </a:rPr>
-              <a:t>Full results table — rows: graph size × region × data distribution; columns: partitioned by route improver (FTSP, CLS), one partial table per value; each partial table then grouped by mandatory selection strategy × route constructor. In every cell, the top value is mean±std overflows (lower is better) and the bottom value is mean±std kg/km (higher is better); the best value per row is shown in bold green.</a:t>
+              <a:t>Full results table — rows: graph size × region × data distribution; columns: mandatory selection strategy × route constructor × route improver. In every cell, the top value is mean±std overflows (lower is better) and the bottom value is mean±std kg/km (higher is better); the best value per row is shown in bold green.</a:t>
             </a:r>
           </a:p>
         </p:txBody>
@@ -6717,7 +6623,7 @@
       </p:sp>
       <p:pic>
         <p:nvPicPr>
-          <p:cNvPr id="4" name="Picture 3" descr="policy_radar_combined.png"/>
+          <p:cNvPr id="4" name="Picture 3" descr="qa_route_illustration.png"/>
           <p:cNvPicPr>
             <a:picLocks noChangeAspect="1"/>
           </p:cNvPicPr>
@@ -6731,8 +6637,8 @@
         </p:blipFill>
         <p:spPr>
           <a:xfrm>
-            <a:off x="6278727" y="1216397"/>
-            <a:ext cx="5364327" cy="4425206"/>
+            <a:off x="6278727" y="717978"/>
+            <a:ext cx="5364327" cy="5422044"/>
           </a:xfrm>
           <a:prstGeom prst="rect">
             <a:avLst/>

--- a/assets/windows/wsmart_route_results.pptx
+++ b/assets/windows/wsmart_route_results.pptx
@@ -5063,7 +5063,7 @@
         <p:spPr>
           <a:xfrm>
             <a:off x="548640" y="6355080"/>
-            <a:ext cx="11094415" cy="822960"/>
+            <a:ext cx="11643055" cy="822960"/>
           </a:xfrm>
           <a:prstGeom prst="rect">
             <a:avLst/>
@@ -5222,7 +5222,7 @@
         <p:spPr>
           <a:xfrm>
             <a:off x="548640" y="6355080"/>
-            <a:ext cx="11094415" cy="822960"/>
+            <a:ext cx="11643055" cy="822960"/>
           </a:xfrm>
           <a:prstGeom prst="rect">
             <a:avLst/>
@@ -5357,7 +5357,7 @@
         <p:spPr>
           <a:xfrm>
             <a:off x="548640" y="6355080"/>
-            <a:ext cx="11094415" cy="822960"/>
+            <a:ext cx="11643055" cy="822960"/>
           </a:xfrm>
           <a:prstGeom prst="rect">
             <a:avLst/>
@@ -5475,8 +5475,8 @@
         </p:blipFill>
         <p:spPr>
           <a:xfrm>
-            <a:off x="2929570" y="1051560"/>
-            <a:ext cx="6149674" cy="3474720"/>
+            <a:off x="274320" y="1172366"/>
+            <a:ext cx="11460175" cy="3598867"/>
           </a:xfrm>
           <a:prstGeom prst="rect">
             <a:avLst/>
@@ -5485,14 +5485,55 @@
       </p:pic>
       <p:sp>
         <p:nvSpPr>
-          <p:cNvPr id="4" name="Rounded Rectangle 3"/>
+          <p:cNvPr id="4" name="TextBox 3"/>
+          <p:cNvSpPr txBox="1"/>
+          <p:nvPr/>
+        </p:nvSpPr>
+        <p:spPr>
+          <a:xfrm>
+            <a:off x="548640" y="4937760"/>
+            <a:ext cx="11643055" cy="320040"/>
+          </a:xfrm>
+          <a:prstGeom prst="rect">
+            <a:avLst/>
+          </a:prstGeom>
+          <a:noFill/>
+        </p:spPr>
+        <p:txBody>
+          <a:bodyPr wrap="square">
+            <a:spAutoFit/>
+          </a:bodyPr>
+          <a:lstStyle/>
+          <a:p>
+            <a:r>
+              <a:rPr b="1" sz="1100">
+                <a:solidFill>
+                  <a:srgbClr val="1F2D3D"/>
+                </a:solidFill>
+              </a:rPr>
+              <a:t>Figure 7: </a:t>
+            </a:r>
+            <a:r>
+              <a:rPr i="1" sz="1100">
+                <a:solidFill>
+                  <a:srgbClr val="5A6A7A"/>
+                </a:solidFill>
+              </a:rPr>
+              <a:t>30-day runs. One panel per scenario; route constructors on the rows, selection × improver combinations on the columns.</a:t>
+            </a:r>
+          </a:p>
+        </p:txBody>
+      </p:sp>
+      <p:sp>
+        <p:nvSpPr>
+          <p:cNvPr id="5" name="Rounded Rectangle 4"/>
           <p:cNvSpPr/>
           <p:nvPr/>
         </p:nvSpPr>
         <p:spPr>
           <a:xfrm>
-            <a:off x="274320" y="4663440"/>
-            <a:ext cx="11643055" cy="1005840"/>
+            <a:off x="274320" y="5303520"/>
+            <a:ext cx="11643055" cy="1188720"/>
           </a:xfrm>
           <a:prstGeom prst="roundRect">
             <a:avLst/>
@@ -5529,14 +5570,14 @@
       </p:sp>
       <p:sp>
         <p:nvSpPr>
-          <p:cNvPr id="5" name="TextBox 4"/>
+          <p:cNvPr id="6" name="TextBox 5"/>
           <p:cNvSpPr txBox="1"/>
           <p:nvPr/>
         </p:nvSpPr>
         <p:spPr>
           <a:xfrm>
-            <a:off x="457200" y="4754880"/>
-            <a:ext cx="11277295" cy="822960"/>
+            <a:off x="457200" y="5394960"/>
+            <a:ext cx="11277295" cy="1005840"/>
           </a:xfrm>
           <a:prstGeom prst="rect">
             <a:avLst/>
@@ -5603,47 +5644,6 @@
             </a:pPr>
             <a:r>
               <a:t>Axis tick labels are shown once here rather than repeated in tiny print on every one of the 6 scenario panels.</a:t>
-            </a:r>
-          </a:p>
-        </p:txBody>
-      </p:sp>
-      <p:sp>
-        <p:nvSpPr>
-          <p:cNvPr id="6" name="TextBox 5"/>
-          <p:cNvSpPr txBox="1"/>
-          <p:nvPr/>
-        </p:nvSpPr>
-        <p:spPr>
-          <a:xfrm>
-            <a:off x="548640" y="6263640"/>
-            <a:ext cx="11094415" cy="822960"/>
-          </a:xfrm>
-          <a:prstGeom prst="rect">
-            <a:avLst/>
-          </a:prstGeom>
-          <a:noFill/>
-        </p:spPr>
-        <p:txBody>
-          <a:bodyPr wrap="square">
-            <a:spAutoFit/>
-          </a:bodyPr>
-          <a:lstStyle/>
-          <a:p>
-            <a:r>
-              <a:rPr b="1" sz="1100">
-                <a:solidFill>
-                  <a:srgbClr val="1F2D3D"/>
-                </a:solidFill>
-              </a:rPr>
-              <a:t>Figure 7: </a:t>
-            </a:r>
-            <a:r>
-              <a:rPr i="1" sz="1100">
-                <a:solidFill>
-                  <a:srgbClr val="5A6A7A"/>
-                </a:solidFill>
-              </a:rPr>
-              <a:t>30-day runs. One panel per scenario; route constructors on the rows, selection × improver combinations on the columns.</a:t>
             </a:r>
           </a:p>
         </p:txBody>
@@ -5775,7 +5775,7 @@
         <p:spPr>
           <a:xfrm>
             <a:off x="548640" y="6355080"/>
-            <a:ext cx="11094415" cy="822960"/>
+            <a:ext cx="11643055" cy="822960"/>
           </a:xfrm>
           <a:prstGeom prst="rect">
             <a:avLst/>
@@ -5910,7 +5910,7 @@
         <p:spPr>
           <a:xfrm>
             <a:off x="548640" y="6355080"/>
-            <a:ext cx="11094415" cy="822960"/>
+            <a:ext cx="11643055" cy="822960"/>
           </a:xfrm>
           <a:prstGeom prst="rect">
             <a:avLst/>
@@ -6014,7 +6014,7 @@
       </p:sp>
       <p:pic>
         <p:nvPicPr>
-          <p:cNvPr id="3" name="Picture 2" descr="full_results_table.png"/>
+          <p:cNvPr id="3" name="Picture 2" descr="full_results_table_strategy_0.png"/>
           <p:cNvPicPr>
             <a:picLocks noChangeAspect="1"/>
           </p:cNvPicPr>
@@ -6028,17 +6028,65 @@
         </p:blipFill>
         <p:spPr>
           <a:xfrm>
-            <a:off x="274320" y="2869653"/>
-            <a:ext cx="11643055" cy="1301573"/>
+            <a:off x="2445602" y="1051560"/>
+            <a:ext cx="7300491" cy="1645919"/>
           </a:xfrm>
           <a:prstGeom prst="rect">
             <a:avLst/>
           </a:prstGeom>
         </p:spPr>
       </p:pic>
-      <p:sp>
-        <p:nvSpPr>
-          <p:cNvPr id="4" name="TextBox 3"/>
+      <p:pic>
+        <p:nvPicPr>
+          <p:cNvPr id="4" name="Picture 3" descr="full_results_table_strategy_1.png"/>
+          <p:cNvPicPr>
+            <a:picLocks noChangeAspect="1"/>
+          </p:cNvPicPr>
+          <p:nvPr/>
+        </p:nvPicPr>
+        <p:blipFill>
+          <a:blip r:embed="rId3"/>
+          <a:stretch>
+            <a:fillRect/>
+          </a:stretch>
+        </p:blipFill>
+        <p:spPr>
+          <a:xfrm>
+            <a:off x="2445602" y="2697480"/>
+            <a:ext cx="7300491" cy="1645919"/>
+          </a:xfrm>
+          <a:prstGeom prst="rect">
+            <a:avLst/>
+          </a:prstGeom>
+        </p:spPr>
+      </p:pic>
+      <p:pic>
+        <p:nvPicPr>
+          <p:cNvPr id="5" name="Picture 4" descr="full_results_table_strategy_2.png"/>
+          <p:cNvPicPr>
+            <a:picLocks noChangeAspect="1"/>
+          </p:cNvPicPr>
+          <p:nvPr/>
+        </p:nvPicPr>
+        <p:blipFill>
+          <a:blip r:embed="rId4"/>
+          <a:stretch>
+            <a:fillRect/>
+          </a:stretch>
+        </p:blipFill>
+        <p:spPr>
+          <a:xfrm>
+            <a:off x="2445602" y="4343400"/>
+            <a:ext cx="7300491" cy="1645919"/>
+          </a:xfrm>
+          <a:prstGeom prst="rect">
+            <a:avLst/>
+          </a:prstGeom>
+        </p:spPr>
+      </p:pic>
+      <p:sp>
+        <p:nvSpPr>
+          <p:cNvPr id="6" name="TextBox 5"/>
           <p:cNvSpPr txBox="1"/>
           <p:nvPr/>
         </p:nvSpPr>
@@ -6072,7 +6120,7 @@
                   <a:srgbClr val="5A6A7A"/>
                 </a:solidFill>
               </a:rPr>
-              <a:t>Full results table — rows: graph size × region × data distribution; columns: mandatory selection strategy × route constructor × route improver. In every cell, the top value is mean±std overflows (lower is better) and the bottom value is mean±std kg/km (higher is better); the best value per row is shown in bold green.</a:t>
+              <a:t>Full results table — rows: graph size × region × data distribution; columns: partitioned by mandatory selection strategy (LA, LM, SL), one partial table per value; each partial table then grouped by route constructor × route improver. In every cell, the top value is mean±std overflows (lower is better) and the bottom value is mean±std kg/km (higher is better); the best value per row is shown in bold green.</a:t>
             </a:r>
           </a:p>
         </p:txBody>
